--- a/docs/BAOCAOTOTNGHIEP.pptx
+++ b/docs/BAOCAOTOTNGHIEP.pptx
@@ -4,6 +4,9 @@
   <p:sldMasterIdLst>
     <p:sldMasterId id="2147483648" r:id="rId1"/>
   </p:sldMasterIdLst>
+  <p:notesMasterIdLst>
+    <p:notesMasterId r:id="rId19"/>
+  </p:notesMasterIdLst>
   <p:sldIdLst>
     <p:sldId id="256" r:id="rId2"/>
     <p:sldId id="257" r:id="rId3"/>
@@ -28,23 +31,23 @@
   <p:embeddedFontLst>
     <p:embeddedFont>
       <p:font typeface="Inter" panose="020B0604020202020204" charset="0"/>
-      <p:regular r:id="rId19"/>
+      <p:regular r:id="rId20"/>
     </p:embeddedFont>
     <p:embeddedFont>
       <p:font typeface="Inter Bold" panose="020B0604020202020204" charset="0"/>
-      <p:regular r:id="rId20"/>
+      <p:regular r:id="rId21"/>
     </p:embeddedFont>
     <p:embeddedFont>
       <p:font typeface="Inter Italics" panose="020B0604020202020204" charset="0"/>
-      <p:regular r:id="rId21"/>
+      <p:regular r:id="rId22"/>
     </p:embeddedFont>
     <p:embeddedFont>
       <p:font typeface="Paytone One" panose="020B0604020202020204" charset="0"/>
-      <p:regular r:id="rId22"/>
+      <p:regular r:id="rId23"/>
     </p:embeddedFont>
     <p:embeddedFont>
       <p:font typeface="Source Sans 3" panose="020B0604020202020204" charset="0"/>
-      <p:regular r:id="rId23"/>
+      <p:regular r:id="rId24"/>
     </p:embeddedFont>
   </p:embeddedFontLst>
   <p:defaultTextStyle>
@@ -159,6 +162,440 @@
     </p:ext>
   </p:extLst>
 </p:presentation>
+</file>
+
+<file path=ppt/notesMasters/notesMaster1.xml><?xml version="1.0" encoding="utf-8"?>
+<p:notesMaster xmlns:a="http://schemas.openxmlformats.org/drawingml/2006/main" xmlns:r="http://schemas.openxmlformats.org/officeDocument/2006/relationships" xmlns:p="http://schemas.openxmlformats.org/presentationml/2006/main">
+  <p:cSld>
+    <p:bg>
+      <p:bgRef idx="1001">
+        <a:schemeClr val="bg1"/>
+      </p:bgRef>
+    </p:bg>
+    <p:spTree>
+      <p:nvGrpSpPr>
+        <p:cNvPr id="1" name=""/>
+        <p:cNvGrpSpPr/>
+        <p:nvPr/>
+      </p:nvGrpSpPr>
+      <p:grpSpPr>
+        <a:xfrm>
+          <a:off x="0" y="0"/>
+          <a:ext cx="0" cy="0"/>
+          <a:chOff x="0" y="0"/>
+          <a:chExt cx="0" cy="0"/>
+        </a:xfrm>
+      </p:grpSpPr>
+      <p:sp>
+        <p:nvSpPr>
+          <p:cNvPr id="2" name="Header Placeholder 1"/>
+          <p:cNvSpPr>
+            <a:spLocks noGrp="1"/>
+          </p:cNvSpPr>
+          <p:nvPr>
+            <p:ph type="hdr" sz="quarter"/>
+          </p:nvPr>
+        </p:nvSpPr>
+        <p:spPr>
+          <a:xfrm>
+            <a:off x="0" y="0"/>
+            <a:ext cx="2971800" cy="458788"/>
+          </a:xfrm>
+          <a:prstGeom prst="rect">
+            <a:avLst/>
+          </a:prstGeom>
+        </p:spPr>
+        <p:txBody>
+          <a:bodyPr vert="horz" lIns="91440" tIns="45720" rIns="91440" bIns="45720" rtlCol="0"/>
+          <a:lstStyle>
+            <a:lvl1pPr algn="l">
+              <a:defRPr sz="1200"/>
+            </a:lvl1pPr>
+          </a:lstStyle>
+          <a:p>
+            <a:endParaRPr lang="en-US"/>
+          </a:p>
+        </p:txBody>
+      </p:sp>
+      <p:sp>
+        <p:nvSpPr>
+          <p:cNvPr id="3" name="Date Placeholder 2"/>
+          <p:cNvSpPr>
+            <a:spLocks noGrp="1"/>
+          </p:cNvSpPr>
+          <p:nvPr>
+            <p:ph type="dt" idx="1"/>
+          </p:nvPr>
+        </p:nvSpPr>
+        <p:spPr>
+          <a:xfrm>
+            <a:off x="3884613" y="0"/>
+            <a:ext cx="2971800" cy="458788"/>
+          </a:xfrm>
+          <a:prstGeom prst="rect">
+            <a:avLst/>
+          </a:prstGeom>
+        </p:spPr>
+        <p:txBody>
+          <a:bodyPr vert="horz" lIns="91440" tIns="45720" rIns="91440" bIns="45720" rtlCol="0"/>
+          <a:lstStyle>
+            <a:lvl1pPr algn="r">
+              <a:defRPr sz="1200"/>
+            </a:lvl1pPr>
+          </a:lstStyle>
+          <a:p>
+            <a:fld id="{990BF94C-C378-4287-BE53-A624E47B9AB2}" type="datetimeFigureOut">
+              <a:rPr lang="en-US" smtClean="0"/>
+              <a:t>7/3/2026</a:t>
+            </a:fld>
+            <a:endParaRPr lang="en-US"/>
+          </a:p>
+        </p:txBody>
+      </p:sp>
+      <p:sp>
+        <p:nvSpPr>
+          <p:cNvPr id="4" name="Slide Image Placeholder 3"/>
+          <p:cNvSpPr>
+            <a:spLocks noGrp="1" noRot="1" noChangeAspect="1"/>
+          </p:cNvSpPr>
+          <p:nvPr>
+            <p:ph type="sldImg" idx="2"/>
+          </p:nvPr>
+        </p:nvSpPr>
+        <p:spPr>
+          <a:xfrm>
+            <a:off x="685800" y="1143000"/>
+            <a:ext cx="5486400" cy="3086100"/>
+          </a:xfrm>
+          <a:prstGeom prst="rect">
+            <a:avLst/>
+          </a:prstGeom>
+          <a:noFill/>
+          <a:ln w="12700">
+            <a:solidFill>
+              <a:prstClr val="black"/>
+            </a:solidFill>
+          </a:ln>
+        </p:spPr>
+        <p:txBody>
+          <a:bodyPr vert="horz" lIns="91440" tIns="45720" rIns="91440" bIns="45720" rtlCol="0" anchor="ctr"/>
+          <a:lstStyle/>
+          <a:p>
+            <a:endParaRPr lang="en-US"/>
+          </a:p>
+        </p:txBody>
+      </p:sp>
+      <p:sp>
+        <p:nvSpPr>
+          <p:cNvPr id="5" name="Notes Placeholder 4"/>
+          <p:cNvSpPr>
+            <a:spLocks noGrp="1"/>
+          </p:cNvSpPr>
+          <p:nvPr>
+            <p:ph type="body" sz="quarter" idx="3"/>
+          </p:nvPr>
+        </p:nvSpPr>
+        <p:spPr>
+          <a:xfrm>
+            <a:off x="685800" y="4400550"/>
+            <a:ext cx="5486400" cy="3600450"/>
+          </a:xfrm>
+          <a:prstGeom prst="rect">
+            <a:avLst/>
+          </a:prstGeom>
+        </p:spPr>
+        <p:txBody>
+          <a:bodyPr vert="horz" lIns="91440" tIns="45720" rIns="91440" bIns="45720" rtlCol="0"/>
+          <a:lstStyle/>
+          <a:p>
+            <a:pPr lvl="0"/>
+            <a:r>
+              <a:rPr lang="en-GB"/>
+              <a:t>Click to edit Master text styles</a:t>
+            </a:r>
+          </a:p>
+          <a:p>
+            <a:pPr lvl="1"/>
+            <a:r>
+              <a:rPr lang="en-GB"/>
+              <a:t>Second level</a:t>
+            </a:r>
+          </a:p>
+          <a:p>
+            <a:pPr lvl="2"/>
+            <a:r>
+              <a:rPr lang="en-GB"/>
+              <a:t>Third level</a:t>
+            </a:r>
+          </a:p>
+          <a:p>
+            <a:pPr lvl="3"/>
+            <a:r>
+              <a:rPr lang="en-GB"/>
+              <a:t>Fourth level</a:t>
+            </a:r>
+          </a:p>
+          <a:p>
+            <a:pPr lvl="4"/>
+            <a:r>
+              <a:rPr lang="en-GB"/>
+              <a:t>Fifth level</a:t>
+            </a:r>
+            <a:endParaRPr lang="en-US"/>
+          </a:p>
+        </p:txBody>
+      </p:sp>
+      <p:sp>
+        <p:nvSpPr>
+          <p:cNvPr id="6" name="Footer Placeholder 5"/>
+          <p:cNvSpPr>
+            <a:spLocks noGrp="1"/>
+          </p:cNvSpPr>
+          <p:nvPr>
+            <p:ph type="ftr" sz="quarter" idx="4"/>
+          </p:nvPr>
+        </p:nvSpPr>
+        <p:spPr>
+          <a:xfrm>
+            <a:off x="0" y="8685213"/>
+            <a:ext cx="2971800" cy="458787"/>
+          </a:xfrm>
+          <a:prstGeom prst="rect">
+            <a:avLst/>
+          </a:prstGeom>
+        </p:spPr>
+        <p:txBody>
+          <a:bodyPr vert="horz" lIns="91440" tIns="45720" rIns="91440" bIns="45720" rtlCol="0" anchor="b"/>
+          <a:lstStyle>
+            <a:lvl1pPr algn="l">
+              <a:defRPr sz="1200"/>
+            </a:lvl1pPr>
+          </a:lstStyle>
+          <a:p>
+            <a:endParaRPr lang="en-US"/>
+          </a:p>
+        </p:txBody>
+      </p:sp>
+      <p:sp>
+        <p:nvSpPr>
+          <p:cNvPr id="7" name="Slide Number Placeholder 6"/>
+          <p:cNvSpPr>
+            <a:spLocks noGrp="1"/>
+          </p:cNvSpPr>
+          <p:nvPr>
+            <p:ph type="sldNum" sz="quarter" idx="5"/>
+          </p:nvPr>
+        </p:nvSpPr>
+        <p:spPr>
+          <a:xfrm>
+            <a:off x="3884613" y="8685213"/>
+            <a:ext cx="2971800" cy="458787"/>
+          </a:xfrm>
+          <a:prstGeom prst="rect">
+            <a:avLst/>
+          </a:prstGeom>
+        </p:spPr>
+        <p:txBody>
+          <a:bodyPr vert="horz" lIns="91440" tIns="45720" rIns="91440" bIns="45720" rtlCol="0" anchor="b"/>
+          <a:lstStyle>
+            <a:lvl1pPr algn="r">
+              <a:defRPr sz="1200"/>
+            </a:lvl1pPr>
+          </a:lstStyle>
+          <a:p>
+            <a:fld id="{02BE832F-9538-40A2-A31F-0417EB2D2CC7}" type="slidenum">
+              <a:rPr lang="en-US" smtClean="0"/>
+              <a:t>‹#›</a:t>
+            </a:fld>
+            <a:endParaRPr lang="en-US"/>
+          </a:p>
+        </p:txBody>
+      </p:sp>
+    </p:spTree>
+    <p:extLst>
+      <p:ext uri="{BB962C8B-B14F-4D97-AF65-F5344CB8AC3E}">
+        <p14:creationId xmlns:p14="http://schemas.microsoft.com/office/powerpoint/2010/main" val="2657953824"/>
+      </p:ext>
+    </p:extLst>
+  </p:cSld>
+  <p:clrMap bg1="lt1" tx1="dk1" bg2="lt2" tx2="dk2" accent1="accent1" accent2="accent2" accent3="accent3" accent4="accent4" accent5="accent5" accent6="accent6" hlink="hlink" folHlink="folHlink"/>
+  <p:notesStyle>
+    <a:lvl1pPr marL="0" algn="l" defTabSz="914400" rtl="0" eaLnBrk="1" latinLnBrk="0" hangingPunct="1">
+      <a:defRPr sz="1200" kern="1200">
+        <a:solidFill>
+          <a:schemeClr val="tx1"/>
+        </a:solidFill>
+        <a:latin typeface="+mn-lt"/>
+        <a:ea typeface="+mn-ea"/>
+        <a:cs typeface="+mn-cs"/>
+      </a:defRPr>
+    </a:lvl1pPr>
+    <a:lvl2pPr marL="457200" algn="l" defTabSz="914400" rtl="0" eaLnBrk="1" latinLnBrk="0" hangingPunct="1">
+      <a:defRPr sz="1200" kern="1200">
+        <a:solidFill>
+          <a:schemeClr val="tx1"/>
+        </a:solidFill>
+        <a:latin typeface="+mn-lt"/>
+        <a:ea typeface="+mn-ea"/>
+        <a:cs typeface="+mn-cs"/>
+      </a:defRPr>
+    </a:lvl2pPr>
+    <a:lvl3pPr marL="914400" algn="l" defTabSz="914400" rtl="0" eaLnBrk="1" latinLnBrk="0" hangingPunct="1">
+      <a:defRPr sz="1200" kern="1200">
+        <a:solidFill>
+          <a:schemeClr val="tx1"/>
+        </a:solidFill>
+        <a:latin typeface="+mn-lt"/>
+        <a:ea typeface="+mn-ea"/>
+        <a:cs typeface="+mn-cs"/>
+      </a:defRPr>
+    </a:lvl3pPr>
+    <a:lvl4pPr marL="1371600" algn="l" defTabSz="914400" rtl="0" eaLnBrk="1" latinLnBrk="0" hangingPunct="1">
+      <a:defRPr sz="1200" kern="1200">
+        <a:solidFill>
+          <a:schemeClr val="tx1"/>
+        </a:solidFill>
+        <a:latin typeface="+mn-lt"/>
+        <a:ea typeface="+mn-ea"/>
+        <a:cs typeface="+mn-cs"/>
+      </a:defRPr>
+    </a:lvl4pPr>
+    <a:lvl5pPr marL="1828800" algn="l" defTabSz="914400" rtl="0" eaLnBrk="1" latinLnBrk="0" hangingPunct="1">
+      <a:defRPr sz="1200" kern="1200">
+        <a:solidFill>
+          <a:schemeClr val="tx1"/>
+        </a:solidFill>
+        <a:latin typeface="+mn-lt"/>
+        <a:ea typeface="+mn-ea"/>
+        <a:cs typeface="+mn-cs"/>
+      </a:defRPr>
+    </a:lvl5pPr>
+    <a:lvl6pPr marL="2286000" algn="l" defTabSz="914400" rtl="0" eaLnBrk="1" latinLnBrk="0" hangingPunct="1">
+      <a:defRPr sz="1200" kern="1200">
+        <a:solidFill>
+          <a:schemeClr val="tx1"/>
+        </a:solidFill>
+        <a:latin typeface="+mn-lt"/>
+        <a:ea typeface="+mn-ea"/>
+        <a:cs typeface="+mn-cs"/>
+      </a:defRPr>
+    </a:lvl6pPr>
+    <a:lvl7pPr marL="2743200" algn="l" defTabSz="914400" rtl="0" eaLnBrk="1" latinLnBrk="0" hangingPunct="1">
+      <a:defRPr sz="1200" kern="1200">
+        <a:solidFill>
+          <a:schemeClr val="tx1"/>
+        </a:solidFill>
+        <a:latin typeface="+mn-lt"/>
+        <a:ea typeface="+mn-ea"/>
+        <a:cs typeface="+mn-cs"/>
+      </a:defRPr>
+    </a:lvl7pPr>
+    <a:lvl8pPr marL="3200400" algn="l" defTabSz="914400" rtl="0" eaLnBrk="1" latinLnBrk="0" hangingPunct="1">
+      <a:defRPr sz="1200" kern="1200">
+        <a:solidFill>
+          <a:schemeClr val="tx1"/>
+        </a:solidFill>
+        <a:latin typeface="+mn-lt"/>
+        <a:ea typeface="+mn-ea"/>
+        <a:cs typeface="+mn-cs"/>
+      </a:defRPr>
+    </a:lvl8pPr>
+    <a:lvl9pPr marL="3657600" algn="l" defTabSz="914400" rtl="0" eaLnBrk="1" latinLnBrk="0" hangingPunct="1">
+      <a:defRPr sz="1200" kern="1200">
+        <a:solidFill>
+          <a:schemeClr val="tx1"/>
+        </a:solidFill>
+        <a:latin typeface="+mn-lt"/>
+        <a:ea typeface="+mn-ea"/>
+        <a:cs typeface="+mn-cs"/>
+      </a:defRPr>
+    </a:lvl9pPr>
+  </p:notesStyle>
+</p:notesMaster>
+</file>
+
+<file path=ppt/notesSlides/notesSlide1.xml><?xml version="1.0" encoding="utf-8"?>
+<p:notes xmlns:a="http://schemas.openxmlformats.org/drawingml/2006/main" xmlns:r="http://schemas.openxmlformats.org/officeDocument/2006/relationships" xmlns:p="http://schemas.openxmlformats.org/presentationml/2006/main">
+  <p:cSld>
+    <p:spTree>
+      <p:nvGrpSpPr>
+        <p:cNvPr id="1" name=""/>
+        <p:cNvGrpSpPr/>
+        <p:nvPr/>
+      </p:nvGrpSpPr>
+      <p:grpSpPr>
+        <a:xfrm>
+          <a:off x="0" y="0"/>
+          <a:ext cx="0" cy="0"/>
+          <a:chOff x="0" y="0"/>
+          <a:chExt cx="0" cy="0"/>
+        </a:xfrm>
+      </p:grpSpPr>
+      <p:sp>
+        <p:nvSpPr>
+          <p:cNvPr id="2" name="Slide Image Placeholder 1"/>
+          <p:cNvSpPr>
+            <a:spLocks noGrp="1" noRot="1" noChangeAspect="1"/>
+          </p:cNvSpPr>
+          <p:nvPr>
+            <p:ph type="sldImg"/>
+          </p:nvPr>
+        </p:nvSpPr>
+        <p:spPr/>
+      </p:sp>
+      <p:sp>
+        <p:nvSpPr>
+          <p:cNvPr id="3" name="Notes Placeholder 2"/>
+          <p:cNvSpPr>
+            <a:spLocks noGrp="1"/>
+          </p:cNvSpPr>
+          <p:nvPr>
+            <p:ph type="body" idx="1"/>
+          </p:nvPr>
+        </p:nvSpPr>
+        <p:spPr/>
+        <p:txBody>
+          <a:bodyPr/>
+          <a:lstStyle/>
+          <a:p>
+            <a:endParaRPr lang="en-US"/>
+          </a:p>
+        </p:txBody>
+      </p:sp>
+      <p:sp>
+        <p:nvSpPr>
+          <p:cNvPr id="4" name="Slide Number Placeholder 3"/>
+          <p:cNvSpPr>
+            <a:spLocks noGrp="1"/>
+          </p:cNvSpPr>
+          <p:nvPr>
+            <p:ph type="sldNum" sz="quarter" idx="5"/>
+          </p:nvPr>
+        </p:nvSpPr>
+        <p:spPr/>
+        <p:txBody>
+          <a:bodyPr/>
+          <a:lstStyle/>
+          <a:p>
+            <a:fld id="{02BE832F-9538-40A2-A31F-0417EB2D2CC7}" type="slidenum">
+              <a:rPr lang="en-US" smtClean="0"/>
+              <a:t>4</a:t>
+            </a:fld>
+            <a:endParaRPr lang="en-US"/>
+          </a:p>
+        </p:txBody>
+      </p:sp>
+    </p:spTree>
+    <p:extLst>
+      <p:ext uri="{BB962C8B-B14F-4D97-AF65-F5344CB8AC3E}">
+        <p14:creationId xmlns:p14="http://schemas.microsoft.com/office/powerpoint/2010/main" val="2443229788"/>
+      </p:ext>
+    </p:extLst>
+  </p:cSld>
+  <p:clrMapOvr>
+    <a:masterClrMapping/>
+  </p:clrMapOvr>
+</p:notes>
 </file>
 
 <file path=ppt/slideLayouts/slideLayout1.xml><?xml version="1.0" encoding="utf-8"?>
@@ -341,7 +778,7 @@
             <a:fld id="{1D8BD707-D9CF-40AE-B4C6-C98DA3205C09}" type="datetimeFigureOut">
               <a:rPr lang="en-US" smtClean="0"/>
               <a:pPr/>
-              <a:t>7/2/2026</a:t>
+              <a:t>7/3/2026</a:t>
             </a:fld>
             <a:endParaRPr lang="en-US"/>
           </a:p>
@@ -506,7 +943,7 @@
             <a:fld id="{1D8BD707-D9CF-40AE-B4C6-C98DA3205C09}" type="datetimeFigureOut">
               <a:rPr lang="en-US" smtClean="0"/>
               <a:pPr/>
-              <a:t>7/2/2026</a:t>
+              <a:t>7/3/2026</a:t>
             </a:fld>
             <a:endParaRPr lang="en-US"/>
           </a:p>
@@ -681,7 +1118,7 @@
             <a:fld id="{1D8BD707-D9CF-40AE-B4C6-C98DA3205C09}" type="datetimeFigureOut">
               <a:rPr lang="en-US" smtClean="0"/>
               <a:pPr/>
-              <a:t>7/2/2026</a:t>
+              <a:t>7/3/2026</a:t>
             </a:fld>
             <a:endParaRPr lang="en-US"/>
           </a:p>
@@ -846,7 +1283,7 @@
             <a:fld id="{1D8BD707-D9CF-40AE-B4C6-C98DA3205C09}" type="datetimeFigureOut">
               <a:rPr lang="en-US" smtClean="0"/>
               <a:pPr/>
-              <a:t>7/2/2026</a:t>
+              <a:t>7/3/2026</a:t>
             </a:fld>
             <a:endParaRPr lang="en-US"/>
           </a:p>
@@ -1088,7 +1525,7 @@
             <a:fld id="{1D8BD707-D9CF-40AE-B4C6-C98DA3205C09}" type="datetimeFigureOut">
               <a:rPr lang="en-US" smtClean="0"/>
               <a:pPr/>
-              <a:t>7/2/2026</a:t>
+              <a:t>7/3/2026</a:t>
             </a:fld>
             <a:endParaRPr lang="en-US"/>
           </a:p>
@@ -1370,7 +1807,7 @@
             <a:fld id="{1D8BD707-D9CF-40AE-B4C6-C98DA3205C09}" type="datetimeFigureOut">
               <a:rPr lang="en-US" smtClean="0"/>
               <a:pPr/>
-              <a:t>7/2/2026</a:t>
+              <a:t>7/3/2026</a:t>
             </a:fld>
             <a:endParaRPr lang="en-US"/>
           </a:p>
@@ -1786,7 +2223,7 @@
             <a:fld id="{1D8BD707-D9CF-40AE-B4C6-C98DA3205C09}" type="datetimeFigureOut">
               <a:rPr lang="en-US" smtClean="0"/>
               <a:pPr/>
-              <a:t>7/2/2026</a:t>
+              <a:t>7/3/2026</a:t>
             </a:fld>
             <a:endParaRPr lang="en-US"/>
           </a:p>
@@ -1900,7 +2337,7 @@
             <a:fld id="{1D8BD707-D9CF-40AE-B4C6-C98DA3205C09}" type="datetimeFigureOut">
               <a:rPr lang="en-US" smtClean="0"/>
               <a:pPr/>
-              <a:t>7/2/2026</a:t>
+              <a:t>7/3/2026</a:t>
             </a:fld>
             <a:endParaRPr lang="en-US"/>
           </a:p>
@@ -1992,7 +2429,7 @@
             <a:fld id="{1D8BD707-D9CF-40AE-B4C6-C98DA3205C09}" type="datetimeFigureOut">
               <a:rPr lang="en-US" smtClean="0"/>
               <a:pPr/>
-              <a:t>7/2/2026</a:t>
+              <a:t>7/3/2026</a:t>
             </a:fld>
             <a:endParaRPr lang="en-US"/>
           </a:p>
@@ -2264,7 +2701,7 @@
             <a:fld id="{1D8BD707-D9CF-40AE-B4C6-C98DA3205C09}" type="datetimeFigureOut">
               <a:rPr lang="en-US" smtClean="0"/>
               <a:pPr/>
-              <a:t>7/2/2026</a:t>
+              <a:t>7/3/2026</a:t>
             </a:fld>
             <a:endParaRPr lang="en-US"/>
           </a:p>
@@ -2513,7 +2950,7 @@
             <a:fld id="{1D8BD707-D9CF-40AE-B4C6-C98DA3205C09}" type="datetimeFigureOut">
               <a:rPr lang="en-US" smtClean="0"/>
               <a:pPr/>
-              <a:t>7/2/2026</a:t>
+              <a:t>7/3/2026</a:t>
             </a:fld>
             <a:endParaRPr lang="en-US"/>
           </a:p>
@@ -2721,7 +3158,7 @@
             <a:fld id="{1D8BD707-D9CF-40AE-B4C6-C98DA3205C09}" type="datetimeFigureOut">
               <a:rPr lang="en-US" smtClean="0"/>
               <a:pPr/>
-              <a:t>7/2/2026</a:t>
+              <a:t>7/3/2026</a:t>
             </a:fld>
             <a:endParaRPr lang="en-US"/>
           </a:p>
@@ -3470,8 +3907,8 @@
         </p:nvSpPr>
         <p:spPr>
           <a:xfrm>
-            <a:off x="12175480" y="8499267"/>
-            <a:ext cx="4497043" cy="389255"/>
+            <a:off x="12039600" y="8499267"/>
+            <a:ext cx="4876800" cy="389255"/>
           </a:xfrm>
           <a:prstGeom prst="rect">
             <a:avLst/>
@@ -4298,7 +4735,7 @@
         <p:grpSpPr>
           <a:xfrm>
             <a:off x="7966283" y="2847619"/>
-            <a:ext cx="2355435" cy="1177717"/>
+            <a:ext cx="2355435" cy="844697"/>
             <a:chOff x="0" y="0"/>
             <a:chExt cx="812800" cy="406400"/>
           </a:xfrm>
@@ -5223,6 +5660,392 @@
   <p:clrMapOvr>
     <a:masterClrMapping/>
   </p:clrMapOvr>
+  <p:timing>
+    <p:tnLst>
+      <p:par>
+        <p:cTn id="1" dur="indefinite" restart="never" nodeType="tmRoot">
+          <p:childTnLst>
+            <p:seq concurrent="1" nextAc="seek">
+              <p:cTn id="2" dur="indefinite" nodeType="mainSeq">
+                <p:childTnLst>
+                  <p:par>
+                    <p:cTn id="3" fill="hold">
+                      <p:stCondLst>
+                        <p:cond delay="indefinite"/>
+                      </p:stCondLst>
+                      <p:childTnLst>
+                        <p:par>
+                          <p:cTn id="4" fill="hold">
+                            <p:stCondLst>
+                              <p:cond delay="0"/>
+                            </p:stCondLst>
+                            <p:childTnLst>
+                              <p:par>
+                                <p:cTn id="5" presetID="22" presetClass="entr" presetSubtype="4" fill="hold" nodeType="clickEffect">
+                                  <p:stCondLst>
+                                    <p:cond delay="0"/>
+                                  </p:stCondLst>
+                                  <p:childTnLst>
+                                    <p:set>
+                                      <p:cBhvr>
+                                        <p:cTn id="6" dur="1" fill="hold">
+                                          <p:stCondLst>
+                                            <p:cond delay="0"/>
+                                          </p:stCondLst>
+                                        </p:cTn>
+                                        <p:tgtEl>
+                                          <p:spTgt spid="18"/>
+                                        </p:tgtEl>
+                                        <p:attrNameLst>
+                                          <p:attrName>style.visibility</p:attrName>
+                                        </p:attrNameLst>
+                                      </p:cBhvr>
+                                      <p:to>
+                                        <p:strVal val="visible"/>
+                                      </p:to>
+                                    </p:set>
+                                    <p:animEffect transition="in" filter="wipe(down)">
+                                      <p:cBhvr>
+                                        <p:cTn id="7" dur="500"/>
+                                        <p:tgtEl>
+                                          <p:spTgt spid="18"/>
+                                        </p:tgtEl>
+                                      </p:cBhvr>
+                                    </p:animEffect>
+                                  </p:childTnLst>
+                                </p:cTn>
+                              </p:par>
+                            </p:childTnLst>
+                          </p:cTn>
+                        </p:par>
+                      </p:childTnLst>
+                    </p:cTn>
+                  </p:par>
+                  <p:par>
+                    <p:cTn id="8" fill="hold">
+                      <p:stCondLst>
+                        <p:cond delay="indefinite"/>
+                      </p:stCondLst>
+                      <p:childTnLst>
+                        <p:par>
+                          <p:cTn id="9" fill="hold">
+                            <p:stCondLst>
+                              <p:cond delay="0"/>
+                            </p:stCondLst>
+                            <p:childTnLst>
+                              <p:par>
+                                <p:cTn id="10" presetID="22" presetClass="entr" presetSubtype="4" fill="hold" nodeType="clickEffect">
+                                  <p:stCondLst>
+                                    <p:cond delay="0"/>
+                                  </p:stCondLst>
+                                  <p:childTnLst>
+                                    <p:set>
+                                      <p:cBhvr>
+                                        <p:cTn id="11" dur="1" fill="hold">
+                                          <p:stCondLst>
+                                            <p:cond delay="0"/>
+                                          </p:stCondLst>
+                                        </p:cTn>
+                                        <p:tgtEl>
+                                          <p:spTgt spid="21"/>
+                                        </p:tgtEl>
+                                        <p:attrNameLst>
+                                          <p:attrName>style.visibility</p:attrName>
+                                        </p:attrNameLst>
+                                      </p:cBhvr>
+                                      <p:to>
+                                        <p:strVal val="visible"/>
+                                      </p:to>
+                                    </p:set>
+                                    <p:animEffect transition="in" filter="wipe(down)">
+                                      <p:cBhvr>
+                                        <p:cTn id="12" dur="500"/>
+                                        <p:tgtEl>
+                                          <p:spTgt spid="21"/>
+                                        </p:tgtEl>
+                                      </p:cBhvr>
+                                    </p:animEffect>
+                                  </p:childTnLst>
+                                </p:cTn>
+                              </p:par>
+                              <p:par>
+                                <p:cTn id="13" presetID="22" presetClass="entr" presetSubtype="4" fill="hold" nodeType="withEffect">
+                                  <p:stCondLst>
+                                    <p:cond delay="0"/>
+                                  </p:stCondLst>
+                                  <p:childTnLst>
+                                    <p:set>
+                                      <p:cBhvr>
+                                        <p:cTn id="14" dur="1" fill="hold">
+                                          <p:stCondLst>
+                                            <p:cond delay="0"/>
+                                          </p:stCondLst>
+                                        </p:cTn>
+                                        <p:tgtEl>
+                                          <p:spTgt spid="24"/>
+                                        </p:tgtEl>
+                                        <p:attrNameLst>
+                                          <p:attrName>style.visibility</p:attrName>
+                                        </p:attrNameLst>
+                                      </p:cBhvr>
+                                      <p:to>
+                                        <p:strVal val="visible"/>
+                                      </p:to>
+                                    </p:set>
+                                    <p:animEffect transition="in" filter="wipe(down)">
+                                      <p:cBhvr>
+                                        <p:cTn id="15" dur="500"/>
+                                        <p:tgtEl>
+                                          <p:spTgt spid="24"/>
+                                        </p:tgtEl>
+                                      </p:cBhvr>
+                                    </p:animEffect>
+                                  </p:childTnLst>
+                                </p:cTn>
+                              </p:par>
+                              <p:par>
+                                <p:cTn id="16" presetID="22" presetClass="entr" presetSubtype="4" fill="hold" grpId="0" nodeType="withEffect">
+                                  <p:stCondLst>
+                                    <p:cond delay="0"/>
+                                  </p:stCondLst>
+                                  <p:childTnLst>
+                                    <p:set>
+                                      <p:cBhvr>
+                                        <p:cTn id="17" dur="1" fill="hold">
+                                          <p:stCondLst>
+                                            <p:cond delay="0"/>
+                                          </p:stCondLst>
+                                        </p:cTn>
+                                        <p:tgtEl>
+                                          <p:spTgt spid="38"/>
+                                        </p:tgtEl>
+                                        <p:attrNameLst>
+                                          <p:attrName>style.visibility</p:attrName>
+                                        </p:attrNameLst>
+                                      </p:cBhvr>
+                                      <p:to>
+                                        <p:strVal val="visible"/>
+                                      </p:to>
+                                    </p:set>
+                                    <p:animEffect transition="in" filter="wipe(down)">
+                                      <p:cBhvr>
+                                        <p:cTn id="18" dur="500"/>
+                                        <p:tgtEl>
+                                          <p:spTgt spid="38"/>
+                                        </p:tgtEl>
+                                      </p:cBhvr>
+                                    </p:animEffect>
+                                  </p:childTnLst>
+                                </p:cTn>
+                              </p:par>
+                            </p:childTnLst>
+                          </p:cTn>
+                        </p:par>
+                      </p:childTnLst>
+                    </p:cTn>
+                  </p:par>
+                  <p:par>
+                    <p:cTn id="19" fill="hold">
+                      <p:stCondLst>
+                        <p:cond delay="indefinite"/>
+                      </p:stCondLst>
+                      <p:childTnLst>
+                        <p:par>
+                          <p:cTn id="20" fill="hold">
+                            <p:stCondLst>
+                              <p:cond delay="0"/>
+                            </p:stCondLst>
+                            <p:childTnLst>
+                              <p:par>
+                                <p:cTn id="21" presetID="22" presetClass="entr" presetSubtype="4" fill="hold" nodeType="clickEffect">
+                                  <p:stCondLst>
+                                    <p:cond delay="0"/>
+                                  </p:stCondLst>
+                                  <p:childTnLst>
+                                    <p:set>
+                                      <p:cBhvr>
+                                        <p:cTn id="22" dur="1" fill="hold">
+                                          <p:stCondLst>
+                                            <p:cond delay="0"/>
+                                          </p:stCondLst>
+                                        </p:cTn>
+                                        <p:tgtEl>
+                                          <p:spTgt spid="27"/>
+                                        </p:tgtEl>
+                                        <p:attrNameLst>
+                                          <p:attrName>style.visibility</p:attrName>
+                                        </p:attrNameLst>
+                                      </p:cBhvr>
+                                      <p:to>
+                                        <p:strVal val="visible"/>
+                                      </p:to>
+                                    </p:set>
+                                    <p:animEffect transition="in" filter="wipe(down)">
+                                      <p:cBhvr>
+                                        <p:cTn id="23" dur="500"/>
+                                        <p:tgtEl>
+                                          <p:spTgt spid="27"/>
+                                        </p:tgtEl>
+                                      </p:cBhvr>
+                                    </p:animEffect>
+                                  </p:childTnLst>
+                                </p:cTn>
+                              </p:par>
+                              <p:par>
+                                <p:cTn id="24" presetID="22" presetClass="entr" presetSubtype="4" fill="hold" nodeType="withEffect">
+                                  <p:stCondLst>
+                                    <p:cond delay="0"/>
+                                  </p:stCondLst>
+                                  <p:childTnLst>
+                                    <p:set>
+                                      <p:cBhvr>
+                                        <p:cTn id="25" dur="1" fill="hold">
+                                          <p:stCondLst>
+                                            <p:cond delay="0"/>
+                                          </p:stCondLst>
+                                        </p:cTn>
+                                        <p:tgtEl>
+                                          <p:spTgt spid="30"/>
+                                        </p:tgtEl>
+                                        <p:attrNameLst>
+                                          <p:attrName>style.visibility</p:attrName>
+                                        </p:attrNameLst>
+                                      </p:cBhvr>
+                                      <p:to>
+                                        <p:strVal val="visible"/>
+                                      </p:to>
+                                    </p:set>
+                                    <p:animEffect transition="in" filter="wipe(down)">
+                                      <p:cBhvr>
+                                        <p:cTn id="26" dur="500"/>
+                                        <p:tgtEl>
+                                          <p:spTgt spid="30"/>
+                                        </p:tgtEl>
+                                      </p:cBhvr>
+                                    </p:animEffect>
+                                  </p:childTnLst>
+                                </p:cTn>
+                              </p:par>
+                              <p:par>
+                                <p:cTn id="27" presetID="22" presetClass="entr" presetSubtype="4" fill="hold" grpId="0" nodeType="withEffect">
+                                  <p:stCondLst>
+                                    <p:cond delay="0"/>
+                                  </p:stCondLst>
+                                  <p:childTnLst>
+                                    <p:set>
+                                      <p:cBhvr>
+                                        <p:cTn id="28" dur="1" fill="hold">
+                                          <p:stCondLst>
+                                            <p:cond delay="0"/>
+                                          </p:stCondLst>
+                                        </p:cTn>
+                                        <p:tgtEl>
+                                          <p:spTgt spid="39"/>
+                                        </p:tgtEl>
+                                        <p:attrNameLst>
+                                          <p:attrName>style.visibility</p:attrName>
+                                        </p:attrNameLst>
+                                      </p:cBhvr>
+                                      <p:to>
+                                        <p:strVal val="visible"/>
+                                      </p:to>
+                                    </p:set>
+                                    <p:animEffect transition="in" filter="wipe(down)">
+                                      <p:cBhvr>
+                                        <p:cTn id="29" dur="500"/>
+                                        <p:tgtEl>
+                                          <p:spTgt spid="39"/>
+                                        </p:tgtEl>
+                                      </p:cBhvr>
+                                    </p:animEffect>
+                                  </p:childTnLst>
+                                </p:cTn>
+                              </p:par>
+                            </p:childTnLst>
+                          </p:cTn>
+                        </p:par>
+                      </p:childTnLst>
+                    </p:cTn>
+                  </p:par>
+                  <p:par>
+                    <p:cTn id="30" fill="hold">
+                      <p:stCondLst>
+                        <p:cond delay="indefinite"/>
+                      </p:stCondLst>
+                      <p:childTnLst>
+                        <p:par>
+                          <p:cTn id="31" fill="hold">
+                            <p:stCondLst>
+                              <p:cond delay="0"/>
+                            </p:stCondLst>
+                            <p:childTnLst>
+                              <p:par>
+                                <p:cTn id="32" presetID="22" presetClass="entr" presetSubtype="4" fill="hold" nodeType="clickEffect">
+                                  <p:stCondLst>
+                                    <p:cond delay="0"/>
+                                  </p:stCondLst>
+                                  <p:childTnLst>
+                                    <p:set>
+                                      <p:cBhvr>
+                                        <p:cTn id="33" dur="1" fill="hold">
+                                          <p:stCondLst>
+                                            <p:cond delay="0"/>
+                                          </p:stCondLst>
+                                        </p:cTn>
+                                        <p:tgtEl>
+                                          <p:spTgt spid="33"/>
+                                        </p:tgtEl>
+                                        <p:attrNameLst>
+                                          <p:attrName>style.visibility</p:attrName>
+                                        </p:attrNameLst>
+                                      </p:cBhvr>
+                                      <p:to>
+                                        <p:strVal val="visible"/>
+                                      </p:to>
+                                    </p:set>
+                                    <p:animEffect transition="in" filter="wipe(down)">
+                                      <p:cBhvr>
+                                        <p:cTn id="34" dur="500"/>
+                                        <p:tgtEl>
+                                          <p:spTgt spid="33"/>
+                                        </p:tgtEl>
+                                      </p:cBhvr>
+                                    </p:animEffect>
+                                  </p:childTnLst>
+                                </p:cTn>
+                              </p:par>
+                            </p:childTnLst>
+                          </p:cTn>
+                        </p:par>
+                      </p:childTnLst>
+                    </p:cTn>
+                  </p:par>
+                </p:childTnLst>
+              </p:cTn>
+              <p:prevCondLst>
+                <p:cond evt="onPrev" delay="0">
+                  <p:tgtEl>
+                    <p:sldTgt/>
+                  </p:tgtEl>
+                </p:cond>
+              </p:prevCondLst>
+              <p:nextCondLst>
+                <p:cond evt="onNext" delay="0">
+                  <p:tgtEl>
+                    <p:sldTgt/>
+                  </p:tgtEl>
+                </p:cond>
+              </p:nextCondLst>
+            </p:seq>
+          </p:childTnLst>
+        </p:cTn>
+      </p:par>
+    </p:tnLst>
+    <p:bldLst>
+      <p:bldP spid="38" grpId="0"/>
+      <p:bldP spid="39" grpId="0"/>
+    </p:bldLst>
+  </p:timing>
 </p:sld>
 </file>
 
@@ -7685,6 +8508,869 @@
   <p:clrMapOvr>
     <a:masterClrMapping/>
   </p:clrMapOvr>
+  <p:timing>
+    <p:tnLst>
+      <p:par>
+        <p:cTn id="1" dur="indefinite" restart="never" nodeType="tmRoot">
+          <p:childTnLst>
+            <p:seq concurrent="1" nextAc="seek">
+              <p:cTn id="2" dur="indefinite" nodeType="mainSeq">
+                <p:childTnLst>
+                  <p:par>
+                    <p:cTn id="3" fill="hold">
+                      <p:stCondLst>
+                        <p:cond delay="indefinite"/>
+                      </p:stCondLst>
+                      <p:childTnLst>
+                        <p:par>
+                          <p:cTn id="4" fill="hold">
+                            <p:stCondLst>
+                              <p:cond delay="0"/>
+                            </p:stCondLst>
+                            <p:childTnLst>
+                              <p:par>
+                                <p:cTn id="5" presetID="22" presetClass="entr" presetSubtype="4" fill="hold" nodeType="clickEffect">
+                                  <p:stCondLst>
+                                    <p:cond delay="0"/>
+                                  </p:stCondLst>
+                                  <p:childTnLst>
+                                    <p:set>
+                                      <p:cBhvr>
+                                        <p:cTn id="6" dur="1" fill="hold">
+                                          <p:stCondLst>
+                                            <p:cond delay="0"/>
+                                          </p:stCondLst>
+                                        </p:cTn>
+                                        <p:tgtEl>
+                                          <p:spTgt spid="18"/>
+                                        </p:tgtEl>
+                                        <p:attrNameLst>
+                                          <p:attrName>style.visibility</p:attrName>
+                                        </p:attrNameLst>
+                                      </p:cBhvr>
+                                      <p:to>
+                                        <p:strVal val="visible"/>
+                                      </p:to>
+                                    </p:set>
+                                    <p:animEffect transition="in" filter="wipe(down)">
+                                      <p:cBhvr>
+                                        <p:cTn id="7" dur="500"/>
+                                        <p:tgtEl>
+                                          <p:spTgt spid="18"/>
+                                        </p:tgtEl>
+                                      </p:cBhvr>
+                                    </p:animEffect>
+                                  </p:childTnLst>
+                                </p:cTn>
+                              </p:par>
+                              <p:par>
+                                <p:cTn id="8" presetID="22" presetClass="entr" presetSubtype="4" fill="hold" nodeType="withEffect">
+                                  <p:stCondLst>
+                                    <p:cond delay="0"/>
+                                  </p:stCondLst>
+                                  <p:childTnLst>
+                                    <p:set>
+                                      <p:cBhvr>
+                                        <p:cTn id="9" dur="1" fill="hold">
+                                          <p:stCondLst>
+                                            <p:cond delay="0"/>
+                                          </p:stCondLst>
+                                        </p:cTn>
+                                        <p:tgtEl>
+                                          <p:spTgt spid="21"/>
+                                        </p:tgtEl>
+                                        <p:attrNameLst>
+                                          <p:attrName>style.visibility</p:attrName>
+                                        </p:attrNameLst>
+                                      </p:cBhvr>
+                                      <p:to>
+                                        <p:strVal val="visible"/>
+                                      </p:to>
+                                    </p:set>
+                                    <p:animEffect transition="in" filter="wipe(down)">
+                                      <p:cBhvr>
+                                        <p:cTn id="10" dur="500"/>
+                                        <p:tgtEl>
+                                          <p:spTgt spid="21"/>
+                                        </p:tgtEl>
+                                      </p:cBhvr>
+                                    </p:animEffect>
+                                  </p:childTnLst>
+                                </p:cTn>
+                              </p:par>
+                              <p:par>
+                                <p:cTn id="11" presetID="22" presetClass="entr" presetSubtype="4" fill="hold" grpId="0" nodeType="withEffect">
+                                  <p:stCondLst>
+                                    <p:cond delay="0"/>
+                                  </p:stCondLst>
+                                  <p:childTnLst>
+                                    <p:set>
+                                      <p:cBhvr>
+                                        <p:cTn id="12" dur="1" fill="hold">
+                                          <p:stCondLst>
+                                            <p:cond delay="0"/>
+                                          </p:stCondLst>
+                                        </p:cTn>
+                                        <p:tgtEl>
+                                          <p:spTgt spid="55"/>
+                                        </p:tgtEl>
+                                        <p:attrNameLst>
+                                          <p:attrName>style.visibility</p:attrName>
+                                        </p:attrNameLst>
+                                      </p:cBhvr>
+                                      <p:to>
+                                        <p:strVal val="visible"/>
+                                      </p:to>
+                                    </p:set>
+                                    <p:animEffect transition="in" filter="wipe(down)">
+                                      <p:cBhvr>
+                                        <p:cTn id="13" dur="500"/>
+                                        <p:tgtEl>
+                                          <p:spTgt spid="55"/>
+                                        </p:tgtEl>
+                                      </p:cBhvr>
+                                    </p:animEffect>
+                                  </p:childTnLst>
+                                </p:cTn>
+                              </p:par>
+                            </p:childTnLst>
+                          </p:cTn>
+                        </p:par>
+                      </p:childTnLst>
+                    </p:cTn>
+                  </p:par>
+                  <p:par>
+                    <p:cTn id="14" fill="hold">
+                      <p:stCondLst>
+                        <p:cond delay="indefinite"/>
+                      </p:stCondLst>
+                      <p:childTnLst>
+                        <p:par>
+                          <p:cTn id="15" fill="hold">
+                            <p:stCondLst>
+                              <p:cond delay="0"/>
+                            </p:stCondLst>
+                            <p:childTnLst>
+                              <p:par>
+                                <p:cTn id="16" presetID="22" presetClass="entr" presetSubtype="4" fill="hold" nodeType="clickEffect">
+                                  <p:stCondLst>
+                                    <p:cond delay="0"/>
+                                  </p:stCondLst>
+                                  <p:childTnLst>
+                                    <p:set>
+                                      <p:cBhvr>
+                                        <p:cTn id="17" dur="1" fill="hold">
+                                          <p:stCondLst>
+                                            <p:cond delay="0"/>
+                                          </p:stCondLst>
+                                        </p:cTn>
+                                        <p:tgtEl>
+                                          <p:spTgt spid="24"/>
+                                        </p:tgtEl>
+                                        <p:attrNameLst>
+                                          <p:attrName>style.visibility</p:attrName>
+                                        </p:attrNameLst>
+                                      </p:cBhvr>
+                                      <p:to>
+                                        <p:strVal val="visible"/>
+                                      </p:to>
+                                    </p:set>
+                                    <p:animEffect transition="in" filter="wipe(down)">
+                                      <p:cBhvr>
+                                        <p:cTn id="18" dur="500"/>
+                                        <p:tgtEl>
+                                          <p:spTgt spid="24"/>
+                                        </p:tgtEl>
+                                      </p:cBhvr>
+                                    </p:animEffect>
+                                  </p:childTnLst>
+                                </p:cTn>
+                              </p:par>
+                              <p:par>
+                                <p:cTn id="19" presetID="22" presetClass="entr" presetSubtype="4" fill="hold" nodeType="withEffect">
+                                  <p:stCondLst>
+                                    <p:cond delay="0"/>
+                                  </p:stCondLst>
+                                  <p:childTnLst>
+                                    <p:set>
+                                      <p:cBhvr>
+                                        <p:cTn id="20" dur="1" fill="hold">
+                                          <p:stCondLst>
+                                            <p:cond delay="0"/>
+                                          </p:stCondLst>
+                                        </p:cTn>
+                                        <p:tgtEl>
+                                          <p:spTgt spid="27"/>
+                                        </p:tgtEl>
+                                        <p:attrNameLst>
+                                          <p:attrName>style.visibility</p:attrName>
+                                        </p:attrNameLst>
+                                      </p:cBhvr>
+                                      <p:to>
+                                        <p:strVal val="visible"/>
+                                      </p:to>
+                                    </p:set>
+                                    <p:animEffect transition="in" filter="wipe(down)">
+                                      <p:cBhvr>
+                                        <p:cTn id="21" dur="500"/>
+                                        <p:tgtEl>
+                                          <p:spTgt spid="27"/>
+                                        </p:tgtEl>
+                                      </p:cBhvr>
+                                    </p:animEffect>
+                                  </p:childTnLst>
+                                </p:cTn>
+                              </p:par>
+                              <p:par>
+                                <p:cTn id="22" presetID="22" presetClass="entr" presetSubtype="4" fill="hold" nodeType="withEffect">
+                                  <p:stCondLst>
+                                    <p:cond delay="0"/>
+                                  </p:stCondLst>
+                                  <p:childTnLst>
+                                    <p:set>
+                                      <p:cBhvr>
+                                        <p:cTn id="23" dur="1" fill="hold">
+                                          <p:stCondLst>
+                                            <p:cond delay="0"/>
+                                          </p:stCondLst>
+                                        </p:cTn>
+                                        <p:tgtEl>
+                                          <p:spTgt spid="30"/>
+                                        </p:tgtEl>
+                                        <p:attrNameLst>
+                                          <p:attrName>style.visibility</p:attrName>
+                                        </p:attrNameLst>
+                                      </p:cBhvr>
+                                      <p:to>
+                                        <p:strVal val="visible"/>
+                                      </p:to>
+                                    </p:set>
+                                    <p:animEffect transition="in" filter="wipe(down)">
+                                      <p:cBhvr>
+                                        <p:cTn id="24" dur="500"/>
+                                        <p:tgtEl>
+                                          <p:spTgt spid="30"/>
+                                        </p:tgtEl>
+                                      </p:cBhvr>
+                                    </p:animEffect>
+                                  </p:childTnLst>
+                                </p:cTn>
+                              </p:par>
+                              <p:par>
+                                <p:cTn id="25" presetID="22" presetClass="entr" presetSubtype="4" fill="hold" nodeType="withEffect">
+                                  <p:stCondLst>
+                                    <p:cond delay="0"/>
+                                  </p:stCondLst>
+                                  <p:childTnLst>
+                                    <p:set>
+                                      <p:cBhvr>
+                                        <p:cTn id="26" dur="1" fill="hold">
+                                          <p:stCondLst>
+                                            <p:cond delay="0"/>
+                                          </p:stCondLst>
+                                        </p:cTn>
+                                        <p:tgtEl>
+                                          <p:spTgt spid="33"/>
+                                        </p:tgtEl>
+                                        <p:attrNameLst>
+                                          <p:attrName>style.visibility</p:attrName>
+                                        </p:attrNameLst>
+                                      </p:cBhvr>
+                                      <p:to>
+                                        <p:strVal val="visible"/>
+                                      </p:to>
+                                    </p:set>
+                                    <p:animEffect transition="in" filter="wipe(down)">
+                                      <p:cBhvr>
+                                        <p:cTn id="27" dur="500"/>
+                                        <p:tgtEl>
+                                          <p:spTgt spid="33"/>
+                                        </p:tgtEl>
+                                      </p:cBhvr>
+                                    </p:animEffect>
+                                  </p:childTnLst>
+                                </p:cTn>
+                              </p:par>
+                              <p:par>
+                                <p:cTn id="28" presetID="22" presetClass="entr" presetSubtype="4" fill="hold" nodeType="withEffect">
+                                  <p:stCondLst>
+                                    <p:cond delay="0"/>
+                                  </p:stCondLst>
+                                  <p:childTnLst>
+                                    <p:set>
+                                      <p:cBhvr>
+                                        <p:cTn id="29" dur="1" fill="hold">
+                                          <p:stCondLst>
+                                            <p:cond delay="0"/>
+                                          </p:stCondLst>
+                                        </p:cTn>
+                                        <p:tgtEl>
+                                          <p:spTgt spid="36"/>
+                                        </p:tgtEl>
+                                        <p:attrNameLst>
+                                          <p:attrName>style.visibility</p:attrName>
+                                        </p:attrNameLst>
+                                      </p:cBhvr>
+                                      <p:to>
+                                        <p:strVal val="visible"/>
+                                      </p:to>
+                                    </p:set>
+                                    <p:animEffect transition="in" filter="wipe(down)">
+                                      <p:cBhvr>
+                                        <p:cTn id="30" dur="500"/>
+                                        <p:tgtEl>
+                                          <p:spTgt spid="36"/>
+                                        </p:tgtEl>
+                                      </p:cBhvr>
+                                    </p:animEffect>
+                                  </p:childTnLst>
+                                </p:cTn>
+                              </p:par>
+                            </p:childTnLst>
+                          </p:cTn>
+                        </p:par>
+                      </p:childTnLst>
+                    </p:cTn>
+                  </p:par>
+                  <p:par>
+                    <p:cTn id="31" fill="hold">
+                      <p:stCondLst>
+                        <p:cond delay="indefinite"/>
+                      </p:stCondLst>
+                      <p:childTnLst>
+                        <p:par>
+                          <p:cTn id="32" fill="hold">
+                            <p:stCondLst>
+                              <p:cond delay="0"/>
+                            </p:stCondLst>
+                            <p:childTnLst>
+                              <p:par>
+                                <p:cTn id="33" presetID="22" presetClass="entr" presetSubtype="4" fill="hold" nodeType="clickEffect">
+                                  <p:stCondLst>
+                                    <p:cond delay="0"/>
+                                  </p:stCondLst>
+                                  <p:childTnLst>
+                                    <p:set>
+                                      <p:cBhvr>
+                                        <p:cTn id="34" dur="1" fill="hold">
+                                          <p:stCondLst>
+                                            <p:cond delay="0"/>
+                                          </p:stCondLst>
+                                        </p:cTn>
+                                        <p:tgtEl>
+                                          <p:spTgt spid="39"/>
+                                        </p:tgtEl>
+                                        <p:attrNameLst>
+                                          <p:attrName>style.visibility</p:attrName>
+                                        </p:attrNameLst>
+                                      </p:cBhvr>
+                                      <p:to>
+                                        <p:strVal val="visible"/>
+                                      </p:to>
+                                    </p:set>
+                                    <p:animEffect transition="in" filter="wipe(down)">
+                                      <p:cBhvr>
+                                        <p:cTn id="35" dur="500"/>
+                                        <p:tgtEl>
+                                          <p:spTgt spid="39"/>
+                                        </p:tgtEl>
+                                      </p:cBhvr>
+                                    </p:animEffect>
+                                  </p:childTnLst>
+                                </p:cTn>
+                              </p:par>
+                              <p:par>
+                                <p:cTn id="36" presetID="22" presetClass="entr" presetSubtype="4" fill="hold" nodeType="withEffect">
+                                  <p:stCondLst>
+                                    <p:cond delay="0"/>
+                                  </p:stCondLst>
+                                  <p:childTnLst>
+                                    <p:set>
+                                      <p:cBhvr>
+                                        <p:cTn id="37" dur="1" fill="hold">
+                                          <p:stCondLst>
+                                            <p:cond delay="0"/>
+                                          </p:stCondLst>
+                                        </p:cTn>
+                                        <p:tgtEl>
+                                          <p:spTgt spid="45"/>
+                                        </p:tgtEl>
+                                        <p:attrNameLst>
+                                          <p:attrName>style.visibility</p:attrName>
+                                        </p:attrNameLst>
+                                      </p:cBhvr>
+                                      <p:to>
+                                        <p:strVal val="visible"/>
+                                      </p:to>
+                                    </p:set>
+                                    <p:animEffect transition="in" filter="wipe(down)">
+                                      <p:cBhvr>
+                                        <p:cTn id="38" dur="500"/>
+                                        <p:tgtEl>
+                                          <p:spTgt spid="45"/>
+                                        </p:tgtEl>
+                                      </p:cBhvr>
+                                    </p:animEffect>
+                                  </p:childTnLst>
+                                </p:cTn>
+                              </p:par>
+                              <p:par>
+                                <p:cTn id="39" presetID="22" presetClass="entr" presetSubtype="4" fill="hold" nodeType="withEffect">
+                                  <p:stCondLst>
+                                    <p:cond delay="0"/>
+                                  </p:stCondLst>
+                                  <p:childTnLst>
+                                    <p:set>
+                                      <p:cBhvr>
+                                        <p:cTn id="40" dur="1" fill="hold">
+                                          <p:stCondLst>
+                                            <p:cond delay="0"/>
+                                          </p:stCondLst>
+                                        </p:cTn>
+                                        <p:tgtEl>
+                                          <p:spTgt spid="46"/>
+                                        </p:tgtEl>
+                                        <p:attrNameLst>
+                                          <p:attrName>style.visibility</p:attrName>
+                                        </p:attrNameLst>
+                                      </p:cBhvr>
+                                      <p:to>
+                                        <p:strVal val="visible"/>
+                                      </p:to>
+                                    </p:set>
+                                    <p:animEffect transition="in" filter="wipe(down)">
+                                      <p:cBhvr>
+                                        <p:cTn id="41" dur="500"/>
+                                        <p:tgtEl>
+                                          <p:spTgt spid="46"/>
+                                        </p:tgtEl>
+                                      </p:cBhvr>
+                                    </p:animEffect>
+                                  </p:childTnLst>
+                                </p:cTn>
+                              </p:par>
+                              <p:par>
+                                <p:cTn id="42" presetID="22" presetClass="entr" presetSubtype="4" fill="hold" nodeType="withEffect">
+                                  <p:stCondLst>
+                                    <p:cond delay="0"/>
+                                  </p:stCondLst>
+                                  <p:childTnLst>
+                                    <p:set>
+                                      <p:cBhvr>
+                                        <p:cTn id="43" dur="1" fill="hold">
+                                          <p:stCondLst>
+                                            <p:cond delay="0"/>
+                                          </p:stCondLst>
+                                        </p:cTn>
+                                        <p:tgtEl>
+                                          <p:spTgt spid="47"/>
+                                        </p:tgtEl>
+                                        <p:attrNameLst>
+                                          <p:attrName>style.visibility</p:attrName>
+                                        </p:attrNameLst>
+                                      </p:cBhvr>
+                                      <p:to>
+                                        <p:strVal val="visible"/>
+                                      </p:to>
+                                    </p:set>
+                                    <p:animEffect transition="in" filter="wipe(down)">
+                                      <p:cBhvr>
+                                        <p:cTn id="44" dur="500"/>
+                                        <p:tgtEl>
+                                          <p:spTgt spid="47"/>
+                                        </p:tgtEl>
+                                      </p:cBhvr>
+                                    </p:animEffect>
+                                  </p:childTnLst>
+                                </p:cTn>
+                              </p:par>
+                              <p:par>
+                                <p:cTn id="45" presetID="22" presetClass="entr" presetSubtype="4" fill="hold" nodeType="withEffect">
+                                  <p:stCondLst>
+                                    <p:cond delay="0"/>
+                                  </p:stCondLst>
+                                  <p:childTnLst>
+                                    <p:set>
+                                      <p:cBhvr>
+                                        <p:cTn id="46" dur="1" fill="hold">
+                                          <p:stCondLst>
+                                            <p:cond delay="0"/>
+                                          </p:stCondLst>
+                                        </p:cTn>
+                                        <p:tgtEl>
+                                          <p:spTgt spid="48"/>
+                                        </p:tgtEl>
+                                        <p:attrNameLst>
+                                          <p:attrName>style.visibility</p:attrName>
+                                        </p:attrNameLst>
+                                      </p:cBhvr>
+                                      <p:to>
+                                        <p:strVal val="visible"/>
+                                      </p:to>
+                                    </p:set>
+                                    <p:animEffect transition="in" filter="wipe(down)">
+                                      <p:cBhvr>
+                                        <p:cTn id="47" dur="500"/>
+                                        <p:tgtEl>
+                                          <p:spTgt spid="48"/>
+                                        </p:tgtEl>
+                                      </p:cBhvr>
+                                    </p:animEffect>
+                                  </p:childTnLst>
+                                </p:cTn>
+                              </p:par>
+                              <p:par>
+                                <p:cTn id="48" presetID="22" presetClass="entr" presetSubtype="4" fill="hold" nodeType="withEffect">
+                                  <p:stCondLst>
+                                    <p:cond delay="0"/>
+                                  </p:stCondLst>
+                                  <p:childTnLst>
+                                    <p:set>
+                                      <p:cBhvr>
+                                        <p:cTn id="49" dur="1" fill="hold">
+                                          <p:stCondLst>
+                                            <p:cond delay="0"/>
+                                          </p:stCondLst>
+                                        </p:cTn>
+                                        <p:tgtEl>
+                                          <p:spTgt spid="49"/>
+                                        </p:tgtEl>
+                                        <p:attrNameLst>
+                                          <p:attrName>style.visibility</p:attrName>
+                                        </p:attrNameLst>
+                                      </p:cBhvr>
+                                      <p:to>
+                                        <p:strVal val="visible"/>
+                                      </p:to>
+                                    </p:set>
+                                    <p:animEffect transition="in" filter="wipe(down)">
+                                      <p:cBhvr>
+                                        <p:cTn id="50" dur="500"/>
+                                        <p:tgtEl>
+                                          <p:spTgt spid="49"/>
+                                        </p:tgtEl>
+                                      </p:cBhvr>
+                                    </p:animEffect>
+                                  </p:childTnLst>
+                                </p:cTn>
+                              </p:par>
+                              <p:par>
+                                <p:cTn id="51" presetID="22" presetClass="entr" presetSubtype="4" fill="hold" nodeType="withEffect">
+                                  <p:stCondLst>
+                                    <p:cond delay="0"/>
+                                  </p:stCondLst>
+                                  <p:childTnLst>
+                                    <p:set>
+                                      <p:cBhvr>
+                                        <p:cTn id="52" dur="1" fill="hold">
+                                          <p:stCondLst>
+                                            <p:cond delay="0"/>
+                                          </p:stCondLst>
+                                        </p:cTn>
+                                        <p:tgtEl>
+                                          <p:spTgt spid="50"/>
+                                        </p:tgtEl>
+                                        <p:attrNameLst>
+                                          <p:attrName>style.visibility</p:attrName>
+                                        </p:attrNameLst>
+                                      </p:cBhvr>
+                                      <p:to>
+                                        <p:strVal val="visible"/>
+                                      </p:to>
+                                    </p:set>
+                                    <p:animEffect transition="in" filter="wipe(down)">
+                                      <p:cBhvr>
+                                        <p:cTn id="53" dur="500"/>
+                                        <p:tgtEl>
+                                          <p:spTgt spid="50"/>
+                                        </p:tgtEl>
+                                      </p:cBhvr>
+                                    </p:animEffect>
+                                  </p:childTnLst>
+                                </p:cTn>
+                              </p:par>
+                              <p:par>
+                                <p:cTn id="54" presetID="22" presetClass="entr" presetSubtype="4" fill="hold" grpId="0" nodeType="withEffect">
+                                  <p:stCondLst>
+                                    <p:cond delay="0"/>
+                                  </p:stCondLst>
+                                  <p:childTnLst>
+                                    <p:set>
+                                      <p:cBhvr>
+                                        <p:cTn id="55" dur="1" fill="hold">
+                                          <p:stCondLst>
+                                            <p:cond delay="0"/>
+                                          </p:stCondLst>
+                                        </p:cTn>
+                                        <p:tgtEl>
+                                          <p:spTgt spid="56"/>
+                                        </p:tgtEl>
+                                        <p:attrNameLst>
+                                          <p:attrName>style.visibility</p:attrName>
+                                        </p:attrNameLst>
+                                      </p:cBhvr>
+                                      <p:to>
+                                        <p:strVal val="visible"/>
+                                      </p:to>
+                                    </p:set>
+                                    <p:animEffect transition="in" filter="wipe(down)">
+                                      <p:cBhvr>
+                                        <p:cTn id="56" dur="500"/>
+                                        <p:tgtEl>
+                                          <p:spTgt spid="56"/>
+                                        </p:tgtEl>
+                                      </p:cBhvr>
+                                    </p:animEffect>
+                                  </p:childTnLst>
+                                </p:cTn>
+                              </p:par>
+                              <p:par>
+                                <p:cTn id="57" presetID="22" presetClass="entr" presetSubtype="4" fill="hold" grpId="0" nodeType="withEffect">
+                                  <p:stCondLst>
+                                    <p:cond delay="0"/>
+                                  </p:stCondLst>
+                                  <p:childTnLst>
+                                    <p:set>
+                                      <p:cBhvr>
+                                        <p:cTn id="58" dur="1" fill="hold">
+                                          <p:stCondLst>
+                                            <p:cond delay="0"/>
+                                          </p:stCondLst>
+                                        </p:cTn>
+                                        <p:tgtEl>
+                                          <p:spTgt spid="57"/>
+                                        </p:tgtEl>
+                                        <p:attrNameLst>
+                                          <p:attrName>style.visibility</p:attrName>
+                                        </p:attrNameLst>
+                                      </p:cBhvr>
+                                      <p:to>
+                                        <p:strVal val="visible"/>
+                                      </p:to>
+                                    </p:set>
+                                    <p:animEffect transition="in" filter="wipe(down)">
+                                      <p:cBhvr>
+                                        <p:cTn id="59" dur="500"/>
+                                        <p:tgtEl>
+                                          <p:spTgt spid="57"/>
+                                        </p:tgtEl>
+                                      </p:cBhvr>
+                                    </p:animEffect>
+                                  </p:childTnLst>
+                                </p:cTn>
+                              </p:par>
+                              <p:par>
+                                <p:cTn id="60" presetID="22" presetClass="entr" presetSubtype="4" fill="hold" grpId="0" nodeType="withEffect">
+                                  <p:stCondLst>
+                                    <p:cond delay="0"/>
+                                  </p:stCondLst>
+                                  <p:childTnLst>
+                                    <p:set>
+                                      <p:cBhvr>
+                                        <p:cTn id="61" dur="1" fill="hold">
+                                          <p:stCondLst>
+                                            <p:cond delay="0"/>
+                                          </p:stCondLst>
+                                        </p:cTn>
+                                        <p:tgtEl>
+                                          <p:spTgt spid="58"/>
+                                        </p:tgtEl>
+                                        <p:attrNameLst>
+                                          <p:attrName>style.visibility</p:attrName>
+                                        </p:attrNameLst>
+                                      </p:cBhvr>
+                                      <p:to>
+                                        <p:strVal val="visible"/>
+                                      </p:to>
+                                    </p:set>
+                                    <p:animEffect transition="in" filter="wipe(down)">
+                                      <p:cBhvr>
+                                        <p:cTn id="62" dur="500"/>
+                                        <p:tgtEl>
+                                          <p:spTgt spid="58"/>
+                                        </p:tgtEl>
+                                      </p:cBhvr>
+                                    </p:animEffect>
+                                  </p:childTnLst>
+                                </p:cTn>
+                              </p:par>
+                              <p:par>
+                                <p:cTn id="63" presetID="22" presetClass="entr" presetSubtype="4" fill="hold" grpId="0" nodeType="withEffect">
+                                  <p:stCondLst>
+                                    <p:cond delay="0"/>
+                                  </p:stCondLst>
+                                  <p:childTnLst>
+                                    <p:set>
+                                      <p:cBhvr>
+                                        <p:cTn id="64" dur="1" fill="hold">
+                                          <p:stCondLst>
+                                            <p:cond delay="0"/>
+                                          </p:stCondLst>
+                                        </p:cTn>
+                                        <p:tgtEl>
+                                          <p:spTgt spid="59"/>
+                                        </p:tgtEl>
+                                        <p:attrNameLst>
+                                          <p:attrName>style.visibility</p:attrName>
+                                        </p:attrNameLst>
+                                      </p:cBhvr>
+                                      <p:to>
+                                        <p:strVal val="visible"/>
+                                      </p:to>
+                                    </p:set>
+                                    <p:animEffect transition="in" filter="wipe(down)">
+                                      <p:cBhvr>
+                                        <p:cTn id="65" dur="500"/>
+                                        <p:tgtEl>
+                                          <p:spTgt spid="59"/>
+                                        </p:tgtEl>
+                                      </p:cBhvr>
+                                    </p:animEffect>
+                                  </p:childTnLst>
+                                </p:cTn>
+                              </p:par>
+                              <p:par>
+                                <p:cTn id="66" presetID="22" presetClass="entr" presetSubtype="4" fill="hold" grpId="0" nodeType="withEffect">
+                                  <p:stCondLst>
+                                    <p:cond delay="0"/>
+                                  </p:stCondLst>
+                                  <p:childTnLst>
+                                    <p:set>
+                                      <p:cBhvr>
+                                        <p:cTn id="67" dur="1" fill="hold">
+                                          <p:stCondLst>
+                                            <p:cond delay="0"/>
+                                          </p:stCondLst>
+                                        </p:cTn>
+                                        <p:tgtEl>
+                                          <p:spTgt spid="60"/>
+                                        </p:tgtEl>
+                                        <p:attrNameLst>
+                                          <p:attrName>style.visibility</p:attrName>
+                                        </p:attrNameLst>
+                                      </p:cBhvr>
+                                      <p:to>
+                                        <p:strVal val="visible"/>
+                                      </p:to>
+                                    </p:set>
+                                    <p:animEffect transition="in" filter="wipe(down)">
+                                      <p:cBhvr>
+                                        <p:cTn id="68" dur="500"/>
+                                        <p:tgtEl>
+                                          <p:spTgt spid="60"/>
+                                        </p:tgtEl>
+                                      </p:cBhvr>
+                                    </p:animEffect>
+                                  </p:childTnLst>
+                                </p:cTn>
+                              </p:par>
+                              <p:par>
+                                <p:cTn id="69" presetID="22" presetClass="entr" presetSubtype="4" fill="hold" grpId="0" nodeType="withEffect">
+                                  <p:stCondLst>
+                                    <p:cond delay="0"/>
+                                  </p:stCondLst>
+                                  <p:childTnLst>
+                                    <p:set>
+                                      <p:cBhvr>
+                                        <p:cTn id="70" dur="1" fill="hold">
+                                          <p:stCondLst>
+                                            <p:cond delay="0"/>
+                                          </p:stCondLst>
+                                        </p:cTn>
+                                        <p:tgtEl>
+                                          <p:spTgt spid="61"/>
+                                        </p:tgtEl>
+                                        <p:attrNameLst>
+                                          <p:attrName>style.visibility</p:attrName>
+                                        </p:attrNameLst>
+                                      </p:cBhvr>
+                                      <p:to>
+                                        <p:strVal val="visible"/>
+                                      </p:to>
+                                    </p:set>
+                                    <p:animEffect transition="in" filter="wipe(down)">
+                                      <p:cBhvr>
+                                        <p:cTn id="71" dur="500"/>
+                                        <p:tgtEl>
+                                          <p:spTgt spid="61"/>
+                                        </p:tgtEl>
+                                      </p:cBhvr>
+                                    </p:animEffect>
+                                  </p:childTnLst>
+                                </p:cTn>
+                              </p:par>
+                              <p:par>
+                                <p:cTn id="72" presetID="22" presetClass="entr" presetSubtype="4" fill="hold" nodeType="withEffect">
+                                  <p:stCondLst>
+                                    <p:cond delay="0"/>
+                                  </p:stCondLst>
+                                  <p:childTnLst>
+                                    <p:set>
+                                      <p:cBhvr>
+                                        <p:cTn id="73" dur="1" fill="hold">
+                                          <p:stCondLst>
+                                            <p:cond delay="0"/>
+                                          </p:stCondLst>
+                                        </p:cTn>
+                                        <p:tgtEl>
+                                          <p:spTgt spid="42"/>
+                                        </p:tgtEl>
+                                        <p:attrNameLst>
+                                          <p:attrName>style.visibility</p:attrName>
+                                        </p:attrNameLst>
+                                      </p:cBhvr>
+                                      <p:to>
+                                        <p:strVal val="visible"/>
+                                      </p:to>
+                                    </p:set>
+                                    <p:animEffect transition="in" filter="wipe(down)">
+                                      <p:cBhvr>
+                                        <p:cTn id="74" dur="500"/>
+                                        <p:tgtEl>
+                                          <p:spTgt spid="42"/>
+                                        </p:tgtEl>
+                                      </p:cBhvr>
+                                    </p:animEffect>
+                                  </p:childTnLst>
+                                </p:cTn>
+                              </p:par>
+                            </p:childTnLst>
+                          </p:cTn>
+                        </p:par>
+                      </p:childTnLst>
+                    </p:cTn>
+                  </p:par>
+                </p:childTnLst>
+              </p:cTn>
+              <p:prevCondLst>
+                <p:cond evt="onPrev" delay="0">
+                  <p:tgtEl>
+                    <p:sldTgt/>
+                  </p:tgtEl>
+                </p:cond>
+              </p:prevCondLst>
+              <p:nextCondLst>
+                <p:cond evt="onNext" delay="0">
+                  <p:tgtEl>
+                    <p:sldTgt/>
+                  </p:tgtEl>
+                </p:cond>
+              </p:nextCondLst>
+            </p:seq>
+          </p:childTnLst>
+        </p:cTn>
+      </p:par>
+    </p:tnLst>
+    <p:bldLst>
+      <p:bldP spid="55" grpId="0"/>
+      <p:bldP spid="56" grpId="0"/>
+      <p:bldP spid="57" grpId="0"/>
+      <p:bldP spid="58" grpId="0"/>
+      <p:bldP spid="59" grpId="0"/>
+      <p:bldP spid="60" grpId="0"/>
+      <p:bldP spid="61" grpId="0"/>
+    </p:bldLst>
+  </p:timing>
 </p:sld>
 </file>
 
@@ -8602,6 +10288,89 @@
   <p:clrMapOvr>
     <a:masterClrMapping/>
   </p:clrMapOvr>
+  <p:timing>
+    <p:tnLst>
+      <p:par>
+        <p:cTn id="1" dur="indefinite" restart="never" nodeType="tmRoot">
+          <p:childTnLst>
+            <p:seq concurrent="1" nextAc="seek">
+              <p:cTn id="2" dur="indefinite" nodeType="mainSeq">
+                <p:childTnLst>
+                  <p:par>
+                    <p:cTn id="3" fill="hold">
+                      <p:stCondLst>
+                        <p:cond delay="indefinite"/>
+                      </p:stCondLst>
+                      <p:childTnLst>
+                        <p:par>
+                          <p:cTn id="4" fill="hold">
+                            <p:stCondLst>
+                              <p:cond delay="0"/>
+                            </p:stCondLst>
+                            <p:childTnLst>
+                              <p:par>
+                                <p:cTn id="5" presetID="22" presetClass="entr" presetSubtype="4" fill="hold" nodeType="clickEffect">
+                                  <p:stCondLst>
+                                    <p:cond delay="0"/>
+                                  </p:stCondLst>
+                                  <p:childTnLst>
+                                    <p:set>
+                                      <p:cBhvr>
+                                        <p:cTn id="6" dur="1" fill="hold">
+                                          <p:stCondLst>
+                                            <p:cond delay="0"/>
+                                          </p:stCondLst>
+                                        </p:cTn>
+                                        <p:tgtEl>
+                                          <p:spTgt spid="18"/>
+                                        </p:tgtEl>
+                                        <p:attrNameLst>
+                                          <p:attrName>style.visibility</p:attrName>
+                                        </p:attrNameLst>
+                                      </p:cBhvr>
+                                      <p:to>
+                                        <p:strVal val="visible"/>
+                                      </p:to>
+                                    </p:set>
+                                    <p:animEffect transition="in" filter="wipe(down)">
+                                      <p:cBhvr>
+                                        <p:cTn id="7" dur="500"/>
+                                        <p:tgtEl>
+                                          <p:spTgt spid="18"/>
+                                        </p:tgtEl>
+                                      </p:cBhvr>
+                                    </p:animEffect>
+                                  </p:childTnLst>
+                                </p:cTn>
+                              </p:par>
+                            </p:childTnLst>
+                          </p:cTn>
+                        </p:par>
+                      </p:childTnLst>
+                    </p:cTn>
+                  </p:par>
+                </p:childTnLst>
+              </p:cTn>
+              <p:prevCondLst>
+                <p:cond evt="onPrev" delay="0">
+                  <p:tgtEl>
+                    <p:sldTgt/>
+                  </p:tgtEl>
+                </p:cond>
+              </p:prevCondLst>
+              <p:nextCondLst>
+                <p:cond evt="onNext" delay="0">
+                  <p:tgtEl>
+                    <p:sldTgt/>
+                  </p:tgtEl>
+                </p:cond>
+              </p:nextCondLst>
+            </p:seq>
+          </p:childTnLst>
+        </p:cTn>
+      </p:par>
+    </p:tnLst>
+  </p:timing>
 </p:sld>
 </file>
 
@@ -9519,6 +11288,89 @@
   <p:clrMapOvr>
     <a:masterClrMapping/>
   </p:clrMapOvr>
+  <p:timing>
+    <p:tnLst>
+      <p:par>
+        <p:cTn id="1" dur="indefinite" restart="never" nodeType="tmRoot">
+          <p:childTnLst>
+            <p:seq concurrent="1" nextAc="seek">
+              <p:cTn id="2" dur="indefinite" nodeType="mainSeq">
+                <p:childTnLst>
+                  <p:par>
+                    <p:cTn id="3" fill="hold">
+                      <p:stCondLst>
+                        <p:cond delay="indefinite"/>
+                      </p:stCondLst>
+                      <p:childTnLst>
+                        <p:par>
+                          <p:cTn id="4" fill="hold">
+                            <p:stCondLst>
+                              <p:cond delay="0"/>
+                            </p:stCondLst>
+                            <p:childTnLst>
+                              <p:par>
+                                <p:cTn id="5" presetID="22" presetClass="entr" presetSubtype="4" fill="hold" nodeType="clickEffect">
+                                  <p:stCondLst>
+                                    <p:cond delay="0"/>
+                                  </p:stCondLst>
+                                  <p:childTnLst>
+                                    <p:set>
+                                      <p:cBhvr>
+                                        <p:cTn id="6" dur="1" fill="hold">
+                                          <p:stCondLst>
+                                            <p:cond delay="0"/>
+                                          </p:stCondLst>
+                                        </p:cTn>
+                                        <p:tgtEl>
+                                          <p:spTgt spid="18"/>
+                                        </p:tgtEl>
+                                        <p:attrNameLst>
+                                          <p:attrName>style.visibility</p:attrName>
+                                        </p:attrNameLst>
+                                      </p:cBhvr>
+                                      <p:to>
+                                        <p:strVal val="visible"/>
+                                      </p:to>
+                                    </p:set>
+                                    <p:animEffect transition="in" filter="wipe(down)">
+                                      <p:cBhvr>
+                                        <p:cTn id="7" dur="500"/>
+                                        <p:tgtEl>
+                                          <p:spTgt spid="18"/>
+                                        </p:tgtEl>
+                                      </p:cBhvr>
+                                    </p:animEffect>
+                                  </p:childTnLst>
+                                </p:cTn>
+                              </p:par>
+                            </p:childTnLst>
+                          </p:cTn>
+                        </p:par>
+                      </p:childTnLst>
+                    </p:cTn>
+                  </p:par>
+                </p:childTnLst>
+              </p:cTn>
+              <p:prevCondLst>
+                <p:cond evt="onPrev" delay="0">
+                  <p:tgtEl>
+                    <p:sldTgt/>
+                  </p:tgtEl>
+                </p:cond>
+              </p:prevCondLst>
+              <p:nextCondLst>
+                <p:cond evt="onNext" delay="0">
+                  <p:tgtEl>
+                    <p:sldTgt/>
+                  </p:tgtEl>
+                </p:cond>
+              </p:nextCondLst>
+            </p:seq>
+          </p:childTnLst>
+        </p:cTn>
+      </p:par>
+    </p:tnLst>
+  </p:timing>
 </p:sld>
 </file>
 
@@ -10436,6 +12288,89 @@
   <p:clrMapOvr>
     <a:masterClrMapping/>
   </p:clrMapOvr>
+  <p:timing>
+    <p:tnLst>
+      <p:par>
+        <p:cTn id="1" dur="indefinite" restart="never" nodeType="tmRoot">
+          <p:childTnLst>
+            <p:seq concurrent="1" nextAc="seek">
+              <p:cTn id="2" dur="indefinite" nodeType="mainSeq">
+                <p:childTnLst>
+                  <p:par>
+                    <p:cTn id="3" fill="hold">
+                      <p:stCondLst>
+                        <p:cond delay="indefinite"/>
+                      </p:stCondLst>
+                      <p:childTnLst>
+                        <p:par>
+                          <p:cTn id="4" fill="hold">
+                            <p:stCondLst>
+                              <p:cond delay="0"/>
+                            </p:stCondLst>
+                            <p:childTnLst>
+                              <p:par>
+                                <p:cTn id="5" presetID="22" presetClass="entr" presetSubtype="4" fill="hold" nodeType="clickEffect">
+                                  <p:stCondLst>
+                                    <p:cond delay="0"/>
+                                  </p:stCondLst>
+                                  <p:childTnLst>
+                                    <p:set>
+                                      <p:cBhvr>
+                                        <p:cTn id="6" dur="1" fill="hold">
+                                          <p:stCondLst>
+                                            <p:cond delay="0"/>
+                                          </p:stCondLst>
+                                        </p:cTn>
+                                        <p:tgtEl>
+                                          <p:spTgt spid="18"/>
+                                        </p:tgtEl>
+                                        <p:attrNameLst>
+                                          <p:attrName>style.visibility</p:attrName>
+                                        </p:attrNameLst>
+                                      </p:cBhvr>
+                                      <p:to>
+                                        <p:strVal val="visible"/>
+                                      </p:to>
+                                    </p:set>
+                                    <p:animEffect transition="in" filter="wipe(down)">
+                                      <p:cBhvr>
+                                        <p:cTn id="7" dur="500"/>
+                                        <p:tgtEl>
+                                          <p:spTgt spid="18"/>
+                                        </p:tgtEl>
+                                      </p:cBhvr>
+                                    </p:animEffect>
+                                  </p:childTnLst>
+                                </p:cTn>
+                              </p:par>
+                            </p:childTnLst>
+                          </p:cTn>
+                        </p:par>
+                      </p:childTnLst>
+                    </p:cTn>
+                  </p:par>
+                </p:childTnLst>
+              </p:cTn>
+              <p:prevCondLst>
+                <p:cond evt="onPrev" delay="0">
+                  <p:tgtEl>
+                    <p:sldTgt/>
+                  </p:tgtEl>
+                </p:cond>
+              </p:prevCondLst>
+              <p:nextCondLst>
+                <p:cond evt="onNext" delay="0">
+                  <p:tgtEl>
+                    <p:sldTgt/>
+                  </p:tgtEl>
+                </p:cond>
+              </p:nextCondLst>
+            </p:seq>
+          </p:childTnLst>
+        </p:cTn>
+      </p:par>
+    </p:tnLst>
+  </p:timing>
 </p:sld>
 </file>
 
@@ -11358,7 +13293,7 @@
         </p:nvSpPr>
         <p:spPr>
           <a:xfrm>
-            <a:off x="1028700" y="5734509"/>
+            <a:off x="1028700" y="5737483"/>
             <a:ext cx="1006217" cy="1006217"/>
           </a:xfrm>
           <a:custGeom>
@@ -11404,7 +13339,7 @@
         </p:nvSpPr>
         <p:spPr>
           <a:xfrm>
-            <a:off x="1028700" y="7178876"/>
+            <a:off x="1028700" y="7109083"/>
             <a:ext cx="1006217" cy="1006217"/>
           </a:xfrm>
           <a:custGeom>
@@ -11757,6 +13692,483 @@
   <p:clrMapOvr>
     <a:masterClrMapping/>
   </p:clrMapOvr>
+  <p:timing>
+    <p:tnLst>
+      <p:par>
+        <p:cTn id="1" dur="indefinite" restart="never" nodeType="tmRoot">
+          <p:childTnLst>
+            <p:seq concurrent="1" nextAc="seek">
+              <p:cTn id="2" dur="indefinite" nodeType="mainSeq">
+                <p:childTnLst>
+                  <p:par>
+                    <p:cTn id="3" fill="hold">
+                      <p:stCondLst>
+                        <p:cond delay="indefinite"/>
+                      </p:stCondLst>
+                      <p:childTnLst>
+                        <p:par>
+                          <p:cTn id="4" fill="hold">
+                            <p:stCondLst>
+                              <p:cond delay="0"/>
+                            </p:stCondLst>
+                            <p:childTnLst>
+                              <p:par>
+                                <p:cTn id="5" presetID="22" presetClass="entr" presetSubtype="4" fill="hold" nodeType="clickEffect">
+                                  <p:stCondLst>
+                                    <p:cond delay="0"/>
+                                  </p:stCondLst>
+                                  <p:childTnLst>
+                                    <p:set>
+                                      <p:cBhvr>
+                                        <p:cTn id="6" dur="1" fill="hold">
+                                          <p:stCondLst>
+                                            <p:cond delay="0"/>
+                                          </p:stCondLst>
+                                        </p:cTn>
+                                        <p:tgtEl>
+                                          <p:spTgt spid="18"/>
+                                        </p:tgtEl>
+                                        <p:attrNameLst>
+                                          <p:attrName>style.visibility</p:attrName>
+                                        </p:attrNameLst>
+                                      </p:cBhvr>
+                                      <p:to>
+                                        <p:strVal val="visible"/>
+                                      </p:to>
+                                    </p:set>
+                                    <p:animEffect transition="in" filter="wipe(down)">
+                                      <p:cBhvr>
+                                        <p:cTn id="7" dur="500"/>
+                                        <p:tgtEl>
+                                          <p:spTgt spid="18"/>
+                                        </p:tgtEl>
+                                      </p:cBhvr>
+                                    </p:animEffect>
+                                  </p:childTnLst>
+                                </p:cTn>
+                              </p:par>
+                              <p:par>
+                                <p:cTn id="8" presetID="22" presetClass="entr" presetSubtype="4" fill="hold" grpId="0" nodeType="withEffect">
+                                  <p:stCondLst>
+                                    <p:cond delay="0"/>
+                                  </p:stCondLst>
+                                  <p:childTnLst>
+                                    <p:set>
+                                      <p:cBhvr>
+                                        <p:cTn id="9" dur="1" fill="hold">
+                                          <p:stCondLst>
+                                            <p:cond delay="0"/>
+                                          </p:stCondLst>
+                                        </p:cTn>
+                                        <p:tgtEl>
+                                          <p:spTgt spid="27"/>
+                                        </p:tgtEl>
+                                        <p:attrNameLst>
+                                          <p:attrName>style.visibility</p:attrName>
+                                        </p:attrNameLst>
+                                      </p:cBhvr>
+                                      <p:to>
+                                        <p:strVal val="visible"/>
+                                      </p:to>
+                                    </p:set>
+                                    <p:animEffect transition="in" filter="wipe(down)">
+                                      <p:cBhvr>
+                                        <p:cTn id="10" dur="500"/>
+                                        <p:tgtEl>
+                                          <p:spTgt spid="27"/>
+                                        </p:tgtEl>
+                                      </p:cBhvr>
+                                    </p:animEffect>
+                                  </p:childTnLst>
+                                </p:cTn>
+                              </p:par>
+                            </p:childTnLst>
+                          </p:cTn>
+                        </p:par>
+                      </p:childTnLst>
+                    </p:cTn>
+                  </p:par>
+                  <p:par>
+                    <p:cTn id="11" fill="hold">
+                      <p:stCondLst>
+                        <p:cond delay="indefinite"/>
+                      </p:stCondLst>
+                      <p:childTnLst>
+                        <p:par>
+                          <p:cTn id="12" fill="hold">
+                            <p:stCondLst>
+                              <p:cond delay="0"/>
+                            </p:stCondLst>
+                            <p:childTnLst>
+                              <p:par>
+                                <p:cTn id="13" presetID="22" presetClass="entr" presetSubtype="4" fill="hold" nodeType="clickEffect">
+                                  <p:stCondLst>
+                                    <p:cond delay="0"/>
+                                  </p:stCondLst>
+                                  <p:childTnLst>
+                                    <p:set>
+                                      <p:cBhvr>
+                                        <p:cTn id="14" dur="1" fill="hold">
+                                          <p:stCondLst>
+                                            <p:cond delay="0"/>
+                                          </p:stCondLst>
+                                        </p:cTn>
+                                        <p:tgtEl>
+                                          <p:spTgt spid="23"/>
+                                        </p:tgtEl>
+                                        <p:attrNameLst>
+                                          <p:attrName>style.visibility</p:attrName>
+                                        </p:attrNameLst>
+                                      </p:cBhvr>
+                                      <p:to>
+                                        <p:strVal val="visible"/>
+                                      </p:to>
+                                    </p:set>
+                                    <p:animEffect transition="in" filter="wipe(down)">
+                                      <p:cBhvr>
+                                        <p:cTn id="15" dur="500"/>
+                                        <p:tgtEl>
+                                          <p:spTgt spid="23"/>
+                                        </p:tgtEl>
+                                      </p:cBhvr>
+                                    </p:animEffect>
+                                  </p:childTnLst>
+                                </p:cTn>
+                              </p:par>
+                              <p:par>
+                                <p:cTn id="16" presetID="22" presetClass="entr" presetSubtype="4" fill="hold" grpId="0" nodeType="withEffect">
+                                  <p:stCondLst>
+                                    <p:cond delay="0"/>
+                                  </p:stCondLst>
+                                  <p:childTnLst>
+                                    <p:set>
+                                      <p:cBhvr>
+                                        <p:cTn id="17" dur="1" fill="hold">
+                                          <p:stCondLst>
+                                            <p:cond delay="0"/>
+                                          </p:stCondLst>
+                                        </p:cTn>
+                                        <p:tgtEl>
+                                          <p:spTgt spid="28"/>
+                                        </p:tgtEl>
+                                        <p:attrNameLst>
+                                          <p:attrName>style.visibility</p:attrName>
+                                        </p:attrNameLst>
+                                      </p:cBhvr>
+                                      <p:to>
+                                        <p:strVal val="visible"/>
+                                      </p:to>
+                                    </p:set>
+                                    <p:animEffect transition="in" filter="wipe(down)">
+                                      <p:cBhvr>
+                                        <p:cTn id="18" dur="500"/>
+                                        <p:tgtEl>
+                                          <p:spTgt spid="28"/>
+                                        </p:tgtEl>
+                                      </p:cBhvr>
+                                    </p:animEffect>
+                                  </p:childTnLst>
+                                </p:cTn>
+                              </p:par>
+                            </p:childTnLst>
+                          </p:cTn>
+                        </p:par>
+                      </p:childTnLst>
+                    </p:cTn>
+                  </p:par>
+                  <p:par>
+                    <p:cTn id="19" fill="hold">
+                      <p:stCondLst>
+                        <p:cond delay="indefinite"/>
+                      </p:stCondLst>
+                      <p:childTnLst>
+                        <p:par>
+                          <p:cTn id="20" fill="hold">
+                            <p:stCondLst>
+                              <p:cond delay="0"/>
+                            </p:stCondLst>
+                            <p:childTnLst>
+                              <p:par>
+                                <p:cTn id="21" presetID="22" presetClass="entr" presetSubtype="4" fill="hold" nodeType="clickEffect">
+                                  <p:stCondLst>
+                                    <p:cond delay="0"/>
+                                  </p:stCondLst>
+                                  <p:childTnLst>
+                                    <p:set>
+                                      <p:cBhvr>
+                                        <p:cTn id="22" dur="1" fill="hold">
+                                          <p:stCondLst>
+                                            <p:cond delay="0"/>
+                                          </p:stCondLst>
+                                        </p:cTn>
+                                        <p:tgtEl>
+                                          <p:spTgt spid="24"/>
+                                        </p:tgtEl>
+                                        <p:attrNameLst>
+                                          <p:attrName>style.visibility</p:attrName>
+                                        </p:attrNameLst>
+                                      </p:cBhvr>
+                                      <p:to>
+                                        <p:strVal val="visible"/>
+                                      </p:to>
+                                    </p:set>
+                                    <p:animEffect transition="in" filter="wipe(down)">
+                                      <p:cBhvr>
+                                        <p:cTn id="23" dur="500"/>
+                                        <p:tgtEl>
+                                          <p:spTgt spid="24"/>
+                                        </p:tgtEl>
+                                      </p:cBhvr>
+                                    </p:animEffect>
+                                  </p:childTnLst>
+                                </p:cTn>
+                              </p:par>
+                              <p:par>
+                                <p:cTn id="24" presetID="22" presetClass="entr" presetSubtype="4" fill="hold" grpId="0" nodeType="withEffect">
+                                  <p:stCondLst>
+                                    <p:cond delay="0"/>
+                                  </p:stCondLst>
+                                  <p:childTnLst>
+                                    <p:set>
+                                      <p:cBhvr>
+                                        <p:cTn id="25" dur="1" fill="hold">
+                                          <p:stCondLst>
+                                            <p:cond delay="0"/>
+                                          </p:stCondLst>
+                                        </p:cTn>
+                                        <p:tgtEl>
+                                          <p:spTgt spid="29"/>
+                                        </p:tgtEl>
+                                        <p:attrNameLst>
+                                          <p:attrName>style.visibility</p:attrName>
+                                        </p:attrNameLst>
+                                      </p:cBhvr>
+                                      <p:to>
+                                        <p:strVal val="visible"/>
+                                      </p:to>
+                                    </p:set>
+                                    <p:animEffect transition="in" filter="wipe(down)">
+                                      <p:cBhvr>
+                                        <p:cTn id="26" dur="500"/>
+                                        <p:tgtEl>
+                                          <p:spTgt spid="29"/>
+                                        </p:tgtEl>
+                                      </p:cBhvr>
+                                    </p:animEffect>
+                                  </p:childTnLst>
+                                </p:cTn>
+                              </p:par>
+                            </p:childTnLst>
+                          </p:cTn>
+                        </p:par>
+                      </p:childTnLst>
+                    </p:cTn>
+                  </p:par>
+                  <p:par>
+                    <p:cTn id="27" fill="hold">
+                      <p:stCondLst>
+                        <p:cond delay="indefinite"/>
+                      </p:stCondLst>
+                      <p:childTnLst>
+                        <p:par>
+                          <p:cTn id="28" fill="hold">
+                            <p:stCondLst>
+                              <p:cond delay="0"/>
+                            </p:stCondLst>
+                            <p:childTnLst>
+                              <p:par>
+                                <p:cTn id="29" presetID="22" presetClass="entr" presetSubtype="4" fill="hold" nodeType="clickEffect">
+                                  <p:stCondLst>
+                                    <p:cond delay="0"/>
+                                  </p:stCondLst>
+                                  <p:childTnLst>
+                                    <p:set>
+                                      <p:cBhvr>
+                                        <p:cTn id="30" dur="1" fill="hold">
+                                          <p:stCondLst>
+                                            <p:cond delay="0"/>
+                                          </p:stCondLst>
+                                        </p:cTn>
+                                        <p:tgtEl>
+                                          <p:spTgt spid="25"/>
+                                        </p:tgtEl>
+                                        <p:attrNameLst>
+                                          <p:attrName>style.visibility</p:attrName>
+                                        </p:attrNameLst>
+                                      </p:cBhvr>
+                                      <p:to>
+                                        <p:strVal val="visible"/>
+                                      </p:to>
+                                    </p:set>
+                                    <p:animEffect transition="in" filter="wipe(down)">
+                                      <p:cBhvr>
+                                        <p:cTn id="31" dur="500"/>
+                                        <p:tgtEl>
+                                          <p:spTgt spid="25"/>
+                                        </p:tgtEl>
+                                      </p:cBhvr>
+                                    </p:animEffect>
+                                  </p:childTnLst>
+                                </p:cTn>
+                              </p:par>
+                              <p:par>
+                                <p:cTn id="32" presetID="22" presetClass="entr" presetSubtype="4" fill="hold" grpId="0" nodeType="withEffect">
+                                  <p:stCondLst>
+                                    <p:cond delay="0"/>
+                                  </p:stCondLst>
+                                  <p:childTnLst>
+                                    <p:set>
+                                      <p:cBhvr>
+                                        <p:cTn id="33" dur="1" fill="hold">
+                                          <p:stCondLst>
+                                            <p:cond delay="0"/>
+                                          </p:stCondLst>
+                                        </p:cTn>
+                                        <p:tgtEl>
+                                          <p:spTgt spid="30"/>
+                                        </p:tgtEl>
+                                        <p:attrNameLst>
+                                          <p:attrName>style.visibility</p:attrName>
+                                        </p:attrNameLst>
+                                      </p:cBhvr>
+                                      <p:to>
+                                        <p:strVal val="visible"/>
+                                      </p:to>
+                                    </p:set>
+                                    <p:animEffect transition="in" filter="wipe(down)">
+                                      <p:cBhvr>
+                                        <p:cTn id="34" dur="500"/>
+                                        <p:tgtEl>
+                                          <p:spTgt spid="30"/>
+                                        </p:tgtEl>
+                                      </p:cBhvr>
+                                    </p:animEffect>
+                                  </p:childTnLst>
+                                </p:cTn>
+                              </p:par>
+                            </p:childTnLst>
+                          </p:cTn>
+                        </p:par>
+                      </p:childTnLst>
+                    </p:cTn>
+                  </p:par>
+                  <p:par>
+                    <p:cTn id="35" fill="hold">
+                      <p:stCondLst>
+                        <p:cond delay="indefinite"/>
+                      </p:stCondLst>
+                      <p:childTnLst>
+                        <p:par>
+                          <p:cTn id="36" fill="hold">
+                            <p:stCondLst>
+                              <p:cond delay="0"/>
+                            </p:stCondLst>
+                            <p:childTnLst>
+                              <p:par>
+                                <p:cTn id="37" presetID="22" presetClass="entr" presetSubtype="4" fill="hold" nodeType="clickEffect">
+                                  <p:stCondLst>
+                                    <p:cond delay="0"/>
+                                  </p:stCondLst>
+                                  <p:childTnLst>
+                                    <p:set>
+                                      <p:cBhvr>
+                                        <p:cTn id="38" dur="1" fill="hold">
+                                          <p:stCondLst>
+                                            <p:cond delay="0"/>
+                                          </p:stCondLst>
+                                        </p:cTn>
+                                        <p:tgtEl>
+                                          <p:spTgt spid="26"/>
+                                        </p:tgtEl>
+                                        <p:attrNameLst>
+                                          <p:attrName>style.visibility</p:attrName>
+                                        </p:attrNameLst>
+                                      </p:cBhvr>
+                                      <p:to>
+                                        <p:strVal val="visible"/>
+                                      </p:to>
+                                    </p:set>
+                                    <p:animEffect transition="in" filter="wipe(down)">
+                                      <p:cBhvr>
+                                        <p:cTn id="39" dur="500"/>
+                                        <p:tgtEl>
+                                          <p:spTgt spid="26"/>
+                                        </p:tgtEl>
+                                      </p:cBhvr>
+                                    </p:animEffect>
+                                  </p:childTnLst>
+                                </p:cTn>
+                              </p:par>
+                              <p:par>
+                                <p:cTn id="40" presetID="22" presetClass="entr" presetSubtype="4" fill="hold" grpId="0" nodeType="withEffect">
+                                  <p:stCondLst>
+                                    <p:cond delay="0"/>
+                                  </p:stCondLst>
+                                  <p:childTnLst>
+                                    <p:set>
+                                      <p:cBhvr>
+                                        <p:cTn id="41" dur="1" fill="hold">
+                                          <p:stCondLst>
+                                            <p:cond delay="0"/>
+                                          </p:stCondLst>
+                                        </p:cTn>
+                                        <p:tgtEl>
+                                          <p:spTgt spid="31"/>
+                                        </p:tgtEl>
+                                        <p:attrNameLst>
+                                          <p:attrName>style.visibility</p:attrName>
+                                        </p:attrNameLst>
+                                      </p:cBhvr>
+                                      <p:to>
+                                        <p:strVal val="visible"/>
+                                      </p:to>
+                                    </p:set>
+                                    <p:animEffect transition="in" filter="wipe(down)">
+                                      <p:cBhvr>
+                                        <p:cTn id="42" dur="500"/>
+                                        <p:tgtEl>
+                                          <p:spTgt spid="31"/>
+                                        </p:tgtEl>
+                                      </p:cBhvr>
+                                    </p:animEffect>
+                                  </p:childTnLst>
+                                </p:cTn>
+                              </p:par>
+                            </p:childTnLst>
+                          </p:cTn>
+                        </p:par>
+                      </p:childTnLst>
+                    </p:cTn>
+                  </p:par>
+                </p:childTnLst>
+              </p:cTn>
+              <p:prevCondLst>
+                <p:cond evt="onPrev" delay="0">
+                  <p:tgtEl>
+                    <p:sldTgt/>
+                  </p:tgtEl>
+                </p:cond>
+              </p:prevCondLst>
+              <p:nextCondLst>
+                <p:cond evt="onNext" delay="0">
+                  <p:tgtEl>
+                    <p:sldTgt/>
+                  </p:tgtEl>
+                </p:cond>
+              </p:nextCondLst>
+            </p:seq>
+          </p:childTnLst>
+        </p:cTn>
+      </p:par>
+    </p:tnLst>
+    <p:bldLst>
+      <p:bldP spid="27" grpId="0"/>
+      <p:bldP spid="28" grpId="0"/>
+      <p:bldP spid="29" grpId="0"/>
+      <p:bldP spid="30" grpId="0"/>
+      <p:bldP spid="31" grpId="0"/>
+    </p:bldLst>
+  </p:timing>
 </p:sld>
 </file>
 
@@ -13124,6 +15536,483 @@
   <p:clrMapOvr>
     <a:masterClrMapping/>
   </p:clrMapOvr>
+  <p:timing>
+    <p:tnLst>
+      <p:par>
+        <p:cTn id="1" dur="indefinite" restart="never" nodeType="tmRoot">
+          <p:childTnLst>
+            <p:seq concurrent="1" nextAc="seek">
+              <p:cTn id="2" dur="indefinite" nodeType="mainSeq">
+                <p:childTnLst>
+                  <p:par>
+                    <p:cTn id="3" fill="hold">
+                      <p:stCondLst>
+                        <p:cond delay="indefinite"/>
+                      </p:stCondLst>
+                      <p:childTnLst>
+                        <p:par>
+                          <p:cTn id="4" fill="hold">
+                            <p:stCondLst>
+                              <p:cond delay="0"/>
+                            </p:stCondLst>
+                            <p:childTnLst>
+                              <p:par>
+                                <p:cTn id="5" presetID="22" presetClass="entr" presetSubtype="4" fill="hold" nodeType="clickEffect">
+                                  <p:stCondLst>
+                                    <p:cond delay="0"/>
+                                  </p:stCondLst>
+                                  <p:childTnLst>
+                                    <p:set>
+                                      <p:cBhvr>
+                                        <p:cTn id="6" dur="1" fill="hold">
+                                          <p:stCondLst>
+                                            <p:cond delay="0"/>
+                                          </p:stCondLst>
+                                        </p:cTn>
+                                        <p:tgtEl>
+                                          <p:spTgt spid="19"/>
+                                        </p:tgtEl>
+                                        <p:attrNameLst>
+                                          <p:attrName>style.visibility</p:attrName>
+                                        </p:attrNameLst>
+                                      </p:cBhvr>
+                                      <p:to>
+                                        <p:strVal val="visible"/>
+                                      </p:to>
+                                    </p:set>
+                                    <p:animEffect transition="in" filter="wipe(down)">
+                                      <p:cBhvr>
+                                        <p:cTn id="7" dur="500"/>
+                                        <p:tgtEl>
+                                          <p:spTgt spid="19"/>
+                                        </p:tgtEl>
+                                      </p:cBhvr>
+                                    </p:animEffect>
+                                  </p:childTnLst>
+                                </p:cTn>
+                              </p:par>
+                              <p:par>
+                                <p:cTn id="8" presetID="22" presetClass="entr" presetSubtype="4" fill="hold" grpId="0" nodeType="withEffect">
+                                  <p:stCondLst>
+                                    <p:cond delay="0"/>
+                                  </p:stCondLst>
+                                  <p:childTnLst>
+                                    <p:set>
+                                      <p:cBhvr>
+                                        <p:cTn id="9" dur="1" fill="hold">
+                                          <p:stCondLst>
+                                            <p:cond delay="0"/>
+                                          </p:stCondLst>
+                                        </p:cTn>
+                                        <p:tgtEl>
+                                          <p:spTgt spid="24"/>
+                                        </p:tgtEl>
+                                        <p:attrNameLst>
+                                          <p:attrName>style.visibility</p:attrName>
+                                        </p:attrNameLst>
+                                      </p:cBhvr>
+                                      <p:to>
+                                        <p:strVal val="visible"/>
+                                      </p:to>
+                                    </p:set>
+                                    <p:animEffect transition="in" filter="wipe(down)">
+                                      <p:cBhvr>
+                                        <p:cTn id="10" dur="500"/>
+                                        <p:tgtEl>
+                                          <p:spTgt spid="24"/>
+                                        </p:tgtEl>
+                                      </p:cBhvr>
+                                    </p:animEffect>
+                                  </p:childTnLst>
+                                </p:cTn>
+                              </p:par>
+                            </p:childTnLst>
+                          </p:cTn>
+                        </p:par>
+                      </p:childTnLst>
+                    </p:cTn>
+                  </p:par>
+                  <p:par>
+                    <p:cTn id="11" fill="hold">
+                      <p:stCondLst>
+                        <p:cond delay="indefinite"/>
+                      </p:stCondLst>
+                      <p:childTnLst>
+                        <p:par>
+                          <p:cTn id="12" fill="hold">
+                            <p:stCondLst>
+                              <p:cond delay="0"/>
+                            </p:stCondLst>
+                            <p:childTnLst>
+                              <p:par>
+                                <p:cTn id="13" presetID="22" presetClass="entr" presetSubtype="4" fill="hold" nodeType="clickEffect">
+                                  <p:stCondLst>
+                                    <p:cond delay="0"/>
+                                  </p:stCondLst>
+                                  <p:childTnLst>
+                                    <p:set>
+                                      <p:cBhvr>
+                                        <p:cTn id="14" dur="1" fill="hold">
+                                          <p:stCondLst>
+                                            <p:cond delay="0"/>
+                                          </p:stCondLst>
+                                        </p:cTn>
+                                        <p:tgtEl>
+                                          <p:spTgt spid="25"/>
+                                        </p:tgtEl>
+                                        <p:attrNameLst>
+                                          <p:attrName>style.visibility</p:attrName>
+                                        </p:attrNameLst>
+                                      </p:cBhvr>
+                                      <p:to>
+                                        <p:strVal val="visible"/>
+                                      </p:to>
+                                    </p:set>
+                                    <p:animEffect transition="in" filter="wipe(down)">
+                                      <p:cBhvr>
+                                        <p:cTn id="15" dur="500"/>
+                                        <p:tgtEl>
+                                          <p:spTgt spid="25"/>
+                                        </p:tgtEl>
+                                      </p:cBhvr>
+                                    </p:animEffect>
+                                  </p:childTnLst>
+                                </p:cTn>
+                              </p:par>
+                              <p:par>
+                                <p:cTn id="16" presetID="22" presetClass="entr" presetSubtype="4" fill="hold" grpId="0" nodeType="withEffect">
+                                  <p:stCondLst>
+                                    <p:cond delay="0"/>
+                                  </p:stCondLst>
+                                  <p:childTnLst>
+                                    <p:set>
+                                      <p:cBhvr>
+                                        <p:cTn id="17" dur="1" fill="hold">
+                                          <p:stCondLst>
+                                            <p:cond delay="0"/>
+                                          </p:stCondLst>
+                                        </p:cTn>
+                                        <p:tgtEl>
+                                          <p:spTgt spid="26"/>
+                                        </p:tgtEl>
+                                        <p:attrNameLst>
+                                          <p:attrName>style.visibility</p:attrName>
+                                        </p:attrNameLst>
+                                      </p:cBhvr>
+                                      <p:to>
+                                        <p:strVal val="visible"/>
+                                      </p:to>
+                                    </p:set>
+                                    <p:animEffect transition="in" filter="wipe(down)">
+                                      <p:cBhvr>
+                                        <p:cTn id="18" dur="500"/>
+                                        <p:tgtEl>
+                                          <p:spTgt spid="26"/>
+                                        </p:tgtEl>
+                                      </p:cBhvr>
+                                    </p:animEffect>
+                                  </p:childTnLst>
+                                </p:cTn>
+                              </p:par>
+                            </p:childTnLst>
+                          </p:cTn>
+                        </p:par>
+                      </p:childTnLst>
+                    </p:cTn>
+                  </p:par>
+                  <p:par>
+                    <p:cTn id="19" fill="hold">
+                      <p:stCondLst>
+                        <p:cond delay="indefinite"/>
+                      </p:stCondLst>
+                      <p:childTnLst>
+                        <p:par>
+                          <p:cTn id="20" fill="hold">
+                            <p:stCondLst>
+                              <p:cond delay="0"/>
+                            </p:stCondLst>
+                            <p:childTnLst>
+                              <p:par>
+                                <p:cTn id="21" presetID="22" presetClass="entr" presetSubtype="4" fill="hold" nodeType="clickEffect">
+                                  <p:stCondLst>
+                                    <p:cond delay="0"/>
+                                  </p:stCondLst>
+                                  <p:childTnLst>
+                                    <p:set>
+                                      <p:cBhvr>
+                                        <p:cTn id="22" dur="1" fill="hold">
+                                          <p:stCondLst>
+                                            <p:cond delay="0"/>
+                                          </p:stCondLst>
+                                        </p:cTn>
+                                        <p:tgtEl>
+                                          <p:spTgt spid="27"/>
+                                        </p:tgtEl>
+                                        <p:attrNameLst>
+                                          <p:attrName>style.visibility</p:attrName>
+                                        </p:attrNameLst>
+                                      </p:cBhvr>
+                                      <p:to>
+                                        <p:strVal val="visible"/>
+                                      </p:to>
+                                    </p:set>
+                                    <p:animEffect transition="in" filter="wipe(down)">
+                                      <p:cBhvr>
+                                        <p:cTn id="23" dur="500"/>
+                                        <p:tgtEl>
+                                          <p:spTgt spid="27"/>
+                                        </p:tgtEl>
+                                      </p:cBhvr>
+                                    </p:animEffect>
+                                  </p:childTnLst>
+                                </p:cTn>
+                              </p:par>
+                              <p:par>
+                                <p:cTn id="24" presetID="22" presetClass="entr" presetSubtype="4" fill="hold" grpId="0" nodeType="withEffect">
+                                  <p:stCondLst>
+                                    <p:cond delay="0"/>
+                                  </p:stCondLst>
+                                  <p:childTnLst>
+                                    <p:set>
+                                      <p:cBhvr>
+                                        <p:cTn id="25" dur="1" fill="hold">
+                                          <p:stCondLst>
+                                            <p:cond delay="0"/>
+                                          </p:stCondLst>
+                                        </p:cTn>
+                                        <p:tgtEl>
+                                          <p:spTgt spid="28"/>
+                                        </p:tgtEl>
+                                        <p:attrNameLst>
+                                          <p:attrName>style.visibility</p:attrName>
+                                        </p:attrNameLst>
+                                      </p:cBhvr>
+                                      <p:to>
+                                        <p:strVal val="visible"/>
+                                      </p:to>
+                                    </p:set>
+                                    <p:animEffect transition="in" filter="wipe(down)">
+                                      <p:cBhvr>
+                                        <p:cTn id="26" dur="500"/>
+                                        <p:tgtEl>
+                                          <p:spTgt spid="28"/>
+                                        </p:tgtEl>
+                                      </p:cBhvr>
+                                    </p:animEffect>
+                                  </p:childTnLst>
+                                </p:cTn>
+                              </p:par>
+                            </p:childTnLst>
+                          </p:cTn>
+                        </p:par>
+                      </p:childTnLst>
+                    </p:cTn>
+                  </p:par>
+                  <p:par>
+                    <p:cTn id="27" fill="hold">
+                      <p:stCondLst>
+                        <p:cond delay="indefinite"/>
+                      </p:stCondLst>
+                      <p:childTnLst>
+                        <p:par>
+                          <p:cTn id="28" fill="hold">
+                            <p:stCondLst>
+                              <p:cond delay="0"/>
+                            </p:stCondLst>
+                            <p:childTnLst>
+                              <p:par>
+                                <p:cTn id="29" presetID="22" presetClass="entr" presetSubtype="4" fill="hold" nodeType="clickEffect">
+                                  <p:stCondLst>
+                                    <p:cond delay="0"/>
+                                  </p:stCondLst>
+                                  <p:childTnLst>
+                                    <p:set>
+                                      <p:cBhvr>
+                                        <p:cTn id="30" dur="1" fill="hold">
+                                          <p:stCondLst>
+                                            <p:cond delay="0"/>
+                                          </p:stCondLst>
+                                        </p:cTn>
+                                        <p:tgtEl>
+                                          <p:spTgt spid="29"/>
+                                        </p:tgtEl>
+                                        <p:attrNameLst>
+                                          <p:attrName>style.visibility</p:attrName>
+                                        </p:attrNameLst>
+                                      </p:cBhvr>
+                                      <p:to>
+                                        <p:strVal val="visible"/>
+                                      </p:to>
+                                    </p:set>
+                                    <p:animEffect transition="in" filter="wipe(down)">
+                                      <p:cBhvr>
+                                        <p:cTn id="31" dur="500"/>
+                                        <p:tgtEl>
+                                          <p:spTgt spid="29"/>
+                                        </p:tgtEl>
+                                      </p:cBhvr>
+                                    </p:animEffect>
+                                  </p:childTnLst>
+                                </p:cTn>
+                              </p:par>
+                              <p:par>
+                                <p:cTn id="32" presetID="22" presetClass="entr" presetSubtype="4" fill="hold" grpId="0" nodeType="withEffect">
+                                  <p:stCondLst>
+                                    <p:cond delay="0"/>
+                                  </p:stCondLst>
+                                  <p:childTnLst>
+                                    <p:set>
+                                      <p:cBhvr>
+                                        <p:cTn id="33" dur="1" fill="hold">
+                                          <p:stCondLst>
+                                            <p:cond delay="0"/>
+                                          </p:stCondLst>
+                                        </p:cTn>
+                                        <p:tgtEl>
+                                          <p:spTgt spid="30"/>
+                                        </p:tgtEl>
+                                        <p:attrNameLst>
+                                          <p:attrName>style.visibility</p:attrName>
+                                        </p:attrNameLst>
+                                      </p:cBhvr>
+                                      <p:to>
+                                        <p:strVal val="visible"/>
+                                      </p:to>
+                                    </p:set>
+                                    <p:animEffect transition="in" filter="wipe(down)">
+                                      <p:cBhvr>
+                                        <p:cTn id="34" dur="500"/>
+                                        <p:tgtEl>
+                                          <p:spTgt spid="30"/>
+                                        </p:tgtEl>
+                                      </p:cBhvr>
+                                    </p:animEffect>
+                                  </p:childTnLst>
+                                </p:cTn>
+                              </p:par>
+                            </p:childTnLst>
+                          </p:cTn>
+                        </p:par>
+                      </p:childTnLst>
+                    </p:cTn>
+                  </p:par>
+                  <p:par>
+                    <p:cTn id="35" fill="hold">
+                      <p:stCondLst>
+                        <p:cond delay="indefinite"/>
+                      </p:stCondLst>
+                      <p:childTnLst>
+                        <p:par>
+                          <p:cTn id="36" fill="hold">
+                            <p:stCondLst>
+                              <p:cond delay="0"/>
+                            </p:stCondLst>
+                            <p:childTnLst>
+                              <p:par>
+                                <p:cTn id="37" presetID="22" presetClass="entr" presetSubtype="4" fill="hold" nodeType="clickEffect">
+                                  <p:stCondLst>
+                                    <p:cond delay="0"/>
+                                  </p:stCondLst>
+                                  <p:childTnLst>
+                                    <p:set>
+                                      <p:cBhvr>
+                                        <p:cTn id="38" dur="1" fill="hold">
+                                          <p:stCondLst>
+                                            <p:cond delay="0"/>
+                                          </p:stCondLst>
+                                        </p:cTn>
+                                        <p:tgtEl>
+                                          <p:spTgt spid="31"/>
+                                        </p:tgtEl>
+                                        <p:attrNameLst>
+                                          <p:attrName>style.visibility</p:attrName>
+                                        </p:attrNameLst>
+                                      </p:cBhvr>
+                                      <p:to>
+                                        <p:strVal val="visible"/>
+                                      </p:to>
+                                    </p:set>
+                                    <p:animEffect transition="in" filter="wipe(down)">
+                                      <p:cBhvr>
+                                        <p:cTn id="39" dur="500"/>
+                                        <p:tgtEl>
+                                          <p:spTgt spid="31"/>
+                                        </p:tgtEl>
+                                      </p:cBhvr>
+                                    </p:animEffect>
+                                  </p:childTnLst>
+                                </p:cTn>
+                              </p:par>
+                              <p:par>
+                                <p:cTn id="40" presetID="22" presetClass="entr" presetSubtype="4" fill="hold" grpId="0" nodeType="withEffect">
+                                  <p:stCondLst>
+                                    <p:cond delay="0"/>
+                                  </p:stCondLst>
+                                  <p:childTnLst>
+                                    <p:set>
+                                      <p:cBhvr>
+                                        <p:cTn id="41" dur="1" fill="hold">
+                                          <p:stCondLst>
+                                            <p:cond delay="0"/>
+                                          </p:stCondLst>
+                                        </p:cTn>
+                                        <p:tgtEl>
+                                          <p:spTgt spid="32"/>
+                                        </p:tgtEl>
+                                        <p:attrNameLst>
+                                          <p:attrName>style.visibility</p:attrName>
+                                        </p:attrNameLst>
+                                      </p:cBhvr>
+                                      <p:to>
+                                        <p:strVal val="visible"/>
+                                      </p:to>
+                                    </p:set>
+                                    <p:animEffect transition="in" filter="wipe(down)">
+                                      <p:cBhvr>
+                                        <p:cTn id="42" dur="500"/>
+                                        <p:tgtEl>
+                                          <p:spTgt spid="32"/>
+                                        </p:tgtEl>
+                                      </p:cBhvr>
+                                    </p:animEffect>
+                                  </p:childTnLst>
+                                </p:cTn>
+                              </p:par>
+                            </p:childTnLst>
+                          </p:cTn>
+                        </p:par>
+                      </p:childTnLst>
+                    </p:cTn>
+                  </p:par>
+                </p:childTnLst>
+              </p:cTn>
+              <p:prevCondLst>
+                <p:cond evt="onPrev" delay="0">
+                  <p:tgtEl>
+                    <p:sldTgt/>
+                  </p:tgtEl>
+                </p:cond>
+              </p:prevCondLst>
+              <p:nextCondLst>
+                <p:cond evt="onNext" delay="0">
+                  <p:tgtEl>
+                    <p:sldTgt/>
+                  </p:tgtEl>
+                </p:cond>
+              </p:nextCondLst>
+            </p:seq>
+          </p:childTnLst>
+        </p:cTn>
+      </p:par>
+    </p:tnLst>
+    <p:bldLst>
+      <p:bldP spid="24" grpId="0"/>
+      <p:bldP spid="26" grpId="0"/>
+      <p:bldP spid="28" grpId="0"/>
+      <p:bldP spid="30" grpId="0"/>
+      <p:bldP spid="32" grpId="0"/>
+    </p:bldLst>
+  </p:timing>
 </p:sld>
 </file>
 
@@ -13599,6 +16488,18 @@
   <p:clrMapOvr>
     <a:masterClrMapping/>
   </p:clrMapOvr>
+  <mc:AlternateContent xmlns:mc="http://schemas.openxmlformats.org/markup-compatibility/2006">
+    <mc:Choice xmlns:p159="http://schemas.microsoft.com/office/powerpoint/2015/09/main" Requires="p159">
+      <p:transition xmlns:p14="http://schemas.microsoft.com/office/powerpoint/2010/main" spd="slow" p14:dur="2000">
+        <p159:morph option="byObject"/>
+      </p:transition>
+    </mc:Choice>
+    <mc:Fallback>
+      <p:transition spd="slow">
+        <p:fade/>
+      </p:transition>
+    </mc:Fallback>
+  </mc:AlternateContent>
 </p:sld>
 </file>
 
@@ -14896,6 +17797,841 @@
   <p:clrMapOvr>
     <a:masterClrMapping/>
   </p:clrMapOvr>
+  <p:timing>
+    <p:tnLst>
+      <p:par>
+        <p:cTn id="1" dur="indefinite" restart="never" nodeType="tmRoot">
+          <p:childTnLst>
+            <p:seq concurrent="1" nextAc="seek">
+              <p:cTn id="2" dur="indefinite" nodeType="mainSeq">
+                <p:childTnLst>
+                  <p:par>
+                    <p:cTn id="3" fill="hold">
+                      <p:stCondLst>
+                        <p:cond delay="indefinite"/>
+                      </p:stCondLst>
+                      <p:childTnLst>
+                        <p:par>
+                          <p:cTn id="4" fill="hold">
+                            <p:stCondLst>
+                              <p:cond delay="0"/>
+                            </p:stCondLst>
+                            <p:childTnLst>
+                              <p:par>
+                                <p:cTn id="5" presetID="10" presetClass="entr" presetSubtype="0" fill="hold" grpId="0" nodeType="clickEffect">
+                                  <p:stCondLst>
+                                    <p:cond delay="0"/>
+                                  </p:stCondLst>
+                                  <p:childTnLst>
+                                    <p:set>
+                                      <p:cBhvr>
+                                        <p:cTn id="6" dur="1" fill="hold">
+                                          <p:stCondLst>
+                                            <p:cond delay="0"/>
+                                          </p:stCondLst>
+                                        </p:cTn>
+                                        <p:tgtEl>
+                                          <p:spTgt spid="6"/>
+                                        </p:tgtEl>
+                                        <p:attrNameLst>
+                                          <p:attrName>style.visibility</p:attrName>
+                                        </p:attrNameLst>
+                                      </p:cBhvr>
+                                      <p:to>
+                                        <p:strVal val="visible"/>
+                                      </p:to>
+                                    </p:set>
+                                    <p:animEffect transition="in" filter="fade">
+                                      <p:cBhvr>
+                                        <p:cTn id="7" dur="500"/>
+                                        <p:tgtEl>
+                                          <p:spTgt spid="6"/>
+                                        </p:tgtEl>
+                                      </p:cBhvr>
+                                    </p:animEffect>
+                                  </p:childTnLst>
+                                </p:cTn>
+                              </p:par>
+                            </p:childTnLst>
+                          </p:cTn>
+                        </p:par>
+                      </p:childTnLst>
+                    </p:cTn>
+                  </p:par>
+                  <p:par>
+                    <p:cTn id="8" fill="hold">
+                      <p:stCondLst>
+                        <p:cond delay="indefinite"/>
+                      </p:stCondLst>
+                      <p:childTnLst>
+                        <p:par>
+                          <p:cTn id="9" fill="hold">
+                            <p:stCondLst>
+                              <p:cond delay="0"/>
+                            </p:stCondLst>
+                            <p:childTnLst>
+                              <p:par>
+                                <p:cTn id="10" presetID="22" presetClass="entr" presetSubtype="4" fill="hold" nodeType="clickEffect">
+                                  <p:stCondLst>
+                                    <p:cond delay="0"/>
+                                  </p:stCondLst>
+                                  <p:childTnLst>
+                                    <p:set>
+                                      <p:cBhvr>
+                                        <p:cTn id="11" dur="1" fill="hold">
+                                          <p:stCondLst>
+                                            <p:cond delay="0"/>
+                                          </p:stCondLst>
+                                        </p:cTn>
+                                        <p:tgtEl>
+                                          <p:spTgt spid="3"/>
+                                        </p:tgtEl>
+                                        <p:attrNameLst>
+                                          <p:attrName>style.visibility</p:attrName>
+                                        </p:attrNameLst>
+                                      </p:cBhvr>
+                                      <p:to>
+                                        <p:strVal val="visible"/>
+                                      </p:to>
+                                    </p:set>
+                                    <p:animEffect transition="in" filter="wipe(down)">
+                                      <p:cBhvr>
+                                        <p:cTn id="12" dur="500"/>
+                                        <p:tgtEl>
+                                          <p:spTgt spid="3"/>
+                                        </p:tgtEl>
+                                      </p:cBhvr>
+                                    </p:animEffect>
+                                  </p:childTnLst>
+                                </p:cTn>
+                              </p:par>
+                              <p:par>
+                                <p:cTn id="13" presetID="22" presetClass="entr" presetSubtype="4" fill="hold" grpId="0" nodeType="withEffect">
+                                  <p:stCondLst>
+                                    <p:cond delay="0"/>
+                                  </p:stCondLst>
+                                  <p:childTnLst>
+                                    <p:set>
+                                      <p:cBhvr>
+                                        <p:cTn id="14" dur="1" fill="hold">
+                                          <p:stCondLst>
+                                            <p:cond delay="0"/>
+                                          </p:stCondLst>
+                                        </p:cTn>
+                                        <p:tgtEl>
+                                          <p:spTgt spid="8"/>
+                                        </p:tgtEl>
+                                        <p:attrNameLst>
+                                          <p:attrName>style.visibility</p:attrName>
+                                        </p:attrNameLst>
+                                      </p:cBhvr>
+                                      <p:to>
+                                        <p:strVal val="visible"/>
+                                      </p:to>
+                                    </p:set>
+                                    <p:animEffect transition="in" filter="wipe(down)">
+                                      <p:cBhvr>
+                                        <p:cTn id="15" dur="500"/>
+                                        <p:tgtEl>
+                                          <p:spTgt spid="8"/>
+                                        </p:tgtEl>
+                                      </p:cBhvr>
+                                    </p:animEffect>
+                                  </p:childTnLst>
+                                </p:cTn>
+                              </p:par>
+                              <p:par>
+                                <p:cTn id="16" presetID="22" presetClass="entr" presetSubtype="4" fill="hold" grpId="0" nodeType="withEffect">
+                                  <p:stCondLst>
+                                    <p:cond delay="0"/>
+                                  </p:stCondLst>
+                                  <p:childTnLst>
+                                    <p:set>
+                                      <p:cBhvr>
+                                        <p:cTn id="17" dur="1" fill="hold">
+                                          <p:stCondLst>
+                                            <p:cond delay="0"/>
+                                          </p:stCondLst>
+                                        </p:cTn>
+                                        <p:tgtEl>
+                                          <p:spTgt spid="9"/>
+                                        </p:tgtEl>
+                                        <p:attrNameLst>
+                                          <p:attrName>style.visibility</p:attrName>
+                                        </p:attrNameLst>
+                                      </p:cBhvr>
+                                      <p:to>
+                                        <p:strVal val="visible"/>
+                                      </p:to>
+                                    </p:set>
+                                    <p:animEffect transition="in" filter="wipe(down)">
+                                      <p:cBhvr>
+                                        <p:cTn id="18" dur="500"/>
+                                        <p:tgtEl>
+                                          <p:spTgt spid="9"/>
+                                        </p:tgtEl>
+                                      </p:cBhvr>
+                                    </p:animEffect>
+                                  </p:childTnLst>
+                                </p:cTn>
+                              </p:par>
+                              <p:par>
+                                <p:cTn id="19" presetID="22" presetClass="entr" presetSubtype="4" fill="hold" grpId="0" nodeType="withEffect">
+                                  <p:stCondLst>
+                                    <p:cond delay="0"/>
+                                  </p:stCondLst>
+                                  <p:childTnLst>
+                                    <p:set>
+                                      <p:cBhvr>
+                                        <p:cTn id="20" dur="1" fill="hold">
+                                          <p:stCondLst>
+                                            <p:cond delay="0"/>
+                                          </p:stCondLst>
+                                        </p:cTn>
+                                        <p:tgtEl>
+                                          <p:spTgt spid="10"/>
+                                        </p:tgtEl>
+                                        <p:attrNameLst>
+                                          <p:attrName>style.visibility</p:attrName>
+                                        </p:attrNameLst>
+                                      </p:cBhvr>
+                                      <p:to>
+                                        <p:strVal val="visible"/>
+                                      </p:to>
+                                    </p:set>
+                                    <p:animEffect transition="in" filter="wipe(down)">
+                                      <p:cBhvr>
+                                        <p:cTn id="21" dur="500"/>
+                                        <p:tgtEl>
+                                          <p:spTgt spid="10"/>
+                                        </p:tgtEl>
+                                      </p:cBhvr>
+                                    </p:animEffect>
+                                  </p:childTnLst>
+                                </p:cTn>
+                              </p:par>
+                            </p:childTnLst>
+                          </p:cTn>
+                        </p:par>
+                      </p:childTnLst>
+                    </p:cTn>
+                  </p:par>
+                  <p:par>
+                    <p:cTn id="22" fill="hold">
+                      <p:stCondLst>
+                        <p:cond delay="indefinite"/>
+                      </p:stCondLst>
+                      <p:childTnLst>
+                        <p:par>
+                          <p:cTn id="23" fill="hold">
+                            <p:stCondLst>
+                              <p:cond delay="0"/>
+                            </p:stCondLst>
+                            <p:childTnLst>
+                              <p:par>
+                                <p:cTn id="24" presetID="22" presetClass="entr" presetSubtype="4" fill="hold" nodeType="clickEffect">
+                                  <p:stCondLst>
+                                    <p:cond delay="0"/>
+                                  </p:stCondLst>
+                                  <p:childTnLst>
+                                    <p:set>
+                                      <p:cBhvr>
+                                        <p:cTn id="25" dur="1" fill="hold">
+                                          <p:stCondLst>
+                                            <p:cond delay="0"/>
+                                          </p:stCondLst>
+                                        </p:cTn>
+                                        <p:tgtEl>
+                                          <p:spTgt spid="11"/>
+                                        </p:tgtEl>
+                                        <p:attrNameLst>
+                                          <p:attrName>style.visibility</p:attrName>
+                                        </p:attrNameLst>
+                                      </p:cBhvr>
+                                      <p:to>
+                                        <p:strVal val="visible"/>
+                                      </p:to>
+                                    </p:set>
+                                    <p:animEffect transition="in" filter="wipe(down)">
+                                      <p:cBhvr>
+                                        <p:cTn id="26" dur="500"/>
+                                        <p:tgtEl>
+                                          <p:spTgt spid="11"/>
+                                        </p:tgtEl>
+                                      </p:cBhvr>
+                                    </p:animEffect>
+                                  </p:childTnLst>
+                                </p:cTn>
+                              </p:par>
+                              <p:par>
+                                <p:cTn id="27" presetID="22" presetClass="entr" presetSubtype="4" fill="hold" grpId="0" nodeType="withEffect">
+                                  <p:stCondLst>
+                                    <p:cond delay="0"/>
+                                  </p:stCondLst>
+                                  <p:childTnLst>
+                                    <p:set>
+                                      <p:cBhvr>
+                                        <p:cTn id="28" dur="1" fill="hold">
+                                          <p:stCondLst>
+                                            <p:cond delay="0"/>
+                                          </p:stCondLst>
+                                        </p:cTn>
+                                        <p:tgtEl>
+                                          <p:spTgt spid="14"/>
+                                        </p:tgtEl>
+                                        <p:attrNameLst>
+                                          <p:attrName>style.visibility</p:attrName>
+                                        </p:attrNameLst>
+                                      </p:cBhvr>
+                                      <p:to>
+                                        <p:strVal val="visible"/>
+                                      </p:to>
+                                    </p:set>
+                                    <p:animEffect transition="in" filter="wipe(down)">
+                                      <p:cBhvr>
+                                        <p:cTn id="29" dur="500"/>
+                                        <p:tgtEl>
+                                          <p:spTgt spid="14"/>
+                                        </p:tgtEl>
+                                      </p:cBhvr>
+                                    </p:animEffect>
+                                  </p:childTnLst>
+                                </p:cTn>
+                              </p:par>
+                              <p:par>
+                                <p:cTn id="30" presetID="22" presetClass="entr" presetSubtype="4" fill="hold" grpId="0" nodeType="withEffect">
+                                  <p:stCondLst>
+                                    <p:cond delay="0"/>
+                                  </p:stCondLst>
+                                  <p:childTnLst>
+                                    <p:set>
+                                      <p:cBhvr>
+                                        <p:cTn id="31" dur="1" fill="hold">
+                                          <p:stCondLst>
+                                            <p:cond delay="0"/>
+                                          </p:stCondLst>
+                                        </p:cTn>
+                                        <p:tgtEl>
+                                          <p:spTgt spid="23"/>
+                                        </p:tgtEl>
+                                        <p:attrNameLst>
+                                          <p:attrName>style.visibility</p:attrName>
+                                        </p:attrNameLst>
+                                      </p:cBhvr>
+                                      <p:to>
+                                        <p:strVal val="visible"/>
+                                      </p:to>
+                                    </p:set>
+                                    <p:animEffect transition="in" filter="wipe(down)">
+                                      <p:cBhvr>
+                                        <p:cTn id="32" dur="500"/>
+                                        <p:tgtEl>
+                                          <p:spTgt spid="23"/>
+                                        </p:tgtEl>
+                                      </p:cBhvr>
+                                    </p:animEffect>
+                                  </p:childTnLst>
+                                </p:cTn>
+                              </p:par>
+                              <p:par>
+                                <p:cTn id="33" presetID="22" presetClass="entr" presetSubtype="4" fill="hold" grpId="0" nodeType="withEffect">
+                                  <p:stCondLst>
+                                    <p:cond delay="0"/>
+                                  </p:stCondLst>
+                                  <p:childTnLst>
+                                    <p:set>
+                                      <p:cBhvr>
+                                        <p:cTn id="34" dur="1" fill="hold">
+                                          <p:stCondLst>
+                                            <p:cond delay="0"/>
+                                          </p:stCondLst>
+                                        </p:cTn>
+                                        <p:tgtEl>
+                                          <p:spTgt spid="24"/>
+                                        </p:tgtEl>
+                                        <p:attrNameLst>
+                                          <p:attrName>style.visibility</p:attrName>
+                                        </p:attrNameLst>
+                                      </p:cBhvr>
+                                      <p:to>
+                                        <p:strVal val="visible"/>
+                                      </p:to>
+                                    </p:set>
+                                    <p:animEffect transition="in" filter="wipe(down)">
+                                      <p:cBhvr>
+                                        <p:cTn id="35" dur="500"/>
+                                        <p:tgtEl>
+                                          <p:spTgt spid="24"/>
+                                        </p:tgtEl>
+                                      </p:cBhvr>
+                                    </p:animEffect>
+                                  </p:childTnLst>
+                                </p:cTn>
+                              </p:par>
+                              <p:par>
+                                <p:cTn id="36" presetID="22" presetClass="entr" presetSubtype="4" fill="hold" nodeType="withEffect">
+                                  <p:stCondLst>
+                                    <p:cond delay="0"/>
+                                  </p:stCondLst>
+                                  <p:childTnLst>
+                                    <p:set>
+                                      <p:cBhvr>
+                                        <p:cTn id="37" dur="1" fill="hold">
+                                          <p:stCondLst>
+                                            <p:cond delay="0"/>
+                                          </p:stCondLst>
+                                        </p:cTn>
+                                        <p:tgtEl>
+                                          <p:spTgt spid="31"/>
+                                        </p:tgtEl>
+                                        <p:attrNameLst>
+                                          <p:attrName>style.visibility</p:attrName>
+                                        </p:attrNameLst>
+                                      </p:cBhvr>
+                                      <p:to>
+                                        <p:strVal val="visible"/>
+                                      </p:to>
+                                    </p:set>
+                                    <p:animEffect transition="in" filter="wipe(down)">
+                                      <p:cBhvr>
+                                        <p:cTn id="38" dur="500"/>
+                                        <p:tgtEl>
+                                          <p:spTgt spid="31"/>
+                                        </p:tgtEl>
+                                      </p:cBhvr>
+                                    </p:animEffect>
+                                  </p:childTnLst>
+                                </p:cTn>
+                              </p:par>
+                            </p:childTnLst>
+                          </p:cTn>
+                        </p:par>
+                      </p:childTnLst>
+                    </p:cTn>
+                  </p:par>
+                  <p:par>
+                    <p:cTn id="39" fill="hold">
+                      <p:stCondLst>
+                        <p:cond delay="indefinite"/>
+                      </p:stCondLst>
+                      <p:childTnLst>
+                        <p:par>
+                          <p:cTn id="40" fill="hold">
+                            <p:stCondLst>
+                              <p:cond delay="0"/>
+                            </p:stCondLst>
+                            <p:childTnLst>
+                              <p:par>
+                                <p:cTn id="41" presetID="22" presetClass="entr" presetSubtype="4" fill="hold" nodeType="clickEffect">
+                                  <p:stCondLst>
+                                    <p:cond delay="0"/>
+                                  </p:stCondLst>
+                                  <p:childTnLst>
+                                    <p:set>
+                                      <p:cBhvr>
+                                        <p:cTn id="42" dur="1" fill="hold">
+                                          <p:stCondLst>
+                                            <p:cond delay="0"/>
+                                          </p:stCondLst>
+                                        </p:cTn>
+                                        <p:tgtEl>
+                                          <p:spTgt spid="15"/>
+                                        </p:tgtEl>
+                                        <p:attrNameLst>
+                                          <p:attrName>style.visibility</p:attrName>
+                                        </p:attrNameLst>
+                                      </p:cBhvr>
+                                      <p:to>
+                                        <p:strVal val="visible"/>
+                                      </p:to>
+                                    </p:set>
+                                    <p:animEffect transition="in" filter="wipe(down)">
+                                      <p:cBhvr>
+                                        <p:cTn id="43" dur="500"/>
+                                        <p:tgtEl>
+                                          <p:spTgt spid="15"/>
+                                        </p:tgtEl>
+                                      </p:cBhvr>
+                                    </p:animEffect>
+                                  </p:childTnLst>
+                                </p:cTn>
+                              </p:par>
+                              <p:par>
+                                <p:cTn id="44" presetID="22" presetClass="entr" presetSubtype="4" fill="hold" grpId="0" nodeType="withEffect">
+                                  <p:stCondLst>
+                                    <p:cond delay="0"/>
+                                  </p:stCondLst>
+                                  <p:childTnLst>
+                                    <p:set>
+                                      <p:cBhvr>
+                                        <p:cTn id="45" dur="1" fill="hold">
+                                          <p:stCondLst>
+                                            <p:cond delay="0"/>
+                                          </p:stCondLst>
+                                        </p:cTn>
+                                        <p:tgtEl>
+                                          <p:spTgt spid="25"/>
+                                        </p:tgtEl>
+                                        <p:attrNameLst>
+                                          <p:attrName>style.visibility</p:attrName>
+                                        </p:attrNameLst>
+                                      </p:cBhvr>
+                                      <p:to>
+                                        <p:strVal val="visible"/>
+                                      </p:to>
+                                    </p:set>
+                                    <p:animEffect transition="in" filter="wipe(down)">
+                                      <p:cBhvr>
+                                        <p:cTn id="46" dur="500"/>
+                                        <p:tgtEl>
+                                          <p:spTgt spid="25"/>
+                                        </p:tgtEl>
+                                      </p:cBhvr>
+                                    </p:animEffect>
+                                  </p:childTnLst>
+                                </p:cTn>
+                              </p:par>
+                              <p:par>
+                                <p:cTn id="47" presetID="22" presetClass="entr" presetSubtype="4" fill="hold" grpId="0" nodeType="withEffect">
+                                  <p:stCondLst>
+                                    <p:cond delay="0"/>
+                                  </p:stCondLst>
+                                  <p:childTnLst>
+                                    <p:set>
+                                      <p:cBhvr>
+                                        <p:cTn id="48" dur="1" fill="hold">
+                                          <p:stCondLst>
+                                            <p:cond delay="0"/>
+                                          </p:stCondLst>
+                                        </p:cTn>
+                                        <p:tgtEl>
+                                          <p:spTgt spid="26"/>
+                                        </p:tgtEl>
+                                        <p:attrNameLst>
+                                          <p:attrName>style.visibility</p:attrName>
+                                        </p:attrNameLst>
+                                      </p:cBhvr>
+                                      <p:to>
+                                        <p:strVal val="visible"/>
+                                      </p:to>
+                                    </p:set>
+                                    <p:animEffect transition="in" filter="wipe(down)">
+                                      <p:cBhvr>
+                                        <p:cTn id="49" dur="500"/>
+                                        <p:tgtEl>
+                                          <p:spTgt spid="26"/>
+                                        </p:tgtEl>
+                                      </p:cBhvr>
+                                    </p:animEffect>
+                                  </p:childTnLst>
+                                </p:cTn>
+                              </p:par>
+                              <p:par>
+                                <p:cTn id="50" presetID="22" presetClass="entr" presetSubtype="4" fill="hold" nodeType="withEffect">
+                                  <p:stCondLst>
+                                    <p:cond delay="0"/>
+                                  </p:stCondLst>
+                                  <p:childTnLst>
+                                    <p:set>
+                                      <p:cBhvr>
+                                        <p:cTn id="51" dur="1" fill="hold">
+                                          <p:stCondLst>
+                                            <p:cond delay="0"/>
+                                          </p:stCondLst>
+                                        </p:cTn>
+                                        <p:tgtEl>
+                                          <p:spTgt spid="29"/>
+                                        </p:tgtEl>
+                                        <p:attrNameLst>
+                                          <p:attrName>style.visibility</p:attrName>
+                                        </p:attrNameLst>
+                                      </p:cBhvr>
+                                      <p:to>
+                                        <p:strVal val="visible"/>
+                                      </p:to>
+                                    </p:set>
+                                    <p:animEffect transition="in" filter="wipe(down)">
+                                      <p:cBhvr>
+                                        <p:cTn id="52" dur="500"/>
+                                        <p:tgtEl>
+                                          <p:spTgt spid="29"/>
+                                        </p:tgtEl>
+                                      </p:cBhvr>
+                                    </p:animEffect>
+                                  </p:childTnLst>
+                                </p:cTn>
+                              </p:par>
+                              <p:par>
+                                <p:cTn id="53" presetID="22" presetClass="entr" presetSubtype="4" fill="hold" grpId="0" nodeType="withEffect">
+                                  <p:stCondLst>
+                                    <p:cond delay="0"/>
+                                  </p:stCondLst>
+                                  <p:childTnLst>
+                                    <p:set>
+                                      <p:cBhvr>
+                                        <p:cTn id="54" dur="1" fill="hold">
+                                          <p:stCondLst>
+                                            <p:cond delay="0"/>
+                                          </p:stCondLst>
+                                        </p:cTn>
+                                        <p:tgtEl>
+                                          <p:spTgt spid="18"/>
+                                        </p:tgtEl>
+                                        <p:attrNameLst>
+                                          <p:attrName>style.visibility</p:attrName>
+                                        </p:attrNameLst>
+                                      </p:cBhvr>
+                                      <p:to>
+                                        <p:strVal val="visible"/>
+                                      </p:to>
+                                    </p:set>
+                                    <p:animEffect transition="in" filter="wipe(down)">
+                                      <p:cBhvr>
+                                        <p:cTn id="55" dur="500"/>
+                                        <p:tgtEl>
+                                          <p:spTgt spid="18"/>
+                                        </p:tgtEl>
+                                      </p:cBhvr>
+                                    </p:animEffect>
+                                  </p:childTnLst>
+                                </p:cTn>
+                              </p:par>
+                            </p:childTnLst>
+                          </p:cTn>
+                        </p:par>
+                      </p:childTnLst>
+                    </p:cTn>
+                  </p:par>
+                  <p:par>
+                    <p:cTn id="56" fill="hold">
+                      <p:stCondLst>
+                        <p:cond delay="indefinite"/>
+                      </p:stCondLst>
+                      <p:childTnLst>
+                        <p:par>
+                          <p:cTn id="57" fill="hold">
+                            <p:stCondLst>
+                              <p:cond delay="0"/>
+                            </p:stCondLst>
+                            <p:childTnLst>
+                              <p:par>
+                                <p:cTn id="58" presetID="22" presetClass="entr" presetSubtype="4" fill="hold" grpId="0" nodeType="clickEffect">
+                                  <p:stCondLst>
+                                    <p:cond delay="0"/>
+                                  </p:stCondLst>
+                                  <p:childTnLst>
+                                    <p:set>
+                                      <p:cBhvr>
+                                        <p:cTn id="59" dur="1" fill="hold">
+                                          <p:stCondLst>
+                                            <p:cond delay="0"/>
+                                          </p:stCondLst>
+                                        </p:cTn>
+                                        <p:tgtEl>
+                                          <p:spTgt spid="27"/>
+                                        </p:tgtEl>
+                                        <p:attrNameLst>
+                                          <p:attrName>style.visibility</p:attrName>
+                                        </p:attrNameLst>
+                                      </p:cBhvr>
+                                      <p:to>
+                                        <p:strVal val="visible"/>
+                                      </p:to>
+                                    </p:set>
+                                    <p:animEffect transition="in" filter="wipe(down)">
+                                      <p:cBhvr>
+                                        <p:cTn id="60" dur="500"/>
+                                        <p:tgtEl>
+                                          <p:spTgt spid="27"/>
+                                        </p:tgtEl>
+                                      </p:cBhvr>
+                                    </p:animEffect>
+                                  </p:childTnLst>
+                                </p:cTn>
+                              </p:par>
+                              <p:par>
+                                <p:cTn id="61" presetID="22" presetClass="entr" presetSubtype="4" fill="hold" nodeType="withEffect">
+                                  <p:stCondLst>
+                                    <p:cond delay="0"/>
+                                  </p:stCondLst>
+                                  <p:childTnLst>
+                                    <p:set>
+                                      <p:cBhvr>
+                                        <p:cTn id="62" dur="1" fill="hold">
+                                          <p:stCondLst>
+                                            <p:cond delay="0"/>
+                                          </p:stCondLst>
+                                        </p:cTn>
+                                        <p:tgtEl>
+                                          <p:spTgt spid="19"/>
+                                        </p:tgtEl>
+                                        <p:attrNameLst>
+                                          <p:attrName>style.visibility</p:attrName>
+                                        </p:attrNameLst>
+                                      </p:cBhvr>
+                                      <p:to>
+                                        <p:strVal val="visible"/>
+                                      </p:to>
+                                    </p:set>
+                                    <p:animEffect transition="in" filter="wipe(down)">
+                                      <p:cBhvr>
+                                        <p:cTn id="63" dur="500"/>
+                                        <p:tgtEl>
+                                          <p:spTgt spid="19"/>
+                                        </p:tgtEl>
+                                      </p:cBhvr>
+                                    </p:animEffect>
+                                  </p:childTnLst>
+                                </p:cTn>
+                              </p:par>
+                              <p:par>
+                                <p:cTn id="64" presetID="22" presetClass="entr" presetSubtype="4" fill="hold" grpId="0" nodeType="withEffect">
+                                  <p:stCondLst>
+                                    <p:cond delay="0"/>
+                                  </p:stCondLst>
+                                  <p:childTnLst>
+                                    <p:set>
+                                      <p:cBhvr>
+                                        <p:cTn id="65" dur="1" fill="hold">
+                                          <p:stCondLst>
+                                            <p:cond delay="0"/>
+                                          </p:stCondLst>
+                                        </p:cTn>
+                                        <p:tgtEl>
+                                          <p:spTgt spid="22"/>
+                                        </p:tgtEl>
+                                        <p:attrNameLst>
+                                          <p:attrName>style.visibility</p:attrName>
+                                        </p:attrNameLst>
+                                      </p:cBhvr>
+                                      <p:to>
+                                        <p:strVal val="visible"/>
+                                      </p:to>
+                                    </p:set>
+                                    <p:animEffect transition="in" filter="wipe(down)">
+                                      <p:cBhvr>
+                                        <p:cTn id="66" dur="500"/>
+                                        <p:tgtEl>
+                                          <p:spTgt spid="22"/>
+                                        </p:tgtEl>
+                                      </p:cBhvr>
+                                    </p:animEffect>
+                                  </p:childTnLst>
+                                </p:cTn>
+                              </p:par>
+                              <p:par>
+                                <p:cTn id="67" presetID="22" presetClass="entr" presetSubtype="4" fill="hold" grpId="0" nodeType="withEffect">
+                                  <p:stCondLst>
+                                    <p:cond delay="0"/>
+                                  </p:stCondLst>
+                                  <p:childTnLst>
+                                    <p:set>
+                                      <p:cBhvr>
+                                        <p:cTn id="68" dur="1" fill="hold">
+                                          <p:stCondLst>
+                                            <p:cond delay="0"/>
+                                          </p:stCondLst>
+                                        </p:cTn>
+                                        <p:tgtEl>
+                                          <p:spTgt spid="28"/>
+                                        </p:tgtEl>
+                                        <p:attrNameLst>
+                                          <p:attrName>style.visibility</p:attrName>
+                                        </p:attrNameLst>
+                                      </p:cBhvr>
+                                      <p:to>
+                                        <p:strVal val="visible"/>
+                                      </p:to>
+                                    </p:set>
+                                    <p:animEffect transition="in" filter="wipe(down)">
+                                      <p:cBhvr>
+                                        <p:cTn id="69" dur="500"/>
+                                        <p:tgtEl>
+                                          <p:spTgt spid="28"/>
+                                        </p:tgtEl>
+                                      </p:cBhvr>
+                                    </p:animEffect>
+                                  </p:childTnLst>
+                                </p:cTn>
+                              </p:par>
+                              <p:par>
+                                <p:cTn id="70" presetID="22" presetClass="entr" presetSubtype="4" fill="hold" nodeType="withEffect">
+                                  <p:stCondLst>
+                                    <p:cond delay="0"/>
+                                  </p:stCondLst>
+                                  <p:childTnLst>
+                                    <p:set>
+                                      <p:cBhvr>
+                                        <p:cTn id="71" dur="1" fill="hold">
+                                          <p:stCondLst>
+                                            <p:cond delay="0"/>
+                                          </p:stCondLst>
+                                        </p:cTn>
+                                        <p:tgtEl>
+                                          <p:spTgt spid="30"/>
+                                        </p:tgtEl>
+                                        <p:attrNameLst>
+                                          <p:attrName>style.visibility</p:attrName>
+                                        </p:attrNameLst>
+                                      </p:cBhvr>
+                                      <p:to>
+                                        <p:strVal val="visible"/>
+                                      </p:to>
+                                    </p:set>
+                                    <p:animEffect transition="in" filter="wipe(down)">
+                                      <p:cBhvr>
+                                        <p:cTn id="72" dur="500"/>
+                                        <p:tgtEl>
+                                          <p:spTgt spid="30"/>
+                                        </p:tgtEl>
+                                      </p:cBhvr>
+                                    </p:animEffect>
+                                  </p:childTnLst>
+                                </p:cTn>
+                              </p:par>
+                            </p:childTnLst>
+                          </p:cTn>
+                        </p:par>
+                      </p:childTnLst>
+                    </p:cTn>
+                  </p:par>
+                </p:childTnLst>
+              </p:cTn>
+              <p:prevCondLst>
+                <p:cond evt="onPrev" delay="0">
+                  <p:tgtEl>
+                    <p:sldTgt/>
+                  </p:tgtEl>
+                </p:cond>
+              </p:prevCondLst>
+              <p:nextCondLst>
+                <p:cond evt="onNext" delay="0">
+                  <p:tgtEl>
+                    <p:sldTgt/>
+                  </p:tgtEl>
+                </p:cond>
+              </p:nextCondLst>
+            </p:seq>
+          </p:childTnLst>
+        </p:cTn>
+      </p:par>
+    </p:tnLst>
+    <p:bldLst>
+      <p:bldP spid="6" grpId="0"/>
+      <p:bldP spid="8" grpId="0"/>
+      <p:bldP spid="9" grpId="0"/>
+      <p:bldP spid="10" grpId="0"/>
+      <p:bldP spid="14" grpId="0"/>
+      <p:bldP spid="18" grpId="0"/>
+      <p:bldP spid="22" grpId="0"/>
+      <p:bldP spid="23" grpId="0"/>
+      <p:bldP spid="24" grpId="0"/>
+      <p:bldP spid="25" grpId="0"/>
+      <p:bldP spid="26" grpId="0"/>
+      <p:bldP spid="27" grpId="0"/>
+      <p:bldP spid="28" grpId="0"/>
+    </p:bldLst>
+  </p:timing>
 </p:sld>
 </file>
 
@@ -14976,6 +18712,13 @@
               <a:miter/>
             </a:ln>
           </p:spPr>
+          <p:txBody>
+            <a:bodyPr/>
+            <a:lstStyle/>
+            <a:p>
+              <a:endParaRPr lang="en-US"/>
+            </a:p>
+          </p:txBody>
         </p:sp>
       </p:grpSp>
       <p:grpSp>
@@ -14987,7 +18730,7 @@
         <p:grpSpPr>
           <a:xfrm>
             <a:off x="6968643" y="467355"/>
-            <a:ext cx="2262593" cy="961402"/>
+            <a:ext cx="2296528" cy="887780"/>
             <a:chOff x="0" y="0"/>
             <a:chExt cx="594056" cy="252421"/>
           </a:xfrm>
@@ -15120,7 +18863,7 @@
         <p:grpSpPr>
           <a:xfrm>
             <a:off x="9842013" y="467355"/>
-            <a:ext cx="2262593" cy="961402"/>
+            <a:ext cx="2306052" cy="887780"/>
             <a:chOff x="0" y="0"/>
             <a:chExt cx="594056" cy="252421"/>
           </a:xfrm>
@@ -15253,7 +18996,7 @@
         <p:grpSpPr>
           <a:xfrm>
             <a:off x="12715382" y="458015"/>
-            <a:ext cx="2262593" cy="961402"/>
+            <a:ext cx="2306052" cy="897120"/>
             <a:chOff x="0" y="0"/>
             <a:chExt cx="594056" cy="252421"/>
           </a:xfrm>
@@ -15386,7 +19129,7 @@
         <p:grpSpPr>
           <a:xfrm>
             <a:off x="15579226" y="467355"/>
-            <a:ext cx="2262593" cy="961402"/>
+            <a:ext cx="2262593" cy="887780"/>
             <a:chOff x="0" y="0"/>
             <a:chExt cx="594056" cy="252421"/>
           </a:xfrm>
@@ -16049,15 +19792,15 @@
         </p:nvSpPr>
         <p:spPr>
           <a:xfrm>
-            <a:off x="5705524" y="1769473"/>
-            <a:ext cx="6876951" cy="1144274"/>
+            <a:off x="5105400" y="1769473"/>
+            <a:ext cx="8229600" cy="1144274"/>
           </a:xfrm>
           <a:prstGeom prst="rect">
             <a:avLst/>
           </a:prstGeom>
         </p:spPr>
         <p:txBody>
-          <a:bodyPr lIns="0" tIns="0" rIns="0" bIns="0" rtlCol="0" anchor="t">
+          <a:bodyPr wrap="square" lIns="0" tIns="0" rIns="0" bIns="0" rtlCol="0" anchor="t">
             <a:spAutoFit/>
           </a:bodyPr>
           <a:lstStyle/>
@@ -16310,6 +20053,670 @@
   <p:clrMapOvr>
     <a:masterClrMapping/>
   </p:clrMapOvr>
+  <p:timing>
+    <p:tnLst>
+      <p:par>
+        <p:cTn id="1" dur="indefinite" restart="never" nodeType="tmRoot">
+          <p:childTnLst>
+            <p:seq concurrent="1" nextAc="seek">
+              <p:cTn id="2" dur="indefinite" nodeType="mainSeq">
+                <p:childTnLst>
+                  <p:par>
+                    <p:cTn id="3" fill="hold">
+                      <p:stCondLst>
+                        <p:cond delay="indefinite"/>
+                      </p:stCondLst>
+                      <p:childTnLst>
+                        <p:par>
+                          <p:cTn id="4" fill="hold">
+                            <p:stCondLst>
+                              <p:cond delay="0"/>
+                            </p:stCondLst>
+                            <p:childTnLst>
+                              <p:par>
+                                <p:cTn id="5" presetID="53" presetClass="entr" presetSubtype="16" fill="hold" nodeType="clickEffect">
+                                  <p:stCondLst>
+                                    <p:cond delay="0"/>
+                                  </p:stCondLst>
+                                  <p:childTnLst>
+                                    <p:set>
+                                      <p:cBhvr>
+                                        <p:cTn id="6" dur="1" fill="hold">
+                                          <p:stCondLst>
+                                            <p:cond delay="0"/>
+                                          </p:stCondLst>
+                                        </p:cTn>
+                                        <p:tgtEl>
+                                          <p:spTgt spid="17"/>
+                                        </p:tgtEl>
+                                        <p:attrNameLst>
+                                          <p:attrName>style.visibility</p:attrName>
+                                        </p:attrNameLst>
+                                      </p:cBhvr>
+                                      <p:to>
+                                        <p:strVal val="visible"/>
+                                      </p:to>
+                                    </p:set>
+                                    <p:anim calcmode="lin" valueType="num">
+                                      <p:cBhvr>
+                                        <p:cTn id="7" dur="500" fill="hold"/>
+                                        <p:tgtEl>
+                                          <p:spTgt spid="17"/>
+                                        </p:tgtEl>
+                                        <p:attrNameLst>
+                                          <p:attrName>ppt_w</p:attrName>
+                                        </p:attrNameLst>
+                                      </p:cBhvr>
+                                      <p:tavLst>
+                                        <p:tav tm="0">
+                                          <p:val>
+                                            <p:fltVal val="0"/>
+                                          </p:val>
+                                        </p:tav>
+                                        <p:tav tm="100000">
+                                          <p:val>
+                                            <p:strVal val="#ppt_w"/>
+                                          </p:val>
+                                        </p:tav>
+                                      </p:tavLst>
+                                    </p:anim>
+                                    <p:anim calcmode="lin" valueType="num">
+                                      <p:cBhvr>
+                                        <p:cTn id="8" dur="500" fill="hold"/>
+                                        <p:tgtEl>
+                                          <p:spTgt spid="17"/>
+                                        </p:tgtEl>
+                                        <p:attrNameLst>
+                                          <p:attrName>ppt_h</p:attrName>
+                                        </p:attrNameLst>
+                                      </p:cBhvr>
+                                      <p:tavLst>
+                                        <p:tav tm="0">
+                                          <p:val>
+                                            <p:fltVal val="0"/>
+                                          </p:val>
+                                        </p:tav>
+                                        <p:tav tm="100000">
+                                          <p:val>
+                                            <p:strVal val="#ppt_h"/>
+                                          </p:val>
+                                        </p:tav>
+                                      </p:tavLst>
+                                    </p:anim>
+                                    <p:animEffect transition="in" filter="fade">
+                                      <p:cBhvr>
+                                        <p:cTn id="9" dur="500"/>
+                                        <p:tgtEl>
+                                          <p:spTgt spid="17"/>
+                                        </p:tgtEl>
+                                      </p:cBhvr>
+                                    </p:animEffect>
+                                  </p:childTnLst>
+                                </p:cTn>
+                              </p:par>
+                              <p:par>
+                                <p:cTn id="10" presetID="53" presetClass="entr" presetSubtype="16" fill="hold" grpId="0" nodeType="withEffect">
+                                  <p:stCondLst>
+                                    <p:cond delay="0"/>
+                                  </p:stCondLst>
+                                  <p:childTnLst>
+                                    <p:set>
+                                      <p:cBhvr>
+                                        <p:cTn id="11" dur="1" fill="hold">
+                                          <p:stCondLst>
+                                            <p:cond delay="0"/>
+                                          </p:stCondLst>
+                                        </p:cTn>
+                                        <p:tgtEl>
+                                          <p:spTgt spid="31"/>
+                                        </p:tgtEl>
+                                        <p:attrNameLst>
+                                          <p:attrName>style.visibility</p:attrName>
+                                        </p:attrNameLst>
+                                      </p:cBhvr>
+                                      <p:to>
+                                        <p:strVal val="visible"/>
+                                      </p:to>
+                                    </p:set>
+                                    <p:anim calcmode="lin" valueType="num">
+                                      <p:cBhvr>
+                                        <p:cTn id="12" dur="500" fill="hold"/>
+                                        <p:tgtEl>
+                                          <p:spTgt spid="31"/>
+                                        </p:tgtEl>
+                                        <p:attrNameLst>
+                                          <p:attrName>ppt_w</p:attrName>
+                                        </p:attrNameLst>
+                                      </p:cBhvr>
+                                      <p:tavLst>
+                                        <p:tav tm="0">
+                                          <p:val>
+                                            <p:fltVal val="0"/>
+                                          </p:val>
+                                        </p:tav>
+                                        <p:tav tm="100000">
+                                          <p:val>
+                                            <p:strVal val="#ppt_w"/>
+                                          </p:val>
+                                        </p:tav>
+                                      </p:tavLst>
+                                    </p:anim>
+                                    <p:anim calcmode="lin" valueType="num">
+                                      <p:cBhvr>
+                                        <p:cTn id="13" dur="500" fill="hold"/>
+                                        <p:tgtEl>
+                                          <p:spTgt spid="31"/>
+                                        </p:tgtEl>
+                                        <p:attrNameLst>
+                                          <p:attrName>ppt_h</p:attrName>
+                                        </p:attrNameLst>
+                                      </p:cBhvr>
+                                      <p:tavLst>
+                                        <p:tav tm="0">
+                                          <p:val>
+                                            <p:fltVal val="0"/>
+                                          </p:val>
+                                        </p:tav>
+                                        <p:tav tm="100000">
+                                          <p:val>
+                                            <p:strVal val="#ppt_h"/>
+                                          </p:val>
+                                        </p:tav>
+                                      </p:tavLst>
+                                    </p:anim>
+                                    <p:animEffect transition="in" filter="fade">
+                                      <p:cBhvr>
+                                        <p:cTn id="14" dur="500"/>
+                                        <p:tgtEl>
+                                          <p:spTgt spid="31"/>
+                                        </p:tgtEl>
+                                      </p:cBhvr>
+                                    </p:animEffect>
+                                  </p:childTnLst>
+                                </p:cTn>
+                              </p:par>
+                            </p:childTnLst>
+                          </p:cTn>
+                        </p:par>
+                      </p:childTnLst>
+                    </p:cTn>
+                  </p:par>
+                  <p:par>
+                    <p:cTn id="15" fill="hold">
+                      <p:stCondLst>
+                        <p:cond delay="indefinite"/>
+                      </p:stCondLst>
+                      <p:childTnLst>
+                        <p:par>
+                          <p:cTn id="16" fill="hold">
+                            <p:stCondLst>
+                              <p:cond delay="0"/>
+                            </p:stCondLst>
+                            <p:childTnLst>
+                              <p:par>
+                                <p:cTn id="17" presetID="53" presetClass="entr" presetSubtype="16" fill="hold" nodeType="clickEffect">
+                                  <p:stCondLst>
+                                    <p:cond delay="0"/>
+                                  </p:stCondLst>
+                                  <p:childTnLst>
+                                    <p:set>
+                                      <p:cBhvr>
+                                        <p:cTn id="18" dur="1" fill="hold">
+                                          <p:stCondLst>
+                                            <p:cond delay="0"/>
+                                          </p:stCondLst>
+                                        </p:cTn>
+                                        <p:tgtEl>
+                                          <p:spTgt spid="19"/>
+                                        </p:tgtEl>
+                                        <p:attrNameLst>
+                                          <p:attrName>style.visibility</p:attrName>
+                                        </p:attrNameLst>
+                                      </p:cBhvr>
+                                      <p:to>
+                                        <p:strVal val="visible"/>
+                                      </p:to>
+                                    </p:set>
+                                    <p:anim calcmode="lin" valueType="num">
+                                      <p:cBhvr>
+                                        <p:cTn id="19" dur="500" fill="hold"/>
+                                        <p:tgtEl>
+                                          <p:spTgt spid="19"/>
+                                        </p:tgtEl>
+                                        <p:attrNameLst>
+                                          <p:attrName>ppt_w</p:attrName>
+                                        </p:attrNameLst>
+                                      </p:cBhvr>
+                                      <p:tavLst>
+                                        <p:tav tm="0">
+                                          <p:val>
+                                            <p:fltVal val="0"/>
+                                          </p:val>
+                                        </p:tav>
+                                        <p:tav tm="100000">
+                                          <p:val>
+                                            <p:strVal val="#ppt_w"/>
+                                          </p:val>
+                                        </p:tav>
+                                      </p:tavLst>
+                                    </p:anim>
+                                    <p:anim calcmode="lin" valueType="num">
+                                      <p:cBhvr>
+                                        <p:cTn id="20" dur="500" fill="hold"/>
+                                        <p:tgtEl>
+                                          <p:spTgt spid="19"/>
+                                        </p:tgtEl>
+                                        <p:attrNameLst>
+                                          <p:attrName>ppt_h</p:attrName>
+                                        </p:attrNameLst>
+                                      </p:cBhvr>
+                                      <p:tavLst>
+                                        <p:tav tm="0">
+                                          <p:val>
+                                            <p:fltVal val="0"/>
+                                          </p:val>
+                                        </p:tav>
+                                        <p:tav tm="100000">
+                                          <p:val>
+                                            <p:strVal val="#ppt_h"/>
+                                          </p:val>
+                                        </p:tav>
+                                      </p:tavLst>
+                                    </p:anim>
+                                    <p:animEffect transition="in" filter="fade">
+                                      <p:cBhvr>
+                                        <p:cTn id="21" dur="500"/>
+                                        <p:tgtEl>
+                                          <p:spTgt spid="19"/>
+                                        </p:tgtEl>
+                                      </p:cBhvr>
+                                    </p:animEffect>
+                                  </p:childTnLst>
+                                </p:cTn>
+                              </p:par>
+                              <p:par>
+                                <p:cTn id="22" presetID="53" presetClass="entr" presetSubtype="16" fill="hold" grpId="0" nodeType="withEffect">
+                                  <p:stCondLst>
+                                    <p:cond delay="0"/>
+                                  </p:stCondLst>
+                                  <p:childTnLst>
+                                    <p:set>
+                                      <p:cBhvr>
+                                        <p:cTn id="23" dur="1" fill="hold">
+                                          <p:stCondLst>
+                                            <p:cond delay="0"/>
+                                          </p:stCondLst>
+                                        </p:cTn>
+                                        <p:tgtEl>
+                                          <p:spTgt spid="32"/>
+                                        </p:tgtEl>
+                                        <p:attrNameLst>
+                                          <p:attrName>style.visibility</p:attrName>
+                                        </p:attrNameLst>
+                                      </p:cBhvr>
+                                      <p:to>
+                                        <p:strVal val="visible"/>
+                                      </p:to>
+                                    </p:set>
+                                    <p:anim calcmode="lin" valueType="num">
+                                      <p:cBhvr>
+                                        <p:cTn id="24" dur="500" fill="hold"/>
+                                        <p:tgtEl>
+                                          <p:spTgt spid="32"/>
+                                        </p:tgtEl>
+                                        <p:attrNameLst>
+                                          <p:attrName>ppt_w</p:attrName>
+                                        </p:attrNameLst>
+                                      </p:cBhvr>
+                                      <p:tavLst>
+                                        <p:tav tm="0">
+                                          <p:val>
+                                            <p:fltVal val="0"/>
+                                          </p:val>
+                                        </p:tav>
+                                        <p:tav tm="100000">
+                                          <p:val>
+                                            <p:strVal val="#ppt_w"/>
+                                          </p:val>
+                                        </p:tav>
+                                      </p:tavLst>
+                                    </p:anim>
+                                    <p:anim calcmode="lin" valueType="num">
+                                      <p:cBhvr>
+                                        <p:cTn id="25" dur="500" fill="hold"/>
+                                        <p:tgtEl>
+                                          <p:spTgt spid="32"/>
+                                        </p:tgtEl>
+                                        <p:attrNameLst>
+                                          <p:attrName>ppt_h</p:attrName>
+                                        </p:attrNameLst>
+                                      </p:cBhvr>
+                                      <p:tavLst>
+                                        <p:tav tm="0">
+                                          <p:val>
+                                            <p:fltVal val="0"/>
+                                          </p:val>
+                                        </p:tav>
+                                        <p:tav tm="100000">
+                                          <p:val>
+                                            <p:strVal val="#ppt_h"/>
+                                          </p:val>
+                                        </p:tav>
+                                      </p:tavLst>
+                                    </p:anim>
+                                    <p:animEffect transition="in" filter="fade">
+                                      <p:cBhvr>
+                                        <p:cTn id="26" dur="500"/>
+                                        <p:tgtEl>
+                                          <p:spTgt spid="32"/>
+                                        </p:tgtEl>
+                                      </p:cBhvr>
+                                    </p:animEffect>
+                                  </p:childTnLst>
+                                </p:cTn>
+                              </p:par>
+                            </p:childTnLst>
+                          </p:cTn>
+                        </p:par>
+                      </p:childTnLst>
+                    </p:cTn>
+                  </p:par>
+                  <p:par>
+                    <p:cTn id="27" fill="hold">
+                      <p:stCondLst>
+                        <p:cond delay="indefinite"/>
+                      </p:stCondLst>
+                      <p:childTnLst>
+                        <p:par>
+                          <p:cTn id="28" fill="hold">
+                            <p:stCondLst>
+                              <p:cond delay="0"/>
+                            </p:stCondLst>
+                            <p:childTnLst>
+                              <p:par>
+                                <p:cTn id="29" presetID="53" presetClass="entr" presetSubtype="16" fill="hold" nodeType="clickEffect">
+                                  <p:stCondLst>
+                                    <p:cond delay="0"/>
+                                  </p:stCondLst>
+                                  <p:childTnLst>
+                                    <p:set>
+                                      <p:cBhvr>
+                                        <p:cTn id="30" dur="1" fill="hold">
+                                          <p:stCondLst>
+                                            <p:cond delay="0"/>
+                                          </p:stCondLst>
+                                        </p:cTn>
+                                        <p:tgtEl>
+                                          <p:spTgt spid="21"/>
+                                        </p:tgtEl>
+                                        <p:attrNameLst>
+                                          <p:attrName>style.visibility</p:attrName>
+                                        </p:attrNameLst>
+                                      </p:cBhvr>
+                                      <p:to>
+                                        <p:strVal val="visible"/>
+                                      </p:to>
+                                    </p:set>
+                                    <p:anim calcmode="lin" valueType="num">
+                                      <p:cBhvr>
+                                        <p:cTn id="31" dur="500" fill="hold"/>
+                                        <p:tgtEl>
+                                          <p:spTgt spid="21"/>
+                                        </p:tgtEl>
+                                        <p:attrNameLst>
+                                          <p:attrName>ppt_w</p:attrName>
+                                        </p:attrNameLst>
+                                      </p:cBhvr>
+                                      <p:tavLst>
+                                        <p:tav tm="0">
+                                          <p:val>
+                                            <p:fltVal val="0"/>
+                                          </p:val>
+                                        </p:tav>
+                                        <p:tav tm="100000">
+                                          <p:val>
+                                            <p:strVal val="#ppt_w"/>
+                                          </p:val>
+                                        </p:tav>
+                                      </p:tavLst>
+                                    </p:anim>
+                                    <p:anim calcmode="lin" valueType="num">
+                                      <p:cBhvr>
+                                        <p:cTn id="32" dur="500" fill="hold"/>
+                                        <p:tgtEl>
+                                          <p:spTgt spid="21"/>
+                                        </p:tgtEl>
+                                        <p:attrNameLst>
+                                          <p:attrName>ppt_h</p:attrName>
+                                        </p:attrNameLst>
+                                      </p:cBhvr>
+                                      <p:tavLst>
+                                        <p:tav tm="0">
+                                          <p:val>
+                                            <p:fltVal val="0"/>
+                                          </p:val>
+                                        </p:tav>
+                                        <p:tav tm="100000">
+                                          <p:val>
+                                            <p:strVal val="#ppt_h"/>
+                                          </p:val>
+                                        </p:tav>
+                                      </p:tavLst>
+                                    </p:anim>
+                                    <p:animEffect transition="in" filter="fade">
+                                      <p:cBhvr>
+                                        <p:cTn id="33" dur="500"/>
+                                        <p:tgtEl>
+                                          <p:spTgt spid="21"/>
+                                        </p:tgtEl>
+                                      </p:cBhvr>
+                                    </p:animEffect>
+                                  </p:childTnLst>
+                                </p:cTn>
+                              </p:par>
+                              <p:par>
+                                <p:cTn id="34" presetID="53" presetClass="entr" presetSubtype="16" fill="hold" grpId="0" nodeType="withEffect">
+                                  <p:stCondLst>
+                                    <p:cond delay="0"/>
+                                  </p:stCondLst>
+                                  <p:childTnLst>
+                                    <p:set>
+                                      <p:cBhvr>
+                                        <p:cTn id="35" dur="1" fill="hold">
+                                          <p:stCondLst>
+                                            <p:cond delay="0"/>
+                                          </p:stCondLst>
+                                        </p:cTn>
+                                        <p:tgtEl>
+                                          <p:spTgt spid="33"/>
+                                        </p:tgtEl>
+                                        <p:attrNameLst>
+                                          <p:attrName>style.visibility</p:attrName>
+                                        </p:attrNameLst>
+                                      </p:cBhvr>
+                                      <p:to>
+                                        <p:strVal val="visible"/>
+                                      </p:to>
+                                    </p:set>
+                                    <p:anim calcmode="lin" valueType="num">
+                                      <p:cBhvr>
+                                        <p:cTn id="36" dur="500" fill="hold"/>
+                                        <p:tgtEl>
+                                          <p:spTgt spid="33"/>
+                                        </p:tgtEl>
+                                        <p:attrNameLst>
+                                          <p:attrName>ppt_w</p:attrName>
+                                        </p:attrNameLst>
+                                      </p:cBhvr>
+                                      <p:tavLst>
+                                        <p:tav tm="0">
+                                          <p:val>
+                                            <p:fltVal val="0"/>
+                                          </p:val>
+                                        </p:tav>
+                                        <p:tav tm="100000">
+                                          <p:val>
+                                            <p:strVal val="#ppt_w"/>
+                                          </p:val>
+                                        </p:tav>
+                                      </p:tavLst>
+                                    </p:anim>
+                                    <p:anim calcmode="lin" valueType="num">
+                                      <p:cBhvr>
+                                        <p:cTn id="37" dur="500" fill="hold"/>
+                                        <p:tgtEl>
+                                          <p:spTgt spid="33"/>
+                                        </p:tgtEl>
+                                        <p:attrNameLst>
+                                          <p:attrName>ppt_h</p:attrName>
+                                        </p:attrNameLst>
+                                      </p:cBhvr>
+                                      <p:tavLst>
+                                        <p:tav tm="0">
+                                          <p:val>
+                                            <p:fltVal val="0"/>
+                                          </p:val>
+                                        </p:tav>
+                                        <p:tav tm="100000">
+                                          <p:val>
+                                            <p:strVal val="#ppt_h"/>
+                                          </p:val>
+                                        </p:tav>
+                                      </p:tavLst>
+                                    </p:anim>
+                                    <p:animEffect transition="in" filter="fade">
+                                      <p:cBhvr>
+                                        <p:cTn id="38" dur="500"/>
+                                        <p:tgtEl>
+                                          <p:spTgt spid="33"/>
+                                        </p:tgtEl>
+                                      </p:cBhvr>
+                                    </p:animEffect>
+                                  </p:childTnLst>
+                                </p:cTn>
+                              </p:par>
+                            </p:childTnLst>
+                          </p:cTn>
+                        </p:par>
+                      </p:childTnLst>
+                    </p:cTn>
+                  </p:par>
+                  <p:par>
+                    <p:cTn id="39" fill="hold">
+                      <p:stCondLst>
+                        <p:cond delay="indefinite"/>
+                      </p:stCondLst>
+                      <p:childTnLst>
+                        <p:par>
+                          <p:cTn id="40" fill="hold">
+                            <p:stCondLst>
+                              <p:cond delay="0"/>
+                            </p:stCondLst>
+                            <p:childTnLst>
+                              <p:par>
+                                <p:cTn id="41" presetID="16" presetClass="entr" presetSubtype="21" fill="hold" nodeType="clickEffect">
+                                  <p:stCondLst>
+                                    <p:cond delay="0"/>
+                                  </p:stCondLst>
+                                  <p:childTnLst>
+                                    <p:set>
+                                      <p:cBhvr>
+                                        <p:cTn id="42" dur="1" fill="hold">
+                                          <p:stCondLst>
+                                            <p:cond delay="0"/>
+                                          </p:stCondLst>
+                                        </p:cTn>
+                                        <p:tgtEl>
+                                          <p:spTgt spid="23"/>
+                                        </p:tgtEl>
+                                        <p:attrNameLst>
+                                          <p:attrName>style.visibility</p:attrName>
+                                        </p:attrNameLst>
+                                      </p:cBhvr>
+                                      <p:to>
+                                        <p:strVal val="visible"/>
+                                      </p:to>
+                                    </p:set>
+                                    <p:animEffect transition="in" filter="barn(inVertical)">
+                                      <p:cBhvr>
+                                        <p:cTn id="43" dur="500"/>
+                                        <p:tgtEl>
+                                          <p:spTgt spid="23"/>
+                                        </p:tgtEl>
+                                      </p:cBhvr>
+                                    </p:animEffect>
+                                  </p:childTnLst>
+                                </p:cTn>
+                              </p:par>
+                              <p:par>
+                                <p:cTn id="44" presetID="16" presetClass="entr" presetSubtype="21" fill="hold" grpId="0" nodeType="withEffect">
+                                  <p:stCondLst>
+                                    <p:cond delay="0"/>
+                                  </p:stCondLst>
+                                  <p:childTnLst>
+                                    <p:set>
+                                      <p:cBhvr>
+                                        <p:cTn id="45" dur="1" fill="hold">
+                                          <p:stCondLst>
+                                            <p:cond delay="0"/>
+                                          </p:stCondLst>
+                                        </p:cTn>
+                                        <p:tgtEl>
+                                          <p:spTgt spid="34"/>
+                                        </p:tgtEl>
+                                        <p:attrNameLst>
+                                          <p:attrName>style.visibility</p:attrName>
+                                        </p:attrNameLst>
+                                      </p:cBhvr>
+                                      <p:to>
+                                        <p:strVal val="visible"/>
+                                      </p:to>
+                                    </p:set>
+                                    <p:animEffect transition="in" filter="barn(inVertical)">
+                                      <p:cBhvr>
+                                        <p:cTn id="46" dur="500"/>
+                                        <p:tgtEl>
+                                          <p:spTgt spid="34"/>
+                                        </p:tgtEl>
+                                      </p:cBhvr>
+                                    </p:animEffect>
+                                  </p:childTnLst>
+                                </p:cTn>
+                              </p:par>
+                            </p:childTnLst>
+                          </p:cTn>
+                        </p:par>
+                      </p:childTnLst>
+                    </p:cTn>
+                  </p:par>
+                </p:childTnLst>
+              </p:cTn>
+              <p:prevCondLst>
+                <p:cond evt="onPrev" delay="0">
+                  <p:tgtEl>
+                    <p:sldTgt/>
+                  </p:tgtEl>
+                </p:cond>
+              </p:prevCondLst>
+              <p:nextCondLst>
+                <p:cond evt="onNext" delay="0">
+                  <p:tgtEl>
+                    <p:sldTgt/>
+                  </p:tgtEl>
+                </p:cond>
+              </p:nextCondLst>
+            </p:seq>
+          </p:childTnLst>
+        </p:cTn>
+      </p:par>
+    </p:tnLst>
+    <p:bldLst>
+      <p:bldP spid="31" grpId="0"/>
+      <p:bldP spid="32" grpId="0"/>
+      <p:bldP spid="33" grpId="0"/>
+      <p:bldP spid="34" grpId="0"/>
+    </p:bldLst>
+  </p:timing>
 </p:sld>
 </file>
 
@@ -16409,7 +20816,7 @@
         <p:grpSpPr>
           <a:xfrm>
             <a:off x="6968643" y="467355"/>
-            <a:ext cx="2262593" cy="961402"/>
+            <a:ext cx="2272118" cy="797636"/>
             <a:chOff x="0" y="0"/>
             <a:chExt cx="594056" cy="252421"/>
           </a:xfrm>
@@ -16541,8 +20948,8 @@
         </p:nvGrpSpPr>
         <p:grpSpPr>
           <a:xfrm>
-            <a:off x="9842013" y="467355"/>
-            <a:ext cx="2262593" cy="961402"/>
+            <a:off x="9842014" y="467355"/>
+            <a:ext cx="2262592" cy="797636"/>
             <a:chOff x="0" y="0"/>
             <a:chExt cx="594056" cy="252421"/>
           </a:xfrm>
@@ -16675,7 +21082,7 @@
         <p:grpSpPr>
           <a:xfrm>
             <a:off x="12715382" y="458015"/>
-            <a:ext cx="2262593" cy="961402"/>
+            <a:ext cx="2290659" cy="806976"/>
             <a:chOff x="0" y="0"/>
             <a:chExt cx="594056" cy="252421"/>
           </a:xfrm>
@@ -16807,8 +21214,8 @@
         </p:nvGrpSpPr>
         <p:grpSpPr>
           <a:xfrm>
-            <a:off x="15579226" y="467355"/>
-            <a:ext cx="2262593" cy="961402"/>
+            <a:off x="15579225" y="467355"/>
+            <a:ext cx="2290659" cy="729303"/>
             <a:chOff x="0" y="0"/>
             <a:chExt cx="594056" cy="252421"/>
           </a:xfrm>
@@ -16971,7 +21378,7 @@
             </a:pathLst>
           </a:custGeom>
           <a:blipFill>
-            <a:blip r:embed="rId2"/>
+            <a:blip r:embed="rId3"/>
             <a:stretch>
               <a:fillRect/>
             </a:stretch>
@@ -17501,7 +21908,7 @@
             </a:pathLst>
           </a:custGeom>
           <a:blipFill>
-            <a:blip r:embed="rId2"/>
+            <a:blip r:embed="rId3"/>
             <a:stretch>
               <a:fillRect/>
             </a:stretch>
@@ -17547,7 +21954,7 @@
             </a:pathLst>
           </a:custGeom>
           <a:blipFill>
-            <a:blip r:embed="rId2"/>
+            <a:blip r:embed="rId3"/>
             <a:stretch>
               <a:fillRect/>
             </a:stretch>
@@ -17603,6 +22010,413 @@
   <p:clrMapOvr>
     <a:masterClrMapping/>
   </p:clrMapOvr>
+  <p:timing>
+    <p:tnLst>
+      <p:par>
+        <p:cTn id="1" dur="indefinite" restart="never" nodeType="tmRoot">
+          <p:childTnLst>
+            <p:seq concurrent="1" nextAc="seek">
+              <p:cTn id="2" dur="indefinite" nodeType="mainSeq">
+                <p:childTnLst>
+                  <p:par>
+                    <p:cTn id="3" fill="hold">
+                      <p:stCondLst>
+                        <p:cond delay="indefinite"/>
+                      </p:stCondLst>
+                      <p:childTnLst>
+                        <p:par>
+                          <p:cTn id="4" fill="hold">
+                            <p:stCondLst>
+                              <p:cond delay="0"/>
+                            </p:stCondLst>
+                            <p:childTnLst>
+                              <p:par>
+                                <p:cTn id="5" presetID="22" presetClass="entr" presetSubtype="4" fill="hold" nodeType="clickEffect">
+                                  <p:stCondLst>
+                                    <p:cond delay="0"/>
+                                  </p:stCondLst>
+                                  <p:childTnLst>
+                                    <p:set>
+                                      <p:cBhvr>
+                                        <p:cTn id="6" dur="1" fill="hold">
+                                          <p:stCondLst>
+                                            <p:cond delay="0"/>
+                                          </p:stCondLst>
+                                        </p:cTn>
+                                        <p:tgtEl>
+                                          <p:spTgt spid="16"/>
+                                        </p:tgtEl>
+                                        <p:attrNameLst>
+                                          <p:attrName>style.visibility</p:attrName>
+                                        </p:attrNameLst>
+                                      </p:cBhvr>
+                                      <p:to>
+                                        <p:strVal val="visible"/>
+                                      </p:to>
+                                    </p:set>
+                                    <p:animEffect transition="in" filter="wipe(down)">
+                                      <p:cBhvr>
+                                        <p:cTn id="7" dur="500"/>
+                                        <p:tgtEl>
+                                          <p:spTgt spid="16"/>
+                                        </p:tgtEl>
+                                      </p:cBhvr>
+                                    </p:animEffect>
+                                  </p:childTnLst>
+                                </p:cTn>
+                              </p:par>
+                              <p:par>
+                                <p:cTn id="8" presetID="22" presetClass="entr" presetSubtype="4" fill="hold" grpId="0" nodeType="withEffect">
+                                  <p:stCondLst>
+                                    <p:cond delay="0"/>
+                                  </p:stCondLst>
+                                  <p:childTnLst>
+                                    <p:set>
+                                      <p:cBhvr>
+                                        <p:cTn id="9" dur="1" fill="hold">
+                                          <p:stCondLst>
+                                            <p:cond delay="0"/>
+                                          </p:stCondLst>
+                                        </p:cTn>
+                                        <p:tgtEl>
+                                          <p:spTgt spid="22"/>
+                                        </p:tgtEl>
+                                        <p:attrNameLst>
+                                          <p:attrName>style.visibility</p:attrName>
+                                        </p:attrNameLst>
+                                      </p:cBhvr>
+                                      <p:to>
+                                        <p:strVal val="visible"/>
+                                      </p:to>
+                                    </p:set>
+                                    <p:animEffect transition="in" filter="wipe(down)">
+                                      <p:cBhvr>
+                                        <p:cTn id="10" dur="500"/>
+                                        <p:tgtEl>
+                                          <p:spTgt spid="22"/>
+                                        </p:tgtEl>
+                                      </p:cBhvr>
+                                    </p:animEffect>
+                                  </p:childTnLst>
+                                </p:cTn>
+                              </p:par>
+                              <p:par>
+                                <p:cTn id="11" presetID="22" presetClass="entr" presetSubtype="4" fill="hold" grpId="0" nodeType="withEffect">
+                                  <p:stCondLst>
+                                    <p:cond delay="0"/>
+                                  </p:stCondLst>
+                                  <p:childTnLst>
+                                    <p:set>
+                                      <p:cBhvr>
+                                        <p:cTn id="12" dur="1" fill="hold">
+                                          <p:stCondLst>
+                                            <p:cond delay="0"/>
+                                          </p:stCondLst>
+                                        </p:cTn>
+                                        <p:tgtEl>
+                                          <p:spTgt spid="23"/>
+                                        </p:tgtEl>
+                                        <p:attrNameLst>
+                                          <p:attrName>style.visibility</p:attrName>
+                                        </p:attrNameLst>
+                                      </p:cBhvr>
+                                      <p:to>
+                                        <p:strVal val="visible"/>
+                                      </p:to>
+                                    </p:set>
+                                    <p:animEffect transition="in" filter="wipe(down)">
+                                      <p:cBhvr>
+                                        <p:cTn id="13" dur="500"/>
+                                        <p:tgtEl>
+                                          <p:spTgt spid="23"/>
+                                        </p:tgtEl>
+                                      </p:cBhvr>
+                                    </p:animEffect>
+                                  </p:childTnLst>
+                                </p:cTn>
+                              </p:par>
+                            </p:childTnLst>
+                          </p:cTn>
+                        </p:par>
+                      </p:childTnLst>
+                    </p:cTn>
+                  </p:par>
+                  <p:par>
+                    <p:cTn id="14" fill="hold">
+                      <p:stCondLst>
+                        <p:cond delay="indefinite"/>
+                      </p:stCondLst>
+                      <p:childTnLst>
+                        <p:par>
+                          <p:cTn id="15" fill="hold">
+                            <p:stCondLst>
+                              <p:cond delay="0"/>
+                            </p:stCondLst>
+                            <p:childTnLst>
+                              <p:par>
+                                <p:cTn id="16" presetID="22" presetClass="entr" presetSubtype="4" fill="hold" grpId="0" nodeType="clickEffect">
+                                  <p:stCondLst>
+                                    <p:cond delay="0"/>
+                                  </p:stCondLst>
+                                  <p:childTnLst>
+                                    <p:set>
+                                      <p:cBhvr>
+                                        <p:cTn id="17" dur="1" fill="hold">
+                                          <p:stCondLst>
+                                            <p:cond delay="0"/>
+                                          </p:stCondLst>
+                                        </p:cTn>
+                                        <p:tgtEl>
+                                          <p:spTgt spid="24"/>
+                                        </p:tgtEl>
+                                        <p:attrNameLst>
+                                          <p:attrName>style.visibility</p:attrName>
+                                        </p:attrNameLst>
+                                      </p:cBhvr>
+                                      <p:to>
+                                        <p:strVal val="visible"/>
+                                      </p:to>
+                                    </p:set>
+                                    <p:animEffect transition="in" filter="wipe(down)">
+                                      <p:cBhvr>
+                                        <p:cTn id="18" dur="500"/>
+                                        <p:tgtEl>
+                                          <p:spTgt spid="24"/>
+                                        </p:tgtEl>
+                                      </p:cBhvr>
+                                    </p:animEffect>
+                                  </p:childTnLst>
+                                </p:cTn>
+                              </p:par>
+                              <p:par>
+                                <p:cTn id="19" presetID="22" presetClass="entr" presetSubtype="4" fill="hold" grpId="0" nodeType="withEffect">
+                                  <p:stCondLst>
+                                    <p:cond delay="0"/>
+                                  </p:stCondLst>
+                                  <p:childTnLst>
+                                    <p:set>
+                                      <p:cBhvr>
+                                        <p:cTn id="20" dur="1" fill="hold">
+                                          <p:stCondLst>
+                                            <p:cond delay="0"/>
+                                          </p:stCondLst>
+                                        </p:cTn>
+                                        <p:tgtEl>
+                                          <p:spTgt spid="25"/>
+                                        </p:tgtEl>
+                                        <p:attrNameLst>
+                                          <p:attrName>style.visibility</p:attrName>
+                                        </p:attrNameLst>
+                                      </p:cBhvr>
+                                      <p:to>
+                                        <p:strVal val="visible"/>
+                                      </p:to>
+                                    </p:set>
+                                    <p:animEffect transition="in" filter="wipe(down)">
+                                      <p:cBhvr>
+                                        <p:cTn id="21" dur="500"/>
+                                        <p:tgtEl>
+                                          <p:spTgt spid="25"/>
+                                        </p:tgtEl>
+                                      </p:cBhvr>
+                                    </p:animEffect>
+                                  </p:childTnLst>
+                                </p:cTn>
+                              </p:par>
+                              <p:par>
+                                <p:cTn id="22" presetID="22" presetClass="entr" presetSubtype="4" fill="hold" nodeType="withEffect">
+                                  <p:stCondLst>
+                                    <p:cond delay="0"/>
+                                  </p:stCondLst>
+                                  <p:childTnLst>
+                                    <p:set>
+                                      <p:cBhvr>
+                                        <p:cTn id="23" dur="1" fill="hold">
+                                          <p:stCondLst>
+                                            <p:cond delay="0"/>
+                                          </p:stCondLst>
+                                        </p:cTn>
+                                        <p:tgtEl>
+                                          <p:spTgt spid="28"/>
+                                        </p:tgtEl>
+                                        <p:attrNameLst>
+                                          <p:attrName>style.visibility</p:attrName>
+                                        </p:attrNameLst>
+                                      </p:cBhvr>
+                                      <p:to>
+                                        <p:strVal val="visible"/>
+                                      </p:to>
+                                    </p:set>
+                                    <p:animEffect transition="in" filter="wipe(down)">
+                                      <p:cBhvr>
+                                        <p:cTn id="24" dur="500"/>
+                                        <p:tgtEl>
+                                          <p:spTgt spid="28"/>
+                                        </p:tgtEl>
+                                      </p:cBhvr>
+                                    </p:animEffect>
+                                  </p:childTnLst>
+                                </p:cTn>
+                              </p:par>
+                            </p:childTnLst>
+                          </p:cTn>
+                        </p:par>
+                      </p:childTnLst>
+                    </p:cTn>
+                  </p:par>
+                  <p:par>
+                    <p:cTn id="25" fill="hold">
+                      <p:stCondLst>
+                        <p:cond delay="indefinite"/>
+                      </p:stCondLst>
+                      <p:childTnLst>
+                        <p:par>
+                          <p:cTn id="26" fill="hold">
+                            <p:stCondLst>
+                              <p:cond delay="0"/>
+                            </p:stCondLst>
+                            <p:childTnLst>
+                              <p:par>
+                                <p:cTn id="27" presetID="22" presetClass="entr" presetSubtype="4" fill="hold" grpId="0" nodeType="clickEffect">
+                                  <p:stCondLst>
+                                    <p:cond delay="0"/>
+                                  </p:stCondLst>
+                                  <p:childTnLst>
+                                    <p:set>
+                                      <p:cBhvr>
+                                        <p:cTn id="28" dur="1" fill="hold">
+                                          <p:stCondLst>
+                                            <p:cond delay="0"/>
+                                          </p:stCondLst>
+                                        </p:cTn>
+                                        <p:tgtEl>
+                                          <p:spTgt spid="26"/>
+                                        </p:tgtEl>
+                                        <p:attrNameLst>
+                                          <p:attrName>style.visibility</p:attrName>
+                                        </p:attrNameLst>
+                                      </p:cBhvr>
+                                      <p:to>
+                                        <p:strVal val="visible"/>
+                                      </p:to>
+                                    </p:set>
+                                    <p:animEffect transition="in" filter="wipe(down)">
+                                      <p:cBhvr>
+                                        <p:cTn id="29" dur="500"/>
+                                        <p:tgtEl>
+                                          <p:spTgt spid="26"/>
+                                        </p:tgtEl>
+                                      </p:cBhvr>
+                                    </p:animEffect>
+                                  </p:childTnLst>
+                                </p:cTn>
+                              </p:par>
+                              <p:par>
+                                <p:cTn id="30" presetID="22" presetClass="entr" presetSubtype="4" fill="hold" grpId="0" nodeType="withEffect">
+                                  <p:stCondLst>
+                                    <p:cond delay="0"/>
+                                  </p:stCondLst>
+                                  <p:childTnLst>
+                                    <p:set>
+                                      <p:cBhvr>
+                                        <p:cTn id="31" dur="1" fill="hold">
+                                          <p:stCondLst>
+                                            <p:cond delay="0"/>
+                                          </p:stCondLst>
+                                        </p:cTn>
+                                        <p:tgtEl>
+                                          <p:spTgt spid="27"/>
+                                        </p:tgtEl>
+                                        <p:attrNameLst>
+                                          <p:attrName>style.visibility</p:attrName>
+                                        </p:attrNameLst>
+                                      </p:cBhvr>
+                                      <p:to>
+                                        <p:strVal val="visible"/>
+                                      </p:to>
+                                    </p:set>
+                                    <p:animEffect transition="in" filter="wipe(down)">
+                                      <p:cBhvr>
+                                        <p:cTn id="32" dur="500"/>
+                                        <p:tgtEl>
+                                          <p:spTgt spid="27"/>
+                                        </p:tgtEl>
+                                      </p:cBhvr>
+                                    </p:animEffect>
+                                  </p:childTnLst>
+                                </p:cTn>
+                              </p:par>
+                              <p:par>
+                                <p:cTn id="33" presetID="22" presetClass="entr" presetSubtype="4" fill="hold" nodeType="withEffect">
+                                  <p:stCondLst>
+                                    <p:cond delay="0"/>
+                                  </p:stCondLst>
+                                  <p:childTnLst>
+                                    <p:set>
+                                      <p:cBhvr>
+                                        <p:cTn id="34" dur="1" fill="hold">
+                                          <p:stCondLst>
+                                            <p:cond delay="0"/>
+                                          </p:stCondLst>
+                                        </p:cTn>
+                                        <p:tgtEl>
+                                          <p:spTgt spid="29"/>
+                                        </p:tgtEl>
+                                        <p:attrNameLst>
+                                          <p:attrName>style.visibility</p:attrName>
+                                        </p:attrNameLst>
+                                      </p:cBhvr>
+                                      <p:to>
+                                        <p:strVal val="visible"/>
+                                      </p:to>
+                                    </p:set>
+                                    <p:animEffect transition="in" filter="wipe(down)">
+                                      <p:cBhvr>
+                                        <p:cTn id="35" dur="500"/>
+                                        <p:tgtEl>
+                                          <p:spTgt spid="29"/>
+                                        </p:tgtEl>
+                                      </p:cBhvr>
+                                    </p:animEffect>
+                                  </p:childTnLst>
+                                </p:cTn>
+                              </p:par>
+                            </p:childTnLst>
+                          </p:cTn>
+                        </p:par>
+                      </p:childTnLst>
+                    </p:cTn>
+                  </p:par>
+                </p:childTnLst>
+              </p:cTn>
+              <p:prevCondLst>
+                <p:cond evt="onPrev" delay="0">
+                  <p:tgtEl>
+                    <p:sldTgt/>
+                  </p:tgtEl>
+                </p:cond>
+              </p:prevCondLst>
+              <p:nextCondLst>
+                <p:cond evt="onNext" delay="0">
+                  <p:tgtEl>
+                    <p:sldTgt/>
+                  </p:tgtEl>
+                </p:cond>
+              </p:nextCondLst>
+            </p:seq>
+          </p:childTnLst>
+        </p:cTn>
+      </p:par>
+    </p:tnLst>
+    <p:bldLst>
+      <p:bldP spid="22" grpId="0"/>
+      <p:bldP spid="23" grpId="0"/>
+      <p:bldP spid="24" grpId="0"/>
+      <p:bldP spid="25" grpId="0"/>
+      <p:bldP spid="26" grpId="0"/>
+      <p:bldP spid="27" grpId="0"/>
+    </p:bldLst>
+  </p:timing>
 </p:sld>
 </file>
 
@@ -17631,8 +22445,8 @@
         </p:nvGrpSpPr>
         <p:grpSpPr>
           <a:xfrm>
-            <a:off x="6968643" y="467355"/>
-            <a:ext cx="2262593" cy="961402"/>
+            <a:off x="6968642" y="467355"/>
+            <a:ext cx="2262593" cy="952062"/>
             <a:chOff x="0" y="0"/>
             <a:chExt cx="594056" cy="252421"/>
           </a:xfrm>
@@ -17765,7 +22579,7 @@
         <p:grpSpPr>
           <a:xfrm>
             <a:off x="9842013" y="467355"/>
-            <a:ext cx="2262593" cy="961402"/>
+            <a:ext cx="2433354" cy="952062"/>
             <a:chOff x="0" y="0"/>
             <a:chExt cx="594056" cy="252421"/>
           </a:xfrm>
@@ -17897,8 +22711,8 @@
         </p:nvGrpSpPr>
         <p:grpSpPr>
           <a:xfrm>
-            <a:off x="12715382" y="458015"/>
-            <a:ext cx="2262593" cy="961402"/>
+            <a:off x="12715383" y="458015"/>
+            <a:ext cx="2253068" cy="961402"/>
             <a:chOff x="0" y="0"/>
             <a:chExt cx="594056" cy="252421"/>
           </a:xfrm>
@@ -18030,8 +22844,8 @@
         </p:nvGrpSpPr>
         <p:grpSpPr>
           <a:xfrm>
-            <a:off x="15579226" y="467355"/>
-            <a:ext cx="2262593" cy="961402"/>
+            <a:off x="15579227" y="467355"/>
+            <a:ext cx="2253068" cy="952062"/>
             <a:chOff x="0" y="0"/>
             <a:chExt cx="594056" cy="252421"/>
           </a:xfrm>
@@ -18932,6 +23746,413 @@
   <p:clrMapOvr>
     <a:masterClrMapping/>
   </p:clrMapOvr>
+  <p:timing>
+    <p:tnLst>
+      <p:par>
+        <p:cTn id="1" dur="indefinite" restart="never" nodeType="tmRoot">
+          <p:childTnLst>
+            <p:seq concurrent="1" nextAc="seek">
+              <p:cTn id="2" dur="indefinite" nodeType="mainSeq">
+                <p:childTnLst>
+                  <p:par>
+                    <p:cTn id="3" fill="hold">
+                      <p:stCondLst>
+                        <p:cond delay="indefinite"/>
+                      </p:stCondLst>
+                      <p:childTnLst>
+                        <p:par>
+                          <p:cTn id="4" fill="hold">
+                            <p:stCondLst>
+                              <p:cond delay="0"/>
+                            </p:stCondLst>
+                            <p:childTnLst>
+                              <p:par>
+                                <p:cTn id="5" presetID="22" presetClass="entr" presetSubtype="4" fill="hold" nodeType="clickEffect">
+                                  <p:stCondLst>
+                                    <p:cond delay="0"/>
+                                  </p:stCondLst>
+                                  <p:childTnLst>
+                                    <p:set>
+                                      <p:cBhvr>
+                                        <p:cTn id="6" dur="1" fill="hold">
+                                          <p:stCondLst>
+                                            <p:cond delay="0"/>
+                                          </p:stCondLst>
+                                        </p:cTn>
+                                        <p:tgtEl>
+                                          <p:spTgt spid="15"/>
+                                        </p:tgtEl>
+                                        <p:attrNameLst>
+                                          <p:attrName>style.visibility</p:attrName>
+                                        </p:attrNameLst>
+                                      </p:cBhvr>
+                                      <p:to>
+                                        <p:strVal val="visible"/>
+                                      </p:to>
+                                    </p:set>
+                                    <p:animEffect transition="in" filter="wipe(down)">
+                                      <p:cBhvr>
+                                        <p:cTn id="7" dur="500"/>
+                                        <p:tgtEl>
+                                          <p:spTgt spid="15"/>
+                                        </p:tgtEl>
+                                      </p:cBhvr>
+                                    </p:animEffect>
+                                  </p:childTnLst>
+                                </p:cTn>
+                              </p:par>
+                              <p:par>
+                                <p:cTn id="8" presetID="22" presetClass="entr" presetSubtype="4" fill="hold" grpId="0" nodeType="withEffect">
+                                  <p:stCondLst>
+                                    <p:cond delay="0"/>
+                                  </p:stCondLst>
+                                  <p:childTnLst>
+                                    <p:set>
+                                      <p:cBhvr>
+                                        <p:cTn id="9" dur="1" fill="hold">
+                                          <p:stCondLst>
+                                            <p:cond delay="0"/>
+                                          </p:stCondLst>
+                                        </p:cTn>
+                                        <p:tgtEl>
+                                          <p:spTgt spid="21"/>
+                                        </p:tgtEl>
+                                        <p:attrNameLst>
+                                          <p:attrName>style.visibility</p:attrName>
+                                        </p:attrNameLst>
+                                      </p:cBhvr>
+                                      <p:to>
+                                        <p:strVal val="visible"/>
+                                      </p:to>
+                                    </p:set>
+                                    <p:animEffect transition="in" filter="wipe(down)">
+                                      <p:cBhvr>
+                                        <p:cTn id="10" dur="500"/>
+                                        <p:tgtEl>
+                                          <p:spTgt spid="21"/>
+                                        </p:tgtEl>
+                                      </p:cBhvr>
+                                    </p:animEffect>
+                                  </p:childTnLst>
+                                </p:cTn>
+                              </p:par>
+                              <p:par>
+                                <p:cTn id="11" presetID="22" presetClass="entr" presetSubtype="4" fill="hold" grpId="0" nodeType="withEffect">
+                                  <p:stCondLst>
+                                    <p:cond delay="0"/>
+                                  </p:stCondLst>
+                                  <p:childTnLst>
+                                    <p:set>
+                                      <p:cBhvr>
+                                        <p:cTn id="12" dur="1" fill="hold">
+                                          <p:stCondLst>
+                                            <p:cond delay="0"/>
+                                          </p:stCondLst>
+                                        </p:cTn>
+                                        <p:tgtEl>
+                                          <p:spTgt spid="22"/>
+                                        </p:tgtEl>
+                                        <p:attrNameLst>
+                                          <p:attrName>style.visibility</p:attrName>
+                                        </p:attrNameLst>
+                                      </p:cBhvr>
+                                      <p:to>
+                                        <p:strVal val="visible"/>
+                                      </p:to>
+                                    </p:set>
+                                    <p:animEffect transition="in" filter="wipe(down)">
+                                      <p:cBhvr>
+                                        <p:cTn id="13" dur="500"/>
+                                        <p:tgtEl>
+                                          <p:spTgt spid="22"/>
+                                        </p:tgtEl>
+                                      </p:cBhvr>
+                                    </p:animEffect>
+                                  </p:childTnLst>
+                                </p:cTn>
+                              </p:par>
+                            </p:childTnLst>
+                          </p:cTn>
+                        </p:par>
+                      </p:childTnLst>
+                    </p:cTn>
+                  </p:par>
+                  <p:par>
+                    <p:cTn id="14" fill="hold">
+                      <p:stCondLst>
+                        <p:cond delay="indefinite"/>
+                      </p:stCondLst>
+                      <p:childTnLst>
+                        <p:par>
+                          <p:cTn id="15" fill="hold">
+                            <p:stCondLst>
+                              <p:cond delay="0"/>
+                            </p:stCondLst>
+                            <p:childTnLst>
+                              <p:par>
+                                <p:cTn id="16" presetID="22" presetClass="entr" presetSubtype="4" fill="hold" nodeType="clickEffect">
+                                  <p:stCondLst>
+                                    <p:cond delay="0"/>
+                                  </p:stCondLst>
+                                  <p:childTnLst>
+                                    <p:set>
+                                      <p:cBhvr>
+                                        <p:cTn id="17" dur="1" fill="hold">
+                                          <p:stCondLst>
+                                            <p:cond delay="0"/>
+                                          </p:stCondLst>
+                                        </p:cTn>
+                                        <p:tgtEl>
+                                          <p:spTgt spid="23"/>
+                                        </p:tgtEl>
+                                        <p:attrNameLst>
+                                          <p:attrName>style.visibility</p:attrName>
+                                        </p:attrNameLst>
+                                      </p:cBhvr>
+                                      <p:to>
+                                        <p:strVal val="visible"/>
+                                      </p:to>
+                                    </p:set>
+                                    <p:animEffect transition="in" filter="wipe(down)">
+                                      <p:cBhvr>
+                                        <p:cTn id="18" dur="500"/>
+                                        <p:tgtEl>
+                                          <p:spTgt spid="23"/>
+                                        </p:tgtEl>
+                                      </p:cBhvr>
+                                    </p:animEffect>
+                                  </p:childTnLst>
+                                </p:cTn>
+                              </p:par>
+                              <p:par>
+                                <p:cTn id="19" presetID="22" presetClass="entr" presetSubtype="4" fill="hold" grpId="0" nodeType="withEffect">
+                                  <p:stCondLst>
+                                    <p:cond delay="0"/>
+                                  </p:stCondLst>
+                                  <p:childTnLst>
+                                    <p:set>
+                                      <p:cBhvr>
+                                        <p:cTn id="20" dur="1" fill="hold">
+                                          <p:stCondLst>
+                                            <p:cond delay="0"/>
+                                          </p:stCondLst>
+                                        </p:cTn>
+                                        <p:tgtEl>
+                                          <p:spTgt spid="25"/>
+                                        </p:tgtEl>
+                                        <p:attrNameLst>
+                                          <p:attrName>style.visibility</p:attrName>
+                                        </p:attrNameLst>
+                                      </p:cBhvr>
+                                      <p:to>
+                                        <p:strVal val="visible"/>
+                                      </p:to>
+                                    </p:set>
+                                    <p:animEffect transition="in" filter="wipe(down)">
+                                      <p:cBhvr>
+                                        <p:cTn id="21" dur="500"/>
+                                        <p:tgtEl>
+                                          <p:spTgt spid="25"/>
+                                        </p:tgtEl>
+                                      </p:cBhvr>
+                                    </p:animEffect>
+                                  </p:childTnLst>
+                                </p:cTn>
+                              </p:par>
+                              <p:par>
+                                <p:cTn id="22" presetID="22" presetClass="entr" presetSubtype="4" fill="hold" grpId="0" nodeType="withEffect">
+                                  <p:stCondLst>
+                                    <p:cond delay="0"/>
+                                  </p:stCondLst>
+                                  <p:childTnLst>
+                                    <p:set>
+                                      <p:cBhvr>
+                                        <p:cTn id="23" dur="1" fill="hold">
+                                          <p:stCondLst>
+                                            <p:cond delay="0"/>
+                                          </p:stCondLst>
+                                        </p:cTn>
+                                        <p:tgtEl>
+                                          <p:spTgt spid="26"/>
+                                        </p:tgtEl>
+                                        <p:attrNameLst>
+                                          <p:attrName>style.visibility</p:attrName>
+                                        </p:attrNameLst>
+                                      </p:cBhvr>
+                                      <p:to>
+                                        <p:strVal val="visible"/>
+                                      </p:to>
+                                    </p:set>
+                                    <p:animEffect transition="in" filter="wipe(down)">
+                                      <p:cBhvr>
+                                        <p:cTn id="24" dur="500"/>
+                                        <p:tgtEl>
+                                          <p:spTgt spid="26"/>
+                                        </p:tgtEl>
+                                      </p:cBhvr>
+                                    </p:animEffect>
+                                  </p:childTnLst>
+                                </p:cTn>
+                              </p:par>
+                            </p:childTnLst>
+                          </p:cTn>
+                        </p:par>
+                      </p:childTnLst>
+                    </p:cTn>
+                  </p:par>
+                  <p:par>
+                    <p:cTn id="25" fill="hold">
+                      <p:stCondLst>
+                        <p:cond delay="indefinite"/>
+                      </p:stCondLst>
+                      <p:childTnLst>
+                        <p:par>
+                          <p:cTn id="26" fill="hold">
+                            <p:stCondLst>
+                              <p:cond delay="0"/>
+                            </p:stCondLst>
+                            <p:childTnLst>
+                              <p:par>
+                                <p:cTn id="27" presetID="22" presetClass="entr" presetSubtype="4" fill="hold" nodeType="clickEffect">
+                                  <p:stCondLst>
+                                    <p:cond delay="0"/>
+                                  </p:stCondLst>
+                                  <p:childTnLst>
+                                    <p:set>
+                                      <p:cBhvr>
+                                        <p:cTn id="28" dur="1" fill="hold">
+                                          <p:stCondLst>
+                                            <p:cond delay="0"/>
+                                          </p:stCondLst>
+                                        </p:cTn>
+                                        <p:tgtEl>
+                                          <p:spTgt spid="27"/>
+                                        </p:tgtEl>
+                                        <p:attrNameLst>
+                                          <p:attrName>style.visibility</p:attrName>
+                                        </p:attrNameLst>
+                                      </p:cBhvr>
+                                      <p:to>
+                                        <p:strVal val="visible"/>
+                                      </p:to>
+                                    </p:set>
+                                    <p:animEffect transition="in" filter="wipe(down)">
+                                      <p:cBhvr>
+                                        <p:cTn id="29" dur="500"/>
+                                        <p:tgtEl>
+                                          <p:spTgt spid="27"/>
+                                        </p:tgtEl>
+                                      </p:cBhvr>
+                                    </p:animEffect>
+                                  </p:childTnLst>
+                                </p:cTn>
+                              </p:par>
+                              <p:par>
+                                <p:cTn id="30" presetID="22" presetClass="entr" presetSubtype="4" fill="hold" grpId="0" nodeType="withEffect">
+                                  <p:stCondLst>
+                                    <p:cond delay="0"/>
+                                  </p:stCondLst>
+                                  <p:childTnLst>
+                                    <p:set>
+                                      <p:cBhvr>
+                                        <p:cTn id="31" dur="1" fill="hold">
+                                          <p:stCondLst>
+                                            <p:cond delay="0"/>
+                                          </p:stCondLst>
+                                        </p:cTn>
+                                        <p:tgtEl>
+                                          <p:spTgt spid="29"/>
+                                        </p:tgtEl>
+                                        <p:attrNameLst>
+                                          <p:attrName>style.visibility</p:attrName>
+                                        </p:attrNameLst>
+                                      </p:cBhvr>
+                                      <p:to>
+                                        <p:strVal val="visible"/>
+                                      </p:to>
+                                    </p:set>
+                                    <p:animEffect transition="in" filter="wipe(down)">
+                                      <p:cBhvr>
+                                        <p:cTn id="32" dur="500"/>
+                                        <p:tgtEl>
+                                          <p:spTgt spid="29"/>
+                                        </p:tgtEl>
+                                      </p:cBhvr>
+                                    </p:animEffect>
+                                  </p:childTnLst>
+                                </p:cTn>
+                              </p:par>
+                              <p:par>
+                                <p:cTn id="33" presetID="22" presetClass="entr" presetSubtype="4" fill="hold" grpId="0" nodeType="withEffect">
+                                  <p:stCondLst>
+                                    <p:cond delay="0"/>
+                                  </p:stCondLst>
+                                  <p:childTnLst>
+                                    <p:set>
+                                      <p:cBhvr>
+                                        <p:cTn id="34" dur="1" fill="hold">
+                                          <p:stCondLst>
+                                            <p:cond delay="0"/>
+                                          </p:stCondLst>
+                                        </p:cTn>
+                                        <p:tgtEl>
+                                          <p:spTgt spid="30"/>
+                                        </p:tgtEl>
+                                        <p:attrNameLst>
+                                          <p:attrName>style.visibility</p:attrName>
+                                        </p:attrNameLst>
+                                      </p:cBhvr>
+                                      <p:to>
+                                        <p:strVal val="visible"/>
+                                      </p:to>
+                                    </p:set>
+                                    <p:animEffect transition="in" filter="wipe(down)">
+                                      <p:cBhvr>
+                                        <p:cTn id="35" dur="500"/>
+                                        <p:tgtEl>
+                                          <p:spTgt spid="30"/>
+                                        </p:tgtEl>
+                                      </p:cBhvr>
+                                    </p:animEffect>
+                                  </p:childTnLst>
+                                </p:cTn>
+                              </p:par>
+                            </p:childTnLst>
+                          </p:cTn>
+                        </p:par>
+                      </p:childTnLst>
+                    </p:cTn>
+                  </p:par>
+                </p:childTnLst>
+              </p:cTn>
+              <p:prevCondLst>
+                <p:cond evt="onPrev" delay="0">
+                  <p:tgtEl>
+                    <p:sldTgt/>
+                  </p:tgtEl>
+                </p:cond>
+              </p:prevCondLst>
+              <p:nextCondLst>
+                <p:cond evt="onNext" delay="0">
+                  <p:tgtEl>
+                    <p:sldTgt/>
+                  </p:tgtEl>
+                </p:cond>
+              </p:nextCondLst>
+            </p:seq>
+          </p:childTnLst>
+        </p:cTn>
+      </p:par>
+    </p:tnLst>
+    <p:bldLst>
+      <p:bldP spid="21" grpId="0"/>
+      <p:bldP spid="22" grpId="0"/>
+      <p:bldP spid="25" grpId="0"/>
+      <p:bldP spid="26" grpId="0"/>
+      <p:bldP spid="29" grpId="0"/>
+      <p:bldP spid="30" grpId="0"/>
+    </p:bldLst>
+  </p:timing>
 </p:sld>
 </file>
 
@@ -20528,7 +25749,7 @@
         </p:nvGrpSpPr>
         <p:grpSpPr>
           <a:xfrm>
-            <a:off x="4288763" y="6296229"/>
+            <a:off x="4169157" y="6296229"/>
             <a:ext cx="5432043" cy="2096810"/>
             <a:chOff x="0" y="0"/>
             <a:chExt cx="1430661" cy="552246"/>
@@ -21053,8 +26274,8 @@
         </p:nvGrpSpPr>
         <p:grpSpPr>
           <a:xfrm>
-            <a:off x="5836220" y="5770484"/>
-            <a:ext cx="2049816" cy="870871"/>
+            <a:off x="5716614" y="5770484"/>
+            <a:ext cx="2573236" cy="870871"/>
             <a:chOff x="0" y="0"/>
             <a:chExt cx="539869" cy="229365"/>
           </a:xfrm>
@@ -21136,6 +26357,13 @@
               <a:srgbClr val="FFBD59"/>
             </a:solidFill>
           </p:spPr>
+          <p:txBody>
+            <a:bodyPr/>
+            <a:lstStyle/>
+            <a:p>
+              <a:endParaRPr lang="en-US"/>
+            </a:p>
+          </p:txBody>
         </p:sp>
         <p:sp>
           <p:nvSpPr>
@@ -21174,7 +26402,7 @@
         </p:nvSpPr>
         <p:spPr>
           <a:xfrm>
-            <a:off x="6238843" y="5902526"/>
+            <a:off x="6119237" y="5902526"/>
             <a:ext cx="606788" cy="606788"/>
           </a:xfrm>
           <a:custGeom>
@@ -21220,7 +26448,7 @@
         </p:nvSpPr>
         <p:spPr>
           <a:xfrm>
-            <a:off x="4563128" y="6975422"/>
+            <a:off x="4443522" y="6975422"/>
             <a:ext cx="1448324" cy="814623"/>
           </a:xfrm>
           <a:custGeom>
@@ -21266,7 +26494,7 @@
         </p:nvSpPr>
         <p:spPr>
           <a:xfrm>
-            <a:off x="6252078" y="7015555"/>
+            <a:off x="6132472" y="7015555"/>
             <a:ext cx="1550478" cy="814623"/>
           </a:xfrm>
           <a:custGeom>
@@ -21312,7 +26540,7 @@
         </p:nvSpPr>
         <p:spPr>
           <a:xfrm>
-            <a:off x="8040681" y="6898531"/>
+            <a:off x="7921075" y="6898531"/>
             <a:ext cx="1453071" cy="814623"/>
           </a:xfrm>
           <a:custGeom>
@@ -22051,15 +27279,15 @@
         </p:nvSpPr>
         <p:spPr>
           <a:xfrm>
-            <a:off x="7009068" y="5848097"/>
-            <a:ext cx="477044" cy="639446"/>
+            <a:off x="6889462" y="5848096"/>
+            <a:ext cx="793488" cy="613566"/>
           </a:xfrm>
           <a:prstGeom prst="rect">
             <a:avLst/>
           </a:prstGeom>
         </p:spPr>
         <p:txBody>
-          <a:bodyPr lIns="0" tIns="0" rIns="0" bIns="0" rtlCol="0" anchor="t">
+          <a:bodyPr wrap="square" lIns="0" tIns="0" rIns="0" bIns="0" rtlCol="0" anchor="t">
             <a:spAutoFit/>
           </a:bodyPr>
           <a:lstStyle/>
@@ -22433,6 +27661,1447 @@
   <p:clrMapOvr>
     <a:masterClrMapping/>
   </p:clrMapOvr>
+  <p:timing>
+    <p:tnLst>
+      <p:par>
+        <p:cTn id="1" dur="indefinite" restart="never" nodeType="tmRoot">
+          <p:childTnLst>
+            <p:seq concurrent="1" nextAc="seek">
+              <p:cTn id="2" dur="indefinite" nodeType="mainSeq">
+                <p:childTnLst>
+                  <p:par>
+                    <p:cTn id="3" fill="hold">
+                      <p:stCondLst>
+                        <p:cond delay="indefinite"/>
+                      </p:stCondLst>
+                      <p:childTnLst>
+                        <p:par>
+                          <p:cTn id="4" fill="hold">
+                            <p:stCondLst>
+                              <p:cond delay="0"/>
+                            </p:stCondLst>
+                            <p:childTnLst>
+                              <p:par>
+                                <p:cTn id="5" presetID="16" presetClass="entr" presetSubtype="21" fill="hold" nodeType="clickEffect">
+                                  <p:stCondLst>
+                                    <p:cond delay="0"/>
+                                  </p:stCondLst>
+                                  <p:childTnLst>
+                                    <p:set>
+                                      <p:cBhvr>
+                                        <p:cTn id="6" dur="1" fill="hold">
+                                          <p:stCondLst>
+                                            <p:cond delay="0"/>
+                                          </p:stCondLst>
+                                        </p:cTn>
+                                        <p:tgtEl>
+                                          <p:spTgt spid="17"/>
+                                        </p:tgtEl>
+                                        <p:attrNameLst>
+                                          <p:attrName>style.visibility</p:attrName>
+                                        </p:attrNameLst>
+                                      </p:cBhvr>
+                                      <p:to>
+                                        <p:strVal val="visible"/>
+                                      </p:to>
+                                    </p:set>
+                                    <p:animEffect transition="in" filter="barn(inVertical)">
+                                      <p:cBhvr>
+                                        <p:cTn id="7" dur="500"/>
+                                        <p:tgtEl>
+                                          <p:spTgt spid="17"/>
+                                        </p:tgtEl>
+                                      </p:cBhvr>
+                                    </p:animEffect>
+                                  </p:childTnLst>
+                                </p:cTn>
+                              </p:par>
+                              <p:par>
+                                <p:cTn id="8" presetID="16" presetClass="entr" presetSubtype="21" fill="hold" nodeType="withEffect">
+                                  <p:stCondLst>
+                                    <p:cond delay="0"/>
+                                  </p:stCondLst>
+                                  <p:childTnLst>
+                                    <p:set>
+                                      <p:cBhvr>
+                                        <p:cTn id="9" dur="1" fill="hold">
+                                          <p:stCondLst>
+                                            <p:cond delay="0"/>
+                                          </p:stCondLst>
+                                        </p:cTn>
+                                        <p:tgtEl>
+                                          <p:spTgt spid="20"/>
+                                        </p:tgtEl>
+                                        <p:attrNameLst>
+                                          <p:attrName>style.visibility</p:attrName>
+                                        </p:attrNameLst>
+                                      </p:cBhvr>
+                                      <p:to>
+                                        <p:strVal val="visible"/>
+                                      </p:to>
+                                    </p:set>
+                                    <p:animEffect transition="in" filter="barn(inVertical)">
+                                      <p:cBhvr>
+                                        <p:cTn id="10" dur="500"/>
+                                        <p:tgtEl>
+                                          <p:spTgt spid="20"/>
+                                        </p:tgtEl>
+                                      </p:cBhvr>
+                                    </p:animEffect>
+                                  </p:childTnLst>
+                                </p:cTn>
+                              </p:par>
+                              <p:par>
+                                <p:cTn id="11" presetID="16" presetClass="entr" presetSubtype="21" fill="hold" nodeType="withEffect">
+                                  <p:stCondLst>
+                                    <p:cond delay="0"/>
+                                  </p:stCondLst>
+                                  <p:childTnLst>
+                                    <p:set>
+                                      <p:cBhvr>
+                                        <p:cTn id="12" dur="1" fill="hold">
+                                          <p:stCondLst>
+                                            <p:cond delay="0"/>
+                                          </p:stCondLst>
+                                        </p:cTn>
+                                        <p:tgtEl>
+                                          <p:spTgt spid="23"/>
+                                        </p:tgtEl>
+                                        <p:attrNameLst>
+                                          <p:attrName>style.visibility</p:attrName>
+                                        </p:attrNameLst>
+                                      </p:cBhvr>
+                                      <p:to>
+                                        <p:strVal val="visible"/>
+                                      </p:to>
+                                    </p:set>
+                                    <p:animEffect transition="in" filter="barn(inVertical)">
+                                      <p:cBhvr>
+                                        <p:cTn id="13" dur="500"/>
+                                        <p:tgtEl>
+                                          <p:spTgt spid="23"/>
+                                        </p:tgtEl>
+                                      </p:cBhvr>
+                                    </p:animEffect>
+                                  </p:childTnLst>
+                                </p:cTn>
+                              </p:par>
+                              <p:par>
+                                <p:cTn id="14" presetID="16" presetClass="entr" presetSubtype="21" fill="hold" nodeType="withEffect">
+                                  <p:stCondLst>
+                                    <p:cond delay="0"/>
+                                  </p:stCondLst>
+                                  <p:childTnLst>
+                                    <p:set>
+                                      <p:cBhvr>
+                                        <p:cTn id="15" dur="1" fill="hold">
+                                          <p:stCondLst>
+                                            <p:cond delay="0"/>
+                                          </p:stCondLst>
+                                        </p:cTn>
+                                        <p:tgtEl>
+                                          <p:spTgt spid="24"/>
+                                        </p:tgtEl>
+                                        <p:attrNameLst>
+                                          <p:attrName>style.visibility</p:attrName>
+                                        </p:attrNameLst>
+                                      </p:cBhvr>
+                                      <p:to>
+                                        <p:strVal val="visible"/>
+                                      </p:to>
+                                    </p:set>
+                                    <p:animEffect transition="in" filter="barn(inVertical)">
+                                      <p:cBhvr>
+                                        <p:cTn id="16" dur="500"/>
+                                        <p:tgtEl>
+                                          <p:spTgt spid="24"/>
+                                        </p:tgtEl>
+                                      </p:cBhvr>
+                                    </p:animEffect>
+                                  </p:childTnLst>
+                                </p:cTn>
+                              </p:par>
+                              <p:par>
+                                <p:cTn id="17" presetID="16" presetClass="entr" presetSubtype="21" fill="hold" nodeType="withEffect">
+                                  <p:stCondLst>
+                                    <p:cond delay="0"/>
+                                  </p:stCondLst>
+                                  <p:childTnLst>
+                                    <p:set>
+                                      <p:cBhvr>
+                                        <p:cTn id="18" dur="1" fill="hold">
+                                          <p:stCondLst>
+                                            <p:cond delay="0"/>
+                                          </p:stCondLst>
+                                        </p:cTn>
+                                        <p:tgtEl>
+                                          <p:spTgt spid="25"/>
+                                        </p:tgtEl>
+                                        <p:attrNameLst>
+                                          <p:attrName>style.visibility</p:attrName>
+                                        </p:attrNameLst>
+                                      </p:cBhvr>
+                                      <p:to>
+                                        <p:strVal val="visible"/>
+                                      </p:to>
+                                    </p:set>
+                                    <p:animEffect transition="in" filter="barn(inVertical)">
+                                      <p:cBhvr>
+                                        <p:cTn id="19" dur="500"/>
+                                        <p:tgtEl>
+                                          <p:spTgt spid="25"/>
+                                        </p:tgtEl>
+                                      </p:cBhvr>
+                                    </p:animEffect>
+                                  </p:childTnLst>
+                                </p:cTn>
+                              </p:par>
+                              <p:par>
+                                <p:cTn id="20" presetID="16" presetClass="entr" presetSubtype="21" fill="hold" nodeType="withEffect">
+                                  <p:stCondLst>
+                                    <p:cond delay="0"/>
+                                  </p:stCondLst>
+                                  <p:childTnLst>
+                                    <p:set>
+                                      <p:cBhvr>
+                                        <p:cTn id="21" dur="1" fill="hold">
+                                          <p:stCondLst>
+                                            <p:cond delay="0"/>
+                                          </p:stCondLst>
+                                        </p:cTn>
+                                        <p:tgtEl>
+                                          <p:spTgt spid="26"/>
+                                        </p:tgtEl>
+                                        <p:attrNameLst>
+                                          <p:attrName>style.visibility</p:attrName>
+                                        </p:attrNameLst>
+                                      </p:cBhvr>
+                                      <p:to>
+                                        <p:strVal val="visible"/>
+                                      </p:to>
+                                    </p:set>
+                                    <p:animEffect transition="in" filter="barn(inVertical)">
+                                      <p:cBhvr>
+                                        <p:cTn id="22" dur="500"/>
+                                        <p:tgtEl>
+                                          <p:spTgt spid="26"/>
+                                        </p:tgtEl>
+                                      </p:cBhvr>
+                                    </p:animEffect>
+                                  </p:childTnLst>
+                                </p:cTn>
+                              </p:par>
+                              <p:par>
+                                <p:cTn id="23" presetID="16" presetClass="entr" presetSubtype="21" fill="hold" grpId="0" nodeType="withEffect">
+                                  <p:stCondLst>
+                                    <p:cond delay="0"/>
+                                  </p:stCondLst>
+                                  <p:childTnLst>
+                                    <p:set>
+                                      <p:cBhvr>
+                                        <p:cTn id="24" dur="1" fill="hold">
+                                          <p:stCondLst>
+                                            <p:cond delay="0"/>
+                                          </p:stCondLst>
+                                        </p:cTn>
+                                        <p:tgtEl>
+                                          <p:spTgt spid="72"/>
+                                        </p:tgtEl>
+                                        <p:attrNameLst>
+                                          <p:attrName>style.visibility</p:attrName>
+                                        </p:attrNameLst>
+                                      </p:cBhvr>
+                                      <p:to>
+                                        <p:strVal val="visible"/>
+                                      </p:to>
+                                    </p:set>
+                                    <p:animEffect transition="in" filter="barn(inVertical)">
+                                      <p:cBhvr>
+                                        <p:cTn id="25" dur="500"/>
+                                        <p:tgtEl>
+                                          <p:spTgt spid="72"/>
+                                        </p:tgtEl>
+                                      </p:cBhvr>
+                                    </p:animEffect>
+                                  </p:childTnLst>
+                                </p:cTn>
+                              </p:par>
+                            </p:childTnLst>
+                          </p:cTn>
+                        </p:par>
+                      </p:childTnLst>
+                    </p:cTn>
+                  </p:par>
+                  <p:par>
+                    <p:cTn id="26" fill="hold">
+                      <p:stCondLst>
+                        <p:cond delay="indefinite"/>
+                      </p:stCondLst>
+                      <p:childTnLst>
+                        <p:par>
+                          <p:cTn id="27" fill="hold">
+                            <p:stCondLst>
+                              <p:cond delay="0"/>
+                            </p:stCondLst>
+                            <p:childTnLst>
+                              <p:par>
+                                <p:cTn id="28" presetID="16" presetClass="entr" presetSubtype="21" fill="hold" nodeType="clickEffect">
+                                  <p:stCondLst>
+                                    <p:cond delay="0"/>
+                                  </p:stCondLst>
+                                  <p:childTnLst>
+                                    <p:set>
+                                      <p:cBhvr>
+                                        <p:cTn id="29" dur="1" fill="hold">
+                                          <p:stCondLst>
+                                            <p:cond delay="0"/>
+                                          </p:stCondLst>
+                                        </p:cTn>
+                                        <p:tgtEl>
+                                          <p:spTgt spid="27"/>
+                                        </p:tgtEl>
+                                        <p:attrNameLst>
+                                          <p:attrName>style.visibility</p:attrName>
+                                        </p:attrNameLst>
+                                      </p:cBhvr>
+                                      <p:to>
+                                        <p:strVal val="visible"/>
+                                      </p:to>
+                                    </p:set>
+                                    <p:animEffect transition="in" filter="barn(inVertical)">
+                                      <p:cBhvr>
+                                        <p:cTn id="30" dur="500"/>
+                                        <p:tgtEl>
+                                          <p:spTgt spid="27"/>
+                                        </p:tgtEl>
+                                      </p:cBhvr>
+                                    </p:animEffect>
+                                  </p:childTnLst>
+                                </p:cTn>
+                              </p:par>
+                              <p:par>
+                                <p:cTn id="31" presetID="16" presetClass="entr" presetSubtype="21" fill="hold" nodeType="withEffect">
+                                  <p:stCondLst>
+                                    <p:cond delay="0"/>
+                                  </p:stCondLst>
+                                  <p:childTnLst>
+                                    <p:set>
+                                      <p:cBhvr>
+                                        <p:cTn id="32" dur="1" fill="hold">
+                                          <p:stCondLst>
+                                            <p:cond delay="0"/>
+                                          </p:stCondLst>
+                                        </p:cTn>
+                                        <p:tgtEl>
+                                          <p:spTgt spid="30"/>
+                                        </p:tgtEl>
+                                        <p:attrNameLst>
+                                          <p:attrName>style.visibility</p:attrName>
+                                        </p:attrNameLst>
+                                      </p:cBhvr>
+                                      <p:to>
+                                        <p:strVal val="visible"/>
+                                      </p:to>
+                                    </p:set>
+                                    <p:animEffect transition="in" filter="barn(inVertical)">
+                                      <p:cBhvr>
+                                        <p:cTn id="33" dur="500"/>
+                                        <p:tgtEl>
+                                          <p:spTgt spid="30"/>
+                                        </p:tgtEl>
+                                      </p:cBhvr>
+                                    </p:animEffect>
+                                  </p:childTnLst>
+                                </p:cTn>
+                              </p:par>
+                              <p:par>
+                                <p:cTn id="34" presetID="16" presetClass="entr" presetSubtype="21" fill="hold" nodeType="withEffect">
+                                  <p:stCondLst>
+                                    <p:cond delay="0"/>
+                                  </p:stCondLst>
+                                  <p:childTnLst>
+                                    <p:set>
+                                      <p:cBhvr>
+                                        <p:cTn id="35" dur="1" fill="hold">
+                                          <p:stCondLst>
+                                            <p:cond delay="0"/>
+                                          </p:stCondLst>
+                                        </p:cTn>
+                                        <p:tgtEl>
+                                          <p:spTgt spid="33"/>
+                                        </p:tgtEl>
+                                        <p:attrNameLst>
+                                          <p:attrName>style.visibility</p:attrName>
+                                        </p:attrNameLst>
+                                      </p:cBhvr>
+                                      <p:to>
+                                        <p:strVal val="visible"/>
+                                      </p:to>
+                                    </p:set>
+                                    <p:animEffect transition="in" filter="barn(inVertical)">
+                                      <p:cBhvr>
+                                        <p:cTn id="36" dur="500"/>
+                                        <p:tgtEl>
+                                          <p:spTgt spid="33"/>
+                                        </p:tgtEl>
+                                      </p:cBhvr>
+                                    </p:animEffect>
+                                  </p:childTnLst>
+                                </p:cTn>
+                              </p:par>
+                              <p:par>
+                                <p:cTn id="37" presetID="16" presetClass="entr" presetSubtype="21" fill="hold" nodeType="withEffect">
+                                  <p:stCondLst>
+                                    <p:cond delay="0"/>
+                                  </p:stCondLst>
+                                  <p:childTnLst>
+                                    <p:set>
+                                      <p:cBhvr>
+                                        <p:cTn id="38" dur="1" fill="hold">
+                                          <p:stCondLst>
+                                            <p:cond delay="0"/>
+                                          </p:stCondLst>
+                                        </p:cTn>
+                                        <p:tgtEl>
+                                          <p:spTgt spid="34"/>
+                                        </p:tgtEl>
+                                        <p:attrNameLst>
+                                          <p:attrName>style.visibility</p:attrName>
+                                        </p:attrNameLst>
+                                      </p:cBhvr>
+                                      <p:to>
+                                        <p:strVal val="visible"/>
+                                      </p:to>
+                                    </p:set>
+                                    <p:animEffect transition="in" filter="barn(inVertical)">
+                                      <p:cBhvr>
+                                        <p:cTn id="39" dur="500"/>
+                                        <p:tgtEl>
+                                          <p:spTgt spid="34"/>
+                                        </p:tgtEl>
+                                      </p:cBhvr>
+                                    </p:animEffect>
+                                  </p:childTnLst>
+                                </p:cTn>
+                              </p:par>
+                              <p:par>
+                                <p:cTn id="40" presetID="16" presetClass="entr" presetSubtype="21" fill="hold" nodeType="withEffect">
+                                  <p:stCondLst>
+                                    <p:cond delay="0"/>
+                                  </p:stCondLst>
+                                  <p:childTnLst>
+                                    <p:set>
+                                      <p:cBhvr>
+                                        <p:cTn id="41" dur="1" fill="hold">
+                                          <p:stCondLst>
+                                            <p:cond delay="0"/>
+                                          </p:stCondLst>
+                                        </p:cTn>
+                                        <p:tgtEl>
+                                          <p:spTgt spid="35"/>
+                                        </p:tgtEl>
+                                        <p:attrNameLst>
+                                          <p:attrName>style.visibility</p:attrName>
+                                        </p:attrNameLst>
+                                      </p:cBhvr>
+                                      <p:to>
+                                        <p:strVal val="visible"/>
+                                      </p:to>
+                                    </p:set>
+                                    <p:animEffect transition="in" filter="barn(inVertical)">
+                                      <p:cBhvr>
+                                        <p:cTn id="42" dur="500"/>
+                                        <p:tgtEl>
+                                          <p:spTgt spid="35"/>
+                                        </p:tgtEl>
+                                      </p:cBhvr>
+                                    </p:animEffect>
+                                  </p:childTnLst>
+                                </p:cTn>
+                              </p:par>
+                              <p:par>
+                                <p:cTn id="43" presetID="16" presetClass="entr" presetSubtype="21" fill="hold" nodeType="withEffect">
+                                  <p:stCondLst>
+                                    <p:cond delay="0"/>
+                                  </p:stCondLst>
+                                  <p:childTnLst>
+                                    <p:set>
+                                      <p:cBhvr>
+                                        <p:cTn id="44" dur="1" fill="hold">
+                                          <p:stCondLst>
+                                            <p:cond delay="0"/>
+                                          </p:stCondLst>
+                                        </p:cTn>
+                                        <p:tgtEl>
+                                          <p:spTgt spid="36"/>
+                                        </p:tgtEl>
+                                        <p:attrNameLst>
+                                          <p:attrName>style.visibility</p:attrName>
+                                        </p:attrNameLst>
+                                      </p:cBhvr>
+                                      <p:to>
+                                        <p:strVal val="visible"/>
+                                      </p:to>
+                                    </p:set>
+                                    <p:animEffect transition="in" filter="barn(inVertical)">
+                                      <p:cBhvr>
+                                        <p:cTn id="45" dur="500"/>
+                                        <p:tgtEl>
+                                          <p:spTgt spid="36"/>
+                                        </p:tgtEl>
+                                      </p:cBhvr>
+                                    </p:animEffect>
+                                  </p:childTnLst>
+                                </p:cTn>
+                              </p:par>
+                              <p:par>
+                                <p:cTn id="46" presetID="16" presetClass="entr" presetSubtype="21" fill="hold" grpId="0" nodeType="withEffect">
+                                  <p:stCondLst>
+                                    <p:cond delay="0"/>
+                                  </p:stCondLst>
+                                  <p:childTnLst>
+                                    <p:set>
+                                      <p:cBhvr>
+                                        <p:cTn id="47" dur="1" fill="hold">
+                                          <p:stCondLst>
+                                            <p:cond delay="0"/>
+                                          </p:stCondLst>
+                                        </p:cTn>
+                                        <p:tgtEl>
+                                          <p:spTgt spid="73"/>
+                                        </p:tgtEl>
+                                        <p:attrNameLst>
+                                          <p:attrName>style.visibility</p:attrName>
+                                        </p:attrNameLst>
+                                      </p:cBhvr>
+                                      <p:to>
+                                        <p:strVal val="visible"/>
+                                      </p:to>
+                                    </p:set>
+                                    <p:animEffect transition="in" filter="barn(inVertical)">
+                                      <p:cBhvr>
+                                        <p:cTn id="48" dur="500"/>
+                                        <p:tgtEl>
+                                          <p:spTgt spid="73"/>
+                                        </p:tgtEl>
+                                      </p:cBhvr>
+                                    </p:animEffect>
+                                  </p:childTnLst>
+                                </p:cTn>
+                              </p:par>
+                            </p:childTnLst>
+                          </p:cTn>
+                        </p:par>
+                      </p:childTnLst>
+                    </p:cTn>
+                  </p:par>
+                  <p:par>
+                    <p:cTn id="49" fill="hold">
+                      <p:stCondLst>
+                        <p:cond delay="indefinite"/>
+                      </p:stCondLst>
+                      <p:childTnLst>
+                        <p:par>
+                          <p:cTn id="50" fill="hold">
+                            <p:stCondLst>
+                              <p:cond delay="0"/>
+                            </p:stCondLst>
+                            <p:childTnLst>
+                              <p:par>
+                                <p:cTn id="51" presetID="16" presetClass="entr" presetSubtype="21" fill="hold" nodeType="clickEffect">
+                                  <p:stCondLst>
+                                    <p:cond delay="0"/>
+                                  </p:stCondLst>
+                                  <p:childTnLst>
+                                    <p:set>
+                                      <p:cBhvr>
+                                        <p:cTn id="52" dur="1" fill="hold">
+                                          <p:stCondLst>
+                                            <p:cond delay="0"/>
+                                          </p:stCondLst>
+                                        </p:cTn>
+                                        <p:tgtEl>
+                                          <p:spTgt spid="37"/>
+                                        </p:tgtEl>
+                                        <p:attrNameLst>
+                                          <p:attrName>style.visibility</p:attrName>
+                                        </p:attrNameLst>
+                                      </p:cBhvr>
+                                      <p:to>
+                                        <p:strVal val="visible"/>
+                                      </p:to>
+                                    </p:set>
+                                    <p:animEffect transition="in" filter="barn(inVertical)">
+                                      <p:cBhvr>
+                                        <p:cTn id="53" dur="500"/>
+                                        <p:tgtEl>
+                                          <p:spTgt spid="37"/>
+                                        </p:tgtEl>
+                                      </p:cBhvr>
+                                    </p:animEffect>
+                                  </p:childTnLst>
+                                </p:cTn>
+                              </p:par>
+                              <p:par>
+                                <p:cTn id="54" presetID="16" presetClass="entr" presetSubtype="21" fill="hold" nodeType="withEffect">
+                                  <p:stCondLst>
+                                    <p:cond delay="0"/>
+                                  </p:stCondLst>
+                                  <p:childTnLst>
+                                    <p:set>
+                                      <p:cBhvr>
+                                        <p:cTn id="55" dur="1" fill="hold">
+                                          <p:stCondLst>
+                                            <p:cond delay="0"/>
+                                          </p:stCondLst>
+                                        </p:cTn>
+                                        <p:tgtEl>
+                                          <p:spTgt spid="46"/>
+                                        </p:tgtEl>
+                                        <p:attrNameLst>
+                                          <p:attrName>style.visibility</p:attrName>
+                                        </p:attrNameLst>
+                                      </p:cBhvr>
+                                      <p:to>
+                                        <p:strVal val="visible"/>
+                                      </p:to>
+                                    </p:set>
+                                    <p:animEffect transition="in" filter="barn(inVertical)">
+                                      <p:cBhvr>
+                                        <p:cTn id="56" dur="500"/>
+                                        <p:tgtEl>
+                                          <p:spTgt spid="46"/>
+                                        </p:tgtEl>
+                                      </p:cBhvr>
+                                    </p:animEffect>
+                                  </p:childTnLst>
+                                </p:cTn>
+                              </p:par>
+                              <p:par>
+                                <p:cTn id="57" presetID="16" presetClass="entr" presetSubtype="21" fill="hold" nodeType="withEffect">
+                                  <p:stCondLst>
+                                    <p:cond delay="0"/>
+                                  </p:stCondLst>
+                                  <p:childTnLst>
+                                    <p:set>
+                                      <p:cBhvr>
+                                        <p:cTn id="58" dur="1" fill="hold">
+                                          <p:stCondLst>
+                                            <p:cond delay="0"/>
+                                          </p:stCondLst>
+                                        </p:cTn>
+                                        <p:tgtEl>
+                                          <p:spTgt spid="49"/>
+                                        </p:tgtEl>
+                                        <p:attrNameLst>
+                                          <p:attrName>style.visibility</p:attrName>
+                                        </p:attrNameLst>
+                                      </p:cBhvr>
+                                      <p:to>
+                                        <p:strVal val="visible"/>
+                                      </p:to>
+                                    </p:set>
+                                    <p:animEffect transition="in" filter="barn(inVertical)">
+                                      <p:cBhvr>
+                                        <p:cTn id="59" dur="500"/>
+                                        <p:tgtEl>
+                                          <p:spTgt spid="49"/>
+                                        </p:tgtEl>
+                                      </p:cBhvr>
+                                    </p:animEffect>
+                                  </p:childTnLst>
+                                </p:cTn>
+                              </p:par>
+                              <p:par>
+                                <p:cTn id="60" presetID="16" presetClass="entr" presetSubtype="21" fill="hold" nodeType="withEffect">
+                                  <p:stCondLst>
+                                    <p:cond delay="0"/>
+                                  </p:stCondLst>
+                                  <p:childTnLst>
+                                    <p:set>
+                                      <p:cBhvr>
+                                        <p:cTn id="61" dur="1" fill="hold">
+                                          <p:stCondLst>
+                                            <p:cond delay="0"/>
+                                          </p:stCondLst>
+                                        </p:cTn>
+                                        <p:tgtEl>
+                                          <p:spTgt spid="50"/>
+                                        </p:tgtEl>
+                                        <p:attrNameLst>
+                                          <p:attrName>style.visibility</p:attrName>
+                                        </p:attrNameLst>
+                                      </p:cBhvr>
+                                      <p:to>
+                                        <p:strVal val="visible"/>
+                                      </p:to>
+                                    </p:set>
+                                    <p:animEffect transition="in" filter="barn(inVertical)">
+                                      <p:cBhvr>
+                                        <p:cTn id="62" dur="500"/>
+                                        <p:tgtEl>
+                                          <p:spTgt spid="50"/>
+                                        </p:tgtEl>
+                                      </p:cBhvr>
+                                    </p:animEffect>
+                                  </p:childTnLst>
+                                </p:cTn>
+                              </p:par>
+                              <p:par>
+                                <p:cTn id="63" presetID="16" presetClass="entr" presetSubtype="21" fill="hold" nodeType="withEffect">
+                                  <p:stCondLst>
+                                    <p:cond delay="0"/>
+                                  </p:stCondLst>
+                                  <p:childTnLst>
+                                    <p:set>
+                                      <p:cBhvr>
+                                        <p:cTn id="64" dur="1" fill="hold">
+                                          <p:stCondLst>
+                                            <p:cond delay="0"/>
+                                          </p:stCondLst>
+                                        </p:cTn>
+                                        <p:tgtEl>
+                                          <p:spTgt spid="51"/>
+                                        </p:tgtEl>
+                                        <p:attrNameLst>
+                                          <p:attrName>style.visibility</p:attrName>
+                                        </p:attrNameLst>
+                                      </p:cBhvr>
+                                      <p:to>
+                                        <p:strVal val="visible"/>
+                                      </p:to>
+                                    </p:set>
+                                    <p:animEffect transition="in" filter="barn(inVertical)">
+                                      <p:cBhvr>
+                                        <p:cTn id="65" dur="500"/>
+                                        <p:tgtEl>
+                                          <p:spTgt spid="51"/>
+                                        </p:tgtEl>
+                                      </p:cBhvr>
+                                    </p:animEffect>
+                                  </p:childTnLst>
+                                </p:cTn>
+                              </p:par>
+                              <p:par>
+                                <p:cTn id="66" presetID="16" presetClass="entr" presetSubtype="21" fill="hold" grpId="0" nodeType="withEffect">
+                                  <p:stCondLst>
+                                    <p:cond delay="0"/>
+                                  </p:stCondLst>
+                                  <p:childTnLst>
+                                    <p:set>
+                                      <p:cBhvr>
+                                        <p:cTn id="67" dur="1" fill="hold">
+                                          <p:stCondLst>
+                                            <p:cond delay="0"/>
+                                          </p:stCondLst>
+                                        </p:cTn>
+                                        <p:tgtEl>
+                                          <p:spTgt spid="74"/>
+                                        </p:tgtEl>
+                                        <p:attrNameLst>
+                                          <p:attrName>style.visibility</p:attrName>
+                                        </p:attrNameLst>
+                                      </p:cBhvr>
+                                      <p:to>
+                                        <p:strVal val="visible"/>
+                                      </p:to>
+                                    </p:set>
+                                    <p:animEffect transition="in" filter="barn(inVertical)">
+                                      <p:cBhvr>
+                                        <p:cTn id="68" dur="500"/>
+                                        <p:tgtEl>
+                                          <p:spTgt spid="74"/>
+                                        </p:tgtEl>
+                                      </p:cBhvr>
+                                    </p:animEffect>
+                                  </p:childTnLst>
+                                </p:cTn>
+                              </p:par>
+                            </p:childTnLst>
+                          </p:cTn>
+                        </p:par>
+                      </p:childTnLst>
+                    </p:cTn>
+                  </p:par>
+                  <p:par>
+                    <p:cTn id="69" fill="hold">
+                      <p:stCondLst>
+                        <p:cond delay="indefinite"/>
+                      </p:stCondLst>
+                      <p:childTnLst>
+                        <p:par>
+                          <p:cTn id="70" fill="hold">
+                            <p:stCondLst>
+                              <p:cond delay="0"/>
+                            </p:stCondLst>
+                            <p:childTnLst>
+                              <p:par>
+                                <p:cTn id="71" presetID="16" presetClass="entr" presetSubtype="21" fill="hold" nodeType="clickEffect">
+                                  <p:stCondLst>
+                                    <p:cond delay="0"/>
+                                  </p:stCondLst>
+                                  <p:childTnLst>
+                                    <p:set>
+                                      <p:cBhvr>
+                                        <p:cTn id="72" dur="1" fill="hold">
+                                          <p:stCondLst>
+                                            <p:cond delay="0"/>
+                                          </p:stCondLst>
+                                        </p:cTn>
+                                        <p:tgtEl>
+                                          <p:spTgt spid="40"/>
+                                        </p:tgtEl>
+                                        <p:attrNameLst>
+                                          <p:attrName>style.visibility</p:attrName>
+                                        </p:attrNameLst>
+                                      </p:cBhvr>
+                                      <p:to>
+                                        <p:strVal val="visible"/>
+                                      </p:to>
+                                    </p:set>
+                                    <p:animEffect transition="in" filter="barn(inVertical)">
+                                      <p:cBhvr>
+                                        <p:cTn id="73" dur="500"/>
+                                        <p:tgtEl>
+                                          <p:spTgt spid="40"/>
+                                        </p:tgtEl>
+                                      </p:cBhvr>
+                                    </p:animEffect>
+                                  </p:childTnLst>
+                                </p:cTn>
+                              </p:par>
+                              <p:par>
+                                <p:cTn id="74" presetID="16" presetClass="entr" presetSubtype="21" fill="hold" nodeType="withEffect">
+                                  <p:stCondLst>
+                                    <p:cond delay="0"/>
+                                  </p:stCondLst>
+                                  <p:childTnLst>
+                                    <p:set>
+                                      <p:cBhvr>
+                                        <p:cTn id="75" dur="1" fill="hold">
+                                          <p:stCondLst>
+                                            <p:cond delay="0"/>
+                                          </p:stCondLst>
+                                        </p:cTn>
+                                        <p:tgtEl>
+                                          <p:spTgt spid="52"/>
+                                        </p:tgtEl>
+                                        <p:attrNameLst>
+                                          <p:attrName>style.visibility</p:attrName>
+                                        </p:attrNameLst>
+                                      </p:cBhvr>
+                                      <p:to>
+                                        <p:strVal val="visible"/>
+                                      </p:to>
+                                    </p:set>
+                                    <p:animEffect transition="in" filter="barn(inVertical)">
+                                      <p:cBhvr>
+                                        <p:cTn id="76" dur="500"/>
+                                        <p:tgtEl>
+                                          <p:spTgt spid="52"/>
+                                        </p:tgtEl>
+                                      </p:cBhvr>
+                                    </p:animEffect>
+                                  </p:childTnLst>
+                                </p:cTn>
+                              </p:par>
+                              <p:par>
+                                <p:cTn id="77" presetID="16" presetClass="entr" presetSubtype="21" fill="hold" nodeType="withEffect">
+                                  <p:stCondLst>
+                                    <p:cond delay="0"/>
+                                  </p:stCondLst>
+                                  <p:childTnLst>
+                                    <p:set>
+                                      <p:cBhvr>
+                                        <p:cTn id="78" dur="1" fill="hold">
+                                          <p:stCondLst>
+                                            <p:cond delay="0"/>
+                                          </p:stCondLst>
+                                        </p:cTn>
+                                        <p:tgtEl>
+                                          <p:spTgt spid="55"/>
+                                        </p:tgtEl>
+                                        <p:attrNameLst>
+                                          <p:attrName>style.visibility</p:attrName>
+                                        </p:attrNameLst>
+                                      </p:cBhvr>
+                                      <p:to>
+                                        <p:strVal val="visible"/>
+                                      </p:to>
+                                    </p:set>
+                                    <p:animEffect transition="in" filter="barn(inVertical)">
+                                      <p:cBhvr>
+                                        <p:cTn id="79" dur="500"/>
+                                        <p:tgtEl>
+                                          <p:spTgt spid="55"/>
+                                        </p:tgtEl>
+                                      </p:cBhvr>
+                                    </p:animEffect>
+                                  </p:childTnLst>
+                                </p:cTn>
+                              </p:par>
+                              <p:par>
+                                <p:cTn id="80" presetID="16" presetClass="entr" presetSubtype="21" fill="hold" nodeType="withEffect">
+                                  <p:stCondLst>
+                                    <p:cond delay="0"/>
+                                  </p:stCondLst>
+                                  <p:childTnLst>
+                                    <p:set>
+                                      <p:cBhvr>
+                                        <p:cTn id="81" dur="1" fill="hold">
+                                          <p:stCondLst>
+                                            <p:cond delay="0"/>
+                                          </p:stCondLst>
+                                        </p:cTn>
+                                        <p:tgtEl>
+                                          <p:spTgt spid="56"/>
+                                        </p:tgtEl>
+                                        <p:attrNameLst>
+                                          <p:attrName>style.visibility</p:attrName>
+                                        </p:attrNameLst>
+                                      </p:cBhvr>
+                                      <p:to>
+                                        <p:strVal val="visible"/>
+                                      </p:to>
+                                    </p:set>
+                                    <p:animEffect transition="in" filter="barn(inVertical)">
+                                      <p:cBhvr>
+                                        <p:cTn id="82" dur="500"/>
+                                        <p:tgtEl>
+                                          <p:spTgt spid="56"/>
+                                        </p:tgtEl>
+                                      </p:cBhvr>
+                                    </p:animEffect>
+                                  </p:childTnLst>
+                                </p:cTn>
+                              </p:par>
+                              <p:par>
+                                <p:cTn id="83" presetID="16" presetClass="entr" presetSubtype="21" fill="hold" nodeType="withEffect">
+                                  <p:stCondLst>
+                                    <p:cond delay="0"/>
+                                  </p:stCondLst>
+                                  <p:childTnLst>
+                                    <p:set>
+                                      <p:cBhvr>
+                                        <p:cTn id="84" dur="1" fill="hold">
+                                          <p:stCondLst>
+                                            <p:cond delay="0"/>
+                                          </p:stCondLst>
+                                        </p:cTn>
+                                        <p:tgtEl>
+                                          <p:spTgt spid="57"/>
+                                        </p:tgtEl>
+                                        <p:attrNameLst>
+                                          <p:attrName>style.visibility</p:attrName>
+                                        </p:attrNameLst>
+                                      </p:cBhvr>
+                                      <p:to>
+                                        <p:strVal val="visible"/>
+                                      </p:to>
+                                    </p:set>
+                                    <p:animEffect transition="in" filter="barn(inVertical)">
+                                      <p:cBhvr>
+                                        <p:cTn id="85" dur="500"/>
+                                        <p:tgtEl>
+                                          <p:spTgt spid="57"/>
+                                        </p:tgtEl>
+                                      </p:cBhvr>
+                                    </p:animEffect>
+                                  </p:childTnLst>
+                                </p:cTn>
+                              </p:par>
+                              <p:par>
+                                <p:cTn id="86" presetID="16" presetClass="entr" presetSubtype="21" fill="hold" nodeType="withEffect">
+                                  <p:stCondLst>
+                                    <p:cond delay="0"/>
+                                  </p:stCondLst>
+                                  <p:childTnLst>
+                                    <p:set>
+                                      <p:cBhvr>
+                                        <p:cTn id="87" dur="1" fill="hold">
+                                          <p:stCondLst>
+                                            <p:cond delay="0"/>
+                                          </p:stCondLst>
+                                        </p:cTn>
+                                        <p:tgtEl>
+                                          <p:spTgt spid="58"/>
+                                        </p:tgtEl>
+                                        <p:attrNameLst>
+                                          <p:attrName>style.visibility</p:attrName>
+                                        </p:attrNameLst>
+                                      </p:cBhvr>
+                                      <p:to>
+                                        <p:strVal val="visible"/>
+                                      </p:to>
+                                    </p:set>
+                                    <p:animEffect transition="in" filter="barn(inVertical)">
+                                      <p:cBhvr>
+                                        <p:cTn id="88" dur="500"/>
+                                        <p:tgtEl>
+                                          <p:spTgt spid="58"/>
+                                        </p:tgtEl>
+                                      </p:cBhvr>
+                                    </p:animEffect>
+                                  </p:childTnLst>
+                                </p:cTn>
+                              </p:par>
+                              <p:par>
+                                <p:cTn id="89" presetID="16" presetClass="entr" presetSubtype="21" fill="hold" grpId="0" nodeType="withEffect">
+                                  <p:stCondLst>
+                                    <p:cond delay="0"/>
+                                  </p:stCondLst>
+                                  <p:childTnLst>
+                                    <p:set>
+                                      <p:cBhvr>
+                                        <p:cTn id="90" dur="1" fill="hold">
+                                          <p:stCondLst>
+                                            <p:cond delay="0"/>
+                                          </p:stCondLst>
+                                        </p:cTn>
+                                        <p:tgtEl>
+                                          <p:spTgt spid="75"/>
+                                        </p:tgtEl>
+                                        <p:attrNameLst>
+                                          <p:attrName>style.visibility</p:attrName>
+                                        </p:attrNameLst>
+                                      </p:cBhvr>
+                                      <p:to>
+                                        <p:strVal val="visible"/>
+                                      </p:to>
+                                    </p:set>
+                                    <p:animEffect transition="in" filter="barn(inVertical)">
+                                      <p:cBhvr>
+                                        <p:cTn id="91" dur="500"/>
+                                        <p:tgtEl>
+                                          <p:spTgt spid="75"/>
+                                        </p:tgtEl>
+                                      </p:cBhvr>
+                                    </p:animEffect>
+                                  </p:childTnLst>
+                                </p:cTn>
+                              </p:par>
+                            </p:childTnLst>
+                          </p:cTn>
+                        </p:par>
+                      </p:childTnLst>
+                    </p:cTn>
+                  </p:par>
+                  <p:par>
+                    <p:cTn id="92" fill="hold">
+                      <p:stCondLst>
+                        <p:cond delay="indefinite"/>
+                      </p:stCondLst>
+                      <p:childTnLst>
+                        <p:par>
+                          <p:cTn id="93" fill="hold">
+                            <p:stCondLst>
+                              <p:cond delay="0"/>
+                            </p:stCondLst>
+                            <p:childTnLst>
+                              <p:par>
+                                <p:cTn id="94" presetID="16" presetClass="entr" presetSubtype="21" fill="hold" nodeType="clickEffect">
+                                  <p:stCondLst>
+                                    <p:cond delay="0"/>
+                                  </p:stCondLst>
+                                  <p:childTnLst>
+                                    <p:set>
+                                      <p:cBhvr>
+                                        <p:cTn id="95" dur="1" fill="hold">
+                                          <p:stCondLst>
+                                            <p:cond delay="0"/>
+                                          </p:stCondLst>
+                                        </p:cTn>
+                                        <p:tgtEl>
+                                          <p:spTgt spid="43"/>
+                                        </p:tgtEl>
+                                        <p:attrNameLst>
+                                          <p:attrName>style.visibility</p:attrName>
+                                        </p:attrNameLst>
+                                      </p:cBhvr>
+                                      <p:to>
+                                        <p:strVal val="visible"/>
+                                      </p:to>
+                                    </p:set>
+                                    <p:animEffect transition="in" filter="barn(inVertical)">
+                                      <p:cBhvr>
+                                        <p:cTn id="96" dur="500"/>
+                                        <p:tgtEl>
+                                          <p:spTgt spid="43"/>
+                                        </p:tgtEl>
+                                      </p:cBhvr>
+                                    </p:animEffect>
+                                  </p:childTnLst>
+                                </p:cTn>
+                              </p:par>
+                              <p:par>
+                                <p:cTn id="97" presetID="16" presetClass="entr" presetSubtype="21" fill="hold" nodeType="withEffect">
+                                  <p:stCondLst>
+                                    <p:cond delay="0"/>
+                                  </p:stCondLst>
+                                  <p:childTnLst>
+                                    <p:set>
+                                      <p:cBhvr>
+                                        <p:cTn id="98" dur="1" fill="hold">
+                                          <p:stCondLst>
+                                            <p:cond delay="0"/>
+                                          </p:stCondLst>
+                                        </p:cTn>
+                                        <p:tgtEl>
+                                          <p:spTgt spid="59"/>
+                                        </p:tgtEl>
+                                        <p:attrNameLst>
+                                          <p:attrName>style.visibility</p:attrName>
+                                        </p:attrNameLst>
+                                      </p:cBhvr>
+                                      <p:to>
+                                        <p:strVal val="visible"/>
+                                      </p:to>
+                                    </p:set>
+                                    <p:animEffect transition="in" filter="barn(inVertical)">
+                                      <p:cBhvr>
+                                        <p:cTn id="99" dur="500"/>
+                                        <p:tgtEl>
+                                          <p:spTgt spid="59"/>
+                                        </p:tgtEl>
+                                      </p:cBhvr>
+                                    </p:animEffect>
+                                  </p:childTnLst>
+                                </p:cTn>
+                              </p:par>
+                              <p:par>
+                                <p:cTn id="100" presetID="16" presetClass="entr" presetSubtype="21" fill="hold" nodeType="withEffect">
+                                  <p:stCondLst>
+                                    <p:cond delay="0"/>
+                                  </p:stCondLst>
+                                  <p:childTnLst>
+                                    <p:set>
+                                      <p:cBhvr>
+                                        <p:cTn id="101" dur="1" fill="hold">
+                                          <p:stCondLst>
+                                            <p:cond delay="0"/>
+                                          </p:stCondLst>
+                                        </p:cTn>
+                                        <p:tgtEl>
+                                          <p:spTgt spid="62"/>
+                                        </p:tgtEl>
+                                        <p:attrNameLst>
+                                          <p:attrName>style.visibility</p:attrName>
+                                        </p:attrNameLst>
+                                      </p:cBhvr>
+                                      <p:to>
+                                        <p:strVal val="visible"/>
+                                      </p:to>
+                                    </p:set>
+                                    <p:animEffect transition="in" filter="barn(inVertical)">
+                                      <p:cBhvr>
+                                        <p:cTn id="102" dur="500"/>
+                                        <p:tgtEl>
+                                          <p:spTgt spid="62"/>
+                                        </p:tgtEl>
+                                      </p:cBhvr>
+                                    </p:animEffect>
+                                  </p:childTnLst>
+                                </p:cTn>
+                              </p:par>
+                              <p:par>
+                                <p:cTn id="103" presetID="16" presetClass="entr" presetSubtype="21" fill="hold" nodeType="withEffect">
+                                  <p:stCondLst>
+                                    <p:cond delay="0"/>
+                                  </p:stCondLst>
+                                  <p:childTnLst>
+                                    <p:set>
+                                      <p:cBhvr>
+                                        <p:cTn id="104" dur="1" fill="hold">
+                                          <p:stCondLst>
+                                            <p:cond delay="0"/>
+                                          </p:stCondLst>
+                                        </p:cTn>
+                                        <p:tgtEl>
+                                          <p:spTgt spid="63"/>
+                                        </p:tgtEl>
+                                        <p:attrNameLst>
+                                          <p:attrName>style.visibility</p:attrName>
+                                        </p:attrNameLst>
+                                      </p:cBhvr>
+                                      <p:to>
+                                        <p:strVal val="visible"/>
+                                      </p:to>
+                                    </p:set>
+                                    <p:animEffect transition="in" filter="barn(inVertical)">
+                                      <p:cBhvr>
+                                        <p:cTn id="105" dur="500"/>
+                                        <p:tgtEl>
+                                          <p:spTgt spid="63"/>
+                                        </p:tgtEl>
+                                      </p:cBhvr>
+                                    </p:animEffect>
+                                  </p:childTnLst>
+                                </p:cTn>
+                              </p:par>
+                              <p:par>
+                                <p:cTn id="106" presetID="16" presetClass="entr" presetSubtype="21" fill="hold" nodeType="withEffect">
+                                  <p:stCondLst>
+                                    <p:cond delay="0"/>
+                                  </p:stCondLst>
+                                  <p:childTnLst>
+                                    <p:set>
+                                      <p:cBhvr>
+                                        <p:cTn id="107" dur="1" fill="hold">
+                                          <p:stCondLst>
+                                            <p:cond delay="0"/>
+                                          </p:stCondLst>
+                                        </p:cTn>
+                                        <p:tgtEl>
+                                          <p:spTgt spid="64"/>
+                                        </p:tgtEl>
+                                        <p:attrNameLst>
+                                          <p:attrName>style.visibility</p:attrName>
+                                        </p:attrNameLst>
+                                      </p:cBhvr>
+                                      <p:to>
+                                        <p:strVal val="visible"/>
+                                      </p:to>
+                                    </p:set>
+                                    <p:animEffect transition="in" filter="barn(inVertical)">
+                                      <p:cBhvr>
+                                        <p:cTn id="108" dur="500"/>
+                                        <p:tgtEl>
+                                          <p:spTgt spid="64"/>
+                                        </p:tgtEl>
+                                      </p:cBhvr>
+                                    </p:animEffect>
+                                  </p:childTnLst>
+                                </p:cTn>
+                              </p:par>
+                              <p:par>
+                                <p:cTn id="109" presetID="16" presetClass="entr" presetSubtype="21" fill="hold" nodeType="withEffect">
+                                  <p:stCondLst>
+                                    <p:cond delay="0"/>
+                                  </p:stCondLst>
+                                  <p:childTnLst>
+                                    <p:set>
+                                      <p:cBhvr>
+                                        <p:cTn id="110" dur="1" fill="hold">
+                                          <p:stCondLst>
+                                            <p:cond delay="0"/>
+                                          </p:stCondLst>
+                                        </p:cTn>
+                                        <p:tgtEl>
+                                          <p:spTgt spid="65"/>
+                                        </p:tgtEl>
+                                        <p:attrNameLst>
+                                          <p:attrName>style.visibility</p:attrName>
+                                        </p:attrNameLst>
+                                      </p:cBhvr>
+                                      <p:to>
+                                        <p:strVal val="visible"/>
+                                      </p:to>
+                                    </p:set>
+                                    <p:animEffect transition="in" filter="barn(inVertical)">
+                                      <p:cBhvr>
+                                        <p:cTn id="111" dur="500"/>
+                                        <p:tgtEl>
+                                          <p:spTgt spid="65"/>
+                                        </p:tgtEl>
+                                      </p:cBhvr>
+                                    </p:animEffect>
+                                  </p:childTnLst>
+                                </p:cTn>
+                              </p:par>
+                              <p:par>
+                                <p:cTn id="112" presetID="16" presetClass="entr" presetSubtype="21" fill="hold" nodeType="withEffect">
+                                  <p:stCondLst>
+                                    <p:cond delay="0"/>
+                                  </p:stCondLst>
+                                  <p:childTnLst>
+                                    <p:set>
+                                      <p:cBhvr>
+                                        <p:cTn id="113" dur="1" fill="hold">
+                                          <p:stCondLst>
+                                            <p:cond delay="0"/>
+                                          </p:stCondLst>
+                                        </p:cTn>
+                                        <p:tgtEl>
+                                          <p:spTgt spid="66"/>
+                                        </p:tgtEl>
+                                        <p:attrNameLst>
+                                          <p:attrName>style.visibility</p:attrName>
+                                        </p:attrNameLst>
+                                      </p:cBhvr>
+                                      <p:to>
+                                        <p:strVal val="visible"/>
+                                      </p:to>
+                                    </p:set>
+                                    <p:animEffect transition="in" filter="barn(inVertical)">
+                                      <p:cBhvr>
+                                        <p:cTn id="114" dur="500"/>
+                                        <p:tgtEl>
+                                          <p:spTgt spid="66"/>
+                                        </p:tgtEl>
+                                      </p:cBhvr>
+                                    </p:animEffect>
+                                  </p:childTnLst>
+                                </p:cTn>
+                              </p:par>
+                              <p:par>
+                                <p:cTn id="115" presetID="16" presetClass="entr" presetSubtype="21" fill="hold" grpId="0" nodeType="withEffect">
+                                  <p:stCondLst>
+                                    <p:cond delay="0"/>
+                                  </p:stCondLst>
+                                  <p:childTnLst>
+                                    <p:set>
+                                      <p:cBhvr>
+                                        <p:cTn id="116" dur="1" fill="hold">
+                                          <p:stCondLst>
+                                            <p:cond delay="0"/>
+                                          </p:stCondLst>
+                                        </p:cTn>
+                                        <p:tgtEl>
+                                          <p:spTgt spid="76"/>
+                                        </p:tgtEl>
+                                        <p:attrNameLst>
+                                          <p:attrName>style.visibility</p:attrName>
+                                        </p:attrNameLst>
+                                      </p:cBhvr>
+                                      <p:to>
+                                        <p:strVal val="visible"/>
+                                      </p:to>
+                                    </p:set>
+                                    <p:animEffect transition="in" filter="barn(inVertical)">
+                                      <p:cBhvr>
+                                        <p:cTn id="117" dur="500"/>
+                                        <p:tgtEl>
+                                          <p:spTgt spid="76"/>
+                                        </p:tgtEl>
+                                      </p:cBhvr>
+                                    </p:animEffect>
+                                  </p:childTnLst>
+                                </p:cTn>
+                              </p:par>
+                            </p:childTnLst>
+                          </p:cTn>
+                        </p:par>
+                      </p:childTnLst>
+                    </p:cTn>
+                  </p:par>
+                  <p:par>
+                    <p:cTn id="118" fill="hold">
+                      <p:stCondLst>
+                        <p:cond delay="indefinite"/>
+                      </p:stCondLst>
+                      <p:childTnLst>
+                        <p:par>
+                          <p:cTn id="119" fill="hold">
+                            <p:stCondLst>
+                              <p:cond delay="0"/>
+                            </p:stCondLst>
+                            <p:childTnLst>
+                              <p:par>
+                                <p:cTn id="120" presetID="16" presetClass="entr" presetSubtype="21" fill="hold" nodeType="clickEffect">
+                                  <p:stCondLst>
+                                    <p:cond delay="0"/>
+                                  </p:stCondLst>
+                                  <p:childTnLst>
+                                    <p:set>
+                                      <p:cBhvr>
+                                        <p:cTn id="121" dur="1" fill="hold">
+                                          <p:stCondLst>
+                                            <p:cond delay="0"/>
+                                          </p:stCondLst>
+                                        </p:cTn>
+                                        <p:tgtEl>
+                                          <p:spTgt spid="77"/>
+                                        </p:tgtEl>
+                                        <p:attrNameLst>
+                                          <p:attrName>style.visibility</p:attrName>
+                                        </p:attrNameLst>
+                                      </p:cBhvr>
+                                      <p:to>
+                                        <p:strVal val="visible"/>
+                                      </p:to>
+                                    </p:set>
+                                    <p:animEffect transition="in" filter="barn(inVertical)">
+                                      <p:cBhvr>
+                                        <p:cTn id="122" dur="500"/>
+                                        <p:tgtEl>
+                                          <p:spTgt spid="77"/>
+                                        </p:tgtEl>
+                                      </p:cBhvr>
+                                    </p:animEffect>
+                                  </p:childTnLst>
+                                </p:cTn>
+                              </p:par>
+                              <p:par>
+                                <p:cTn id="123" presetID="16" presetClass="entr" presetSubtype="21" fill="hold" grpId="0" nodeType="withEffect">
+                                  <p:stCondLst>
+                                    <p:cond delay="0"/>
+                                  </p:stCondLst>
+                                  <p:childTnLst>
+                                    <p:set>
+                                      <p:cBhvr>
+                                        <p:cTn id="124" dur="1" fill="hold">
+                                          <p:stCondLst>
+                                            <p:cond delay="0"/>
+                                          </p:stCondLst>
+                                        </p:cTn>
+                                        <p:tgtEl>
+                                          <p:spTgt spid="80"/>
+                                        </p:tgtEl>
+                                        <p:attrNameLst>
+                                          <p:attrName>style.visibility</p:attrName>
+                                        </p:attrNameLst>
+                                      </p:cBhvr>
+                                      <p:to>
+                                        <p:strVal val="visible"/>
+                                      </p:to>
+                                    </p:set>
+                                    <p:animEffect transition="in" filter="barn(inVertical)">
+                                      <p:cBhvr>
+                                        <p:cTn id="125" dur="500"/>
+                                        <p:tgtEl>
+                                          <p:spTgt spid="80"/>
+                                        </p:tgtEl>
+                                      </p:cBhvr>
+                                    </p:animEffect>
+                                  </p:childTnLst>
+                                </p:cTn>
+                              </p:par>
+                            </p:childTnLst>
+                          </p:cTn>
+                        </p:par>
+                      </p:childTnLst>
+                    </p:cTn>
+                  </p:par>
+                </p:childTnLst>
+              </p:cTn>
+              <p:prevCondLst>
+                <p:cond evt="onPrev" delay="0">
+                  <p:tgtEl>
+                    <p:sldTgt/>
+                  </p:tgtEl>
+                </p:cond>
+              </p:prevCondLst>
+              <p:nextCondLst>
+                <p:cond evt="onNext" delay="0">
+                  <p:tgtEl>
+                    <p:sldTgt/>
+                  </p:tgtEl>
+                </p:cond>
+              </p:nextCondLst>
+            </p:seq>
+          </p:childTnLst>
+        </p:cTn>
+      </p:par>
+    </p:tnLst>
+    <p:bldLst>
+      <p:bldP spid="72" grpId="0"/>
+      <p:bldP spid="73" grpId="0"/>
+      <p:bldP spid="74" grpId="0"/>
+      <p:bldP spid="75" grpId="0"/>
+      <p:bldP spid="76" grpId="0"/>
+      <p:bldP spid="80" grpId="0"/>
+    </p:bldLst>
+  </p:timing>
 </p:sld>
 </file>
 
@@ -23674,6 +30343,216 @@
   <p:clrMapOvr>
     <a:masterClrMapping/>
   </p:clrMapOvr>
+  <p:timing>
+    <p:tnLst>
+      <p:par>
+        <p:cTn id="1" dur="indefinite" restart="never" nodeType="tmRoot">
+          <p:childTnLst>
+            <p:seq concurrent="1" nextAc="seek">
+              <p:cTn id="2" dur="indefinite" nodeType="mainSeq">
+                <p:childTnLst>
+                  <p:par>
+                    <p:cTn id="3" fill="hold">
+                      <p:stCondLst>
+                        <p:cond delay="indefinite"/>
+                      </p:stCondLst>
+                      <p:childTnLst>
+                        <p:par>
+                          <p:cTn id="4" fill="hold">
+                            <p:stCondLst>
+                              <p:cond delay="0"/>
+                            </p:stCondLst>
+                            <p:childTnLst>
+                              <p:par>
+                                <p:cTn id="5" presetID="22" presetClass="entr" presetSubtype="4" fill="hold" grpId="0" nodeType="clickEffect">
+                                  <p:stCondLst>
+                                    <p:cond delay="0"/>
+                                  </p:stCondLst>
+                                  <p:childTnLst>
+                                    <p:set>
+                                      <p:cBhvr>
+                                        <p:cTn id="6" dur="1" fill="hold">
+                                          <p:stCondLst>
+                                            <p:cond delay="0"/>
+                                          </p:stCondLst>
+                                        </p:cTn>
+                                        <p:tgtEl>
+                                          <p:spTgt spid="22"/>
+                                        </p:tgtEl>
+                                        <p:attrNameLst>
+                                          <p:attrName>style.visibility</p:attrName>
+                                        </p:attrNameLst>
+                                      </p:cBhvr>
+                                      <p:to>
+                                        <p:strVal val="visible"/>
+                                      </p:to>
+                                    </p:set>
+                                    <p:animEffect transition="in" filter="wipe(down)">
+                                      <p:cBhvr>
+                                        <p:cTn id="7" dur="500"/>
+                                        <p:tgtEl>
+                                          <p:spTgt spid="22"/>
+                                        </p:tgtEl>
+                                      </p:cBhvr>
+                                    </p:animEffect>
+                                  </p:childTnLst>
+                                </p:cTn>
+                              </p:par>
+                              <p:par>
+                                <p:cTn id="8" presetID="22" presetClass="entr" presetSubtype="4" fill="hold" nodeType="withEffect">
+                                  <p:stCondLst>
+                                    <p:cond delay="0"/>
+                                  </p:stCondLst>
+                                  <p:childTnLst>
+                                    <p:set>
+                                      <p:cBhvr>
+                                        <p:cTn id="9" dur="1" fill="hold">
+                                          <p:stCondLst>
+                                            <p:cond delay="0"/>
+                                          </p:stCondLst>
+                                        </p:cTn>
+                                        <p:tgtEl>
+                                          <p:spTgt spid="23"/>
+                                        </p:tgtEl>
+                                        <p:attrNameLst>
+                                          <p:attrName>style.visibility</p:attrName>
+                                        </p:attrNameLst>
+                                      </p:cBhvr>
+                                      <p:to>
+                                        <p:strVal val="visible"/>
+                                      </p:to>
+                                    </p:set>
+                                    <p:animEffect transition="in" filter="wipe(down)">
+                                      <p:cBhvr>
+                                        <p:cTn id="10" dur="500"/>
+                                        <p:tgtEl>
+                                          <p:spTgt spid="23"/>
+                                        </p:tgtEl>
+                                      </p:cBhvr>
+                                    </p:animEffect>
+                                  </p:childTnLst>
+                                </p:cTn>
+                              </p:par>
+                            </p:childTnLst>
+                          </p:cTn>
+                        </p:par>
+                      </p:childTnLst>
+                    </p:cTn>
+                  </p:par>
+                  <p:par>
+                    <p:cTn id="11" fill="hold">
+                      <p:stCondLst>
+                        <p:cond delay="indefinite"/>
+                      </p:stCondLst>
+                      <p:childTnLst>
+                        <p:par>
+                          <p:cTn id="12" fill="hold">
+                            <p:stCondLst>
+                              <p:cond delay="0"/>
+                            </p:stCondLst>
+                            <p:childTnLst>
+                              <p:par>
+                                <p:cTn id="13" presetID="22" presetClass="entr" presetSubtype="4" fill="hold" grpId="0" nodeType="clickEffect">
+                                  <p:stCondLst>
+                                    <p:cond delay="0"/>
+                                  </p:stCondLst>
+                                  <p:childTnLst>
+                                    <p:set>
+                                      <p:cBhvr>
+                                        <p:cTn id="14" dur="1" fill="hold">
+                                          <p:stCondLst>
+                                            <p:cond delay="0"/>
+                                          </p:stCondLst>
+                                        </p:cTn>
+                                        <p:tgtEl>
+                                          <p:spTgt spid="26"/>
+                                        </p:tgtEl>
+                                        <p:attrNameLst>
+                                          <p:attrName>style.visibility</p:attrName>
+                                        </p:attrNameLst>
+                                      </p:cBhvr>
+                                      <p:to>
+                                        <p:strVal val="visible"/>
+                                      </p:to>
+                                    </p:set>
+                                    <p:animEffect transition="in" filter="wipe(down)">
+                                      <p:cBhvr>
+                                        <p:cTn id="15" dur="500"/>
+                                        <p:tgtEl>
+                                          <p:spTgt spid="26"/>
+                                        </p:tgtEl>
+                                      </p:cBhvr>
+                                    </p:animEffect>
+                                  </p:childTnLst>
+                                </p:cTn>
+                              </p:par>
+                              <p:par>
+                                <p:cTn id="16" presetID="22" presetClass="entr" presetSubtype="4" fill="hold" nodeType="withEffect">
+                                  <p:stCondLst>
+                                    <p:cond delay="0"/>
+                                  </p:stCondLst>
+                                  <p:childTnLst>
+                                    <p:set>
+                                      <p:cBhvr>
+                                        <p:cTn id="17" dur="1" fill="hold">
+                                          <p:stCondLst>
+                                            <p:cond delay="0"/>
+                                          </p:stCondLst>
+                                        </p:cTn>
+                                        <p:tgtEl>
+                                          <p:spTgt spid="27"/>
+                                        </p:tgtEl>
+                                        <p:attrNameLst>
+                                          <p:attrName>style.visibility</p:attrName>
+                                        </p:attrNameLst>
+                                      </p:cBhvr>
+                                      <p:to>
+                                        <p:strVal val="visible"/>
+                                      </p:to>
+                                    </p:set>
+                                    <p:animEffect transition="in" filter="wipe(down)">
+                                      <p:cBhvr>
+                                        <p:cTn id="18" dur="500"/>
+                                        <p:tgtEl>
+                                          <p:spTgt spid="27"/>
+                                        </p:tgtEl>
+                                      </p:cBhvr>
+                                    </p:animEffect>
+                                  </p:childTnLst>
+                                </p:cTn>
+                              </p:par>
+                            </p:childTnLst>
+                          </p:cTn>
+                        </p:par>
+                      </p:childTnLst>
+                    </p:cTn>
+                  </p:par>
+                </p:childTnLst>
+              </p:cTn>
+              <p:prevCondLst>
+                <p:cond evt="onPrev" delay="0">
+                  <p:tgtEl>
+                    <p:sldTgt/>
+                  </p:tgtEl>
+                </p:cond>
+              </p:prevCondLst>
+              <p:nextCondLst>
+                <p:cond evt="onNext" delay="0">
+                  <p:tgtEl>
+                    <p:sldTgt/>
+                  </p:tgtEl>
+                </p:cond>
+              </p:nextCondLst>
+            </p:seq>
+          </p:childTnLst>
+        </p:cTn>
+      </p:par>
+    </p:tnLst>
+    <p:bldLst>
+      <p:bldP spid="22" grpId="0"/>
+      <p:bldP spid="26" grpId="0"/>
+    </p:bldLst>
+  </p:timing>
 </p:sld>
 </file>
 
@@ -24328,8 +31207,8 @@
         </p:nvGrpSpPr>
         <p:grpSpPr>
           <a:xfrm>
-            <a:off x="7966283" y="2847619"/>
-            <a:ext cx="2355435" cy="1177717"/>
+            <a:off x="7966283" y="2847620"/>
+            <a:ext cx="2355435" cy="778374"/>
             <a:chOff x="0" y="0"/>
             <a:chExt cx="812800" cy="406400"/>
           </a:xfrm>
@@ -25244,6 +32123,391 @@
   <p:clrMapOvr>
     <a:masterClrMapping/>
   </p:clrMapOvr>
+  <p:timing>
+    <p:tnLst>
+      <p:par>
+        <p:cTn id="1" dur="indefinite" restart="never" nodeType="tmRoot">
+          <p:childTnLst>
+            <p:seq concurrent="1" nextAc="seek">
+              <p:cTn id="2" dur="indefinite" nodeType="mainSeq">
+                <p:childTnLst>
+                  <p:par>
+                    <p:cTn id="3" fill="hold">
+                      <p:stCondLst>
+                        <p:cond delay="indefinite"/>
+                      </p:stCondLst>
+                      <p:childTnLst>
+                        <p:par>
+                          <p:cTn id="4" fill="hold">
+                            <p:stCondLst>
+                              <p:cond delay="0"/>
+                            </p:stCondLst>
+                            <p:childTnLst>
+                              <p:par>
+                                <p:cTn id="5" presetID="22" presetClass="entr" presetSubtype="4" fill="hold" nodeType="clickEffect">
+                                  <p:stCondLst>
+                                    <p:cond delay="0"/>
+                                  </p:stCondLst>
+                                  <p:childTnLst>
+                                    <p:set>
+                                      <p:cBhvr>
+                                        <p:cTn id="6" dur="1" fill="hold">
+                                          <p:stCondLst>
+                                            <p:cond delay="0"/>
+                                          </p:stCondLst>
+                                        </p:cTn>
+                                        <p:tgtEl>
+                                          <p:spTgt spid="18"/>
+                                        </p:tgtEl>
+                                        <p:attrNameLst>
+                                          <p:attrName>style.visibility</p:attrName>
+                                        </p:attrNameLst>
+                                      </p:cBhvr>
+                                      <p:to>
+                                        <p:strVal val="visible"/>
+                                      </p:to>
+                                    </p:set>
+                                    <p:animEffect transition="in" filter="wipe(down)">
+                                      <p:cBhvr>
+                                        <p:cTn id="7" dur="500"/>
+                                        <p:tgtEl>
+                                          <p:spTgt spid="18"/>
+                                        </p:tgtEl>
+                                      </p:cBhvr>
+                                    </p:animEffect>
+                                  </p:childTnLst>
+                                </p:cTn>
+                              </p:par>
+                            </p:childTnLst>
+                          </p:cTn>
+                        </p:par>
+                      </p:childTnLst>
+                    </p:cTn>
+                  </p:par>
+                  <p:par>
+                    <p:cTn id="8" fill="hold">
+                      <p:stCondLst>
+                        <p:cond delay="indefinite"/>
+                      </p:stCondLst>
+                      <p:childTnLst>
+                        <p:par>
+                          <p:cTn id="9" fill="hold">
+                            <p:stCondLst>
+                              <p:cond delay="0"/>
+                            </p:stCondLst>
+                            <p:childTnLst>
+                              <p:par>
+                                <p:cTn id="10" presetID="22" presetClass="entr" presetSubtype="4" fill="hold" nodeType="clickEffect">
+                                  <p:stCondLst>
+                                    <p:cond delay="0"/>
+                                  </p:stCondLst>
+                                  <p:childTnLst>
+                                    <p:set>
+                                      <p:cBhvr>
+                                        <p:cTn id="11" dur="1" fill="hold">
+                                          <p:stCondLst>
+                                            <p:cond delay="0"/>
+                                          </p:stCondLst>
+                                        </p:cTn>
+                                        <p:tgtEl>
+                                          <p:spTgt spid="21"/>
+                                        </p:tgtEl>
+                                        <p:attrNameLst>
+                                          <p:attrName>style.visibility</p:attrName>
+                                        </p:attrNameLst>
+                                      </p:cBhvr>
+                                      <p:to>
+                                        <p:strVal val="visible"/>
+                                      </p:to>
+                                    </p:set>
+                                    <p:animEffect transition="in" filter="wipe(down)">
+                                      <p:cBhvr>
+                                        <p:cTn id="12" dur="500"/>
+                                        <p:tgtEl>
+                                          <p:spTgt spid="21"/>
+                                        </p:tgtEl>
+                                      </p:cBhvr>
+                                    </p:animEffect>
+                                  </p:childTnLst>
+                                </p:cTn>
+                              </p:par>
+                              <p:par>
+                                <p:cTn id="13" presetID="22" presetClass="entr" presetSubtype="4" fill="hold" nodeType="withEffect">
+                                  <p:stCondLst>
+                                    <p:cond delay="0"/>
+                                  </p:stCondLst>
+                                  <p:childTnLst>
+                                    <p:set>
+                                      <p:cBhvr>
+                                        <p:cTn id="14" dur="1" fill="hold">
+                                          <p:stCondLst>
+                                            <p:cond delay="0"/>
+                                          </p:stCondLst>
+                                        </p:cTn>
+                                        <p:tgtEl>
+                                          <p:spTgt spid="24"/>
+                                        </p:tgtEl>
+                                        <p:attrNameLst>
+                                          <p:attrName>style.visibility</p:attrName>
+                                        </p:attrNameLst>
+                                      </p:cBhvr>
+                                      <p:to>
+                                        <p:strVal val="visible"/>
+                                      </p:to>
+                                    </p:set>
+                                    <p:animEffect transition="in" filter="wipe(down)">
+                                      <p:cBhvr>
+                                        <p:cTn id="15" dur="500"/>
+                                        <p:tgtEl>
+                                          <p:spTgt spid="24"/>
+                                        </p:tgtEl>
+                                      </p:cBhvr>
+                                    </p:animEffect>
+                                  </p:childTnLst>
+                                </p:cTn>
+                              </p:par>
+                              <p:par>
+                                <p:cTn id="16" presetID="22" presetClass="entr" presetSubtype="4" fill="hold" grpId="0" nodeType="withEffect">
+                                  <p:stCondLst>
+                                    <p:cond delay="0"/>
+                                  </p:stCondLst>
+                                  <p:childTnLst>
+                                    <p:set>
+                                      <p:cBhvr>
+                                        <p:cTn id="17" dur="1" fill="hold">
+                                          <p:stCondLst>
+                                            <p:cond delay="0"/>
+                                          </p:stCondLst>
+                                        </p:cTn>
+                                        <p:tgtEl>
+                                          <p:spTgt spid="39"/>
+                                        </p:tgtEl>
+                                        <p:attrNameLst>
+                                          <p:attrName>style.visibility</p:attrName>
+                                        </p:attrNameLst>
+                                      </p:cBhvr>
+                                      <p:to>
+                                        <p:strVal val="visible"/>
+                                      </p:to>
+                                    </p:set>
+                                    <p:animEffect transition="in" filter="wipe(down)">
+                                      <p:cBhvr>
+                                        <p:cTn id="18" dur="500"/>
+                                        <p:tgtEl>
+                                          <p:spTgt spid="39"/>
+                                        </p:tgtEl>
+                                      </p:cBhvr>
+                                    </p:animEffect>
+                                  </p:childTnLst>
+                                </p:cTn>
+                              </p:par>
+                            </p:childTnLst>
+                          </p:cTn>
+                        </p:par>
+                      </p:childTnLst>
+                    </p:cTn>
+                  </p:par>
+                  <p:par>
+                    <p:cTn id="19" fill="hold">
+                      <p:stCondLst>
+                        <p:cond delay="indefinite"/>
+                      </p:stCondLst>
+                      <p:childTnLst>
+                        <p:par>
+                          <p:cTn id="20" fill="hold">
+                            <p:stCondLst>
+                              <p:cond delay="0"/>
+                            </p:stCondLst>
+                            <p:childTnLst>
+                              <p:par>
+                                <p:cTn id="21" presetID="22" presetClass="entr" presetSubtype="4" fill="hold" nodeType="clickEffect">
+                                  <p:stCondLst>
+                                    <p:cond delay="0"/>
+                                  </p:stCondLst>
+                                  <p:childTnLst>
+                                    <p:set>
+                                      <p:cBhvr>
+                                        <p:cTn id="22" dur="1" fill="hold">
+                                          <p:stCondLst>
+                                            <p:cond delay="0"/>
+                                          </p:stCondLst>
+                                        </p:cTn>
+                                        <p:tgtEl>
+                                          <p:spTgt spid="27"/>
+                                        </p:tgtEl>
+                                        <p:attrNameLst>
+                                          <p:attrName>style.visibility</p:attrName>
+                                        </p:attrNameLst>
+                                      </p:cBhvr>
+                                      <p:to>
+                                        <p:strVal val="visible"/>
+                                      </p:to>
+                                    </p:set>
+                                    <p:animEffect transition="in" filter="wipe(down)">
+                                      <p:cBhvr>
+                                        <p:cTn id="23" dur="500"/>
+                                        <p:tgtEl>
+                                          <p:spTgt spid="27"/>
+                                        </p:tgtEl>
+                                      </p:cBhvr>
+                                    </p:animEffect>
+                                  </p:childTnLst>
+                                </p:cTn>
+                              </p:par>
+                              <p:par>
+                                <p:cTn id="24" presetID="22" presetClass="entr" presetSubtype="4" fill="hold" nodeType="withEffect">
+                                  <p:stCondLst>
+                                    <p:cond delay="0"/>
+                                  </p:stCondLst>
+                                  <p:childTnLst>
+                                    <p:set>
+                                      <p:cBhvr>
+                                        <p:cTn id="25" dur="1" fill="hold">
+                                          <p:stCondLst>
+                                            <p:cond delay="0"/>
+                                          </p:stCondLst>
+                                        </p:cTn>
+                                        <p:tgtEl>
+                                          <p:spTgt spid="30"/>
+                                        </p:tgtEl>
+                                        <p:attrNameLst>
+                                          <p:attrName>style.visibility</p:attrName>
+                                        </p:attrNameLst>
+                                      </p:cBhvr>
+                                      <p:to>
+                                        <p:strVal val="visible"/>
+                                      </p:to>
+                                    </p:set>
+                                    <p:animEffect transition="in" filter="wipe(down)">
+                                      <p:cBhvr>
+                                        <p:cTn id="26" dur="500"/>
+                                        <p:tgtEl>
+                                          <p:spTgt spid="30"/>
+                                        </p:tgtEl>
+                                      </p:cBhvr>
+                                    </p:animEffect>
+                                  </p:childTnLst>
+                                </p:cTn>
+                              </p:par>
+                              <p:par>
+                                <p:cTn id="27" presetID="22" presetClass="entr" presetSubtype="4" fill="hold" nodeType="withEffect">
+                                  <p:stCondLst>
+                                    <p:cond delay="0"/>
+                                  </p:stCondLst>
+                                  <p:childTnLst>
+                                    <p:set>
+                                      <p:cBhvr>
+                                        <p:cTn id="28" dur="1" fill="hold">
+                                          <p:stCondLst>
+                                            <p:cond delay="0"/>
+                                          </p:stCondLst>
+                                        </p:cTn>
+                                        <p:tgtEl>
+                                          <p:spTgt spid="33"/>
+                                        </p:tgtEl>
+                                        <p:attrNameLst>
+                                          <p:attrName>style.visibility</p:attrName>
+                                        </p:attrNameLst>
+                                      </p:cBhvr>
+                                      <p:to>
+                                        <p:strVal val="visible"/>
+                                      </p:to>
+                                    </p:set>
+                                    <p:animEffect transition="in" filter="wipe(down)">
+                                      <p:cBhvr>
+                                        <p:cTn id="29" dur="500"/>
+                                        <p:tgtEl>
+                                          <p:spTgt spid="33"/>
+                                        </p:tgtEl>
+                                      </p:cBhvr>
+                                    </p:animEffect>
+                                  </p:childTnLst>
+                                </p:cTn>
+                              </p:par>
+                            </p:childTnLst>
+                          </p:cTn>
+                        </p:par>
+                      </p:childTnLst>
+                    </p:cTn>
+                  </p:par>
+                  <p:par>
+                    <p:cTn id="30" fill="hold">
+                      <p:stCondLst>
+                        <p:cond delay="indefinite"/>
+                      </p:stCondLst>
+                      <p:childTnLst>
+                        <p:par>
+                          <p:cTn id="31" fill="hold">
+                            <p:stCondLst>
+                              <p:cond delay="0"/>
+                            </p:stCondLst>
+                            <p:childTnLst>
+                              <p:par>
+                                <p:cTn id="32" presetID="22" presetClass="entr" presetSubtype="4" fill="hold" nodeType="clickEffect">
+                                  <p:stCondLst>
+                                    <p:cond delay="0"/>
+                                  </p:stCondLst>
+                                  <p:childTnLst>
+                                    <p:set>
+                                      <p:cBhvr>
+                                        <p:cTn id="33" dur="1" fill="hold">
+                                          <p:stCondLst>
+                                            <p:cond delay="0"/>
+                                          </p:stCondLst>
+                                        </p:cTn>
+                                        <p:tgtEl>
+                                          <p:spTgt spid="34"/>
+                                        </p:tgtEl>
+                                        <p:attrNameLst>
+                                          <p:attrName>style.visibility</p:attrName>
+                                        </p:attrNameLst>
+                                      </p:cBhvr>
+                                      <p:to>
+                                        <p:strVal val="visible"/>
+                                      </p:to>
+                                    </p:set>
+                                    <p:animEffect transition="in" filter="wipe(down)">
+                                      <p:cBhvr>
+                                        <p:cTn id="34" dur="500"/>
+                                        <p:tgtEl>
+                                          <p:spTgt spid="34"/>
+                                        </p:tgtEl>
+                                      </p:cBhvr>
+                                    </p:animEffect>
+                                  </p:childTnLst>
+                                </p:cTn>
+                              </p:par>
+                            </p:childTnLst>
+                          </p:cTn>
+                        </p:par>
+                      </p:childTnLst>
+                    </p:cTn>
+                  </p:par>
+                </p:childTnLst>
+              </p:cTn>
+              <p:prevCondLst>
+                <p:cond evt="onPrev" delay="0">
+                  <p:tgtEl>
+                    <p:sldTgt/>
+                  </p:tgtEl>
+                </p:cond>
+              </p:prevCondLst>
+              <p:nextCondLst>
+                <p:cond evt="onNext" delay="0">
+                  <p:tgtEl>
+                    <p:sldTgt/>
+                  </p:tgtEl>
+                </p:cond>
+              </p:nextCondLst>
+            </p:seq>
+          </p:childTnLst>
+        </p:cTn>
+      </p:par>
+    </p:tnLst>
+    <p:bldLst>
+      <p:bldP spid="39" grpId="0"/>
+    </p:bldLst>
+  </p:timing>
 </p:sld>
 </file>
 
@@ -25898,8 +33162,8 @@
         </p:nvGrpSpPr>
         <p:grpSpPr>
           <a:xfrm>
-            <a:off x="7966283" y="2847619"/>
-            <a:ext cx="2355435" cy="1177717"/>
+            <a:off x="7966283" y="2847620"/>
+            <a:ext cx="2355435" cy="941984"/>
             <a:chOff x="0" y="0"/>
             <a:chExt cx="812800" cy="406400"/>
           </a:xfrm>
@@ -27113,6 +34377,515 @@
   <p:clrMapOvr>
     <a:masterClrMapping/>
   </p:clrMapOvr>
+  <p:timing>
+    <p:tnLst>
+      <p:par>
+        <p:cTn id="1" dur="indefinite" restart="never" nodeType="tmRoot">
+          <p:childTnLst>
+            <p:seq concurrent="1" nextAc="seek">
+              <p:cTn id="2" dur="indefinite" nodeType="mainSeq">
+                <p:childTnLst>
+                  <p:par>
+                    <p:cTn id="3" fill="hold">
+                      <p:stCondLst>
+                        <p:cond delay="indefinite"/>
+                      </p:stCondLst>
+                      <p:childTnLst>
+                        <p:par>
+                          <p:cTn id="4" fill="hold">
+                            <p:stCondLst>
+                              <p:cond delay="0"/>
+                            </p:stCondLst>
+                            <p:childTnLst>
+                              <p:par>
+                                <p:cTn id="5" presetID="22" presetClass="entr" presetSubtype="4" fill="hold" nodeType="clickEffect">
+                                  <p:stCondLst>
+                                    <p:cond delay="0"/>
+                                  </p:stCondLst>
+                                  <p:childTnLst>
+                                    <p:set>
+                                      <p:cBhvr>
+                                        <p:cTn id="6" dur="1" fill="hold">
+                                          <p:stCondLst>
+                                            <p:cond delay="0"/>
+                                          </p:stCondLst>
+                                        </p:cTn>
+                                        <p:tgtEl>
+                                          <p:spTgt spid="18"/>
+                                        </p:tgtEl>
+                                        <p:attrNameLst>
+                                          <p:attrName>style.visibility</p:attrName>
+                                        </p:attrNameLst>
+                                      </p:cBhvr>
+                                      <p:to>
+                                        <p:strVal val="visible"/>
+                                      </p:to>
+                                    </p:set>
+                                    <p:animEffect transition="in" filter="wipe(down)">
+                                      <p:cBhvr>
+                                        <p:cTn id="7" dur="500"/>
+                                        <p:tgtEl>
+                                          <p:spTgt spid="18"/>
+                                        </p:tgtEl>
+                                      </p:cBhvr>
+                                    </p:animEffect>
+                                  </p:childTnLst>
+                                </p:cTn>
+                              </p:par>
+                            </p:childTnLst>
+                          </p:cTn>
+                        </p:par>
+                      </p:childTnLst>
+                    </p:cTn>
+                  </p:par>
+                  <p:par>
+                    <p:cTn id="8" fill="hold">
+                      <p:stCondLst>
+                        <p:cond delay="indefinite"/>
+                      </p:stCondLst>
+                      <p:childTnLst>
+                        <p:par>
+                          <p:cTn id="9" fill="hold">
+                            <p:stCondLst>
+                              <p:cond delay="0"/>
+                            </p:stCondLst>
+                            <p:childTnLst>
+                              <p:par>
+                                <p:cTn id="10" presetID="22" presetClass="entr" presetSubtype="4" fill="hold" nodeType="clickEffect">
+                                  <p:stCondLst>
+                                    <p:cond delay="0"/>
+                                  </p:stCondLst>
+                                  <p:childTnLst>
+                                    <p:set>
+                                      <p:cBhvr>
+                                        <p:cTn id="11" dur="1" fill="hold">
+                                          <p:stCondLst>
+                                            <p:cond delay="0"/>
+                                          </p:stCondLst>
+                                        </p:cTn>
+                                        <p:tgtEl>
+                                          <p:spTgt spid="21"/>
+                                        </p:tgtEl>
+                                        <p:attrNameLst>
+                                          <p:attrName>style.visibility</p:attrName>
+                                        </p:attrNameLst>
+                                      </p:cBhvr>
+                                      <p:to>
+                                        <p:strVal val="visible"/>
+                                      </p:to>
+                                    </p:set>
+                                    <p:animEffect transition="in" filter="wipe(down)">
+                                      <p:cBhvr>
+                                        <p:cTn id="12" dur="500"/>
+                                        <p:tgtEl>
+                                          <p:spTgt spid="21"/>
+                                        </p:tgtEl>
+                                      </p:cBhvr>
+                                    </p:animEffect>
+                                  </p:childTnLst>
+                                </p:cTn>
+                              </p:par>
+                              <p:par>
+                                <p:cTn id="13" presetID="22" presetClass="entr" presetSubtype="4" fill="hold" nodeType="withEffect">
+                                  <p:stCondLst>
+                                    <p:cond delay="0"/>
+                                  </p:stCondLst>
+                                  <p:childTnLst>
+                                    <p:set>
+                                      <p:cBhvr>
+                                        <p:cTn id="14" dur="1" fill="hold">
+                                          <p:stCondLst>
+                                            <p:cond delay="0"/>
+                                          </p:stCondLst>
+                                        </p:cTn>
+                                        <p:tgtEl>
+                                          <p:spTgt spid="24"/>
+                                        </p:tgtEl>
+                                        <p:attrNameLst>
+                                          <p:attrName>style.visibility</p:attrName>
+                                        </p:attrNameLst>
+                                      </p:cBhvr>
+                                      <p:to>
+                                        <p:strVal val="visible"/>
+                                      </p:to>
+                                    </p:set>
+                                    <p:animEffect transition="in" filter="wipe(down)">
+                                      <p:cBhvr>
+                                        <p:cTn id="15" dur="500"/>
+                                        <p:tgtEl>
+                                          <p:spTgt spid="24"/>
+                                        </p:tgtEl>
+                                      </p:cBhvr>
+                                    </p:animEffect>
+                                  </p:childTnLst>
+                                </p:cTn>
+                              </p:par>
+                              <p:par>
+                                <p:cTn id="16" presetID="22" presetClass="entr" presetSubtype="4" fill="hold" grpId="0" nodeType="withEffect">
+                                  <p:stCondLst>
+                                    <p:cond delay="0"/>
+                                  </p:stCondLst>
+                                  <p:childTnLst>
+                                    <p:set>
+                                      <p:cBhvr>
+                                        <p:cTn id="17" dur="1" fill="hold">
+                                          <p:stCondLst>
+                                            <p:cond delay="0"/>
+                                          </p:stCondLst>
+                                        </p:cTn>
+                                        <p:tgtEl>
+                                          <p:spTgt spid="37"/>
+                                        </p:tgtEl>
+                                        <p:attrNameLst>
+                                          <p:attrName>style.visibility</p:attrName>
+                                        </p:attrNameLst>
+                                      </p:cBhvr>
+                                      <p:to>
+                                        <p:strVal val="visible"/>
+                                      </p:to>
+                                    </p:set>
+                                    <p:animEffect transition="in" filter="wipe(down)">
+                                      <p:cBhvr>
+                                        <p:cTn id="18" dur="500"/>
+                                        <p:tgtEl>
+                                          <p:spTgt spid="37"/>
+                                        </p:tgtEl>
+                                      </p:cBhvr>
+                                    </p:animEffect>
+                                  </p:childTnLst>
+                                </p:cTn>
+                              </p:par>
+                            </p:childTnLst>
+                          </p:cTn>
+                        </p:par>
+                      </p:childTnLst>
+                    </p:cTn>
+                  </p:par>
+                  <p:par>
+                    <p:cTn id="19" fill="hold">
+                      <p:stCondLst>
+                        <p:cond delay="indefinite"/>
+                      </p:stCondLst>
+                      <p:childTnLst>
+                        <p:par>
+                          <p:cTn id="20" fill="hold">
+                            <p:stCondLst>
+                              <p:cond delay="0"/>
+                            </p:stCondLst>
+                            <p:childTnLst>
+                              <p:par>
+                                <p:cTn id="21" presetID="22" presetClass="entr" presetSubtype="4" fill="hold" grpId="0" nodeType="clickEffect">
+                                  <p:stCondLst>
+                                    <p:cond delay="0"/>
+                                  </p:stCondLst>
+                                  <p:childTnLst>
+                                    <p:set>
+                                      <p:cBhvr>
+                                        <p:cTn id="22" dur="1" fill="hold">
+                                          <p:stCondLst>
+                                            <p:cond delay="0"/>
+                                          </p:stCondLst>
+                                        </p:cTn>
+                                        <p:tgtEl>
+                                          <p:spTgt spid="38"/>
+                                        </p:tgtEl>
+                                        <p:attrNameLst>
+                                          <p:attrName>style.visibility</p:attrName>
+                                        </p:attrNameLst>
+                                      </p:cBhvr>
+                                      <p:to>
+                                        <p:strVal val="visible"/>
+                                      </p:to>
+                                    </p:set>
+                                    <p:animEffect transition="in" filter="wipe(down)">
+                                      <p:cBhvr>
+                                        <p:cTn id="23" dur="500"/>
+                                        <p:tgtEl>
+                                          <p:spTgt spid="38"/>
+                                        </p:tgtEl>
+                                      </p:cBhvr>
+                                    </p:animEffect>
+                                  </p:childTnLst>
+                                </p:cTn>
+                              </p:par>
+                            </p:childTnLst>
+                          </p:cTn>
+                        </p:par>
+                      </p:childTnLst>
+                    </p:cTn>
+                  </p:par>
+                  <p:par>
+                    <p:cTn id="24" fill="hold">
+                      <p:stCondLst>
+                        <p:cond delay="indefinite"/>
+                      </p:stCondLst>
+                      <p:childTnLst>
+                        <p:par>
+                          <p:cTn id="25" fill="hold">
+                            <p:stCondLst>
+                              <p:cond delay="0"/>
+                            </p:stCondLst>
+                            <p:childTnLst>
+                              <p:par>
+                                <p:cTn id="26" presetID="22" presetClass="entr" presetSubtype="4" fill="hold" nodeType="clickEffect">
+                                  <p:stCondLst>
+                                    <p:cond delay="0"/>
+                                  </p:stCondLst>
+                                  <p:childTnLst>
+                                    <p:set>
+                                      <p:cBhvr>
+                                        <p:cTn id="27" dur="1" fill="hold">
+                                          <p:stCondLst>
+                                            <p:cond delay="0"/>
+                                          </p:stCondLst>
+                                        </p:cTn>
+                                        <p:tgtEl>
+                                          <p:spTgt spid="27"/>
+                                        </p:tgtEl>
+                                        <p:attrNameLst>
+                                          <p:attrName>style.visibility</p:attrName>
+                                        </p:attrNameLst>
+                                      </p:cBhvr>
+                                      <p:to>
+                                        <p:strVal val="visible"/>
+                                      </p:to>
+                                    </p:set>
+                                    <p:animEffect transition="in" filter="wipe(down)">
+                                      <p:cBhvr>
+                                        <p:cTn id="28" dur="500"/>
+                                        <p:tgtEl>
+                                          <p:spTgt spid="27"/>
+                                        </p:tgtEl>
+                                      </p:cBhvr>
+                                    </p:animEffect>
+                                  </p:childTnLst>
+                                </p:cTn>
+                              </p:par>
+                              <p:par>
+                                <p:cTn id="29" presetID="22" presetClass="entr" presetSubtype="4" fill="hold" nodeType="withEffect">
+                                  <p:stCondLst>
+                                    <p:cond delay="0"/>
+                                  </p:stCondLst>
+                                  <p:childTnLst>
+                                    <p:set>
+                                      <p:cBhvr>
+                                        <p:cTn id="30" dur="1" fill="hold">
+                                          <p:stCondLst>
+                                            <p:cond delay="0"/>
+                                          </p:stCondLst>
+                                        </p:cTn>
+                                        <p:tgtEl>
+                                          <p:spTgt spid="39"/>
+                                        </p:tgtEl>
+                                        <p:attrNameLst>
+                                          <p:attrName>style.visibility</p:attrName>
+                                        </p:attrNameLst>
+                                      </p:cBhvr>
+                                      <p:to>
+                                        <p:strVal val="visible"/>
+                                      </p:to>
+                                    </p:set>
+                                    <p:animEffect transition="in" filter="wipe(down)">
+                                      <p:cBhvr>
+                                        <p:cTn id="31" dur="500"/>
+                                        <p:tgtEl>
+                                          <p:spTgt spid="39"/>
+                                        </p:tgtEl>
+                                      </p:cBhvr>
+                                    </p:animEffect>
+                                  </p:childTnLst>
+                                </p:cTn>
+                              </p:par>
+                              <p:par>
+                                <p:cTn id="32" presetID="22" presetClass="entr" presetSubtype="4" fill="hold" nodeType="withEffect">
+                                  <p:stCondLst>
+                                    <p:cond delay="0"/>
+                                  </p:stCondLst>
+                                  <p:childTnLst>
+                                    <p:set>
+                                      <p:cBhvr>
+                                        <p:cTn id="33" dur="1" fill="hold">
+                                          <p:stCondLst>
+                                            <p:cond delay="0"/>
+                                          </p:stCondLst>
+                                        </p:cTn>
+                                        <p:tgtEl>
+                                          <p:spTgt spid="42"/>
+                                        </p:tgtEl>
+                                        <p:attrNameLst>
+                                          <p:attrName>style.visibility</p:attrName>
+                                        </p:attrNameLst>
+                                      </p:cBhvr>
+                                      <p:to>
+                                        <p:strVal val="visible"/>
+                                      </p:to>
+                                    </p:set>
+                                    <p:animEffect transition="in" filter="wipe(down)">
+                                      <p:cBhvr>
+                                        <p:cTn id="34" dur="500"/>
+                                        <p:tgtEl>
+                                          <p:spTgt spid="42"/>
+                                        </p:tgtEl>
+                                      </p:cBhvr>
+                                    </p:animEffect>
+                                  </p:childTnLst>
+                                </p:cTn>
+                              </p:par>
+                            </p:childTnLst>
+                          </p:cTn>
+                        </p:par>
+                      </p:childTnLst>
+                    </p:cTn>
+                  </p:par>
+                  <p:par>
+                    <p:cTn id="35" fill="hold">
+                      <p:stCondLst>
+                        <p:cond delay="indefinite"/>
+                      </p:stCondLst>
+                      <p:childTnLst>
+                        <p:par>
+                          <p:cTn id="36" fill="hold">
+                            <p:stCondLst>
+                              <p:cond delay="0"/>
+                            </p:stCondLst>
+                            <p:childTnLst>
+                              <p:par>
+                                <p:cTn id="37" presetID="22" presetClass="entr" presetSubtype="4" fill="hold" nodeType="clickEffect">
+                                  <p:stCondLst>
+                                    <p:cond delay="0"/>
+                                  </p:stCondLst>
+                                  <p:childTnLst>
+                                    <p:set>
+                                      <p:cBhvr>
+                                        <p:cTn id="38" dur="1" fill="hold">
+                                          <p:stCondLst>
+                                            <p:cond delay="0"/>
+                                          </p:stCondLst>
+                                        </p:cTn>
+                                        <p:tgtEl>
+                                          <p:spTgt spid="30"/>
+                                        </p:tgtEl>
+                                        <p:attrNameLst>
+                                          <p:attrName>style.visibility</p:attrName>
+                                        </p:attrNameLst>
+                                      </p:cBhvr>
+                                      <p:to>
+                                        <p:strVal val="visible"/>
+                                      </p:to>
+                                    </p:set>
+                                    <p:animEffect transition="in" filter="wipe(down)">
+                                      <p:cBhvr>
+                                        <p:cTn id="39" dur="500"/>
+                                        <p:tgtEl>
+                                          <p:spTgt spid="30"/>
+                                        </p:tgtEl>
+                                      </p:cBhvr>
+                                    </p:animEffect>
+                                  </p:childTnLst>
+                                </p:cTn>
+                              </p:par>
+                              <p:par>
+                                <p:cTn id="40" presetID="22" presetClass="entr" presetSubtype="4" fill="hold" nodeType="withEffect">
+                                  <p:stCondLst>
+                                    <p:cond delay="0"/>
+                                  </p:stCondLst>
+                                  <p:childTnLst>
+                                    <p:set>
+                                      <p:cBhvr>
+                                        <p:cTn id="41" dur="1" fill="hold">
+                                          <p:stCondLst>
+                                            <p:cond delay="0"/>
+                                          </p:stCondLst>
+                                        </p:cTn>
+                                        <p:tgtEl>
+                                          <p:spTgt spid="43"/>
+                                        </p:tgtEl>
+                                        <p:attrNameLst>
+                                          <p:attrName>style.visibility</p:attrName>
+                                        </p:attrNameLst>
+                                      </p:cBhvr>
+                                      <p:to>
+                                        <p:strVal val="visible"/>
+                                      </p:to>
+                                    </p:set>
+                                    <p:animEffect transition="in" filter="wipe(down)">
+                                      <p:cBhvr>
+                                        <p:cTn id="42" dur="500"/>
+                                        <p:tgtEl>
+                                          <p:spTgt spid="43"/>
+                                        </p:tgtEl>
+                                      </p:cBhvr>
+                                    </p:animEffect>
+                                  </p:childTnLst>
+                                </p:cTn>
+                              </p:par>
+                              <p:par>
+                                <p:cTn id="43" presetID="22" presetClass="entr" presetSubtype="4" fill="hold" nodeType="withEffect">
+                                  <p:stCondLst>
+                                    <p:cond delay="0"/>
+                                  </p:stCondLst>
+                                  <p:childTnLst>
+                                    <p:set>
+                                      <p:cBhvr>
+                                        <p:cTn id="44" dur="1" fill="hold">
+                                          <p:stCondLst>
+                                            <p:cond delay="0"/>
+                                          </p:stCondLst>
+                                        </p:cTn>
+                                        <p:tgtEl>
+                                          <p:spTgt spid="46"/>
+                                        </p:tgtEl>
+                                        <p:attrNameLst>
+                                          <p:attrName>style.visibility</p:attrName>
+                                        </p:attrNameLst>
+                                      </p:cBhvr>
+                                      <p:to>
+                                        <p:strVal val="visible"/>
+                                      </p:to>
+                                    </p:set>
+                                    <p:animEffect transition="in" filter="wipe(down)">
+                                      <p:cBhvr>
+                                        <p:cTn id="45" dur="500"/>
+                                        <p:tgtEl>
+                                          <p:spTgt spid="46"/>
+                                        </p:tgtEl>
+                                      </p:cBhvr>
+                                    </p:animEffect>
+                                  </p:childTnLst>
+                                </p:cTn>
+                              </p:par>
+                            </p:childTnLst>
+                          </p:cTn>
+                        </p:par>
+                      </p:childTnLst>
+                    </p:cTn>
+                  </p:par>
+                </p:childTnLst>
+              </p:cTn>
+              <p:prevCondLst>
+                <p:cond evt="onPrev" delay="0">
+                  <p:tgtEl>
+                    <p:sldTgt/>
+                  </p:tgtEl>
+                </p:cond>
+              </p:prevCondLst>
+              <p:nextCondLst>
+                <p:cond evt="onNext" delay="0">
+                  <p:tgtEl>
+                    <p:sldTgt/>
+                  </p:tgtEl>
+                </p:cond>
+              </p:nextCondLst>
+            </p:seq>
+          </p:childTnLst>
+        </p:cTn>
+      </p:par>
+    </p:tnLst>
+    <p:bldLst>
+      <p:bldP spid="37" grpId="0"/>
+      <p:bldP spid="38" grpId="0"/>
+    </p:bldLst>
+  </p:timing>
 </p:sld>
 </file>
 
@@ -27397,4 +35170,319 @@
   <a:objectDefaults/>
   <a:extraClrSchemeLst/>
 </a:theme>
+</file>
+
+<file path=ppt/theme/theme2.xml><?xml version="1.0" encoding="utf-8"?>
+<a:theme xmlns:a="http://schemas.openxmlformats.org/drawingml/2006/main" name="Office Theme">
+  <a:themeElements>
+    <a:clrScheme name="Office">
+      <a:dk1>
+        <a:sysClr val="windowText" lastClr="000000"/>
+      </a:dk1>
+      <a:lt1>
+        <a:sysClr val="window" lastClr="FFFFFF"/>
+      </a:lt1>
+      <a:dk2>
+        <a:srgbClr val="0E2841"/>
+      </a:dk2>
+      <a:lt2>
+        <a:srgbClr val="E8E8E8"/>
+      </a:lt2>
+      <a:accent1>
+        <a:srgbClr val="156082"/>
+      </a:accent1>
+      <a:accent2>
+        <a:srgbClr val="E97132"/>
+      </a:accent2>
+      <a:accent3>
+        <a:srgbClr val="196B24"/>
+      </a:accent3>
+      <a:accent4>
+        <a:srgbClr val="0F9ED5"/>
+      </a:accent4>
+      <a:accent5>
+        <a:srgbClr val="A02B93"/>
+      </a:accent5>
+      <a:accent6>
+        <a:srgbClr val="4EA72E"/>
+      </a:accent6>
+      <a:hlink>
+        <a:srgbClr val="467886"/>
+      </a:hlink>
+      <a:folHlink>
+        <a:srgbClr val="96607D"/>
+      </a:folHlink>
+    </a:clrScheme>
+    <a:fontScheme name="Office">
+      <a:majorFont>
+        <a:latin typeface="Aptos Display" panose="02110004020202020204"/>
+        <a:ea typeface=""/>
+        <a:cs typeface=""/>
+        <a:font script="Jpan" typeface="游ゴシック Light"/>
+        <a:font script="Hang" typeface="맑은 고딕"/>
+        <a:font script="Hans" typeface="等线 Light"/>
+        <a:font script="Hant" typeface="新細明體"/>
+        <a:font script="Arab" typeface="Times New Roman"/>
+        <a:font script="Hebr" typeface="Times New Roman"/>
+        <a:font script="Thai" typeface="Angsana New"/>
+        <a:font script="Ethi" typeface="Nyala"/>
+        <a:font script="Beng" typeface="Vrinda"/>
+        <a:font script="Gujr" typeface="Shruti"/>
+        <a:font script="Khmr" typeface="MoolBoran"/>
+        <a:font script="Knda" typeface="Tunga"/>
+        <a:font script="Guru" typeface="Raavi"/>
+        <a:font script="Cans" typeface="Euphemia"/>
+        <a:font script="Cher" typeface="Plantagenet Cherokee"/>
+        <a:font script="Yiii" typeface="Microsoft Yi Baiti"/>
+        <a:font script="Tibt" typeface="Microsoft Himalaya"/>
+        <a:font script="Thaa" typeface="MV Boli"/>
+        <a:font script="Deva" typeface="Mangal"/>
+        <a:font script="Telu" typeface="Gautami"/>
+        <a:font script="Taml" typeface="Latha"/>
+        <a:font script="Syrc" typeface="Estrangelo Edessa"/>
+        <a:font script="Orya" typeface="Kalinga"/>
+        <a:font script="Mlym" typeface="Kartika"/>
+        <a:font script="Laoo" typeface="DokChampa"/>
+        <a:font script="Sinh" typeface="Iskoola Pota"/>
+        <a:font script="Mong" typeface="Mongolian Baiti"/>
+        <a:font script="Viet" typeface="Times New Roman"/>
+        <a:font script="Uigh" typeface="Microsoft Uighur"/>
+        <a:font script="Geor" typeface="Sylfaen"/>
+        <a:font script="Armn" typeface="Arial"/>
+        <a:font script="Bugi" typeface="Leelawadee UI"/>
+        <a:font script="Bopo" typeface="Microsoft JhengHei"/>
+        <a:font script="Java" typeface="Javanese Text"/>
+        <a:font script="Lisu" typeface="Segoe UI"/>
+        <a:font script="Mymr" typeface="Myanmar Text"/>
+        <a:font script="Nkoo" typeface="Ebrima"/>
+        <a:font script="Olck" typeface="Nirmala UI"/>
+        <a:font script="Osma" typeface="Ebrima"/>
+        <a:font script="Phag" typeface="Phagspa"/>
+        <a:font script="Syrn" typeface="Estrangelo Edessa"/>
+        <a:font script="Syrj" typeface="Estrangelo Edessa"/>
+        <a:font script="Syre" typeface="Estrangelo Edessa"/>
+        <a:font script="Sora" typeface="Nirmala UI"/>
+        <a:font script="Tale" typeface="Microsoft Tai Le"/>
+        <a:font script="Talu" typeface="Microsoft New Tai Lue"/>
+        <a:font script="Tfng" typeface="Ebrima"/>
+      </a:majorFont>
+      <a:minorFont>
+        <a:latin typeface="Aptos" panose="02110004020202020204"/>
+        <a:ea typeface=""/>
+        <a:cs typeface=""/>
+        <a:font script="Jpan" typeface="游ゴシック"/>
+        <a:font script="Hang" typeface="맑은 고딕"/>
+        <a:font script="Hans" typeface="等线"/>
+        <a:font script="Hant" typeface="新細明體"/>
+        <a:font script="Arab" typeface="Arial"/>
+        <a:font script="Hebr" typeface="Arial"/>
+        <a:font script="Thai" typeface="Cordia New"/>
+        <a:font script="Ethi" typeface="Nyala"/>
+        <a:font script="Beng" typeface="Vrinda"/>
+        <a:font script="Gujr" typeface="Shruti"/>
+        <a:font script="Khmr" typeface="DaunPenh"/>
+        <a:font script="Knda" typeface="Tunga"/>
+        <a:font script="Guru" typeface="Raavi"/>
+        <a:font script="Cans" typeface="Euphemia"/>
+        <a:font script="Cher" typeface="Plantagenet Cherokee"/>
+        <a:font script="Yiii" typeface="Microsoft Yi Baiti"/>
+        <a:font script="Tibt" typeface="Microsoft Himalaya"/>
+        <a:font script="Thaa" typeface="MV Boli"/>
+        <a:font script="Deva" typeface="Mangal"/>
+        <a:font script="Telu" typeface="Gautami"/>
+        <a:font script="Taml" typeface="Latha"/>
+        <a:font script="Syrc" typeface="Estrangelo Edessa"/>
+        <a:font script="Orya" typeface="Kalinga"/>
+        <a:font script="Mlym" typeface="Kartika"/>
+        <a:font script="Laoo" typeface="DokChampa"/>
+        <a:font script="Sinh" typeface="Iskoola Pota"/>
+        <a:font script="Mong" typeface="Mongolian Baiti"/>
+        <a:font script="Viet" typeface="Arial"/>
+        <a:font script="Uigh" typeface="Microsoft Uighur"/>
+        <a:font script="Geor" typeface="Sylfaen"/>
+        <a:font script="Armn" typeface="Arial"/>
+        <a:font script="Bugi" typeface="Leelawadee UI"/>
+        <a:font script="Bopo" typeface="Microsoft JhengHei"/>
+        <a:font script="Java" typeface="Javanese Text"/>
+        <a:font script="Lisu" typeface="Segoe UI"/>
+        <a:font script="Mymr" typeface="Myanmar Text"/>
+        <a:font script="Nkoo" typeface="Ebrima"/>
+        <a:font script="Olck" typeface="Nirmala UI"/>
+        <a:font script="Osma" typeface="Ebrima"/>
+        <a:font script="Phag" typeface="Phagspa"/>
+        <a:font script="Syrn" typeface="Estrangelo Edessa"/>
+        <a:font script="Syrj" typeface="Estrangelo Edessa"/>
+        <a:font script="Syre" typeface="Estrangelo Edessa"/>
+        <a:font script="Sora" typeface="Nirmala UI"/>
+        <a:font script="Tale" typeface="Microsoft Tai Le"/>
+        <a:font script="Talu" typeface="Microsoft New Tai Lue"/>
+        <a:font script="Tfng" typeface="Ebrima"/>
+      </a:minorFont>
+    </a:fontScheme>
+    <a:fmtScheme name="Office">
+      <a:fillStyleLst>
+        <a:solidFill>
+          <a:schemeClr val="phClr"/>
+        </a:solidFill>
+        <a:gradFill rotWithShape="1">
+          <a:gsLst>
+            <a:gs pos="0">
+              <a:schemeClr val="phClr">
+                <a:lumMod val="110000"/>
+                <a:satMod val="105000"/>
+                <a:tint val="67000"/>
+              </a:schemeClr>
+            </a:gs>
+            <a:gs pos="50000">
+              <a:schemeClr val="phClr">
+                <a:lumMod val="105000"/>
+                <a:satMod val="103000"/>
+                <a:tint val="73000"/>
+              </a:schemeClr>
+            </a:gs>
+            <a:gs pos="100000">
+              <a:schemeClr val="phClr">
+                <a:lumMod val="105000"/>
+                <a:satMod val="109000"/>
+                <a:tint val="81000"/>
+              </a:schemeClr>
+            </a:gs>
+          </a:gsLst>
+          <a:lin ang="5400000" scaled="0"/>
+        </a:gradFill>
+        <a:gradFill rotWithShape="1">
+          <a:gsLst>
+            <a:gs pos="0">
+              <a:schemeClr val="phClr">
+                <a:satMod val="103000"/>
+                <a:lumMod val="102000"/>
+                <a:tint val="94000"/>
+              </a:schemeClr>
+            </a:gs>
+            <a:gs pos="50000">
+              <a:schemeClr val="phClr">
+                <a:satMod val="110000"/>
+                <a:lumMod val="100000"/>
+                <a:shade val="100000"/>
+              </a:schemeClr>
+            </a:gs>
+            <a:gs pos="100000">
+              <a:schemeClr val="phClr">
+                <a:lumMod val="99000"/>
+                <a:satMod val="120000"/>
+                <a:shade val="78000"/>
+              </a:schemeClr>
+            </a:gs>
+          </a:gsLst>
+          <a:lin ang="5400000" scaled="0"/>
+        </a:gradFill>
+      </a:fillStyleLst>
+      <a:lnStyleLst>
+        <a:ln w="12700" cap="flat" cmpd="sng" algn="ctr">
+          <a:solidFill>
+            <a:schemeClr val="phClr"/>
+          </a:solidFill>
+          <a:prstDash val="solid"/>
+          <a:miter lim="800000"/>
+        </a:ln>
+        <a:ln w="19050" cap="flat" cmpd="sng" algn="ctr">
+          <a:solidFill>
+            <a:schemeClr val="phClr"/>
+          </a:solidFill>
+          <a:prstDash val="solid"/>
+          <a:miter lim="800000"/>
+        </a:ln>
+        <a:ln w="25400" cap="flat" cmpd="sng" algn="ctr">
+          <a:solidFill>
+            <a:schemeClr val="phClr"/>
+          </a:solidFill>
+          <a:prstDash val="solid"/>
+          <a:miter lim="800000"/>
+        </a:ln>
+      </a:lnStyleLst>
+      <a:effectStyleLst>
+        <a:effectStyle>
+          <a:effectLst/>
+        </a:effectStyle>
+        <a:effectStyle>
+          <a:effectLst/>
+        </a:effectStyle>
+        <a:effectStyle>
+          <a:effectLst>
+            <a:outerShdw blurRad="57150" dist="19050" dir="5400000" algn="ctr" rotWithShape="0">
+              <a:srgbClr val="000000">
+                <a:alpha val="63000"/>
+              </a:srgbClr>
+            </a:outerShdw>
+          </a:effectLst>
+        </a:effectStyle>
+      </a:effectStyleLst>
+      <a:bgFillStyleLst>
+        <a:solidFill>
+          <a:schemeClr val="phClr"/>
+        </a:solidFill>
+        <a:solidFill>
+          <a:schemeClr val="phClr">
+            <a:tint val="95000"/>
+            <a:satMod val="170000"/>
+          </a:schemeClr>
+        </a:solidFill>
+        <a:gradFill rotWithShape="1">
+          <a:gsLst>
+            <a:gs pos="0">
+              <a:schemeClr val="phClr">
+                <a:tint val="93000"/>
+                <a:satMod val="150000"/>
+                <a:shade val="98000"/>
+                <a:lumMod val="102000"/>
+              </a:schemeClr>
+            </a:gs>
+            <a:gs pos="50000">
+              <a:schemeClr val="phClr">
+                <a:tint val="98000"/>
+                <a:satMod val="130000"/>
+                <a:shade val="90000"/>
+                <a:lumMod val="103000"/>
+              </a:schemeClr>
+            </a:gs>
+            <a:gs pos="100000">
+              <a:schemeClr val="phClr">
+                <a:shade val="63000"/>
+                <a:satMod val="120000"/>
+              </a:schemeClr>
+            </a:gs>
+          </a:gsLst>
+          <a:lin ang="5400000" scaled="0"/>
+        </a:gradFill>
+      </a:bgFillStyleLst>
+    </a:fmtScheme>
+  </a:themeElements>
+  <a:objectDefaults>
+    <a:lnDef>
+      <a:spPr/>
+      <a:bodyPr/>
+      <a:lstStyle/>
+      <a:style>
+        <a:lnRef idx="2">
+          <a:schemeClr val="accent1"/>
+        </a:lnRef>
+        <a:fillRef idx="0">
+          <a:schemeClr val="accent1"/>
+        </a:fillRef>
+        <a:effectRef idx="1">
+          <a:schemeClr val="accent1"/>
+        </a:effectRef>
+        <a:fontRef idx="minor">
+          <a:schemeClr val="tx1"/>
+        </a:fontRef>
+      </a:style>
+    </a:lnDef>
+  </a:objectDefaults>
+  <a:extraClrSchemeLst/>
+  <a:extLst>
+    <a:ext uri="{05A4C25C-085E-4340-85A3-A5531E510DB2}">
+      <thm15:themeFamily xmlns:thm15="http://schemas.microsoft.com/office/thememl/2012/main" name="Office Theme" id="{2E142A2C-CD16-42D6-873A-C26D2A0506FA}" vid="{1BDDFF52-6CD6-40A5-AB3C-68EB2F1E4D0A}"/>
+    </a:ext>
+  </a:extLst>
+</a:theme>
 </file>
--- a/docs/BAOCAOTOTNGHIEP.pptx
+++ b/docs/BAOCAOTOTNGHIEP.pptx
@@ -246,7 +246,7 @@
           <a:p>
             <a:fld id="{990BF94C-C378-4287-BE53-A624E47B9AB2}" type="datetimeFigureOut">
               <a:rPr lang="en-US" smtClean="0"/>
-              <a:t>7/3/2026</a:t>
+              <a:t>7/5/2026</a:t>
             </a:fld>
             <a:endParaRPr lang="en-US"/>
           </a:p>
@@ -558,6 +558,53 @@
           <a:bodyPr/>
           <a:lstStyle/>
           <a:p>
+            <a:r>
+              <a:rPr lang="vi-VN"/>
+              <a:t>Kính thưa quý thầy cô trong Hội đồng!</a:t>
+            </a:r>
+          </a:p>
+          <a:p>
+            <a:r>
+              <a:rPr lang="vi-VN"/>
+              <a:t>Em xin tự giới thiệu, em là </a:t>
+            </a:r>
+            <a:r>
+              <a:rPr lang="vi-VN" b="1"/>
+              <a:t>Trần Thị Yến Nhi</a:t>
+            </a:r>
+            <a:r>
+              <a:rPr lang="vi-VN"/>
+              <a:t>, sinh viên lớp </a:t>
+            </a:r>
+            <a:r>
+              <a:rPr lang="vi-VN" b="1"/>
+              <a:t>DA22TTB</a:t>
+            </a:r>
+            <a:r>
+              <a:rPr lang="vi-VN"/>
+              <a:t>, Trường Kỹ thuật và Công nghệ, Trường Đại học Trà Vinh.</a:t>
+            </a:r>
+          </a:p>
+          <a:p>
+            <a:r>
+              <a:rPr lang="vi-VN"/>
+              <a:t>Hôm nay em xin trình bày khóa luận tốt nghiệp với đề tài:</a:t>
+            </a:r>
+          </a:p>
+          <a:p>
+            <a:r>
+              <a:rPr lang="vi-VN" b="1"/>
+              <a:t>"Phát triển hệ thống gợi ý thực phẩm hỗ trợ tăng cân lành mạnh cho người thiếu cân."</a:t>
+            </a:r>
+            <a:endParaRPr lang="vi-VN"/>
+          </a:p>
+          <a:p>
+            <a:r>
+              <a:rPr lang="vi-VN"/>
+              <a:t>Sau đây em xin bắt đầu phần trình bày.</a:t>
+            </a:r>
+          </a:p>
+          <a:p>
             <a:endParaRPr lang="en-US"/>
           </a:p>
         </p:txBody>
@@ -579,6 +626,1267 @@
           <a:p>
             <a:fld id="{02BE832F-9538-40A2-A31F-0417EB2D2CC7}" type="slidenum">
               <a:rPr lang="en-US" smtClean="0"/>
+              <a:t>1</a:t>
+            </a:fld>
+            <a:endParaRPr lang="en-US"/>
+          </a:p>
+        </p:txBody>
+      </p:sp>
+    </p:spTree>
+    <p:extLst>
+      <p:ext uri="{BB962C8B-B14F-4D97-AF65-F5344CB8AC3E}">
+        <p14:creationId xmlns:p14="http://schemas.microsoft.com/office/powerpoint/2010/main" val="3582104673"/>
+      </p:ext>
+    </p:extLst>
+  </p:cSld>
+  <p:clrMapOvr>
+    <a:masterClrMapping/>
+  </p:clrMapOvr>
+</p:notes>
+</file>
+
+<file path=ppt/notesSlides/notesSlide10.xml><?xml version="1.0" encoding="utf-8"?>
+<p:notes xmlns:a="http://schemas.openxmlformats.org/drawingml/2006/main" xmlns:r="http://schemas.openxmlformats.org/officeDocument/2006/relationships" xmlns:p="http://schemas.openxmlformats.org/presentationml/2006/main">
+  <p:cSld>
+    <p:spTree>
+      <p:nvGrpSpPr>
+        <p:cNvPr id="1" name=""/>
+        <p:cNvGrpSpPr/>
+        <p:nvPr/>
+      </p:nvGrpSpPr>
+      <p:grpSpPr>
+        <a:xfrm>
+          <a:off x="0" y="0"/>
+          <a:ext cx="0" cy="0"/>
+          <a:chOff x="0" y="0"/>
+          <a:chExt cx="0" cy="0"/>
+        </a:xfrm>
+      </p:grpSpPr>
+      <p:sp>
+        <p:nvSpPr>
+          <p:cNvPr id="2" name="Slide Image Placeholder 1"/>
+          <p:cNvSpPr>
+            <a:spLocks noGrp="1" noRot="1" noChangeAspect="1"/>
+          </p:cNvSpPr>
+          <p:nvPr>
+            <p:ph type="sldImg"/>
+          </p:nvPr>
+        </p:nvSpPr>
+        <p:spPr/>
+      </p:sp>
+      <p:sp>
+        <p:nvSpPr>
+          <p:cNvPr id="3" name="Notes Placeholder 2"/>
+          <p:cNvSpPr>
+            <a:spLocks noGrp="1"/>
+          </p:cNvSpPr>
+          <p:nvPr>
+            <p:ph type="body" idx="1"/>
+          </p:nvPr>
+        </p:nvSpPr>
+        <p:spPr/>
+        <p:txBody>
+          <a:bodyPr/>
+          <a:lstStyle/>
+          <a:p>
+            <a:r>
+              <a:rPr lang="vi-VN"/>
+              <a:t>TDEE là tổng năng lượng tiêu hao trong một ngày.</a:t>
+            </a:r>
+          </a:p>
+          <a:p>
+            <a:r>
+              <a:rPr lang="vi-VN"/>
+              <a:t>Công thức:</a:t>
+            </a:r>
+          </a:p>
+          <a:p>
+            <a:r>
+              <a:rPr lang="vi-VN" b="1"/>
+              <a:t>TDEE = BMR × hệ số hoạt động.</a:t>
+            </a:r>
+            <a:endParaRPr lang="vi-VN"/>
+          </a:p>
+          <a:p>
+            <a:r>
+              <a:rPr lang="vi-VN"/>
+              <a:t>Dựa trên TDEE, hệ thống sẽ tính lượng calo cần bổ sung để người dùng tăng cân an toàn.</a:t>
+            </a:r>
+          </a:p>
+          <a:p>
+            <a:endParaRPr lang="en-US"/>
+          </a:p>
+        </p:txBody>
+      </p:sp>
+      <p:sp>
+        <p:nvSpPr>
+          <p:cNvPr id="4" name="Slide Number Placeholder 3"/>
+          <p:cNvSpPr>
+            <a:spLocks noGrp="1"/>
+          </p:cNvSpPr>
+          <p:nvPr>
+            <p:ph type="sldNum" sz="quarter" idx="5"/>
+          </p:nvPr>
+        </p:nvSpPr>
+        <p:spPr/>
+        <p:txBody>
+          <a:bodyPr/>
+          <a:lstStyle/>
+          <a:p>
+            <a:fld id="{02BE832F-9538-40A2-A31F-0417EB2D2CC7}" type="slidenum">
+              <a:rPr lang="en-US" smtClean="0"/>
+              <a:t>10</a:t>
+            </a:fld>
+            <a:endParaRPr lang="en-US"/>
+          </a:p>
+        </p:txBody>
+      </p:sp>
+    </p:spTree>
+    <p:extLst>
+      <p:ext uri="{BB962C8B-B14F-4D97-AF65-F5344CB8AC3E}">
+        <p14:creationId xmlns:p14="http://schemas.microsoft.com/office/powerpoint/2010/main" val="2149482931"/>
+      </p:ext>
+    </p:extLst>
+  </p:cSld>
+  <p:clrMapOvr>
+    <a:masterClrMapping/>
+  </p:clrMapOvr>
+</p:notes>
+</file>
+
+<file path=ppt/notesSlides/notesSlide11.xml><?xml version="1.0" encoding="utf-8"?>
+<p:notes xmlns:a="http://schemas.openxmlformats.org/drawingml/2006/main" xmlns:r="http://schemas.openxmlformats.org/officeDocument/2006/relationships" xmlns:p="http://schemas.openxmlformats.org/presentationml/2006/main">
+  <p:cSld>
+    <p:spTree>
+      <p:nvGrpSpPr>
+        <p:cNvPr id="1" name=""/>
+        <p:cNvGrpSpPr/>
+        <p:nvPr/>
+      </p:nvGrpSpPr>
+      <p:grpSpPr>
+        <a:xfrm>
+          <a:off x="0" y="0"/>
+          <a:ext cx="0" cy="0"/>
+          <a:chOff x="0" y="0"/>
+          <a:chExt cx="0" cy="0"/>
+        </a:xfrm>
+      </p:grpSpPr>
+      <p:sp>
+        <p:nvSpPr>
+          <p:cNvPr id="2" name="Slide Image Placeholder 1"/>
+          <p:cNvSpPr>
+            <a:spLocks noGrp="1" noRot="1" noChangeAspect="1"/>
+          </p:cNvSpPr>
+          <p:nvPr>
+            <p:ph type="sldImg"/>
+          </p:nvPr>
+        </p:nvSpPr>
+        <p:spPr/>
+      </p:sp>
+      <p:sp>
+        <p:nvSpPr>
+          <p:cNvPr id="3" name="Notes Placeholder 2"/>
+          <p:cNvSpPr>
+            <a:spLocks noGrp="1"/>
+          </p:cNvSpPr>
+          <p:nvPr>
+            <p:ph type="body" idx="1"/>
+          </p:nvPr>
+        </p:nvSpPr>
+        <p:spPr/>
+        <p:txBody>
+          <a:bodyPr/>
+          <a:lstStyle/>
+          <a:p>
+            <a:r>
+              <a:rPr lang="vi-VN"/>
+              <a:t>Một điểm nổi bật của hệ thống là áp dụng </a:t>
+            </a:r>
+            <a:r>
+              <a:rPr lang="vi-VN" b="1"/>
+              <a:t>Gamification</a:t>
+            </a:r>
+            <a:r>
+              <a:rPr lang="vi-VN"/>
+              <a:t>.</a:t>
+            </a:r>
+          </a:p>
+          <a:p>
+            <a:r>
+              <a:rPr lang="vi-VN"/>
+              <a:t>Đây là phương pháp đưa các yếu tố trò chơi vào ứng dụng nhằm tăng động lực sử dụng.</a:t>
+            </a:r>
+          </a:p>
+          <a:p>
+            <a:r>
+              <a:rPr lang="vi-VN"/>
+              <a:t>Hệ thống có:</a:t>
+            </a:r>
+          </a:p>
+          <a:p>
+            <a:pPr>
+              <a:buFont typeface="Arial" panose="020B0604020202020204" pitchFamily="34" charset="0"/>
+              <a:buChar char="•"/>
+            </a:pPr>
+            <a:r>
+              <a:rPr lang="vi-VN"/>
+              <a:t>điểm thưởng, </a:t>
+            </a:r>
+          </a:p>
+          <a:p>
+            <a:pPr>
+              <a:buFont typeface="Arial" panose="020B0604020202020204" pitchFamily="34" charset="0"/>
+              <a:buChar char="•"/>
+            </a:pPr>
+            <a:r>
+              <a:rPr lang="vi-VN"/>
+              <a:t>huy hiệu, </a:t>
+            </a:r>
+          </a:p>
+          <a:p>
+            <a:pPr>
+              <a:buFont typeface="Arial" panose="020B0604020202020204" pitchFamily="34" charset="0"/>
+              <a:buChar char="•"/>
+            </a:pPr>
+            <a:r>
+              <a:rPr lang="vi-VN"/>
+              <a:t>cấp độ, </a:t>
+            </a:r>
+          </a:p>
+          <a:p>
+            <a:pPr>
+              <a:buFont typeface="Arial" panose="020B0604020202020204" pitchFamily="34" charset="0"/>
+              <a:buChar char="•"/>
+            </a:pPr>
+            <a:r>
+              <a:rPr lang="vi-VN"/>
+              <a:t>chuỗi đăng nhập, </a:t>
+            </a:r>
+          </a:p>
+          <a:p>
+            <a:pPr>
+              <a:buFont typeface="Arial" panose="020B0604020202020204" pitchFamily="34" charset="0"/>
+              <a:buChar char="•"/>
+            </a:pPr>
+            <a:r>
+              <a:rPr lang="vi-VN"/>
+              <a:t>thử thách, </a:t>
+            </a:r>
+          </a:p>
+          <a:p>
+            <a:pPr>
+              <a:buFont typeface="Arial" panose="020B0604020202020204" pitchFamily="34" charset="0"/>
+              <a:buChar char="•"/>
+            </a:pPr>
+            <a:r>
+              <a:rPr lang="vi-VN"/>
+              <a:t>phần thưởng. </a:t>
+            </a:r>
+          </a:p>
+          <a:p>
+            <a:r>
+              <a:rPr lang="vi-VN"/>
+              <a:t>Những tính năng này giúp người dùng duy trì thói quen ăn uống và theo dõi cân nặng lâu dài.</a:t>
+            </a:r>
+          </a:p>
+          <a:p>
+            <a:endParaRPr lang="en-US"/>
+          </a:p>
+        </p:txBody>
+      </p:sp>
+      <p:sp>
+        <p:nvSpPr>
+          <p:cNvPr id="4" name="Slide Number Placeholder 3"/>
+          <p:cNvSpPr>
+            <a:spLocks noGrp="1"/>
+          </p:cNvSpPr>
+          <p:nvPr>
+            <p:ph type="sldNum" sz="quarter" idx="5"/>
+          </p:nvPr>
+        </p:nvSpPr>
+        <p:spPr/>
+        <p:txBody>
+          <a:bodyPr/>
+          <a:lstStyle/>
+          <a:p>
+            <a:fld id="{02BE832F-9538-40A2-A31F-0417EB2D2CC7}" type="slidenum">
+              <a:rPr lang="en-US" smtClean="0"/>
+              <a:t>11</a:t>
+            </a:fld>
+            <a:endParaRPr lang="en-US"/>
+          </a:p>
+        </p:txBody>
+      </p:sp>
+    </p:spTree>
+    <p:extLst>
+      <p:ext uri="{BB962C8B-B14F-4D97-AF65-F5344CB8AC3E}">
+        <p14:creationId xmlns:p14="http://schemas.microsoft.com/office/powerpoint/2010/main" val="1407699877"/>
+      </p:ext>
+    </p:extLst>
+  </p:cSld>
+  <p:clrMapOvr>
+    <a:masterClrMapping/>
+  </p:clrMapOvr>
+</p:notes>
+</file>
+
+<file path=ppt/notesSlides/notesSlide12.xml><?xml version="1.0" encoding="utf-8"?>
+<p:notes xmlns:a="http://schemas.openxmlformats.org/drawingml/2006/main" xmlns:r="http://schemas.openxmlformats.org/officeDocument/2006/relationships" xmlns:p="http://schemas.openxmlformats.org/presentationml/2006/main">
+  <p:cSld>
+    <p:spTree>
+      <p:nvGrpSpPr>
+        <p:cNvPr id="1" name=""/>
+        <p:cNvGrpSpPr/>
+        <p:nvPr/>
+      </p:nvGrpSpPr>
+      <p:grpSpPr>
+        <a:xfrm>
+          <a:off x="0" y="0"/>
+          <a:ext cx="0" cy="0"/>
+          <a:chOff x="0" y="0"/>
+          <a:chExt cx="0" cy="0"/>
+        </a:xfrm>
+      </p:grpSpPr>
+      <p:sp>
+        <p:nvSpPr>
+          <p:cNvPr id="2" name="Slide Image Placeholder 1"/>
+          <p:cNvSpPr>
+            <a:spLocks noGrp="1" noRot="1" noChangeAspect="1"/>
+          </p:cNvSpPr>
+          <p:nvPr>
+            <p:ph type="sldImg"/>
+          </p:nvPr>
+        </p:nvSpPr>
+        <p:spPr/>
+      </p:sp>
+      <p:sp>
+        <p:nvSpPr>
+          <p:cNvPr id="3" name="Notes Placeholder 2"/>
+          <p:cNvSpPr>
+            <a:spLocks noGrp="1"/>
+          </p:cNvSpPr>
+          <p:nvPr>
+            <p:ph type="body" idx="1"/>
+          </p:nvPr>
+        </p:nvSpPr>
+        <p:spPr/>
+        <p:txBody>
+          <a:bodyPr/>
+          <a:lstStyle/>
+          <a:p>
+            <a:r>
+              <a:rPr lang="vi-VN"/>
+              <a:t>Đây là mô hình cơ sở dữ liệu của hệ thống.</a:t>
+            </a:r>
+          </a:p>
+          <a:p>
+            <a:r>
+              <a:rPr lang="vi-VN"/>
+              <a:t>Cơ sở dữ liệu được thiết kế theo mô hình quan hệ.</a:t>
+            </a:r>
+          </a:p>
+          <a:p>
+            <a:r>
+              <a:rPr lang="vi-VN"/>
+              <a:t>Các bảng chính gồm:</a:t>
+            </a:r>
+          </a:p>
+          <a:p>
+            <a:pPr>
+              <a:buFont typeface="Arial" panose="020B0604020202020204" pitchFamily="34" charset="0"/>
+              <a:buChar char="•"/>
+            </a:pPr>
+            <a:r>
+              <a:rPr lang="vi-VN"/>
+              <a:t>Users, </a:t>
+            </a:r>
+          </a:p>
+          <a:p>
+            <a:pPr>
+              <a:buFont typeface="Arial" panose="020B0604020202020204" pitchFamily="34" charset="0"/>
+              <a:buChar char="•"/>
+            </a:pPr>
+            <a:r>
+              <a:rPr lang="vi-VN"/>
+              <a:t>Foods, </a:t>
+            </a:r>
+          </a:p>
+          <a:p>
+            <a:pPr>
+              <a:buFont typeface="Arial" panose="020B0604020202020204" pitchFamily="34" charset="0"/>
+              <a:buChar char="•"/>
+            </a:pPr>
+            <a:r>
+              <a:rPr lang="vi-VN"/>
+              <a:t>Meal Plans, </a:t>
+            </a:r>
+          </a:p>
+          <a:p>
+            <a:pPr>
+              <a:buFont typeface="Arial" panose="020B0604020202020204" pitchFamily="34" charset="0"/>
+              <a:buChar char="•"/>
+            </a:pPr>
+            <a:r>
+              <a:rPr lang="vi-VN"/>
+              <a:t>Weight History, </a:t>
+            </a:r>
+          </a:p>
+          <a:p>
+            <a:pPr>
+              <a:buFont typeface="Arial" panose="020B0604020202020204" pitchFamily="34" charset="0"/>
+              <a:buChar char="•"/>
+            </a:pPr>
+            <a:r>
+              <a:rPr lang="vi-VN"/>
+              <a:t>Food Logs, </a:t>
+            </a:r>
+          </a:p>
+          <a:p>
+            <a:pPr>
+              <a:buFont typeface="Arial" panose="020B0604020202020204" pitchFamily="34" charset="0"/>
+              <a:buChar char="•"/>
+            </a:pPr>
+            <a:r>
+              <a:rPr lang="vi-VN"/>
+              <a:t>Rewards... </a:t>
+            </a:r>
+          </a:p>
+          <a:p>
+            <a:r>
+              <a:rPr lang="vi-VN"/>
+              <a:t>Các bảng liên kết với nhau nhằm đảm bảo dữ liệu nhất quán và hỗ trợ tốt cho việc truy vấn.</a:t>
+            </a:r>
+          </a:p>
+          <a:p>
+            <a:r>
+              <a:rPr lang="vi-VN" i="1"/>
+              <a:t>(Không cần giải thích từng bảng vì hội đồng thường không muốn nghe quá chi tiết.)</a:t>
+            </a:r>
+            <a:endParaRPr lang="vi-VN"/>
+          </a:p>
+          <a:p>
+            <a:endParaRPr lang="en-US"/>
+          </a:p>
+        </p:txBody>
+      </p:sp>
+      <p:sp>
+        <p:nvSpPr>
+          <p:cNvPr id="4" name="Slide Number Placeholder 3"/>
+          <p:cNvSpPr>
+            <a:spLocks noGrp="1"/>
+          </p:cNvSpPr>
+          <p:nvPr>
+            <p:ph type="sldNum" sz="quarter" idx="5"/>
+          </p:nvPr>
+        </p:nvSpPr>
+        <p:spPr/>
+        <p:txBody>
+          <a:bodyPr/>
+          <a:lstStyle/>
+          <a:p>
+            <a:fld id="{02BE832F-9538-40A2-A31F-0417EB2D2CC7}" type="slidenum">
+              <a:rPr lang="en-US" smtClean="0"/>
+              <a:t>14</a:t>
+            </a:fld>
+            <a:endParaRPr lang="en-US"/>
+          </a:p>
+        </p:txBody>
+      </p:sp>
+    </p:spTree>
+    <p:extLst>
+      <p:ext uri="{BB962C8B-B14F-4D97-AF65-F5344CB8AC3E}">
+        <p14:creationId xmlns:p14="http://schemas.microsoft.com/office/powerpoint/2010/main" val="3488022406"/>
+      </p:ext>
+    </p:extLst>
+  </p:cSld>
+  <p:clrMapOvr>
+    <a:masterClrMapping/>
+  </p:clrMapOvr>
+</p:notes>
+</file>
+
+<file path=ppt/notesSlides/notesSlide13.xml><?xml version="1.0" encoding="utf-8"?>
+<p:notes xmlns:a="http://schemas.openxmlformats.org/drawingml/2006/main" xmlns:r="http://schemas.openxmlformats.org/officeDocument/2006/relationships" xmlns:p="http://schemas.openxmlformats.org/presentationml/2006/main">
+  <p:cSld>
+    <p:spTree>
+      <p:nvGrpSpPr>
+        <p:cNvPr id="1" name=""/>
+        <p:cNvGrpSpPr/>
+        <p:nvPr/>
+      </p:nvGrpSpPr>
+      <p:grpSpPr>
+        <a:xfrm>
+          <a:off x="0" y="0"/>
+          <a:ext cx="0" cy="0"/>
+          <a:chOff x="0" y="0"/>
+          <a:chExt cx="0" cy="0"/>
+        </a:xfrm>
+      </p:grpSpPr>
+      <p:sp>
+        <p:nvSpPr>
+          <p:cNvPr id="2" name="Slide Image Placeholder 1"/>
+          <p:cNvSpPr>
+            <a:spLocks noGrp="1" noRot="1" noChangeAspect="1"/>
+          </p:cNvSpPr>
+          <p:nvPr>
+            <p:ph type="sldImg"/>
+          </p:nvPr>
+        </p:nvSpPr>
+        <p:spPr/>
+      </p:sp>
+      <p:sp>
+        <p:nvSpPr>
+          <p:cNvPr id="3" name="Notes Placeholder 2"/>
+          <p:cNvSpPr>
+            <a:spLocks noGrp="1"/>
+          </p:cNvSpPr>
+          <p:nvPr>
+            <p:ph type="body" idx="1"/>
+          </p:nvPr>
+        </p:nvSpPr>
+        <p:spPr/>
+        <p:txBody>
+          <a:bodyPr/>
+          <a:lstStyle/>
+          <a:p>
+            <a:r>
+              <a:rPr lang="vi-VN"/>
+              <a:t>Sau quá trình nghiên cứu và phát triển, đề tài đã đạt được các kết quả sau:</a:t>
+            </a:r>
+          </a:p>
+          <a:p>
+            <a:pPr>
+              <a:buFont typeface="Arial" panose="020B0604020202020204" pitchFamily="34" charset="0"/>
+              <a:buChar char="•"/>
+            </a:pPr>
+            <a:r>
+              <a:rPr lang="vi-VN"/>
+              <a:t>Xây dựng thành công hệ thống NutriGain. </a:t>
+            </a:r>
+          </a:p>
+          <a:p>
+            <a:pPr>
+              <a:buFont typeface="Arial" panose="020B0604020202020204" pitchFamily="34" charset="0"/>
+              <a:buChar char="•"/>
+            </a:pPr>
+            <a:r>
+              <a:rPr lang="vi-VN"/>
+              <a:t>Tính toán chính xác BMI, BMR và TDEE. </a:t>
+            </a:r>
+          </a:p>
+          <a:p>
+            <a:pPr>
+              <a:buFont typeface="Arial" panose="020B0604020202020204" pitchFamily="34" charset="0"/>
+              <a:buChar char="•"/>
+            </a:pPr>
+            <a:r>
+              <a:rPr lang="vi-VN"/>
+              <a:t>Áp dụng Hybrid Recommendation kết hợp Content-Based và Rule-Based để gợi ý thực </a:t>
+            </a:r>
+            <a:r>
+              <a:rPr lang="en-US"/>
+              <a:t>phẩm</a:t>
+            </a:r>
+            <a:r>
+              <a:rPr lang="vi-VN"/>
+              <a:t>. </a:t>
+            </a:r>
+          </a:p>
+          <a:p>
+            <a:pPr>
+              <a:buFont typeface="Arial" panose="020B0604020202020204" pitchFamily="34" charset="0"/>
+              <a:buChar char="•"/>
+            </a:pPr>
+            <a:r>
+              <a:rPr lang="vi-VN"/>
+              <a:t>Tích hợp AI nhận diện thực phẩm từ hình ảnh. </a:t>
+            </a:r>
+          </a:p>
+          <a:p>
+            <a:pPr>
+              <a:buFont typeface="Arial" panose="020B0604020202020204" pitchFamily="34" charset="0"/>
+              <a:buChar char="•"/>
+            </a:pPr>
+            <a:r>
+              <a:rPr lang="vi-VN"/>
+              <a:t>Xây dựng chức năng theo dõi cân nặng. </a:t>
+            </a:r>
+          </a:p>
+          <a:p>
+            <a:pPr>
+              <a:buFont typeface="Arial" panose="020B0604020202020204" pitchFamily="34" charset="0"/>
+              <a:buChar char="•"/>
+            </a:pPr>
+            <a:r>
+              <a:rPr lang="vi-VN"/>
+              <a:t>Nhật ký ăn uống. </a:t>
+            </a:r>
+          </a:p>
+          <a:p>
+            <a:pPr>
+              <a:buFont typeface="Arial" panose="020B0604020202020204" pitchFamily="34" charset="0"/>
+              <a:buChar char="•"/>
+            </a:pPr>
+            <a:r>
+              <a:rPr lang="vi-VN"/>
+              <a:t>Gamification. </a:t>
+            </a:r>
+          </a:p>
+          <a:p>
+            <a:pPr>
+              <a:buFont typeface="Arial" panose="020B0604020202020204" pitchFamily="34" charset="0"/>
+              <a:buChar char="•"/>
+            </a:pPr>
+            <a:r>
+              <a:rPr lang="vi-VN"/>
+              <a:t>Hệ thống quản trị. </a:t>
+            </a:r>
+          </a:p>
+          <a:p>
+            <a:r>
+              <a:rPr lang="vi-VN"/>
+              <a:t>Qua quá trình kiểm thử, hệ thống hoạt động ổn định và đáp ứng đầy đủ các yêu cầu chức năng đã đặt ra.</a:t>
+            </a:r>
+          </a:p>
+          <a:p>
+            <a:endParaRPr lang="en-US"/>
+          </a:p>
+        </p:txBody>
+      </p:sp>
+      <p:sp>
+        <p:nvSpPr>
+          <p:cNvPr id="4" name="Slide Number Placeholder 3"/>
+          <p:cNvSpPr>
+            <a:spLocks noGrp="1"/>
+          </p:cNvSpPr>
+          <p:nvPr>
+            <p:ph type="sldNum" sz="quarter" idx="5"/>
+          </p:nvPr>
+        </p:nvSpPr>
+        <p:spPr/>
+        <p:txBody>
+          <a:bodyPr/>
+          <a:lstStyle/>
+          <a:p>
+            <a:fld id="{02BE832F-9538-40A2-A31F-0417EB2D2CC7}" type="slidenum">
+              <a:rPr lang="en-US" smtClean="0"/>
+              <a:t>15</a:t>
+            </a:fld>
+            <a:endParaRPr lang="en-US"/>
+          </a:p>
+        </p:txBody>
+      </p:sp>
+    </p:spTree>
+    <p:extLst>
+      <p:ext uri="{BB962C8B-B14F-4D97-AF65-F5344CB8AC3E}">
+        <p14:creationId xmlns:p14="http://schemas.microsoft.com/office/powerpoint/2010/main" val="4133304067"/>
+      </p:ext>
+    </p:extLst>
+  </p:cSld>
+  <p:clrMapOvr>
+    <a:masterClrMapping/>
+  </p:clrMapOvr>
+</p:notes>
+</file>
+
+<file path=ppt/notesSlides/notesSlide14.xml><?xml version="1.0" encoding="utf-8"?>
+<p:notes xmlns:a="http://schemas.openxmlformats.org/drawingml/2006/main" xmlns:r="http://schemas.openxmlformats.org/officeDocument/2006/relationships" xmlns:p="http://schemas.openxmlformats.org/presentationml/2006/main">
+  <p:cSld>
+    <p:spTree>
+      <p:nvGrpSpPr>
+        <p:cNvPr id="1" name=""/>
+        <p:cNvGrpSpPr/>
+        <p:nvPr/>
+      </p:nvGrpSpPr>
+      <p:grpSpPr>
+        <a:xfrm>
+          <a:off x="0" y="0"/>
+          <a:ext cx="0" cy="0"/>
+          <a:chOff x="0" y="0"/>
+          <a:chExt cx="0" cy="0"/>
+        </a:xfrm>
+      </p:grpSpPr>
+      <p:sp>
+        <p:nvSpPr>
+          <p:cNvPr id="2" name="Slide Image Placeholder 1"/>
+          <p:cNvSpPr>
+            <a:spLocks noGrp="1" noRot="1" noChangeAspect="1"/>
+          </p:cNvSpPr>
+          <p:nvPr>
+            <p:ph type="sldImg"/>
+          </p:nvPr>
+        </p:nvSpPr>
+        <p:spPr/>
+      </p:sp>
+      <p:sp>
+        <p:nvSpPr>
+          <p:cNvPr id="3" name="Notes Placeholder 2"/>
+          <p:cNvSpPr>
+            <a:spLocks noGrp="1"/>
+          </p:cNvSpPr>
+          <p:nvPr>
+            <p:ph type="body" idx="1"/>
+          </p:nvPr>
+        </p:nvSpPr>
+        <p:spPr/>
+        <p:txBody>
+          <a:bodyPr/>
+          <a:lstStyle/>
+          <a:p>
+            <a:r>
+              <a:rPr lang="vi-VN"/>
+              <a:t>Trong thời gian tới, hệ thống có thể tiếp tục phát triển theo các hướng sau:</a:t>
+            </a:r>
+          </a:p>
+          <a:p>
+            <a:pPr>
+              <a:buFont typeface="Arial" panose="020B0604020202020204" pitchFamily="34" charset="0"/>
+              <a:buChar char="•"/>
+            </a:pPr>
+            <a:r>
+              <a:rPr lang="vi-VN"/>
+              <a:t>tích hợp thêm thông tin sức khỏe cá nhân; </a:t>
+            </a:r>
+          </a:p>
+          <a:p>
+            <a:pPr>
+              <a:buFont typeface="Arial" panose="020B0604020202020204" pitchFamily="34" charset="0"/>
+              <a:buChar char="•"/>
+            </a:pPr>
+            <a:r>
+              <a:rPr lang="vi-VN"/>
+              <a:t>xây dựng thực đơn riêng cho từng nhóm bệnh; </a:t>
+            </a:r>
+          </a:p>
+          <a:p>
+            <a:pPr>
+              <a:buFont typeface="Arial" panose="020B0604020202020204" pitchFamily="34" charset="0"/>
+              <a:buChar char="•"/>
+            </a:pPr>
+            <a:r>
+              <a:rPr lang="vi-VN"/>
+              <a:t>học từ phản hồi người dùng để cải thiện chất lượng gợi ý; </a:t>
+            </a:r>
+          </a:p>
+          <a:p>
+            <a:pPr>
+              <a:buFont typeface="Arial" panose="020B0604020202020204" pitchFamily="34" charset="0"/>
+              <a:buChar char="•"/>
+            </a:pPr>
+            <a:r>
+              <a:rPr lang="vi-VN"/>
+              <a:t>kết nối với các thiết bị đeo thông minh; </a:t>
+            </a:r>
+          </a:p>
+          <a:p>
+            <a:pPr>
+              <a:buFont typeface="Arial" panose="020B0604020202020204" pitchFamily="34" charset="0"/>
+              <a:buChar char="•"/>
+            </a:pPr>
+            <a:r>
+              <a:rPr lang="vi-VN"/>
+              <a:t>và phát triển theo hướng </a:t>
+            </a:r>
+            <a:r>
+              <a:rPr lang="vi-VN" b="1"/>
+              <a:t>Personalized Nutrition AI</a:t>
+            </a:r>
+            <a:r>
+              <a:rPr lang="vi-VN"/>
+              <a:t>, tức là cá nhân hóa hoàn toàn chế độ dinh dưỡng cho từng người dùng dựa trên dữ liệu sức khỏe, thói quen ăn uống và mục tiêu cá nhân.</a:t>
+            </a:r>
+          </a:p>
+          <a:p>
+            <a:endParaRPr lang="en-US"/>
+          </a:p>
+        </p:txBody>
+      </p:sp>
+      <p:sp>
+        <p:nvSpPr>
+          <p:cNvPr id="4" name="Slide Number Placeholder 3"/>
+          <p:cNvSpPr>
+            <a:spLocks noGrp="1"/>
+          </p:cNvSpPr>
+          <p:nvPr>
+            <p:ph type="sldNum" sz="quarter" idx="5"/>
+          </p:nvPr>
+        </p:nvSpPr>
+        <p:spPr/>
+        <p:txBody>
+          <a:bodyPr/>
+          <a:lstStyle/>
+          <a:p>
+            <a:fld id="{02BE832F-9538-40A2-A31F-0417EB2D2CC7}" type="slidenum">
+              <a:rPr lang="en-US" smtClean="0"/>
+              <a:t>16</a:t>
+            </a:fld>
+            <a:endParaRPr lang="en-US"/>
+          </a:p>
+        </p:txBody>
+      </p:sp>
+    </p:spTree>
+    <p:extLst>
+      <p:ext uri="{BB962C8B-B14F-4D97-AF65-F5344CB8AC3E}">
+        <p14:creationId xmlns:p14="http://schemas.microsoft.com/office/powerpoint/2010/main" val="1210673734"/>
+      </p:ext>
+    </p:extLst>
+  </p:cSld>
+  <p:clrMapOvr>
+    <a:masterClrMapping/>
+  </p:clrMapOvr>
+</p:notes>
+</file>
+
+<file path=ppt/notesSlides/notesSlide15.xml><?xml version="1.0" encoding="utf-8"?>
+<p:notes xmlns:a="http://schemas.openxmlformats.org/drawingml/2006/main" xmlns:r="http://schemas.openxmlformats.org/officeDocument/2006/relationships" xmlns:p="http://schemas.openxmlformats.org/presentationml/2006/main">
+  <p:cSld>
+    <p:spTree>
+      <p:nvGrpSpPr>
+        <p:cNvPr id="1" name=""/>
+        <p:cNvGrpSpPr/>
+        <p:nvPr/>
+      </p:nvGrpSpPr>
+      <p:grpSpPr>
+        <a:xfrm>
+          <a:off x="0" y="0"/>
+          <a:ext cx="0" cy="0"/>
+          <a:chOff x="0" y="0"/>
+          <a:chExt cx="0" cy="0"/>
+        </a:xfrm>
+      </p:grpSpPr>
+      <p:sp>
+        <p:nvSpPr>
+          <p:cNvPr id="2" name="Slide Image Placeholder 1"/>
+          <p:cNvSpPr>
+            <a:spLocks noGrp="1" noRot="1" noChangeAspect="1"/>
+          </p:cNvSpPr>
+          <p:nvPr>
+            <p:ph type="sldImg"/>
+          </p:nvPr>
+        </p:nvSpPr>
+        <p:spPr/>
+      </p:sp>
+      <p:sp>
+        <p:nvSpPr>
+          <p:cNvPr id="3" name="Notes Placeholder 2"/>
+          <p:cNvSpPr>
+            <a:spLocks noGrp="1"/>
+          </p:cNvSpPr>
+          <p:nvPr>
+            <p:ph type="body" idx="1"/>
+          </p:nvPr>
+        </p:nvSpPr>
+        <p:spPr/>
+        <p:txBody>
+          <a:bodyPr/>
+          <a:lstStyle/>
+          <a:p>
+            <a:r>
+              <a:rPr lang="vi-VN"/>
+              <a:t>Phần trình bày của em đến đây là hết.</a:t>
+            </a:r>
+          </a:p>
+          <a:p>
+            <a:r>
+              <a:rPr lang="vi-VN"/>
+              <a:t>Em xin chân thành cảm ơn quý thầy cô trong Hội đồng đã lắng nghe.</a:t>
+            </a:r>
+          </a:p>
+          <a:p>
+            <a:r>
+              <a:rPr lang="vi-VN"/>
+              <a:t>Em rất mong nhận được những ý kiến đóng góp để hoàn thiện đề tài hơn.</a:t>
+            </a:r>
+          </a:p>
+          <a:p>
+            <a:r>
+              <a:rPr lang="vi-VN" b="1"/>
+              <a:t>Em xin trân trọng cảm ơn và sẵn sàng trả lời các câu hỏi của Hội đồng.</a:t>
+            </a:r>
+            <a:endParaRPr lang="vi-VN"/>
+          </a:p>
+          <a:p>
+            <a:endParaRPr lang="en-US"/>
+          </a:p>
+        </p:txBody>
+      </p:sp>
+      <p:sp>
+        <p:nvSpPr>
+          <p:cNvPr id="4" name="Slide Number Placeholder 3"/>
+          <p:cNvSpPr>
+            <a:spLocks noGrp="1"/>
+          </p:cNvSpPr>
+          <p:nvPr>
+            <p:ph type="sldNum" sz="quarter" idx="5"/>
+          </p:nvPr>
+        </p:nvSpPr>
+        <p:spPr/>
+        <p:txBody>
+          <a:bodyPr/>
+          <a:lstStyle/>
+          <a:p>
+            <a:fld id="{02BE832F-9538-40A2-A31F-0417EB2D2CC7}" type="slidenum">
+              <a:rPr lang="en-US" smtClean="0"/>
+              <a:t>17</a:t>
+            </a:fld>
+            <a:endParaRPr lang="en-US"/>
+          </a:p>
+        </p:txBody>
+      </p:sp>
+    </p:spTree>
+    <p:extLst>
+      <p:ext uri="{BB962C8B-B14F-4D97-AF65-F5344CB8AC3E}">
+        <p14:creationId xmlns:p14="http://schemas.microsoft.com/office/powerpoint/2010/main" val="3936370725"/>
+      </p:ext>
+    </p:extLst>
+  </p:cSld>
+  <p:clrMapOvr>
+    <a:masterClrMapping/>
+  </p:clrMapOvr>
+</p:notes>
+</file>
+
+<file path=ppt/notesSlides/notesSlide2.xml><?xml version="1.0" encoding="utf-8"?>
+<p:notes xmlns:a="http://schemas.openxmlformats.org/drawingml/2006/main" xmlns:r="http://schemas.openxmlformats.org/officeDocument/2006/relationships" xmlns:p="http://schemas.openxmlformats.org/presentationml/2006/main">
+  <p:cSld>
+    <p:spTree>
+      <p:nvGrpSpPr>
+        <p:cNvPr id="1" name=""/>
+        <p:cNvGrpSpPr/>
+        <p:nvPr/>
+      </p:nvGrpSpPr>
+      <p:grpSpPr>
+        <a:xfrm>
+          <a:off x="0" y="0"/>
+          <a:ext cx="0" cy="0"/>
+          <a:chOff x="0" y="0"/>
+          <a:chExt cx="0" cy="0"/>
+        </a:xfrm>
+      </p:grpSpPr>
+      <p:sp>
+        <p:nvSpPr>
+          <p:cNvPr id="2" name="Slide Image Placeholder 1"/>
+          <p:cNvSpPr>
+            <a:spLocks noGrp="1" noRot="1" noChangeAspect="1"/>
+          </p:cNvSpPr>
+          <p:nvPr>
+            <p:ph type="sldImg"/>
+          </p:nvPr>
+        </p:nvSpPr>
+        <p:spPr/>
+      </p:sp>
+      <p:sp>
+        <p:nvSpPr>
+          <p:cNvPr id="3" name="Notes Placeholder 2"/>
+          <p:cNvSpPr>
+            <a:spLocks noGrp="1"/>
+          </p:cNvSpPr>
+          <p:nvPr>
+            <p:ph type="body" idx="1"/>
+          </p:nvPr>
+        </p:nvSpPr>
+        <p:spPr/>
+        <p:txBody>
+          <a:bodyPr/>
+          <a:lstStyle/>
+          <a:p>
+            <a:r>
+              <a:rPr lang="vi-VN"/>
+              <a:t>Bài báo cáo của em gồm 4 phần:</a:t>
+            </a:r>
+          </a:p>
+          <a:p>
+            <a:pPr>
+              <a:buFont typeface="Arial" panose="020B0604020202020204" pitchFamily="34" charset="0"/>
+              <a:buChar char="•"/>
+            </a:pPr>
+            <a:r>
+              <a:rPr lang="vi-VN"/>
+              <a:t>Phần 1: Tổng quan về đề tài. </a:t>
+            </a:r>
+          </a:p>
+          <a:p>
+            <a:pPr>
+              <a:buFont typeface="Arial" panose="020B0604020202020204" pitchFamily="34" charset="0"/>
+              <a:buChar char="•"/>
+            </a:pPr>
+            <a:r>
+              <a:rPr lang="vi-VN"/>
+              <a:t>Phần 2: Cơ sở lý thuyết. </a:t>
+            </a:r>
+          </a:p>
+          <a:p>
+            <a:pPr>
+              <a:buFont typeface="Arial" panose="020B0604020202020204" pitchFamily="34" charset="0"/>
+              <a:buChar char="•"/>
+            </a:pPr>
+            <a:r>
+              <a:rPr lang="vi-VN"/>
+              <a:t>Phần 3: Thiết kế hệ thống. </a:t>
+            </a:r>
+          </a:p>
+          <a:p>
+            <a:pPr>
+              <a:buFont typeface="Arial" panose="020B0604020202020204" pitchFamily="34" charset="0"/>
+              <a:buChar char="•"/>
+            </a:pPr>
+            <a:r>
+              <a:rPr lang="vi-VN"/>
+              <a:t>Phần 4: Kết quả đạt được và hướng phát triển. </a:t>
+            </a:r>
+          </a:p>
+          <a:p>
+            <a:endParaRPr lang="en-US"/>
+          </a:p>
+        </p:txBody>
+      </p:sp>
+      <p:sp>
+        <p:nvSpPr>
+          <p:cNvPr id="4" name="Slide Number Placeholder 3"/>
+          <p:cNvSpPr>
+            <a:spLocks noGrp="1"/>
+          </p:cNvSpPr>
+          <p:nvPr>
+            <p:ph type="sldNum" sz="quarter" idx="5"/>
+          </p:nvPr>
+        </p:nvSpPr>
+        <p:spPr/>
+        <p:txBody>
+          <a:bodyPr/>
+          <a:lstStyle/>
+          <a:p>
+            <a:fld id="{02BE832F-9538-40A2-A31F-0417EB2D2CC7}" type="slidenum">
+              <a:rPr lang="en-US" smtClean="0"/>
+              <a:t>2</a:t>
+            </a:fld>
+            <a:endParaRPr lang="en-US"/>
+          </a:p>
+        </p:txBody>
+      </p:sp>
+    </p:spTree>
+    <p:extLst>
+      <p:ext uri="{BB962C8B-B14F-4D97-AF65-F5344CB8AC3E}">
+        <p14:creationId xmlns:p14="http://schemas.microsoft.com/office/powerpoint/2010/main" val="645019662"/>
+      </p:ext>
+    </p:extLst>
+  </p:cSld>
+  <p:clrMapOvr>
+    <a:masterClrMapping/>
+  </p:clrMapOvr>
+</p:notes>
+</file>
+
+<file path=ppt/notesSlides/notesSlide3.xml><?xml version="1.0" encoding="utf-8"?>
+<p:notes xmlns:a="http://schemas.openxmlformats.org/drawingml/2006/main" xmlns:r="http://schemas.openxmlformats.org/officeDocument/2006/relationships" xmlns:p="http://schemas.openxmlformats.org/presentationml/2006/main">
+  <p:cSld>
+    <p:spTree>
+      <p:nvGrpSpPr>
+        <p:cNvPr id="1" name=""/>
+        <p:cNvGrpSpPr/>
+        <p:nvPr/>
+      </p:nvGrpSpPr>
+      <p:grpSpPr>
+        <a:xfrm>
+          <a:off x="0" y="0"/>
+          <a:ext cx="0" cy="0"/>
+          <a:chOff x="0" y="0"/>
+          <a:chExt cx="0" cy="0"/>
+        </a:xfrm>
+      </p:grpSpPr>
+      <p:sp>
+        <p:nvSpPr>
+          <p:cNvPr id="2" name="Slide Image Placeholder 1"/>
+          <p:cNvSpPr>
+            <a:spLocks noGrp="1" noRot="1" noChangeAspect="1"/>
+          </p:cNvSpPr>
+          <p:nvPr>
+            <p:ph type="sldImg"/>
+          </p:nvPr>
+        </p:nvSpPr>
+        <p:spPr/>
+      </p:sp>
+      <p:sp>
+        <p:nvSpPr>
+          <p:cNvPr id="3" name="Notes Placeholder 2"/>
+          <p:cNvSpPr>
+            <a:spLocks noGrp="1"/>
+          </p:cNvSpPr>
+          <p:nvPr>
+            <p:ph type="body" idx="1"/>
+          </p:nvPr>
+        </p:nvSpPr>
+        <p:spPr/>
+        <p:txBody>
+          <a:bodyPr/>
+          <a:lstStyle/>
+          <a:p>
+            <a:r>
+              <a:rPr lang="vi-VN"/>
+              <a:t>Hiện nay, tình trạng thiếu cân vẫn còn khá phổ biến, đặc biệt ở thanh thiếu niên và người có chế độ sinh hoạt chưa hợp lý.</a:t>
+            </a:r>
+          </a:p>
+          <a:p>
+            <a:r>
+              <a:rPr lang="vi-VN"/>
+              <a:t>Phần lớn mọi người chỉ tập trung vào việc ăn nhiều hơn mà chưa quan tâm đến việc cân đối dinh dưỡng.</a:t>
+            </a:r>
+          </a:p>
+          <a:p>
+            <a:r>
+              <a:rPr lang="vi-VN"/>
+              <a:t>Điều này có thể dẫn đến tăng cân không lành mạnh, tích mỡ hoặc ảnh hưởng đến sức khỏe lâu dài.</a:t>
+            </a:r>
+          </a:p>
+          <a:p>
+            <a:r>
+              <a:rPr lang="vi-VN"/>
+              <a:t>Bên cạnh đó, các ứng dụng hiện nay chủ yếu hỗ trợ giảm cân, trong khi các hệ thống dành riêng cho người muốn tăng cân còn khá ít.</a:t>
+            </a:r>
+          </a:p>
+          <a:p>
+            <a:r>
+              <a:rPr lang="vi-VN"/>
+              <a:t>Chính vì vậy, em lựa chọn xây dựng hệ thống </a:t>
+            </a:r>
+            <a:r>
+              <a:rPr lang="vi-VN" b="1"/>
+              <a:t>NutriGain</a:t>
+            </a:r>
+            <a:r>
+              <a:rPr lang="vi-VN"/>
+              <a:t> nhằm hỗ trợ người thiếu cân tăng cân khoa học, an toàn và hiệu quả.</a:t>
+            </a:r>
+          </a:p>
+          <a:p>
+            <a:endParaRPr lang="en-US"/>
+          </a:p>
+        </p:txBody>
+      </p:sp>
+      <p:sp>
+        <p:nvSpPr>
+          <p:cNvPr id="4" name="Slide Number Placeholder 3"/>
+          <p:cNvSpPr>
+            <a:spLocks noGrp="1"/>
+          </p:cNvSpPr>
+          <p:nvPr>
+            <p:ph type="sldNum" sz="quarter" idx="5"/>
+          </p:nvPr>
+        </p:nvSpPr>
+        <p:spPr/>
+        <p:txBody>
+          <a:bodyPr/>
+          <a:lstStyle/>
+          <a:p>
+            <a:fld id="{02BE832F-9538-40A2-A31F-0417EB2D2CC7}" type="slidenum">
+              <a:rPr lang="en-US" smtClean="0"/>
+              <a:t>3</a:t>
+            </a:fld>
+            <a:endParaRPr lang="en-US"/>
+          </a:p>
+        </p:txBody>
+      </p:sp>
+    </p:spTree>
+    <p:extLst>
+      <p:ext uri="{BB962C8B-B14F-4D97-AF65-F5344CB8AC3E}">
+        <p14:creationId xmlns:p14="http://schemas.microsoft.com/office/powerpoint/2010/main" val="1919684249"/>
+      </p:ext>
+    </p:extLst>
+  </p:cSld>
+  <p:clrMapOvr>
+    <a:masterClrMapping/>
+  </p:clrMapOvr>
+</p:notes>
+</file>
+
+<file path=ppt/notesSlides/notesSlide4.xml><?xml version="1.0" encoding="utf-8"?>
+<p:notes xmlns:a="http://schemas.openxmlformats.org/drawingml/2006/main" xmlns:r="http://schemas.openxmlformats.org/officeDocument/2006/relationships" xmlns:p="http://schemas.openxmlformats.org/presentationml/2006/main">
+  <p:cSld>
+    <p:spTree>
+      <p:nvGrpSpPr>
+        <p:cNvPr id="1" name=""/>
+        <p:cNvGrpSpPr/>
+        <p:nvPr/>
+      </p:nvGrpSpPr>
+      <p:grpSpPr>
+        <a:xfrm>
+          <a:off x="0" y="0"/>
+          <a:ext cx="0" cy="0"/>
+          <a:chOff x="0" y="0"/>
+          <a:chExt cx="0" cy="0"/>
+        </a:xfrm>
+      </p:grpSpPr>
+      <p:sp>
+        <p:nvSpPr>
+          <p:cNvPr id="2" name="Slide Image Placeholder 1"/>
+          <p:cNvSpPr>
+            <a:spLocks noGrp="1" noRot="1" noChangeAspect="1"/>
+          </p:cNvSpPr>
+          <p:nvPr>
+            <p:ph type="sldImg"/>
+          </p:nvPr>
+        </p:nvSpPr>
+        <p:spPr/>
+      </p:sp>
+      <p:sp>
+        <p:nvSpPr>
+          <p:cNvPr id="3" name="Notes Placeholder 2"/>
+          <p:cNvSpPr>
+            <a:spLocks noGrp="1"/>
+          </p:cNvSpPr>
+          <p:nvPr>
+            <p:ph type="body" idx="1"/>
+          </p:nvPr>
+        </p:nvSpPr>
+        <p:spPr/>
+        <p:txBody>
+          <a:bodyPr/>
+          <a:lstStyle/>
+          <a:p>
+            <a:r>
+              <a:rPr lang="vi-VN"/>
+              <a:t>Đề tài hướng đến ba mục tiêu chính.</a:t>
+            </a:r>
+          </a:p>
+          <a:p>
+            <a:r>
+              <a:rPr lang="vi-VN"/>
+              <a:t>Thứ nhất là nghiên cứu nhu cầu dinh dưỡng của người thiếu cân cũng như các yếu tố ảnh hưởng đến quá trình tăng cân.</a:t>
+            </a:r>
+          </a:p>
+          <a:p>
+            <a:r>
+              <a:rPr lang="vi-VN"/>
+              <a:t>Thứ hai là xây dựng hệ thống có khả năng tính toán nhu cầu dinh dưỡng, gợi ý thực phẩm phù hợp với từng người dùng.</a:t>
+            </a:r>
+          </a:p>
+          <a:p>
+            <a:r>
+              <a:rPr lang="vi-VN"/>
+              <a:t>Cuối cùng là kiểm thử và đánh giá tính chính xác, tính ổn định cũng như khả năng đáp ứng của hệ thống.</a:t>
+            </a:r>
+          </a:p>
+          <a:p>
+            <a:endParaRPr lang="en-US"/>
+          </a:p>
+        </p:txBody>
+      </p:sp>
+      <p:sp>
+        <p:nvSpPr>
+          <p:cNvPr id="4" name="Slide Number Placeholder 3"/>
+          <p:cNvSpPr>
+            <a:spLocks noGrp="1"/>
+          </p:cNvSpPr>
+          <p:nvPr>
+            <p:ph type="sldNum" sz="quarter" idx="5"/>
+          </p:nvPr>
+        </p:nvSpPr>
+        <p:spPr/>
+        <p:txBody>
+          <a:bodyPr/>
+          <a:lstStyle/>
+          <a:p>
+            <a:fld id="{02BE832F-9538-40A2-A31F-0417EB2D2CC7}" type="slidenum">
+              <a:rPr lang="en-US" smtClean="0"/>
               <a:t>4</a:t>
             </a:fld>
             <a:endParaRPr lang="en-US"/>
@@ -589,6 +1897,649 @@
     <p:extLst>
       <p:ext uri="{BB962C8B-B14F-4D97-AF65-F5344CB8AC3E}">
         <p14:creationId xmlns:p14="http://schemas.microsoft.com/office/powerpoint/2010/main" val="2443229788"/>
+      </p:ext>
+    </p:extLst>
+  </p:cSld>
+  <p:clrMapOvr>
+    <a:masterClrMapping/>
+  </p:clrMapOvr>
+</p:notes>
+</file>
+
+<file path=ppt/notesSlides/notesSlide5.xml><?xml version="1.0" encoding="utf-8"?>
+<p:notes xmlns:a="http://schemas.openxmlformats.org/drawingml/2006/main" xmlns:r="http://schemas.openxmlformats.org/officeDocument/2006/relationships" xmlns:p="http://schemas.openxmlformats.org/presentationml/2006/main">
+  <p:cSld>
+    <p:spTree>
+      <p:nvGrpSpPr>
+        <p:cNvPr id="1" name=""/>
+        <p:cNvGrpSpPr/>
+        <p:nvPr/>
+      </p:nvGrpSpPr>
+      <p:grpSpPr>
+        <a:xfrm>
+          <a:off x="0" y="0"/>
+          <a:ext cx="0" cy="0"/>
+          <a:chOff x="0" y="0"/>
+          <a:chExt cx="0" cy="0"/>
+        </a:xfrm>
+      </p:grpSpPr>
+      <p:sp>
+        <p:nvSpPr>
+          <p:cNvPr id="2" name="Slide Image Placeholder 1"/>
+          <p:cNvSpPr>
+            <a:spLocks noGrp="1" noRot="1" noChangeAspect="1"/>
+          </p:cNvSpPr>
+          <p:nvPr>
+            <p:ph type="sldImg"/>
+          </p:nvPr>
+        </p:nvSpPr>
+        <p:spPr/>
+      </p:sp>
+      <p:sp>
+        <p:nvSpPr>
+          <p:cNvPr id="3" name="Notes Placeholder 2"/>
+          <p:cNvSpPr>
+            <a:spLocks noGrp="1"/>
+          </p:cNvSpPr>
+          <p:nvPr>
+            <p:ph type="body" idx="1"/>
+          </p:nvPr>
+        </p:nvSpPr>
+        <p:spPr/>
+        <p:txBody>
+          <a:bodyPr/>
+          <a:lstStyle/>
+          <a:p>
+            <a:r>
+              <a:rPr lang="vi-VN"/>
+              <a:t>Đối tượng nghiên cứu của đề tài là những người có chỉ số BMI dưới mức bình thường và có nhu cầu tăng cân.</a:t>
+            </a:r>
+          </a:p>
+          <a:p>
+            <a:r>
+              <a:rPr lang="vi-VN"/>
+              <a:t>Phạm vi nghiên cứu bao gồm:</a:t>
+            </a:r>
+          </a:p>
+          <a:p>
+            <a:pPr>
+              <a:buFont typeface="Arial" panose="020B0604020202020204" pitchFamily="34" charset="0"/>
+              <a:buChar char="•"/>
+            </a:pPr>
+            <a:r>
+              <a:rPr lang="vi-VN"/>
+              <a:t>các chỉ số BMI, BMR và TDEE; </a:t>
+            </a:r>
+          </a:p>
+          <a:p>
+            <a:pPr>
+              <a:buFont typeface="Arial" panose="020B0604020202020204" pitchFamily="34" charset="0"/>
+              <a:buChar char="•"/>
+            </a:pPr>
+            <a:r>
+              <a:rPr lang="vi-VN"/>
+              <a:t>xây dựng hệ thống gợi ý thực phẩ</a:t>
+            </a:r>
+            <a:r>
+              <a:rPr lang="en-US"/>
+              <a:t>m</a:t>
+            </a:r>
+            <a:r>
+              <a:rPr lang="vi-VN"/>
+              <a:t>; </a:t>
+            </a:r>
+          </a:p>
+          <a:p>
+            <a:pPr>
+              <a:buFont typeface="Arial" panose="020B0604020202020204" pitchFamily="34" charset="0"/>
+              <a:buChar char="•"/>
+            </a:pPr>
+            <a:r>
+              <a:rPr lang="vi-VN"/>
+              <a:t>thiết kế website theo dõi quá trình tăng cân. </a:t>
+            </a:r>
+          </a:p>
+          <a:p>
+            <a:r>
+              <a:rPr lang="vi-VN"/>
+              <a:t>Về phương pháp nghiên cứu, em thực hiện nghiên cứu tài liệu, phân tích yêu cầu, thiết kế hệ thống, lập trình, kiểm thử và đánh giá kết quả.</a:t>
+            </a:r>
+          </a:p>
+          <a:p>
+            <a:endParaRPr lang="en-US"/>
+          </a:p>
+        </p:txBody>
+      </p:sp>
+      <p:sp>
+        <p:nvSpPr>
+          <p:cNvPr id="4" name="Slide Number Placeholder 3"/>
+          <p:cNvSpPr>
+            <a:spLocks noGrp="1"/>
+          </p:cNvSpPr>
+          <p:nvPr>
+            <p:ph type="sldNum" sz="quarter" idx="5"/>
+          </p:nvPr>
+        </p:nvSpPr>
+        <p:spPr/>
+        <p:txBody>
+          <a:bodyPr/>
+          <a:lstStyle/>
+          <a:p>
+            <a:fld id="{02BE832F-9538-40A2-A31F-0417EB2D2CC7}" type="slidenum">
+              <a:rPr lang="en-US" smtClean="0"/>
+              <a:t>5</a:t>
+            </a:fld>
+            <a:endParaRPr lang="en-US"/>
+          </a:p>
+        </p:txBody>
+      </p:sp>
+    </p:spTree>
+    <p:extLst>
+      <p:ext uri="{BB962C8B-B14F-4D97-AF65-F5344CB8AC3E}">
+        <p14:creationId xmlns:p14="http://schemas.microsoft.com/office/powerpoint/2010/main" val="581141567"/>
+      </p:ext>
+    </p:extLst>
+  </p:cSld>
+  <p:clrMapOvr>
+    <a:masterClrMapping/>
+  </p:clrMapOvr>
+</p:notes>
+</file>
+
+<file path=ppt/notesSlides/notesSlide6.xml><?xml version="1.0" encoding="utf-8"?>
+<p:notes xmlns:a="http://schemas.openxmlformats.org/drawingml/2006/main" xmlns:r="http://schemas.openxmlformats.org/officeDocument/2006/relationships" xmlns:p="http://schemas.openxmlformats.org/presentationml/2006/main">
+  <p:cSld>
+    <p:spTree>
+      <p:nvGrpSpPr>
+        <p:cNvPr id="1" name=""/>
+        <p:cNvGrpSpPr/>
+        <p:nvPr/>
+      </p:nvGrpSpPr>
+      <p:grpSpPr>
+        <a:xfrm>
+          <a:off x="0" y="0"/>
+          <a:ext cx="0" cy="0"/>
+          <a:chOff x="0" y="0"/>
+          <a:chExt cx="0" cy="0"/>
+        </a:xfrm>
+      </p:grpSpPr>
+      <p:sp>
+        <p:nvSpPr>
+          <p:cNvPr id="2" name="Slide Image Placeholder 1"/>
+          <p:cNvSpPr>
+            <a:spLocks noGrp="1" noRot="1" noChangeAspect="1"/>
+          </p:cNvSpPr>
+          <p:nvPr>
+            <p:ph type="sldImg"/>
+          </p:nvPr>
+        </p:nvSpPr>
+        <p:spPr/>
+      </p:sp>
+      <p:sp>
+        <p:nvSpPr>
+          <p:cNvPr id="3" name="Notes Placeholder 2"/>
+          <p:cNvSpPr>
+            <a:spLocks noGrp="1"/>
+          </p:cNvSpPr>
+          <p:nvPr>
+            <p:ph type="body" idx="1"/>
+          </p:nvPr>
+        </p:nvSpPr>
+        <p:spPr/>
+        <p:txBody>
+          <a:bodyPr/>
+          <a:lstStyle/>
+          <a:p>
+            <a:r>
+              <a:rPr lang="vi-VN"/>
+              <a:t>Hệ thống được xây dựng bằng các công nghệ hiện đại.</a:t>
+            </a:r>
+          </a:p>
+          <a:p>
+            <a:r>
+              <a:rPr lang="vi-VN"/>
+              <a:t>Frontend sử dụng React giúp giao diện trực quan và thân thiện.</a:t>
+            </a:r>
+          </a:p>
+          <a:p>
+            <a:r>
+              <a:rPr lang="vi-VN"/>
+              <a:t>Backend sử dụng FastAPI nhằm đảm bảo hiệu năng xử lý cao.</a:t>
+            </a:r>
+          </a:p>
+          <a:p>
+            <a:r>
+              <a:rPr lang="vi-VN"/>
+              <a:t>Cơ sở dữ liệu sử dụng MySQL.</a:t>
+            </a:r>
+          </a:p>
+          <a:p>
+            <a:r>
+              <a:rPr lang="vi-VN"/>
+              <a:t>Docker được sử dụng để triển khai hệ thống dễ dàng trên nhiều môi trường khác nhau.</a:t>
+            </a:r>
+          </a:p>
+          <a:p>
+            <a:r>
+              <a:rPr lang="vi-VN"/>
+              <a:t>Ngoài ra, hệ thống còn tích hợp AI để nhận diện thực phẩm từ hình ảnh và JWT để bảo mật xác thực người dùng.</a:t>
+            </a:r>
+          </a:p>
+          <a:p>
+            <a:r>
+              <a:rPr lang="vi-VN" i="1"/>
+              <a:t>(Nếu hội đồng hỏi thì nói thêm Docker giúp triển khai đồng nhất giữa máy phát triển và máy chủ.)</a:t>
+            </a:r>
+            <a:endParaRPr lang="vi-VN"/>
+          </a:p>
+          <a:p>
+            <a:endParaRPr lang="en-US"/>
+          </a:p>
+        </p:txBody>
+      </p:sp>
+      <p:sp>
+        <p:nvSpPr>
+          <p:cNvPr id="4" name="Slide Number Placeholder 3"/>
+          <p:cNvSpPr>
+            <a:spLocks noGrp="1"/>
+          </p:cNvSpPr>
+          <p:nvPr>
+            <p:ph type="sldNum" sz="quarter" idx="5"/>
+          </p:nvPr>
+        </p:nvSpPr>
+        <p:spPr/>
+        <p:txBody>
+          <a:bodyPr/>
+          <a:lstStyle/>
+          <a:p>
+            <a:fld id="{02BE832F-9538-40A2-A31F-0417EB2D2CC7}" type="slidenum">
+              <a:rPr lang="en-US" smtClean="0"/>
+              <a:t>6</a:t>
+            </a:fld>
+            <a:endParaRPr lang="en-US"/>
+          </a:p>
+        </p:txBody>
+      </p:sp>
+    </p:spTree>
+    <p:extLst>
+      <p:ext uri="{BB962C8B-B14F-4D97-AF65-F5344CB8AC3E}">
+        <p14:creationId xmlns:p14="http://schemas.microsoft.com/office/powerpoint/2010/main" val="1316728722"/>
+      </p:ext>
+    </p:extLst>
+  </p:cSld>
+  <p:clrMapOvr>
+    <a:masterClrMapping/>
+  </p:clrMapOvr>
+</p:notes>
+</file>
+
+<file path=ppt/notesSlides/notesSlide7.xml><?xml version="1.0" encoding="utf-8"?>
+<p:notes xmlns:a="http://schemas.openxmlformats.org/drawingml/2006/main" xmlns:r="http://schemas.openxmlformats.org/officeDocument/2006/relationships" xmlns:p="http://schemas.openxmlformats.org/presentationml/2006/main">
+  <p:cSld>
+    <p:spTree>
+      <p:nvGrpSpPr>
+        <p:cNvPr id="1" name=""/>
+        <p:cNvGrpSpPr/>
+        <p:nvPr/>
+      </p:nvGrpSpPr>
+      <p:grpSpPr>
+        <a:xfrm>
+          <a:off x="0" y="0"/>
+          <a:ext cx="0" cy="0"/>
+          <a:chOff x="0" y="0"/>
+          <a:chExt cx="0" cy="0"/>
+        </a:xfrm>
+      </p:grpSpPr>
+      <p:sp>
+        <p:nvSpPr>
+          <p:cNvPr id="2" name="Slide Image Placeholder 1"/>
+          <p:cNvSpPr>
+            <a:spLocks noGrp="1" noRot="1" noChangeAspect="1"/>
+          </p:cNvSpPr>
+          <p:nvPr>
+            <p:ph type="sldImg"/>
+          </p:nvPr>
+        </p:nvSpPr>
+        <p:spPr/>
+      </p:sp>
+      <p:sp>
+        <p:nvSpPr>
+          <p:cNvPr id="3" name="Notes Placeholder 2"/>
+          <p:cNvSpPr>
+            <a:spLocks noGrp="1"/>
+          </p:cNvSpPr>
+          <p:nvPr>
+            <p:ph type="body" idx="1"/>
+          </p:nvPr>
+        </p:nvSpPr>
+        <p:spPr/>
+        <p:txBody>
+          <a:bodyPr/>
+          <a:lstStyle/>
+          <a:p>
+            <a:r>
+              <a:rPr lang="vi-VN"/>
+              <a:t>Dinh dưỡng là quá trình cơ thể tiếp nhận và sử dụng các chất dinh dưỡng từ thực phẩm.</a:t>
+            </a:r>
+          </a:p>
+          <a:p>
+            <a:r>
+              <a:rPr lang="vi-VN"/>
+              <a:t>Dinh dưỡng đóng vai trò rất quan trọng vì:</a:t>
+            </a:r>
+          </a:p>
+          <a:p>
+            <a:pPr>
+              <a:buFont typeface="Arial" panose="020B0604020202020204" pitchFamily="34" charset="0"/>
+              <a:buChar char="•"/>
+            </a:pPr>
+            <a:r>
+              <a:rPr lang="vi-VN"/>
+              <a:t>cung cấp năng lượng, </a:t>
+            </a:r>
+          </a:p>
+          <a:p>
+            <a:pPr>
+              <a:buFont typeface="Arial" panose="020B0604020202020204" pitchFamily="34" charset="0"/>
+              <a:buChar char="•"/>
+            </a:pPr>
+            <a:r>
+              <a:rPr lang="vi-VN"/>
+              <a:t>hỗ trợ tăng trưởng, </a:t>
+            </a:r>
+          </a:p>
+          <a:p>
+            <a:pPr>
+              <a:buFont typeface="Arial" panose="020B0604020202020204" pitchFamily="34" charset="0"/>
+              <a:buChar char="•"/>
+            </a:pPr>
+            <a:r>
+              <a:rPr lang="vi-VN"/>
+              <a:t>phục hồi mô, </a:t>
+            </a:r>
+          </a:p>
+          <a:p>
+            <a:pPr>
+              <a:buFont typeface="Arial" panose="020B0604020202020204" pitchFamily="34" charset="0"/>
+              <a:buChar char="•"/>
+            </a:pPr>
+            <a:r>
+              <a:rPr lang="vi-VN"/>
+              <a:t>duy trì hoạt động của các cơ quan, </a:t>
+            </a:r>
+          </a:p>
+          <a:p>
+            <a:pPr>
+              <a:buFont typeface="Arial" panose="020B0604020202020204" pitchFamily="34" charset="0"/>
+              <a:buChar char="•"/>
+            </a:pPr>
+            <a:r>
+              <a:rPr lang="vi-VN"/>
+              <a:t>nâng cao sức khỏe tổng thể. </a:t>
+            </a:r>
+          </a:p>
+          <a:p>
+            <a:r>
+              <a:rPr lang="vi-VN"/>
+              <a:t>Đây là nền tảng để xây dựng hệ thống gợi ý thực phẩm của đề tài.</a:t>
+            </a:r>
+          </a:p>
+          <a:p>
+            <a:endParaRPr lang="en-US"/>
+          </a:p>
+        </p:txBody>
+      </p:sp>
+      <p:sp>
+        <p:nvSpPr>
+          <p:cNvPr id="4" name="Slide Number Placeholder 3"/>
+          <p:cNvSpPr>
+            <a:spLocks noGrp="1"/>
+          </p:cNvSpPr>
+          <p:nvPr>
+            <p:ph type="sldNum" sz="quarter" idx="5"/>
+          </p:nvPr>
+        </p:nvSpPr>
+        <p:spPr/>
+        <p:txBody>
+          <a:bodyPr/>
+          <a:lstStyle/>
+          <a:p>
+            <a:fld id="{02BE832F-9538-40A2-A31F-0417EB2D2CC7}" type="slidenum">
+              <a:rPr lang="en-US" smtClean="0"/>
+              <a:t>7</a:t>
+            </a:fld>
+            <a:endParaRPr lang="en-US"/>
+          </a:p>
+        </p:txBody>
+      </p:sp>
+    </p:spTree>
+    <p:extLst>
+      <p:ext uri="{BB962C8B-B14F-4D97-AF65-F5344CB8AC3E}">
+        <p14:creationId xmlns:p14="http://schemas.microsoft.com/office/powerpoint/2010/main" val="2705304515"/>
+      </p:ext>
+    </p:extLst>
+  </p:cSld>
+  <p:clrMapOvr>
+    <a:masterClrMapping/>
+  </p:clrMapOvr>
+</p:notes>
+</file>
+
+<file path=ppt/notesSlides/notesSlide8.xml><?xml version="1.0" encoding="utf-8"?>
+<p:notes xmlns:a="http://schemas.openxmlformats.org/drawingml/2006/main" xmlns:r="http://schemas.openxmlformats.org/officeDocument/2006/relationships" xmlns:p="http://schemas.openxmlformats.org/presentationml/2006/main">
+  <p:cSld>
+    <p:spTree>
+      <p:nvGrpSpPr>
+        <p:cNvPr id="1" name=""/>
+        <p:cNvGrpSpPr/>
+        <p:nvPr/>
+      </p:nvGrpSpPr>
+      <p:grpSpPr>
+        <a:xfrm>
+          <a:off x="0" y="0"/>
+          <a:ext cx="0" cy="0"/>
+          <a:chOff x="0" y="0"/>
+          <a:chExt cx="0" cy="0"/>
+        </a:xfrm>
+      </p:grpSpPr>
+      <p:sp>
+        <p:nvSpPr>
+          <p:cNvPr id="2" name="Slide Image Placeholder 1"/>
+          <p:cNvSpPr>
+            <a:spLocks noGrp="1" noRot="1" noChangeAspect="1"/>
+          </p:cNvSpPr>
+          <p:nvPr>
+            <p:ph type="sldImg"/>
+          </p:nvPr>
+        </p:nvSpPr>
+        <p:spPr/>
+      </p:sp>
+      <p:sp>
+        <p:nvSpPr>
+          <p:cNvPr id="3" name="Notes Placeholder 2"/>
+          <p:cNvSpPr>
+            <a:spLocks noGrp="1"/>
+          </p:cNvSpPr>
+          <p:nvPr>
+            <p:ph type="body" idx="1"/>
+          </p:nvPr>
+        </p:nvSpPr>
+        <p:spPr/>
+        <p:txBody>
+          <a:bodyPr/>
+          <a:lstStyle/>
+          <a:p>
+            <a:r>
+              <a:rPr lang="vi-VN"/>
+              <a:t>BMI là chỉ số khối cơ thể dùng để đánh giá tình trạng cân nặng.</a:t>
+            </a:r>
+          </a:p>
+          <a:p>
+            <a:r>
+              <a:rPr lang="vi-VN"/>
+              <a:t>Công thức tính là:</a:t>
+            </a:r>
+          </a:p>
+          <a:p>
+            <a:r>
+              <a:rPr lang="vi-VN" b="1"/>
+              <a:t>BMI = Cân nặng chia cho bình phương chiều cao.</a:t>
+            </a:r>
+            <a:endParaRPr lang="vi-VN"/>
+          </a:p>
+          <a:p>
+            <a:r>
+              <a:rPr lang="vi-VN"/>
+              <a:t>Nếu BMI dưới 18,5 thì được xem là thiếu cân.</a:t>
+            </a:r>
+          </a:p>
+          <a:p>
+            <a:r>
+              <a:rPr lang="vi-VN"/>
+              <a:t>Hệ thống sẽ sử dụng BMI để đánh giá tình trạng ban đầu của người dùng.</a:t>
+            </a:r>
+          </a:p>
+          <a:p>
+            <a:r>
+              <a:rPr lang="vi-VN" i="1"/>
+              <a:t>(Có thể chỉ nhanh vào công thức trên slide.)</a:t>
+            </a:r>
+            <a:endParaRPr lang="vi-VN"/>
+          </a:p>
+          <a:p>
+            <a:endParaRPr lang="en-US"/>
+          </a:p>
+        </p:txBody>
+      </p:sp>
+      <p:sp>
+        <p:nvSpPr>
+          <p:cNvPr id="4" name="Slide Number Placeholder 3"/>
+          <p:cNvSpPr>
+            <a:spLocks noGrp="1"/>
+          </p:cNvSpPr>
+          <p:nvPr>
+            <p:ph type="sldNum" sz="quarter" idx="5"/>
+          </p:nvPr>
+        </p:nvSpPr>
+        <p:spPr/>
+        <p:txBody>
+          <a:bodyPr/>
+          <a:lstStyle/>
+          <a:p>
+            <a:fld id="{02BE832F-9538-40A2-A31F-0417EB2D2CC7}" type="slidenum">
+              <a:rPr lang="en-US" smtClean="0"/>
+              <a:t>8</a:t>
+            </a:fld>
+            <a:endParaRPr lang="en-US"/>
+          </a:p>
+        </p:txBody>
+      </p:sp>
+    </p:spTree>
+    <p:extLst>
+      <p:ext uri="{BB962C8B-B14F-4D97-AF65-F5344CB8AC3E}">
+        <p14:creationId xmlns:p14="http://schemas.microsoft.com/office/powerpoint/2010/main" val="456006194"/>
+      </p:ext>
+    </p:extLst>
+  </p:cSld>
+  <p:clrMapOvr>
+    <a:masterClrMapping/>
+  </p:clrMapOvr>
+</p:notes>
+</file>
+
+<file path=ppt/notesSlides/notesSlide9.xml><?xml version="1.0" encoding="utf-8"?>
+<p:notes xmlns:a="http://schemas.openxmlformats.org/drawingml/2006/main" xmlns:r="http://schemas.openxmlformats.org/officeDocument/2006/relationships" xmlns:p="http://schemas.openxmlformats.org/presentationml/2006/main">
+  <p:cSld>
+    <p:spTree>
+      <p:nvGrpSpPr>
+        <p:cNvPr id="1" name=""/>
+        <p:cNvGrpSpPr/>
+        <p:nvPr/>
+      </p:nvGrpSpPr>
+      <p:grpSpPr>
+        <a:xfrm>
+          <a:off x="0" y="0"/>
+          <a:ext cx="0" cy="0"/>
+          <a:chOff x="0" y="0"/>
+          <a:chExt cx="0" cy="0"/>
+        </a:xfrm>
+      </p:grpSpPr>
+      <p:sp>
+        <p:nvSpPr>
+          <p:cNvPr id="2" name="Slide Image Placeholder 1"/>
+          <p:cNvSpPr>
+            <a:spLocks noGrp="1" noRot="1" noChangeAspect="1"/>
+          </p:cNvSpPr>
+          <p:nvPr>
+            <p:ph type="sldImg"/>
+          </p:nvPr>
+        </p:nvSpPr>
+        <p:spPr/>
+      </p:sp>
+      <p:sp>
+        <p:nvSpPr>
+          <p:cNvPr id="3" name="Notes Placeholder 2"/>
+          <p:cNvSpPr>
+            <a:spLocks noGrp="1"/>
+          </p:cNvSpPr>
+          <p:nvPr>
+            <p:ph type="body" idx="1"/>
+          </p:nvPr>
+        </p:nvSpPr>
+        <p:spPr/>
+        <p:txBody>
+          <a:bodyPr/>
+          <a:lstStyle/>
+          <a:p>
+            <a:r>
+              <a:rPr lang="vi-VN"/>
+              <a:t>BMR là lượng năng lượng tối thiểu mà cơ thể cần để duy trì các hoạt động sống khi nghỉ ngơi.</a:t>
+            </a:r>
+          </a:p>
+          <a:p>
+            <a:r>
+              <a:rPr lang="vi-VN"/>
+              <a:t>Công thức tính khác nhau giữa nam và nữ.</a:t>
+            </a:r>
+          </a:p>
+          <a:p>
+            <a:r>
+              <a:rPr lang="vi-VN"/>
+              <a:t>Chỉ số này giúp xác định lượng calo tối thiểu cần thiết mỗi ngày.</a:t>
+            </a:r>
+          </a:p>
+          <a:p>
+            <a:endParaRPr lang="en-US"/>
+          </a:p>
+        </p:txBody>
+      </p:sp>
+      <p:sp>
+        <p:nvSpPr>
+          <p:cNvPr id="4" name="Slide Number Placeholder 3"/>
+          <p:cNvSpPr>
+            <a:spLocks noGrp="1"/>
+          </p:cNvSpPr>
+          <p:nvPr>
+            <p:ph type="sldNum" sz="quarter" idx="5"/>
+          </p:nvPr>
+        </p:nvSpPr>
+        <p:spPr/>
+        <p:txBody>
+          <a:bodyPr/>
+          <a:lstStyle/>
+          <a:p>
+            <a:fld id="{02BE832F-9538-40A2-A31F-0417EB2D2CC7}" type="slidenum">
+              <a:rPr lang="en-US" smtClean="0"/>
+              <a:t>9</a:t>
+            </a:fld>
+            <a:endParaRPr lang="en-US"/>
+          </a:p>
+        </p:txBody>
+      </p:sp>
+    </p:spTree>
+    <p:extLst>
+      <p:ext uri="{BB962C8B-B14F-4D97-AF65-F5344CB8AC3E}">
+        <p14:creationId xmlns:p14="http://schemas.microsoft.com/office/powerpoint/2010/main" val="4182707998"/>
       </p:ext>
     </p:extLst>
   </p:cSld>
@@ -778,7 +2729,7 @@
             <a:fld id="{1D8BD707-D9CF-40AE-B4C6-C98DA3205C09}" type="datetimeFigureOut">
               <a:rPr lang="en-US" smtClean="0"/>
               <a:pPr/>
-              <a:t>7/3/2026</a:t>
+              <a:t>7/5/2026</a:t>
             </a:fld>
             <a:endParaRPr lang="en-US"/>
           </a:p>
@@ -943,7 +2894,7 @@
             <a:fld id="{1D8BD707-D9CF-40AE-B4C6-C98DA3205C09}" type="datetimeFigureOut">
               <a:rPr lang="en-US" smtClean="0"/>
               <a:pPr/>
-              <a:t>7/3/2026</a:t>
+              <a:t>7/5/2026</a:t>
             </a:fld>
             <a:endParaRPr lang="en-US"/>
           </a:p>
@@ -1118,7 +3069,7 @@
             <a:fld id="{1D8BD707-D9CF-40AE-B4C6-C98DA3205C09}" type="datetimeFigureOut">
               <a:rPr lang="en-US" smtClean="0"/>
               <a:pPr/>
-              <a:t>7/3/2026</a:t>
+              <a:t>7/5/2026</a:t>
             </a:fld>
             <a:endParaRPr lang="en-US"/>
           </a:p>
@@ -1283,7 +3234,7 @@
             <a:fld id="{1D8BD707-D9CF-40AE-B4C6-C98DA3205C09}" type="datetimeFigureOut">
               <a:rPr lang="en-US" smtClean="0"/>
               <a:pPr/>
-              <a:t>7/3/2026</a:t>
+              <a:t>7/5/2026</a:t>
             </a:fld>
             <a:endParaRPr lang="en-US"/>
           </a:p>
@@ -1525,7 +3476,7 @@
             <a:fld id="{1D8BD707-D9CF-40AE-B4C6-C98DA3205C09}" type="datetimeFigureOut">
               <a:rPr lang="en-US" smtClean="0"/>
               <a:pPr/>
-              <a:t>7/3/2026</a:t>
+              <a:t>7/5/2026</a:t>
             </a:fld>
             <a:endParaRPr lang="en-US"/>
           </a:p>
@@ -1807,7 +3758,7 @@
             <a:fld id="{1D8BD707-D9CF-40AE-B4C6-C98DA3205C09}" type="datetimeFigureOut">
               <a:rPr lang="en-US" smtClean="0"/>
               <a:pPr/>
-              <a:t>7/3/2026</a:t>
+              <a:t>7/5/2026</a:t>
             </a:fld>
             <a:endParaRPr lang="en-US"/>
           </a:p>
@@ -2223,7 +4174,7 @@
             <a:fld id="{1D8BD707-D9CF-40AE-B4C6-C98DA3205C09}" type="datetimeFigureOut">
               <a:rPr lang="en-US" smtClean="0"/>
               <a:pPr/>
-              <a:t>7/3/2026</a:t>
+              <a:t>7/5/2026</a:t>
             </a:fld>
             <a:endParaRPr lang="en-US"/>
           </a:p>
@@ -2337,7 +4288,7 @@
             <a:fld id="{1D8BD707-D9CF-40AE-B4C6-C98DA3205C09}" type="datetimeFigureOut">
               <a:rPr lang="en-US" smtClean="0"/>
               <a:pPr/>
-              <a:t>7/3/2026</a:t>
+              <a:t>7/5/2026</a:t>
             </a:fld>
             <a:endParaRPr lang="en-US"/>
           </a:p>
@@ -2429,7 +4380,7 @@
             <a:fld id="{1D8BD707-D9CF-40AE-B4C6-C98DA3205C09}" type="datetimeFigureOut">
               <a:rPr lang="en-US" smtClean="0"/>
               <a:pPr/>
-              <a:t>7/3/2026</a:t>
+              <a:t>7/5/2026</a:t>
             </a:fld>
             <a:endParaRPr lang="en-US"/>
           </a:p>
@@ -2701,7 +4652,7 @@
             <a:fld id="{1D8BD707-D9CF-40AE-B4C6-C98DA3205C09}" type="datetimeFigureOut">
               <a:rPr lang="en-US" smtClean="0"/>
               <a:pPr/>
-              <a:t>7/3/2026</a:t>
+              <a:t>7/5/2026</a:t>
             </a:fld>
             <a:endParaRPr lang="en-US"/>
           </a:p>
@@ -2950,7 +4901,7 @@
             <a:fld id="{1D8BD707-D9CF-40AE-B4C6-C98DA3205C09}" type="datetimeFigureOut">
               <a:rPr lang="en-US" smtClean="0"/>
               <a:pPr/>
-              <a:t>7/3/2026</a:t>
+              <a:t>7/5/2026</a:t>
             </a:fld>
             <a:endParaRPr lang="en-US"/>
           </a:p>
@@ -3158,7 +5109,7 @@
             <a:fld id="{1D8BD707-D9CF-40AE-B4C6-C98DA3205C09}" type="datetimeFigureOut">
               <a:rPr lang="en-US" smtClean="0"/>
               <a:pPr/>
-              <a:t>7/3/2026</a:t>
+              <a:t>7/5/2026</a:t>
             </a:fld>
             <a:endParaRPr lang="en-US"/>
           </a:p>
@@ -3568,10 +5519,10 @@
             </a:pathLst>
           </a:custGeom>
           <a:blipFill>
-            <a:blip r:embed="rId2">
+            <a:blip r:embed="rId3">
               <a:extLst>
                 <a:ext uri="{96DAC541-7B7A-43D3-8B79-37D633B846F1}">
-                  <asvg:svgBlip xmlns:asvg="http://schemas.microsoft.com/office/drawing/2016/SVG/main" r:embed="rId3"/>
+                  <asvg:svgBlip xmlns:asvg="http://schemas.microsoft.com/office/drawing/2016/SVG/main" r:embed="rId4"/>
                 </a:ext>
               </a:extLst>
             </a:blip>
@@ -3620,7 +5571,7 @@
             </a:pathLst>
           </a:custGeom>
           <a:blipFill>
-            <a:blip r:embed="rId4"/>
+            <a:blip r:embed="rId5"/>
             <a:stretch>
               <a:fillRect/>
             </a:stretch>
@@ -3666,10 +5617,10 @@
             </a:pathLst>
           </a:custGeom>
           <a:blipFill>
-            <a:blip r:embed="rId2">
+            <a:blip r:embed="rId3">
               <a:extLst>
                 <a:ext uri="{96DAC541-7B7A-43D3-8B79-37D633B846F1}">
-                  <asvg:svgBlip xmlns:asvg="http://schemas.microsoft.com/office/drawing/2016/SVG/main" r:embed="rId3"/>
+                  <asvg:svgBlip xmlns:asvg="http://schemas.microsoft.com/office/drawing/2016/SVG/main" r:embed="rId4"/>
                 </a:ext>
               </a:extLst>
             </a:blip>
@@ -5300,12 +7251,12 @@
           <a:graphicData uri="http://schemas.openxmlformats.org/presentationml/2006/ole">
             <mc:AlternateContent xmlns:mc="http://schemas.openxmlformats.org/markup-compatibility/2006">
               <mc:Choice xmlns:v="urn:schemas-microsoft-com:vml" Requires="v">
-                <p:oleObj name="Worksheet" r:id="rId2" imgW="9105900" imgH="5791200" progId="Excel.Sheet.12">
+                <p:oleObj name="Worksheet" r:id="rId3" imgW="9105900" imgH="5791200" progId="Excel.Sheet.12">
                   <p:embed/>
                 </p:oleObj>
               </mc:Choice>
               <mc:Fallback>
-                <p:oleObj name="Worksheet" r:id="rId2" imgW="9105900" imgH="5791200" progId="Excel.Sheet.12">
+                <p:oleObj name="Worksheet" r:id="rId3" imgW="9105900" imgH="5791200" progId="Excel.Sheet.12">
                   <p:embed/>
                   <p:pic>
                     <p:nvPicPr>
@@ -5314,7 +7265,7 @@
                       <p:nvPr/>
                     </p:nvPicPr>
                     <p:blipFill>
-                      <a:blip r:embed="rId3"/>
+                      <a:blip r:embed="rId4"/>
                       <a:stretch>
                         <a:fillRect/>
                       </a:stretch>
@@ -7738,7 +9689,7 @@
             </a:pathLst>
           </a:custGeom>
           <a:blipFill>
-            <a:blip r:embed="rId2"/>
+            <a:blip r:embed="rId3"/>
             <a:stretch>
               <a:fillRect/>
             </a:stretch>
@@ -7784,7 +9735,7 @@
             </a:pathLst>
           </a:custGeom>
           <a:blipFill>
-            <a:blip r:embed="rId3"/>
+            <a:blip r:embed="rId4"/>
             <a:stretch>
               <a:fillRect/>
             </a:stretch>
@@ -7830,7 +9781,7 @@
             </a:pathLst>
           </a:custGeom>
           <a:blipFill>
-            <a:blip r:embed="rId4"/>
+            <a:blip r:embed="rId5"/>
             <a:stretch>
               <a:fillRect/>
             </a:stretch>
@@ -7876,7 +9827,7 @@
             </a:pathLst>
           </a:custGeom>
           <a:blipFill>
-            <a:blip r:embed="rId5"/>
+            <a:blip r:embed="rId6"/>
             <a:stretch>
               <a:fillRect/>
             </a:stretch>
@@ -7922,7 +9873,7 @@
             </a:pathLst>
           </a:custGeom>
           <a:blipFill>
-            <a:blip r:embed="rId6"/>
+            <a:blip r:embed="rId7"/>
             <a:stretch>
               <a:fillRect/>
             </a:stretch>
@@ -7968,7 +9919,7 @@
             </a:pathLst>
           </a:custGeom>
           <a:blipFill>
-            <a:blip r:embed="rId7"/>
+            <a:blip r:embed="rId8"/>
             <a:stretch>
               <a:fillRect/>
             </a:stretch>
@@ -12056,7 +14007,7 @@
             </a:pathLst>
           </a:custGeom>
           <a:blipFill>
-            <a:blip r:embed="rId2"/>
+            <a:blip r:embed="rId3"/>
             <a:stretch>
               <a:fillRect/>
             </a:stretch>
@@ -13056,7 +15007,7 @@
             </a:pathLst>
           </a:custGeom>
           <a:blipFill>
-            <a:blip r:embed="rId2"/>
+            <a:blip r:embed="rId3"/>
             <a:stretch>
               <a:fillRect/>
             </a:stretch>
@@ -13278,7 +15229,7 @@
             </a:pathLst>
           </a:custGeom>
           <a:blipFill>
-            <a:blip r:embed="rId2"/>
+            <a:blip r:embed="rId3"/>
             <a:stretch>
               <a:fillRect/>
             </a:stretch>
@@ -13324,7 +15275,7 @@
             </a:pathLst>
           </a:custGeom>
           <a:blipFill>
-            <a:blip r:embed="rId2"/>
+            <a:blip r:embed="rId3"/>
             <a:stretch>
               <a:fillRect/>
             </a:stretch>
@@ -13370,7 +15321,7 @@
             </a:pathLst>
           </a:custGeom>
           <a:blipFill>
-            <a:blip r:embed="rId2"/>
+            <a:blip r:embed="rId3"/>
             <a:stretch>
               <a:fillRect/>
             </a:stretch>
@@ -13416,7 +15367,7 @@
             </a:pathLst>
           </a:custGeom>
           <a:blipFill>
-            <a:blip r:embed="rId2"/>
+            <a:blip r:embed="rId3"/>
             <a:stretch>
               <a:fillRect/>
             </a:stretch>
@@ -13550,7 +15501,7 @@
                 <a:cs typeface="Inter Italics"/>
                 <a:sym typeface="Inter Italics"/>
               </a:rPr>
-              <a:t>Áp dụng Hybrid Recommendation (Content-Based + Rule-Based) để gợi ý thực đơn.</a:t>
+              <a:t>Áp dụng Hybrid Recommendation (Content-Based + Rule-Based) để gợi ý thực phẩm.</a:t>
             </a:r>
           </a:p>
         </p:txBody>
@@ -14854,7 +16805,7 @@
             </a:pathLst>
           </a:custGeom>
           <a:blipFill>
-            <a:blip r:embed="rId2"/>
+            <a:blip r:embed="rId3"/>
             <a:stretch>
               <a:fillRect/>
             </a:stretch>
@@ -14900,7 +16851,7 @@
             </a:pathLst>
           </a:custGeom>
           <a:blipFill>
-            <a:blip r:embed="rId3"/>
+            <a:blip r:embed="rId4"/>
             <a:stretch>
               <a:fillRect/>
             </a:stretch>
@@ -15166,7 +17117,7 @@
             </a:pathLst>
           </a:custGeom>
           <a:blipFill>
-            <a:blip r:embed="rId3"/>
+            <a:blip r:embed="rId4"/>
             <a:stretch>
               <a:fillRect/>
             </a:stretch>
@@ -15181,20 +17132,20 @@
         </p:nvSpPr>
         <p:spPr>
           <a:xfrm>
-            <a:off x="2000619" y="4101869"/>
-            <a:ext cx="10103987" cy="705486"/>
+            <a:off x="2000619" y="4130653"/>
+            <a:ext cx="13299711" cy="673967"/>
           </a:xfrm>
           <a:prstGeom prst="rect">
             <a:avLst/>
           </a:prstGeom>
         </p:spPr>
         <p:txBody>
-          <a:bodyPr lIns="0" tIns="0" rIns="0" bIns="0" rtlCol="0" anchor="t">
+          <a:bodyPr wrap="square" lIns="0" tIns="0" rIns="0" bIns="0" rtlCol="0" anchor="t">
             <a:spAutoFit/>
           </a:bodyPr>
           <a:lstStyle/>
           <a:p>
-            <a:pPr algn="ctr">
+            <a:pPr>
               <a:lnSpc>
                 <a:spcPts val="5739"/>
               </a:lnSpc>
@@ -15212,7 +17163,7 @@
                 <a:cs typeface="Inter Italics"/>
                 <a:sym typeface="Inter Italics"/>
               </a:rPr>
-              <a:t>Xây dựng thực đơn cho từng nhóm bệnh</a:t>
+              <a:t>Xây dựng hệ gợi ý thực phẩm cho từng nhóm bệnh</a:t>
             </a:r>
           </a:p>
         </p:txBody>
@@ -15256,7 +17207,7 @@
             </a:pathLst>
           </a:custGeom>
           <a:blipFill>
-            <a:blip r:embed="rId3"/>
+            <a:blip r:embed="rId4"/>
             <a:stretch>
               <a:fillRect/>
             </a:stretch>
@@ -15271,15 +17222,15 @@
         </p:nvSpPr>
         <p:spPr>
           <a:xfrm>
-            <a:off x="2017587" y="5405498"/>
-            <a:ext cx="7126413" cy="705486"/>
+            <a:off x="1699521" y="5405498"/>
+            <a:ext cx="7444480" cy="673967"/>
           </a:xfrm>
           <a:prstGeom prst="rect">
             <a:avLst/>
           </a:prstGeom>
         </p:spPr>
         <p:txBody>
-          <a:bodyPr lIns="0" tIns="0" rIns="0" bIns="0" rtlCol="0" anchor="t">
+          <a:bodyPr wrap="square" lIns="0" tIns="0" rIns="0" bIns="0" rtlCol="0" anchor="t">
             <a:spAutoFit/>
           </a:bodyPr>
           <a:lstStyle/>
@@ -15346,7 +17297,7 @@
             </a:pathLst>
           </a:custGeom>
           <a:blipFill>
-            <a:blip r:embed="rId3"/>
+            <a:blip r:embed="rId4"/>
             <a:stretch>
               <a:fillRect/>
             </a:stretch>
@@ -15361,15 +17312,15 @@
         </p:nvSpPr>
         <p:spPr>
           <a:xfrm>
-            <a:off x="2017587" y="6709126"/>
-            <a:ext cx="7824426" cy="705486"/>
+            <a:off x="1682553" y="6709125"/>
+            <a:ext cx="8159460" cy="673967"/>
           </a:xfrm>
           <a:prstGeom prst="rect">
             <a:avLst/>
           </a:prstGeom>
         </p:spPr>
         <p:txBody>
-          <a:bodyPr lIns="0" tIns="0" rIns="0" bIns="0" rtlCol="0" anchor="t">
+          <a:bodyPr wrap="square" lIns="0" tIns="0" rIns="0" bIns="0" rtlCol="0" anchor="t">
             <a:spAutoFit/>
           </a:bodyPr>
           <a:lstStyle/>
@@ -15436,7 +17387,7 @@
             </a:pathLst>
           </a:custGeom>
           <a:blipFill>
-            <a:blip r:embed="rId3"/>
+            <a:blip r:embed="rId4"/>
             <a:stretch>
               <a:fillRect/>
             </a:stretch>
@@ -16072,10 +18023,10 @@
             </a:pathLst>
           </a:custGeom>
           <a:blipFill>
-            <a:blip r:embed="rId2">
+            <a:blip r:embed="rId3">
               <a:extLst>
                 <a:ext uri="{96DAC541-7B7A-43D3-8B79-37D633B846F1}">
-                  <asvg:svgBlip xmlns:asvg="http://schemas.microsoft.com/office/drawing/2016/SVG/main" r:embed="rId3"/>
+                  <asvg:svgBlip xmlns:asvg="http://schemas.microsoft.com/office/drawing/2016/SVG/main" r:embed="rId4"/>
                 </a:ext>
               </a:extLst>
             </a:blip>
@@ -16124,10 +18075,10 @@
             </a:pathLst>
           </a:custGeom>
           <a:blipFill>
-            <a:blip r:embed="rId2">
+            <a:blip r:embed="rId3">
               <a:extLst>
                 <a:ext uri="{96DAC541-7B7A-43D3-8B79-37D633B846F1}">
-                  <asvg:svgBlip xmlns:asvg="http://schemas.microsoft.com/office/drawing/2016/SVG/main" r:embed="rId3"/>
+                  <asvg:svgBlip xmlns:asvg="http://schemas.microsoft.com/office/drawing/2016/SVG/main" r:embed="rId4"/>
                 </a:ext>
               </a:extLst>
             </a:blip>
@@ -16220,7 +18171,7 @@
             </a:pathLst>
           </a:custGeom>
           <a:blipFill>
-            <a:blip r:embed="rId4"/>
+            <a:blip r:embed="rId5"/>
             <a:stretch>
               <a:fillRect/>
             </a:stretch>
@@ -16488,13 +18439,13 @@
   <p:clrMapOvr>
     <a:masterClrMapping/>
   </p:clrMapOvr>
-  <mc:AlternateContent xmlns:mc="http://schemas.openxmlformats.org/markup-compatibility/2006">
-    <mc:Choice xmlns:p159="http://schemas.microsoft.com/office/powerpoint/2015/09/main" Requires="p159">
+  <mc:AlternateContent xmlns:mc="http://schemas.openxmlformats.org/markup-compatibility/2006" xmlns:p159="http://schemas.microsoft.com/office/powerpoint/2015/09/main">
+    <mc:Choice Requires="p159">
       <p:transition xmlns:p14="http://schemas.microsoft.com/office/powerpoint/2010/main" spd="slow" p14:dur="2000">
         <p159:morph option="byObject"/>
       </p:transition>
     </mc:Choice>
-    <mc:Fallback>
+    <mc:Fallback xmlns="">
       <p:transition spd="slow">
         <p:fade/>
       </p:transition>
@@ -16736,10 +18687,10 @@
             </a:pathLst>
           </a:custGeom>
           <a:blipFill>
-            <a:blip r:embed="rId2">
+            <a:blip r:embed="rId3">
               <a:extLst>
                 <a:ext uri="{96DAC541-7B7A-43D3-8B79-37D633B846F1}">
-                  <asvg:svgBlip xmlns:asvg="http://schemas.microsoft.com/office/drawing/2016/SVG/main" r:embed="rId3"/>
+                  <asvg:svgBlip xmlns:asvg="http://schemas.microsoft.com/office/drawing/2016/SVG/main" r:embed="rId4"/>
                 </a:ext>
               </a:extLst>
             </a:blip>
@@ -16845,7 +18796,7 @@
         </p:nvSpPr>
         <p:spPr>
           <a:xfrm>
-            <a:off x="6508552" y="3267564"/>
+            <a:off x="6920689" y="3267564"/>
             <a:ext cx="6566711" cy="412750"/>
           </a:xfrm>
           <a:prstGeom prst="rect">
@@ -17464,7 +19415,7 @@
         </p:nvSpPr>
         <p:spPr>
           <a:xfrm>
-            <a:off x="5917794" y="5213573"/>
+            <a:off x="6158689" y="5213573"/>
             <a:ext cx="6566711" cy="412750"/>
           </a:xfrm>
           <a:prstGeom prst="rect">
@@ -17552,7 +19503,7 @@
         </p:nvSpPr>
         <p:spPr>
           <a:xfrm>
-            <a:off x="6307485" y="7156317"/>
+            <a:off x="6463489" y="7156317"/>
             <a:ext cx="6566711" cy="412750"/>
           </a:xfrm>
           <a:prstGeom prst="rect">
@@ -17640,7 +19591,7 @@
         </p:nvSpPr>
         <p:spPr>
           <a:xfrm>
-            <a:off x="6676615" y="9086177"/>
+            <a:off x="7132909" y="9086177"/>
             <a:ext cx="9707291" cy="412750"/>
           </a:xfrm>
           <a:prstGeom prst="rect">
@@ -17818,7 +19769,7 @@
                             </p:stCondLst>
                             <p:childTnLst>
                               <p:par>
-                                <p:cTn id="5" presetID="10" presetClass="entr" presetSubtype="0" fill="hold" grpId="0" nodeType="clickEffect">
+                                <p:cTn id="5" presetID="22" presetClass="entr" presetSubtype="4" fill="hold" nodeType="clickEffect">
                                   <p:stCondLst>
                                     <p:cond delay="0"/>
                                   </p:stCondLst>
@@ -17826,59 +19777,6 @@
                                     <p:set>
                                       <p:cBhvr>
                                         <p:cTn id="6" dur="1" fill="hold">
-                                          <p:stCondLst>
-                                            <p:cond delay="0"/>
-                                          </p:stCondLst>
-                                        </p:cTn>
-                                        <p:tgtEl>
-                                          <p:spTgt spid="6"/>
-                                        </p:tgtEl>
-                                        <p:attrNameLst>
-                                          <p:attrName>style.visibility</p:attrName>
-                                        </p:attrNameLst>
-                                      </p:cBhvr>
-                                      <p:to>
-                                        <p:strVal val="visible"/>
-                                      </p:to>
-                                    </p:set>
-                                    <p:animEffect transition="in" filter="fade">
-                                      <p:cBhvr>
-                                        <p:cTn id="7" dur="500"/>
-                                        <p:tgtEl>
-                                          <p:spTgt spid="6"/>
-                                        </p:tgtEl>
-                                      </p:cBhvr>
-                                    </p:animEffect>
-                                  </p:childTnLst>
-                                </p:cTn>
-                              </p:par>
-                            </p:childTnLst>
-                          </p:cTn>
-                        </p:par>
-                      </p:childTnLst>
-                    </p:cTn>
-                  </p:par>
-                  <p:par>
-                    <p:cTn id="8" fill="hold">
-                      <p:stCondLst>
-                        <p:cond delay="indefinite"/>
-                      </p:stCondLst>
-                      <p:childTnLst>
-                        <p:par>
-                          <p:cTn id="9" fill="hold">
-                            <p:stCondLst>
-                              <p:cond delay="0"/>
-                            </p:stCondLst>
-                            <p:childTnLst>
-                              <p:par>
-                                <p:cTn id="10" presetID="22" presetClass="entr" presetSubtype="4" fill="hold" nodeType="clickEffect">
-                                  <p:stCondLst>
-                                    <p:cond delay="0"/>
-                                  </p:stCondLst>
-                                  <p:childTnLst>
-                                    <p:set>
-                                      <p:cBhvr>
-                                        <p:cTn id="11" dur="1" fill="hold">
                                           <p:stCondLst>
                                             <p:cond delay="0"/>
                                           </p:stCondLst>
@@ -17896,7 +19794,7 @@
                                     </p:set>
                                     <p:animEffect transition="in" filter="wipe(down)">
                                       <p:cBhvr>
-                                        <p:cTn id="12" dur="500"/>
+                                        <p:cTn id="7" dur="500"/>
                                         <p:tgtEl>
                                           <p:spTgt spid="3"/>
                                         </p:tgtEl>
@@ -17906,14 +19804,14 @@
                                 </p:cTn>
                               </p:par>
                               <p:par>
-                                <p:cTn id="13" presetID="22" presetClass="entr" presetSubtype="4" fill="hold" grpId="0" nodeType="withEffect">
+                                <p:cTn id="8" presetID="22" presetClass="entr" presetSubtype="4" fill="hold" grpId="0" nodeType="withEffect">
                                   <p:stCondLst>
                                     <p:cond delay="0"/>
                                   </p:stCondLst>
                                   <p:childTnLst>
                                     <p:set>
                                       <p:cBhvr>
-                                        <p:cTn id="14" dur="1" fill="hold">
+                                        <p:cTn id="9" dur="1" fill="hold">
                                           <p:stCondLst>
                                             <p:cond delay="0"/>
                                           </p:stCondLst>
@@ -17931,7 +19829,7 @@
                                     </p:set>
                                     <p:animEffect transition="in" filter="wipe(down)">
                                       <p:cBhvr>
-                                        <p:cTn id="15" dur="500"/>
+                                        <p:cTn id="10" dur="500"/>
                                         <p:tgtEl>
                                           <p:spTgt spid="8"/>
                                         </p:tgtEl>
@@ -17941,14 +19839,14 @@
                                 </p:cTn>
                               </p:par>
                               <p:par>
-                                <p:cTn id="16" presetID="22" presetClass="entr" presetSubtype="4" fill="hold" grpId="0" nodeType="withEffect">
+                                <p:cTn id="11" presetID="22" presetClass="entr" presetSubtype="4" fill="hold" grpId="0" nodeType="withEffect">
                                   <p:stCondLst>
                                     <p:cond delay="0"/>
                                   </p:stCondLst>
                                   <p:childTnLst>
                                     <p:set>
                                       <p:cBhvr>
-                                        <p:cTn id="17" dur="1" fill="hold">
+                                        <p:cTn id="12" dur="1" fill="hold">
                                           <p:stCondLst>
                                             <p:cond delay="0"/>
                                           </p:stCondLst>
@@ -17966,7 +19864,7 @@
                                     </p:set>
                                     <p:animEffect transition="in" filter="wipe(down)">
                                       <p:cBhvr>
-                                        <p:cTn id="18" dur="500"/>
+                                        <p:cTn id="13" dur="500"/>
                                         <p:tgtEl>
                                           <p:spTgt spid="9"/>
                                         </p:tgtEl>
@@ -17976,14 +19874,14 @@
                                 </p:cTn>
                               </p:par>
                               <p:par>
-                                <p:cTn id="19" presetID="22" presetClass="entr" presetSubtype="4" fill="hold" grpId="0" nodeType="withEffect">
+                                <p:cTn id="14" presetID="22" presetClass="entr" presetSubtype="4" fill="hold" grpId="0" nodeType="withEffect">
                                   <p:stCondLst>
                                     <p:cond delay="0"/>
                                   </p:stCondLst>
                                   <p:childTnLst>
                                     <p:set>
                                       <p:cBhvr>
-                                        <p:cTn id="20" dur="1" fill="hold">
+                                        <p:cTn id="15" dur="1" fill="hold">
                                           <p:stCondLst>
                                             <p:cond delay="0"/>
                                           </p:stCondLst>
@@ -18001,7 +19899,7 @@
                                     </p:set>
                                     <p:animEffect transition="in" filter="wipe(down)">
                                       <p:cBhvr>
-                                        <p:cTn id="21" dur="500"/>
+                                        <p:cTn id="16" dur="500"/>
                                         <p:tgtEl>
                                           <p:spTgt spid="10"/>
                                         </p:tgtEl>
@@ -18017,26 +19915,26 @@
                     </p:cTn>
                   </p:par>
                   <p:par>
-                    <p:cTn id="22" fill="hold">
+                    <p:cTn id="17" fill="hold">
                       <p:stCondLst>
                         <p:cond delay="indefinite"/>
                       </p:stCondLst>
                       <p:childTnLst>
                         <p:par>
-                          <p:cTn id="23" fill="hold">
+                          <p:cTn id="18" fill="hold">
                             <p:stCondLst>
                               <p:cond delay="0"/>
                             </p:stCondLst>
                             <p:childTnLst>
                               <p:par>
-                                <p:cTn id="24" presetID="22" presetClass="entr" presetSubtype="4" fill="hold" nodeType="clickEffect">
+                                <p:cTn id="19" presetID="22" presetClass="entr" presetSubtype="4" fill="hold" nodeType="clickEffect">
                                   <p:stCondLst>
                                     <p:cond delay="0"/>
                                   </p:stCondLst>
                                   <p:childTnLst>
                                     <p:set>
                                       <p:cBhvr>
-                                        <p:cTn id="25" dur="1" fill="hold">
+                                        <p:cTn id="20" dur="1" fill="hold">
                                           <p:stCondLst>
                                             <p:cond delay="0"/>
                                           </p:stCondLst>
@@ -18054,7 +19952,7 @@
                                     </p:set>
                                     <p:animEffect transition="in" filter="wipe(down)">
                                       <p:cBhvr>
-                                        <p:cTn id="26" dur="500"/>
+                                        <p:cTn id="21" dur="500"/>
                                         <p:tgtEl>
                                           <p:spTgt spid="11"/>
                                         </p:tgtEl>
@@ -18064,14 +19962,14 @@
                                 </p:cTn>
                               </p:par>
                               <p:par>
-                                <p:cTn id="27" presetID="22" presetClass="entr" presetSubtype="4" fill="hold" grpId="0" nodeType="withEffect">
+                                <p:cTn id="22" presetID="22" presetClass="entr" presetSubtype="4" fill="hold" grpId="0" nodeType="withEffect">
                                   <p:stCondLst>
                                     <p:cond delay="0"/>
                                   </p:stCondLst>
                                   <p:childTnLst>
                                     <p:set>
                                       <p:cBhvr>
-                                        <p:cTn id="28" dur="1" fill="hold">
+                                        <p:cTn id="23" dur="1" fill="hold">
                                           <p:stCondLst>
                                             <p:cond delay="0"/>
                                           </p:stCondLst>
@@ -18089,7 +19987,7 @@
                                     </p:set>
                                     <p:animEffect transition="in" filter="wipe(down)">
                                       <p:cBhvr>
-                                        <p:cTn id="29" dur="500"/>
+                                        <p:cTn id="24" dur="500"/>
                                         <p:tgtEl>
                                           <p:spTgt spid="14"/>
                                         </p:tgtEl>
@@ -18099,14 +19997,14 @@
                                 </p:cTn>
                               </p:par>
                               <p:par>
-                                <p:cTn id="30" presetID="22" presetClass="entr" presetSubtype="4" fill="hold" grpId="0" nodeType="withEffect">
+                                <p:cTn id="25" presetID="22" presetClass="entr" presetSubtype="4" fill="hold" grpId="0" nodeType="withEffect">
                                   <p:stCondLst>
                                     <p:cond delay="0"/>
                                   </p:stCondLst>
                                   <p:childTnLst>
                                     <p:set>
                                       <p:cBhvr>
-                                        <p:cTn id="31" dur="1" fill="hold">
+                                        <p:cTn id="26" dur="1" fill="hold">
                                           <p:stCondLst>
                                             <p:cond delay="0"/>
                                           </p:stCondLst>
@@ -18124,7 +20022,7 @@
                                     </p:set>
                                     <p:animEffect transition="in" filter="wipe(down)">
                                       <p:cBhvr>
-                                        <p:cTn id="32" dur="500"/>
+                                        <p:cTn id="27" dur="500"/>
                                         <p:tgtEl>
                                           <p:spTgt spid="23"/>
                                         </p:tgtEl>
@@ -18134,14 +20032,14 @@
                                 </p:cTn>
                               </p:par>
                               <p:par>
-                                <p:cTn id="33" presetID="22" presetClass="entr" presetSubtype="4" fill="hold" grpId="0" nodeType="withEffect">
+                                <p:cTn id="28" presetID="22" presetClass="entr" presetSubtype="4" fill="hold" grpId="0" nodeType="withEffect">
                                   <p:stCondLst>
                                     <p:cond delay="0"/>
                                   </p:stCondLst>
                                   <p:childTnLst>
                                     <p:set>
                                       <p:cBhvr>
-                                        <p:cTn id="34" dur="1" fill="hold">
+                                        <p:cTn id="29" dur="1" fill="hold">
                                           <p:stCondLst>
                                             <p:cond delay="0"/>
                                           </p:stCondLst>
@@ -18159,7 +20057,7 @@
                                     </p:set>
                                     <p:animEffect transition="in" filter="wipe(down)">
                                       <p:cBhvr>
-                                        <p:cTn id="35" dur="500"/>
+                                        <p:cTn id="30" dur="500"/>
                                         <p:tgtEl>
                                           <p:spTgt spid="24"/>
                                         </p:tgtEl>
@@ -18169,14 +20067,14 @@
                                 </p:cTn>
                               </p:par>
                               <p:par>
-                                <p:cTn id="36" presetID="22" presetClass="entr" presetSubtype="4" fill="hold" nodeType="withEffect">
+                                <p:cTn id="31" presetID="22" presetClass="entr" presetSubtype="4" fill="hold" nodeType="withEffect">
                                   <p:stCondLst>
                                     <p:cond delay="0"/>
                                   </p:stCondLst>
                                   <p:childTnLst>
                                     <p:set>
                                       <p:cBhvr>
-                                        <p:cTn id="37" dur="1" fill="hold">
+                                        <p:cTn id="32" dur="1" fill="hold">
                                           <p:stCondLst>
                                             <p:cond delay="0"/>
                                           </p:stCondLst>
@@ -18194,7 +20092,7 @@
                                     </p:set>
                                     <p:animEffect transition="in" filter="wipe(down)">
                                       <p:cBhvr>
-                                        <p:cTn id="38" dur="500"/>
+                                        <p:cTn id="33" dur="500"/>
                                         <p:tgtEl>
                                           <p:spTgt spid="31"/>
                                         </p:tgtEl>
@@ -18210,26 +20108,26 @@
                     </p:cTn>
                   </p:par>
                   <p:par>
-                    <p:cTn id="39" fill="hold">
+                    <p:cTn id="34" fill="hold">
                       <p:stCondLst>
                         <p:cond delay="indefinite"/>
                       </p:stCondLst>
                       <p:childTnLst>
                         <p:par>
-                          <p:cTn id="40" fill="hold">
+                          <p:cTn id="35" fill="hold">
                             <p:stCondLst>
                               <p:cond delay="0"/>
                             </p:stCondLst>
                             <p:childTnLst>
                               <p:par>
-                                <p:cTn id="41" presetID="22" presetClass="entr" presetSubtype="4" fill="hold" nodeType="clickEffect">
+                                <p:cTn id="36" presetID="22" presetClass="entr" presetSubtype="4" fill="hold" nodeType="clickEffect">
                                   <p:stCondLst>
                                     <p:cond delay="0"/>
                                   </p:stCondLst>
                                   <p:childTnLst>
                                     <p:set>
                                       <p:cBhvr>
-                                        <p:cTn id="42" dur="1" fill="hold">
+                                        <p:cTn id="37" dur="1" fill="hold">
                                           <p:stCondLst>
                                             <p:cond delay="0"/>
                                           </p:stCondLst>
@@ -18247,7 +20145,7 @@
                                     </p:set>
                                     <p:animEffect transition="in" filter="wipe(down)">
                                       <p:cBhvr>
-                                        <p:cTn id="43" dur="500"/>
+                                        <p:cTn id="38" dur="500"/>
                                         <p:tgtEl>
                                           <p:spTgt spid="15"/>
                                         </p:tgtEl>
@@ -18257,14 +20155,14 @@
                                 </p:cTn>
                               </p:par>
                               <p:par>
-                                <p:cTn id="44" presetID="22" presetClass="entr" presetSubtype="4" fill="hold" grpId="0" nodeType="withEffect">
+                                <p:cTn id="39" presetID="22" presetClass="entr" presetSubtype="4" fill="hold" grpId="0" nodeType="withEffect">
                                   <p:stCondLst>
                                     <p:cond delay="0"/>
                                   </p:stCondLst>
                                   <p:childTnLst>
                                     <p:set>
                                       <p:cBhvr>
-                                        <p:cTn id="45" dur="1" fill="hold">
+                                        <p:cTn id="40" dur="1" fill="hold">
                                           <p:stCondLst>
                                             <p:cond delay="0"/>
                                           </p:stCondLst>
@@ -18282,7 +20180,7 @@
                                     </p:set>
                                     <p:animEffect transition="in" filter="wipe(down)">
                                       <p:cBhvr>
-                                        <p:cTn id="46" dur="500"/>
+                                        <p:cTn id="41" dur="500"/>
                                         <p:tgtEl>
                                           <p:spTgt spid="25"/>
                                         </p:tgtEl>
@@ -18292,14 +20190,14 @@
                                 </p:cTn>
                               </p:par>
                               <p:par>
-                                <p:cTn id="47" presetID="22" presetClass="entr" presetSubtype="4" fill="hold" grpId="0" nodeType="withEffect">
+                                <p:cTn id="42" presetID="22" presetClass="entr" presetSubtype="4" fill="hold" grpId="0" nodeType="withEffect">
                                   <p:stCondLst>
                                     <p:cond delay="0"/>
                                   </p:stCondLst>
                                   <p:childTnLst>
                                     <p:set>
                                       <p:cBhvr>
-                                        <p:cTn id="48" dur="1" fill="hold">
+                                        <p:cTn id="43" dur="1" fill="hold">
                                           <p:stCondLst>
                                             <p:cond delay="0"/>
                                           </p:stCondLst>
@@ -18317,7 +20215,7 @@
                                     </p:set>
                                     <p:animEffect transition="in" filter="wipe(down)">
                                       <p:cBhvr>
-                                        <p:cTn id="49" dur="500"/>
+                                        <p:cTn id="44" dur="500"/>
                                         <p:tgtEl>
                                           <p:spTgt spid="26"/>
                                         </p:tgtEl>
@@ -18327,14 +20225,14 @@
                                 </p:cTn>
                               </p:par>
                               <p:par>
-                                <p:cTn id="50" presetID="22" presetClass="entr" presetSubtype="4" fill="hold" nodeType="withEffect">
+                                <p:cTn id="45" presetID="22" presetClass="entr" presetSubtype="4" fill="hold" nodeType="withEffect">
                                   <p:stCondLst>
                                     <p:cond delay="0"/>
                                   </p:stCondLst>
                                   <p:childTnLst>
                                     <p:set>
                                       <p:cBhvr>
-                                        <p:cTn id="51" dur="1" fill="hold">
+                                        <p:cTn id="46" dur="1" fill="hold">
                                           <p:stCondLst>
                                             <p:cond delay="0"/>
                                           </p:stCondLst>
@@ -18352,7 +20250,7 @@
                                     </p:set>
                                     <p:animEffect transition="in" filter="wipe(down)">
                                       <p:cBhvr>
-                                        <p:cTn id="52" dur="500"/>
+                                        <p:cTn id="47" dur="500"/>
                                         <p:tgtEl>
                                           <p:spTgt spid="29"/>
                                         </p:tgtEl>
@@ -18362,14 +20260,14 @@
                                 </p:cTn>
                               </p:par>
                               <p:par>
-                                <p:cTn id="53" presetID="22" presetClass="entr" presetSubtype="4" fill="hold" grpId="0" nodeType="withEffect">
+                                <p:cTn id="48" presetID="22" presetClass="entr" presetSubtype="4" fill="hold" grpId="0" nodeType="withEffect">
                                   <p:stCondLst>
                                     <p:cond delay="0"/>
                                   </p:stCondLst>
                                   <p:childTnLst>
                                     <p:set>
                                       <p:cBhvr>
-                                        <p:cTn id="54" dur="1" fill="hold">
+                                        <p:cTn id="49" dur="1" fill="hold">
                                           <p:stCondLst>
                                             <p:cond delay="0"/>
                                           </p:stCondLst>
@@ -18387,7 +20285,7 @@
                                     </p:set>
                                     <p:animEffect transition="in" filter="wipe(down)">
                                       <p:cBhvr>
-                                        <p:cTn id="55" dur="500"/>
+                                        <p:cTn id="50" dur="500"/>
                                         <p:tgtEl>
                                           <p:spTgt spid="18"/>
                                         </p:tgtEl>
@@ -18403,26 +20301,26 @@
                     </p:cTn>
                   </p:par>
                   <p:par>
-                    <p:cTn id="56" fill="hold">
+                    <p:cTn id="51" fill="hold">
                       <p:stCondLst>
                         <p:cond delay="indefinite"/>
                       </p:stCondLst>
                       <p:childTnLst>
                         <p:par>
-                          <p:cTn id="57" fill="hold">
+                          <p:cTn id="52" fill="hold">
                             <p:stCondLst>
                               <p:cond delay="0"/>
                             </p:stCondLst>
                             <p:childTnLst>
                               <p:par>
-                                <p:cTn id="58" presetID="22" presetClass="entr" presetSubtype="4" fill="hold" grpId="0" nodeType="clickEffect">
+                                <p:cTn id="53" presetID="22" presetClass="entr" presetSubtype="4" fill="hold" grpId="0" nodeType="clickEffect">
                                   <p:stCondLst>
                                     <p:cond delay="0"/>
                                   </p:stCondLst>
                                   <p:childTnLst>
                                     <p:set>
                                       <p:cBhvr>
-                                        <p:cTn id="59" dur="1" fill="hold">
+                                        <p:cTn id="54" dur="1" fill="hold">
                                           <p:stCondLst>
                                             <p:cond delay="0"/>
                                           </p:stCondLst>
@@ -18440,7 +20338,7 @@
                                     </p:set>
                                     <p:animEffect transition="in" filter="wipe(down)">
                                       <p:cBhvr>
-                                        <p:cTn id="60" dur="500"/>
+                                        <p:cTn id="55" dur="500"/>
                                         <p:tgtEl>
                                           <p:spTgt spid="27"/>
                                         </p:tgtEl>
@@ -18450,14 +20348,14 @@
                                 </p:cTn>
                               </p:par>
                               <p:par>
-                                <p:cTn id="61" presetID="22" presetClass="entr" presetSubtype="4" fill="hold" nodeType="withEffect">
+                                <p:cTn id="56" presetID="22" presetClass="entr" presetSubtype="4" fill="hold" nodeType="withEffect">
                                   <p:stCondLst>
                                     <p:cond delay="0"/>
                                   </p:stCondLst>
                                   <p:childTnLst>
                                     <p:set>
                                       <p:cBhvr>
-                                        <p:cTn id="62" dur="1" fill="hold">
+                                        <p:cTn id="57" dur="1" fill="hold">
                                           <p:stCondLst>
                                             <p:cond delay="0"/>
                                           </p:stCondLst>
@@ -18475,7 +20373,7 @@
                                     </p:set>
                                     <p:animEffect transition="in" filter="wipe(down)">
                                       <p:cBhvr>
-                                        <p:cTn id="63" dur="500"/>
+                                        <p:cTn id="58" dur="500"/>
                                         <p:tgtEl>
                                           <p:spTgt spid="19"/>
                                         </p:tgtEl>
@@ -18485,14 +20383,14 @@
                                 </p:cTn>
                               </p:par>
                               <p:par>
-                                <p:cTn id="64" presetID="22" presetClass="entr" presetSubtype="4" fill="hold" grpId="0" nodeType="withEffect">
+                                <p:cTn id="59" presetID="22" presetClass="entr" presetSubtype="4" fill="hold" grpId="0" nodeType="withEffect">
                                   <p:stCondLst>
                                     <p:cond delay="0"/>
                                   </p:stCondLst>
                                   <p:childTnLst>
                                     <p:set>
                                       <p:cBhvr>
-                                        <p:cTn id="65" dur="1" fill="hold">
+                                        <p:cTn id="60" dur="1" fill="hold">
                                           <p:stCondLst>
                                             <p:cond delay="0"/>
                                           </p:stCondLst>
@@ -18510,7 +20408,7 @@
                                     </p:set>
                                     <p:animEffect transition="in" filter="wipe(down)">
                                       <p:cBhvr>
-                                        <p:cTn id="66" dur="500"/>
+                                        <p:cTn id="61" dur="500"/>
                                         <p:tgtEl>
                                           <p:spTgt spid="22"/>
                                         </p:tgtEl>
@@ -18520,14 +20418,14 @@
                                 </p:cTn>
                               </p:par>
                               <p:par>
-                                <p:cTn id="67" presetID="22" presetClass="entr" presetSubtype="4" fill="hold" grpId="0" nodeType="withEffect">
+                                <p:cTn id="62" presetID="22" presetClass="entr" presetSubtype="4" fill="hold" grpId="0" nodeType="withEffect">
                                   <p:stCondLst>
                                     <p:cond delay="0"/>
                                   </p:stCondLst>
                                   <p:childTnLst>
                                     <p:set>
                                       <p:cBhvr>
-                                        <p:cTn id="68" dur="1" fill="hold">
+                                        <p:cTn id="63" dur="1" fill="hold">
                                           <p:stCondLst>
                                             <p:cond delay="0"/>
                                           </p:stCondLst>
@@ -18545,7 +20443,7 @@
                                     </p:set>
                                     <p:animEffect transition="in" filter="wipe(down)">
                                       <p:cBhvr>
-                                        <p:cTn id="69" dur="500"/>
+                                        <p:cTn id="64" dur="500"/>
                                         <p:tgtEl>
                                           <p:spTgt spid="28"/>
                                         </p:tgtEl>
@@ -18555,14 +20453,14 @@
                                 </p:cTn>
                               </p:par>
                               <p:par>
-                                <p:cTn id="70" presetID="22" presetClass="entr" presetSubtype="4" fill="hold" nodeType="withEffect">
+                                <p:cTn id="65" presetID="22" presetClass="entr" presetSubtype="4" fill="hold" nodeType="withEffect">
                                   <p:stCondLst>
                                     <p:cond delay="0"/>
                                   </p:stCondLst>
                                   <p:childTnLst>
                                     <p:set>
                                       <p:cBhvr>
-                                        <p:cTn id="71" dur="1" fill="hold">
+                                        <p:cTn id="66" dur="1" fill="hold">
                                           <p:stCondLst>
                                             <p:cond delay="0"/>
                                           </p:stCondLst>
@@ -18580,7 +20478,7 @@
                                     </p:set>
                                     <p:animEffect transition="in" filter="wipe(down)">
                                       <p:cBhvr>
-                                        <p:cTn id="72" dur="500"/>
+                                        <p:cTn id="67" dur="500"/>
                                         <p:tgtEl>
                                           <p:spTgt spid="30"/>
                                         </p:tgtEl>
@@ -18617,7 +20515,6 @@
       </p:par>
     </p:tnLst>
     <p:bldLst>
-      <p:bldP spid="6" grpId="0"/>
       <p:bldP spid="8" grpId="0"/>
       <p:bldP spid="9" grpId="0"/>
       <p:bldP spid="10" grpId="0"/>
@@ -19792,8 +21689,8 @@
         </p:nvSpPr>
         <p:spPr>
           <a:xfrm>
-            <a:off x="5105400" y="1769473"/>
-            <a:ext cx="8229600" cy="1144274"/>
+            <a:off x="4495800" y="1880298"/>
+            <a:ext cx="9906000" cy="1109599"/>
           </a:xfrm>
           <a:prstGeom prst="rect">
             <a:avLst/>
@@ -19823,7 +21720,7 @@
                 <a:cs typeface="Inter Bold"/>
                 <a:sym typeface="Inter Bold"/>
               </a:rPr>
-              <a:t>Lý do chọn đề tài</a:t>
+              <a:t>LÝ DO CHỌN ĐỀ TÀI</a:t>
             </a:r>
           </a:p>
         </p:txBody>
@@ -20805,6 +22702,13 @@
               <a:miter/>
             </a:ln>
           </p:spPr>
+          <p:txBody>
+            <a:bodyPr/>
+            <a:lstStyle/>
+            <a:p>
+              <a:endParaRPr lang="en-US"/>
+            </a:p>
+          </p:txBody>
         </p:sp>
       </p:grpSp>
       <p:grpSp>
@@ -21569,15 +23473,15 @@
         </p:nvSpPr>
         <p:spPr>
           <a:xfrm>
-            <a:off x="4966047" y="1769473"/>
-            <a:ext cx="8355906" cy="1144274"/>
+            <a:off x="3429001" y="1887884"/>
+            <a:ext cx="11871330" cy="1109599"/>
           </a:xfrm>
           <a:prstGeom prst="rect">
             <a:avLst/>
           </a:prstGeom>
         </p:spPr>
         <p:txBody>
-          <a:bodyPr lIns="0" tIns="0" rIns="0" bIns="0" rtlCol="0" anchor="t">
+          <a:bodyPr wrap="square" lIns="0" tIns="0" rIns="0" bIns="0" rtlCol="0" anchor="t">
             <a:spAutoFit/>
           </a:bodyPr>
           <a:lstStyle/>
@@ -21600,7 +23504,7 @@
                 <a:cs typeface="Inter Bold"/>
                 <a:sym typeface="Inter Bold"/>
               </a:rPr>
-              <a:t>Mục tiêu nghiên cứu</a:t>
+              <a:t>MỤC TIÊU NGHIÊN CỨU</a:t>
             </a:r>
           </a:p>
         </p:txBody>
@@ -21776,7 +23680,7 @@
                 <a:cs typeface="Inter Italics"/>
                 <a:sym typeface="Inter Italics"/>
               </a:rPr>
-              <a:t>Xây dựng hệ thống hỗ trợ tính toán nhu cầu dinh dưỡng, gợi ý thực phẩm và thực đơn phù hợp với từng người dùng.</a:t>
+              <a:t>Xây dựng hệ thống hỗ trợ tính toán nhu cầu dinh dưỡng, gợi ý thực phẩm phù hợp với từng người dùng.</a:t>
             </a:r>
           </a:p>
         </p:txBody>
@@ -23223,7 +25127,7 @@
           </a:prstGeom>
         </p:spPr>
         <p:txBody>
-          <a:bodyPr lIns="0" tIns="0" rIns="0" bIns="0" rtlCol="0" anchor="t">
+          <a:bodyPr wrap="square" lIns="0" tIns="0" rIns="0" bIns="0" rtlCol="0" anchor="t">
             <a:spAutoFit/>
           </a:bodyPr>
           <a:lstStyle/>
@@ -23412,7 +25316,7 @@
         <p:spPr>
           <a:xfrm>
             <a:off x="6237276" y="3345296"/>
-            <a:ext cx="4580403" cy="5380990"/>
+            <a:ext cx="4580403" cy="4874796"/>
           </a:xfrm>
           <a:prstGeom prst="rect">
             <a:avLst/>
@@ -23468,7 +25372,7 @@
                 <a:cs typeface="Inter"/>
                 <a:sym typeface="Inter"/>
               </a:rPr>
-              <a:t>Xây dựng hệ thống gợi ý thực phẩm và thực đơn.</a:t>
+              <a:t>Xây dựng hệ thống gợi ý thực phẩm.</a:t>
             </a:r>
           </a:p>
           <a:p>
@@ -25045,7 +26949,7 @@
             </a:pathLst>
           </a:custGeom>
           <a:blipFill>
-            <a:blip r:embed="rId2"/>
+            <a:blip r:embed="rId3"/>
             <a:stretch>
               <a:fillRect/>
             </a:stretch>
@@ -25091,7 +26995,7 @@
             </a:pathLst>
           </a:custGeom>
           <a:blipFill>
-            <a:blip r:embed="rId3"/>
+            <a:blip r:embed="rId4"/>
             <a:stretch>
               <a:fillRect/>
             </a:stretch>
@@ -25137,7 +27041,7 @@
             </a:pathLst>
           </a:custGeom>
           <a:blipFill>
-            <a:blip r:embed="rId4"/>
+            <a:blip r:embed="rId5"/>
             <a:stretch>
               <a:fillRect/>
             </a:stretch>
@@ -25183,7 +27087,7 @@
             </a:pathLst>
           </a:custGeom>
           <a:blipFill>
-            <a:blip r:embed="rId5"/>
+            <a:blip r:embed="rId6"/>
             <a:stretch>
               <a:fillRect/>
             </a:stretch>
@@ -25468,7 +27372,7 @@
             </a:pathLst>
           </a:custGeom>
           <a:blipFill>
-            <a:blip r:embed="rId6"/>
+            <a:blip r:embed="rId7"/>
             <a:stretch>
               <a:fillRect/>
             </a:stretch>
@@ -25514,7 +27418,7 @@
             </a:pathLst>
           </a:custGeom>
           <a:blipFill>
-            <a:blip r:embed="rId7"/>
+            <a:blip r:embed="rId8"/>
             <a:stretch>
               <a:fillRect/>
             </a:stretch>
@@ -25560,7 +27464,7 @@
             </a:pathLst>
           </a:custGeom>
           <a:blipFill>
-            <a:blip r:embed="rId8"/>
+            <a:blip r:embed="rId9"/>
             <a:stretch>
               <a:fillRect/>
             </a:stretch>
@@ -25606,7 +27510,7 @@
             </a:pathLst>
           </a:custGeom>
           <a:blipFill>
-            <a:blip r:embed="rId9"/>
+            <a:blip r:embed="rId10"/>
             <a:stretch>
               <a:fillRect/>
             </a:stretch>
@@ -26167,7 +28071,7 @@
             </a:pathLst>
           </a:custGeom>
           <a:blipFill>
-            <a:blip r:embed="rId10"/>
+            <a:blip r:embed="rId11"/>
             <a:stretch>
               <a:fillRect/>
             </a:stretch>
@@ -26213,7 +28117,7 @@
             </a:pathLst>
           </a:custGeom>
           <a:blipFill>
-            <a:blip r:embed="rId11"/>
+            <a:blip r:embed="rId12"/>
             <a:stretch>
               <a:fillRect/>
             </a:stretch>
@@ -26259,7 +28163,7 @@
             </a:pathLst>
           </a:custGeom>
           <a:blipFill>
-            <a:blip r:embed="rId12"/>
+            <a:blip r:embed="rId13"/>
             <a:stretch>
               <a:fillRect/>
             </a:stretch>
@@ -26433,7 +28337,7 @@
             </a:pathLst>
           </a:custGeom>
           <a:blipFill>
-            <a:blip r:embed="rId13"/>
+            <a:blip r:embed="rId14"/>
             <a:stretch>
               <a:fillRect/>
             </a:stretch>
@@ -26479,7 +28383,7 @@
             </a:pathLst>
           </a:custGeom>
           <a:blipFill>
-            <a:blip r:embed="rId14"/>
+            <a:blip r:embed="rId15"/>
             <a:stretch>
               <a:fillRect/>
             </a:stretch>
@@ -26525,7 +28429,7 @@
             </a:pathLst>
           </a:custGeom>
           <a:blipFill>
-            <a:blip r:embed="rId15"/>
+            <a:blip r:embed="rId16"/>
             <a:stretch>
               <a:fillRect/>
             </a:stretch>
@@ -26571,7 +28475,7 @@
             </a:pathLst>
           </a:custGeom>
           <a:blipFill>
-            <a:blip r:embed="rId16"/>
+            <a:blip r:embed="rId17"/>
             <a:stretch>
               <a:fillRect/>
             </a:stretch>
@@ -26728,7 +28632,7 @@
             </a:pathLst>
           </a:custGeom>
           <a:blipFill>
-            <a:blip r:embed="rId17"/>
+            <a:blip r:embed="rId18"/>
             <a:stretch>
               <a:fillRect/>
             </a:stretch>
@@ -26774,7 +28678,7 @@
             </a:pathLst>
           </a:custGeom>
           <a:blipFill>
-            <a:blip r:embed="rId18"/>
+            <a:blip r:embed="rId19"/>
             <a:stretch>
               <a:fillRect/>
             </a:stretch>
@@ -26820,7 +28724,7 @@
             </a:pathLst>
           </a:custGeom>
           <a:blipFill>
-            <a:blip r:embed="rId19"/>
+            <a:blip r:embed="rId20"/>
             <a:stretch>
               <a:fillRect/>
             </a:stretch>
@@ -26866,7 +28770,7 @@
             </a:pathLst>
           </a:custGeom>
           <a:blipFill>
-            <a:blip r:embed="rId20"/>
+            <a:blip r:embed="rId21"/>
             <a:stretch>
               <a:fillRect/>
             </a:stretch>
@@ -26912,7 +28816,7 @@
             </a:pathLst>
           </a:custGeom>
           <a:blipFill>
-            <a:blip r:embed="rId21"/>
+            <a:blip r:embed="rId22"/>
             <a:stretch>
               <a:fillRect/>
             </a:stretch>
@@ -26927,15 +28831,15 @@
         </p:nvSpPr>
         <p:spPr>
           <a:xfrm>
-            <a:off x="6680223" y="604573"/>
-            <a:ext cx="2873369" cy="573405"/>
+            <a:off x="6726024" y="623253"/>
+            <a:ext cx="2873369" cy="543675"/>
           </a:xfrm>
           <a:prstGeom prst="rect">
             <a:avLst/>
           </a:prstGeom>
         </p:spPr>
         <p:txBody>
-          <a:bodyPr lIns="0" tIns="0" rIns="0" bIns="0" rtlCol="0" anchor="t">
+          <a:bodyPr wrap="square" lIns="0" tIns="0" rIns="0" bIns="0" rtlCol="0" anchor="t">
             <a:spAutoFit/>
           </a:bodyPr>
           <a:lstStyle/>
@@ -27103,8 +29007,8 @@
         </p:nvSpPr>
         <p:spPr>
           <a:xfrm>
-            <a:off x="6338739" y="1807573"/>
-            <a:ext cx="6088222" cy="795023"/>
+            <a:off x="5029200" y="1916478"/>
+            <a:ext cx="8344187" cy="778931"/>
           </a:xfrm>
           <a:prstGeom prst="rect">
             <a:avLst/>
@@ -27134,7 +29038,7 @@
                 <a:cs typeface="Inter Bold"/>
                 <a:sym typeface="Inter Bold"/>
               </a:rPr>
-              <a:t>Công nghệ sử dụng</a:t>
+              <a:t>CÔNG NGHỆ SỬ DỤNG</a:t>
             </a:r>
           </a:p>
         </p:txBody>
@@ -31798,7 +33702,7 @@
             </a:pathLst>
           </a:custGeom>
           <a:blipFill>
-            <a:blip r:embed="rId2"/>
+            <a:blip r:embed="rId3"/>
             <a:stretch>
               <a:fillRect/>
             </a:stretch>
@@ -31819,12 +33723,12 @@
           <a:graphicData uri="http://schemas.openxmlformats.org/presentationml/2006/ole">
             <mc:AlternateContent xmlns:mc="http://schemas.openxmlformats.org/markup-compatibility/2006">
               <mc:Choice xmlns:v="urn:schemas-microsoft-com:vml" Requires="v">
-                <p:oleObj name="Worksheet" r:id="rId3" imgW="9105900" imgH="5791200" progId="Excel.Sheet.12">
+                <p:oleObj name="Worksheet" r:id="rId4" imgW="9105900" imgH="5791200" progId="Excel.Sheet.12">
                   <p:embed/>
                 </p:oleObj>
               </mc:Choice>
               <mc:Fallback>
-                <p:oleObj name="Worksheet" r:id="rId3" imgW="9105900" imgH="5791200" progId="Excel.Sheet.12">
+                <p:oleObj name="Worksheet" r:id="rId4" imgW="9105900" imgH="5791200" progId="Excel.Sheet.12">
                   <p:embed/>
                   <p:pic>
                     <p:nvPicPr>
@@ -31833,7 +33737,7 @@
                       <p:nvPr/>
                     </p:nvPicPr>
                     <p:blipFill>
-                      <a:blip r:embed="rId4"/>
+                      <a:blip r:embed="rId5"/>
                       <a:stretch>
                         <a:fillRect/>
                       </a:stretch>
@@ -34147,7 +36051,7 @@
             </a:pathLst>
           </a:custGeom>
           <a:blipFill>
-            <a:blip r:embed="rId2"/>
+            <a:blip r:embed="rId3"/>
             <a:stretch>
               <a:fillRect/>
             </a:stretch>
@@ -34321,7 +36225,7 @@
             </a:pathLst>
           </a:custGeom>
           <a:blipFill>
-            <a:blip r:embed="rId3"/>
+            <a:blip r:embed="rId4"/>
             <a:stretch>
               <a:fillRect/>
             </a:stretch>
